--- a/assets/decks/episodio-04-semantica-aberta-interoperavel.pptx
+++ b/assets/decks/episodio-04-semantica-aberta-interoperavel.pptx
@@ -2,33 +2,33 @@
 <file path=ppt/presentation.xml><?xml version="1.0" encoding="utf-8"?>
 <p:presentation xmlns:p="http://schemas.openxmlformats.org/presentationml/2006/main">
   <p:sldMasterIdLst>
-    <p:sldMasterId xmlns:r="http://schemas.openxmlformats.org/officeDocument/2006/relationships" id="2147483648" r:id="Rd5a95ff7523c48d1"/>
-    <p:sldMasterId xmlns:r="http://schemas.openxmlformats.org/officeDocument/2006/relationships" id="2147483650" r:id="R87d956bc9dc2498c"/>
+    <p:sldMasterId xmlns:r="http://schemas.openxmlformats.org/officeDocument/2006/relationships" id="2147483648" r:id="R7dc1e42de2d142de"/>
+    <p:sldMasterId xmlns:r="http://schemas.openxmlformats.org/officeDocument/2006/relationships" id="2147483650" r:id="Rb5ffea67b1224881"/>
   </p:sldMasterIdLst>
   <p:notesMasterIdLst>
-    <p:notesMasterId xmlns:r="http://schemas.openxmlformats.org/officeDocument/2006/relationships" r:id="R12e10e0d1fac4c17"/>
+    <p:notesMasterId xmlns:r="http://schemas.openxmlformats.org/officeDocument/2006/relationships" r:id="Ree62fc8049864c59"/>
   </p:notesMasterIdLst>
   <p:sldIdLst>
-    <p:sldId xmlns:r="http://schemas.openxmlformats.org/officeDocument/2006/relationships" id="256" r:id="Ra59b712813774d2d"/>
-    <p:sldId xmlns:r="http://schemas.openxmlformats.org/officeDocument/2006/relationships" id="257" r:id="R00bc4d17cb254c57"/>
-    <p:sldId xmlns:r="http://schemas.openxmlformats.org/officeDocument/2006/relationships" id="258" r:id="R24fa900f84cf4c6f"/>
-    <p:sldId xmlns:r="http://schemas.openxmlformats.org/officeDocument/2006/relationships" id="259" r:id="R444f2f59ef9a4888"/>
-    <p:sldId xmlns:r="http://schemas.openxmlformats.org/officeDocument/2006/relationships" id="260" r:id="Ree29e03629fe48fa"/>
-    <p:sldId xmlns:r="http://schemas.openxmlformats.org/officeDocument/2006/relationships" id="261" r:id="Re784c5c3a4024611"/>
-    <p:sldId xmlns:r="http://schemas.openxmlformats.org/officeDocument/2006/relationships" id="262" r:id="R28e0ac0f915940e8"/>
-    <p:sldId xmlns:r="http://schemas.openxmlformats.org/officeDocument/2006/relationships" id="263" r:id="R5555f7479eb34b0c"/>
-    <p:sldId xmlns:r="http://schemas.openxmlformats.org/officeDocument/2006/relationships" id="264" r:id="R0d6253c81e564b9f"/>
-    <p:sldId xmlns:r="http://schemas.openxmlformats.org/officeDocument/2006/relationships" id="265" r:id="R1f3a3e88a6c44883"/>
-    <p:sldId xmlns:r="http://schemas.openxmlformats.org/officeDocument/2006/relationships" id="266" r:id="R3cf0ab40cee34793"/>
-    <p:sldId xmlns:r="http://schemas.openxmlformats.org/officeDocument/2006/relationships" id="267" r:id="R03d24827cf714f26"/>
-    <p:sldId xmlns:r="http://schemas.openxmlformats.org/officeDocument/2006/relationships" id="268" r:id="R3557c8cad7ce4871"/>
-    <p:sldId xmlns:r="http://schemas.openxmlformats.org/officeDocument/2006/relationships" id="269" r:id="Rbfb8ca975ed94bf8"/>
-    <p:sldId xmlns:r="http://schemas.openxmlformats.org/officeDocument/2006/relationships" id="270" r:id="Rd359c864ab5f4b93"/>
-    <p:sldId xmlns:r="http://schemas.openxmlformats.org/officeDocument/2006/relationships" id="271" r:id="R823d09d6056e4596"/>
-    <p:sldId xmlns:r="http://schemas.openxmlformats.org/officeDocument/2006/relationships" id="272" r:id="R4f1238b4bf194fa6"/>
-    <p:sldId xmlns:r="http://schemas.openxmlformats.org/officeDocument/2006/relationships" id="273" r:id="Rc4acf3e1342940cf"/>
-    <p:sldId xmlns:r="http://schemas.openxmlformats.org/officeDocument/2006/relationships" id="274" r:id="R5c415893a4494d32"/>
-    <p:sldId xmlns:r="http://schemas.openxmlformats.org/officeDocument/2006/relationships" id="275" r:id="R4fd205a984fa435c"/>
+    <p:sldId xmlns:r="http://schemas.openxmlformats.org/officeDocument/2006/relationships" id="256" r:id="R69c74e9e026b4503"/>
+    <p:sldId xmlns:r="http://schemas.openxmlformats.org/officeDocument/2006/relationships" id="257" r:id="Re77390c64bfa41e7"/>
+    <p:sldId xmlns:r="http://schemas.openxmlformats.org/officeDocument/2006/relationships" id="258" r:id="Ra758b87900934be8"/>
+    <p:sldId xmlns:r="http://schemas.openxmlformats.org/officeDocument/2006/relationships" id="259" r:id="R0861128c7ba8405c"/>
+    <p:sldId xmlns:r="http://schemas.openxmlformats.org/officeDocument/2006/relationships" id="260" r:id="R5e8862c1a7254eda"/>
+    <p:sldId xmlns:r="http://schemas.openxmlformats.org/officeDocument/2006/relationships" id="261" r:id="Rfb778f45cd2b4dfd"/>
+    <p:sldId xmlns:r="http://schemas.openxmlformats.org/officeDocument/2006/relationships" id="262" r:id="Raa2ea39fd1fc4760"/>
+    <p:sldId xmlns:r="http://schemas.openxmlformats.org/officeDocument/2006/relationships" id="263" r:id="R9539a3e7b2594203"/>
+    <p:sldId xmlns:r="http://schemas.openxmlformats.org/officeDocument/2006/relationships" id="264" r:id="R4e2c8f6d53734050"/>
+    <p:sldId xmlns:r="http://schemas.openxmlformats.org/officeDocument/2006/relationships" id="265" r:id="Rfa74178c95c44fb1"/>
+    <p:sldId xmlns:r="http://schemas.openxmlformats.org/officeDocument/2006/relationships" id="266" r:id="R09127273cd224e9b"/>
+    <p:sldId xmlns:r="http://schemas.openxmlformats.org/officeDocument/2006/relationships" id="267" r:id="Rf6fa95309f5e4db0"/>
+    <p:sldId xmlns:r="http://schemas.openxmlformats.org/officeDocument/2006/relationships" id="268" r:id="R58acb9204c7c44b6"/>
+    <p:sldId xmlns:r="http://schemas.openxmlformats.org/officeDocument/2006/relationships" id="269" r:id="Rc14634212fd74af0"/>
+    <p:sldId xmlns:r="http://schemas.openxmlformats.org/officeDocument/2006/relationships" id="270" r:id="R2c5d7ba504c94a82"/>
+    <p:sldId xmlns:r="http://schemas.openxmlformats.org/officeDocument/2006/relationships" id="271" r:id="R960c50ff93764133"/>
+    <p:sldId xmlns:r="http://schemas.openxmlformats.org/officeDocument/2006/relationships" id="272" r:id="R13815bed750a4ab4"/>
+    <p:sldId xmlns:r="http://schemas.openxmlformats.org/officeDocument/2006/relationships" id="273" r:id="R5b49511c4ff04c0f"/>
+    <p:sldId xmlns:r="http://schemas.openxmlformats.org/officeDocument/2006/relationships" id="274" r:id="R31ab54a109744e1c"/>
+    <p:sldId xmlns:r="http://schemas.openxmlformats.org/officeDocument/2006/relationships" id="275" r:id="Rbf5e221ce56a420b"/>
   </p:sldIdLst>
   <p:sldSz cx="12192000" cy="6858000"/>
   <p:notesSz cx="6858000" cy="9144000"/>
@@ -462,7 +462,57 @@
           <a:lstStyle xmlns:a="http://schemas.openxmlformats.org/drawingml/2006/main"/>
           <a:p xmlns:a="http://schemas.openxmlformats.org/drawingml/2006/main">
             <a:r>
-              <a:t>Apresente o objetivo do EPISÓDIO 4 e conecte-o ao checkpoint executável. Interoperabilidade começa quando o consumidor não precisa copiar a fórmula.</a:t>
+              <a:t>[Roteiro recomendado]</a:t>
+            </a:r>
+          </a:p>
+          <a:p xmlns:a="http://schemas.openxmlformats.org/drawingml/2006/main">
+            <a:r>
+              <a:t>[Tempo sugerido: 00:45]</a:t>
+            </a:r>
+          </a:p>
+          <a:p xmlns:a="http://schemas.openxmlformats.org/drawingml/2006/main">
+            <a:r>
+              <a:t/>
+            </a:r>
+          </a:p>
+          <a:p xmlns:a="http://schemas.openxmlformats.org/drawingml/2006/main">
+            <a:r>
+              <a:t>Fala sugerida:</a:t>
+            </a:r>
+          </a:p>
+          <a:p xmlns:a="http://schemas.openxmlformats.org/drawingml/2006/main">
+            <a:r>
+              <a:t>Bem-vindo ao episódio 4 do dbt Moderno na Prática. Hoje vamos trabalhar o tema “Semântica aberta e interoperável”. Uma definição, múltiplos canais de consumo. O objetivo não é apenas conhecer o conceito: vamos conectá-lo ao laboratório e terminar com uma evidência que você consegue reproduzir no seu próprio ambiente. Ao longo da aula, separe sempre o que é recurso aberto e estável daquilo que aparecerá apenas no Radar.</a:t>
+            </a:r>
+          </a:p>
+          <a:p xmlns:a="http://schemas.openxmlformats.org/drawingml/2006/main">
+            <a:r>
+              <a:t/>
+            </a:r>
+          </a:p>
+          <a:p xmlns:a="http://schemas.openxmlformats.org/drawingml/2006/main">
+            <a:r>
+              <a:t>O que destacar:</a:t>
+            </a:r>
+          </a:p>
+          <a:p xmlns:a="http://schemas.openxmlformats.org/drawingml/2006/main">
+            <a:r>
+              <a:t>- Apresente o título, situe o checkpoint 04 e deixe claro que a aula faz parte da trilha open/stable.</a:t>
+            </a:r>
+          </a:p>
+          <a:p xmlns:a="http://schemas.openxmlformats.org/drawingml/2006/main">
+            <a:r>
+              <a:t/>
+            </a:r>
+          </a:p>
+          <a:p xmlns:a="http://schemas.openxmlformats.org/drawingml/2006/main">
+            <a:r>
+              <a:t>Transição:</a:t>
+            </a:r>
+          </a:p>
+          <a:p xmlns:a="http://schemas.openxmlformats.org/drawingml/2006/main">
+            <a:r>
+              <a:t>Com esse ponto estabelecido, avance para “Interoperabilidade começa quando o consumidor não precisa copiar a fórmula.”.</a:t>
             </a:r>
           </a:p>
           <a:p xmlns:a="http://schemas.openxmlformats.org/drawingml/2006/main">
@@ -577,7 +627,57 @@
           <a:lstStyle xmlns:a="http://schemas.openxmlformats.org/drawingml/2006/main"/>
           <a:p xmlns:a="http://schemas.openxmlformats.org/drawingml/2006/main">
             <a:r>
-              <a:t>Use a composição para explicar visualmente: O artifact descreve semântica; cada consumidor ainda precisa implementar compatibilidade. Documento validável Versão explícita Sem promessa de universalidade</a:t>
+              <a:t>[Roteiro recomendado]</a:t>
+            </a:r>
+          </a:p>
+          <a:p xmlns:a="http://schemas.openxmlformats.org/drawingml/2006/main">
+            <a:r>
+              <a:t>[Tempo sugerido: 00:55]</a:t>
+            </a:r>
+          </a:p>
+          <a:p xmlns:a="http://schemas.openxmlformats.org/drawingml/2006/main">
+            <a:r>
+              <a:t/>
+            </a:r>
+          </a:p>
+          <a:p xmlns:a="http://schemas.openxmlformats.org/drawingml/2006/main">
+            <a:r>
+              <a:t>Fala sugerida:</a:t>
+            </a:r>
+          </a:p>
+          <a:p xmlns:a="http://schemas.openxmlformats.org/drawingml/2006/main">
+            <a:r>
+              <a:t>Agora vamos ler a ideia visualmente. O artifact descreve semântica; cada consumidor ainda precisa implementar compatibilidade. Siga a composição na ordem mostrada e conecte artifact, Validação e Compatibilidade. A imagem ou o fluxo não cria uma regra nova; ele torna visível a relação que acabamos de explicar. Use a disposição dos elementos para reforçar causa, dependência ou comparação.</a:t>
+            </a:r>
+          </a:p>
+          <a:p xmlns:a="http://schemas.openxmlformats.org/drawingml/2006/main">
+            <a:r>
+              <a:t/>
+            </a:r>
+          </a:p>
+          <a:p xmlns:a="http://schemas.openxmlformats.org/drawingml/2006/main">
+            <a:r>
+              <a:t>O que destacar:</a:t>
+            </a:r>
+          </a:p>
+          <a:p xmlns:a="http://schemas.openxmlformats.org/drawingml/2006/main">
+            <a:r>
+              <a:t>- Acompanhe o fluxo ou a comparação com o cursor e preserve a ordem de leitura do slide.</a:t>
+            </a:r>
+          </a:p>
+          <a:p xmlns:a="http://schemas.openxmlformats.org/drawingml/2006/main">
+            <a:r>
+              <a:t/>
+            </a:r>
+          </a:p>
+          <a:p xmlns:a="http://schemas.openxmlformats.org/drawingml/2006/main">
+            <a:r>
+              <a:t>Transição:</a:t>
+            </a:r>
+          </a:p>
+          <a:p xmlns:a="http://schemas.openxmlformats.org/drawingml/2006/main">
+            <a:r>
+              <a:t>Com esse ponto estabelecido, avance para “Agentes ganham vocabulário compacto”.</a:t>
             </a:r>
           </a:p>
           <a:p xmlns:a="http://schemas.openxmlformats.org/drawingml/2006/main">
@@ -692,7 +792,57 @@
           <a:lstStyle xmlns:a="http://schemas.openxmlformats.org/drawingml/2006/main"/>
           <a:p xmlns:a="http://schemas.openxmlformats.org/drawingml/2006/main">
             <a:r>
-              <a:t>Nomes de métricas comprimem contexto e reduzem joins inventados. Desenvolva os pontos: delivered_revenue; metric_time; Dimensões permitidas.</a:t>
+              <a:t>[Roteiro recomendado]</a:t>
+            </a:r>
+          </a:p>
+          <a:p xmlns:a="http://schemas.openxmlformats.org/drawingml/2006/main">
+            <a:r>
+              <a:t>[Tempo sugerido: 01:10]</a:t>
+            </a:r>
+          </a:p>
+          <a:p xmlns:a="http://schemas.openxmlformats.org/drawingml/2006/main">
+            <a:r>
+              <a:t/>
+            </a:r>
+          </a:p>
+          <a:p xmlns:a="http://schemas.openxmlformats.org/drawingml/2006/main">
+            <a:r>
+              <a:t>Fala sugerida:</a:t>
+            </a:r>
+          </a:p>
+          <a:p xmlns:a="http://schemas.openxmlformats.org/drawingml/2006/main">
+            <a:r>
+              <a:t>A mensagem principal deste slide é: Nomes de métricas comprimem contexto e reduzem joins inventados. Para tornar isso concreto, observe delivered_revenue, metric_time e Dimensões permitidas. Esses pontos devem ser entendidos em conjunto; não são funcionalidades isoladas. No projeto, essa combinação transforma uma convenção informal em algo que pode ser revisado, testado ou consumido de maneira consistente.</a:t>
+            </a:r>
+          </a:p>
+          <a:p xmlns:a="http://schemas.openxmlformats.org/drawingml/2006/main">
+            <a:r>
+              <a:t/>
+            </a:r>
+          </a:p>
+          <a:p xmlns:a="http://schemas.openxmlformats.org/drawingml/2006/main">
+            <a:r>
+              <a:t>O que destacar:</a:t>
+            </a:r>
+          </a:p>
+          <a:p xmlns:a="http://schemas.openxmlformats.org/drawingml/2006/main">
+            <a:r>
+              <a:t>- Comece pelo título, leia a afirmação abaixo dele e depois desenvolva os itens sem repetir o texto palavra por palavra.</a:t>
+            </a:r>
+          </a:p>
+          <a:p xmlns:a="http://schemas.openxmlformats.org/drawingml/2006/main">
+            <a:r>
+              <a:t/>
+            </a:r>
+          </a:p>
+          <a:p xmlns:a="http://schemas.openxmlformats.org/drawingml/2006/main">
+            <a:r>
+              <a:t>Transição:</a:t>
+            </a:r>
+          </a:p>
+          <a:p xmlns:a="http://schemas.openxmlformats.org/drawingml/2006/main">
+            <a:r>
+              <a:t>Com esse ponto estabelecido, avance para “Agentes ganham vocabulário compacto”.</a:t>
             </a:r>
           </a:p>
           <a:p xmlns:a="http://schemas.openxmlformats.org/drawingml/2006/main">
@@ -807,7 +957,57 @@
           <a:lstStyle xmlns:a="http://schemas.openxmlformats.org/drawingml/2006/main"/>
           <a:p xmlns:a="http://schemas.openxmlformats.org/drawingml/2006/main">
             <a:r>
-              <a:t>Use a composição para explicar visualmente: Nomes de métricas comprimem contexto e reduzem joins inventados. delivered_revenue metric_time Dimensões permitidas</a:t>
+              <a:t>[Roteiro recomendado]</a:t>
+            </a:r>
+          </a:p>
+          <a:p xmlns:a="http://schemas.openxmlformats.org/drawingml/2006/main">
+            <a:r>
+              <a:t>[Tempo sugerido: 00:55]</a:t>
+            </a:r>
+          </a:p>
+          <a:p xmlns:a="http://schemas.openxmlformats.org/drawingml/2006/main">
+            <a:r>
+              <a:t/>
+            </a:r>
+          </a:p>
+          <a:p xmlns:a="http://schemas.openxmlformats.org/drawingml/2006/main">
+            <a:r>
+              <a:t>Fala sugerida:</a:t>
+            </a:r>
+          </a:p>
+          <a:p xmlns:a="http://schemas.openxmlformats.org/drawingml/2006/main">
+            <a:r>
+              <a:t>Agora vamos ler a ideia visualmente. Nomes de métricas comprimem contexto e reduzem joins inventados. Siga a composição na ordem mostrada e conecte pergunta, Métrica, SQL e Resposta. A imagem ou o fluxo não cria uma regra nova; ele torna visível a relação que acabamos de explicar. Use a disposição dos elementos para reforçar causa, dependência ou comparação.</a:t>
+            </a:r>
+          </a:p>
+          <a:p xmlns:a="http://schemas.openxmlformats.org/drawingml/2006/main">
+            <a:r>
+              <a:t/>
+            </a:r>
+          </a:p>
+          <a:p xmlns:a="http://schemas.openxmlformats.org/drawingml/2006/main">
+            <a:r>
+              <a:t>O que destacar:</a:t>
+            </a:r>
+          </a:p>
+          <a:p xmlns:a="http://schemas.openxmlformats.org/drawingml/2006/main">
+            <a:r>
+              <a:t>- Acompanhe o fluxo ou a comparação com o cursor e preserve a ordem de leitura do slide.</a:t>
+            </a:r>
+          </a:p>
+          <a:p xmlns:a="http://schemas.openxmlformats.org/drawingml/2006/main">
+            <a:r>
+              <a:t/>
+            </a:r>
+          </a:p>
+          <a:p xmlns:a="http://schemas.openxmlformats.org/drawingml/2006/main">
+            <a:r>
+              <a:t>Transição:</a:t>
+            </a:r>
+          </a:p>
+          <a:p xmlns:a="http://schemas.openxmlformats.org/drawingml/2006/main">
+            <a:r>
+              <a:t>Com esse ponto estabelecido, avance para “Demonstração — execute”.</a:t>
             </a:r>
           </a:p>
           <a:p xmlns:a="http://schemas.openxmlformats.org/drawingml/2006/main">
@@ -922,7 +1122,57 @@
           <a:lstStyle xmlns:a="http://schemas.openxmlformats.org/drawingml/2006/main"/>
           <a:p xmlns:a="http://schemas.openxmlformats.org/drawingml/2006/main">
             <a:r>
-              <a:t>Execute python course.py checkpoint 04. Pause para o aluno acompanhar o terminal.</a:t>
+              <a:t>[Roteiro recomendado]</a:t>
+            </a:r>
+          </a:p>
+          <a:p xmlns:a="http://schemas.openxmlformats.org/drawingml/2006/main">
+            <a:r>
+              <a:t>[Tempo sugerido: 01:20]</a:t>
+            </a:r>
+          </a:p>
+          <a:p xmlns:a="http://schemas.openxmlformats.org/drawingml/2006/main">
+            <a:r>
+              <a:t/>
+            </a:r>
+          </a:p>
+          <a:p xmlns:a="http://schemas.openxmlformats.org/drawingml/2006/main">
+            <a:r>
+              <a:t>Fala sugerida:</a:t>
+            </a:r>
+          </a:p>
+          <a:p xmlns:a="http://schemas.openxmlformats.org/drawingml/2006/main">
+            <a:r>
+              <a:t>Agora vamos sair da explicação e comprovar o comportamento. Execute os comandos exatamente como aparecem: python course.py checkpoint 04. Não é necessário ativar o ambiente virtual manualmente; o launcher do curso seleciona o ambiente correto. Antes de avançar, confirme que o comando iniciou sem erro e dê tempo para o aluno acompanhar a mesma etapa.</a:t>
+            </a:r>
+          </a:p>
+          <a:p xmlns:a="http://schemas.openxmlformats.org/drawingml/2006/main">
+            <a:r>
+              <a:t/>
+            </a:r>
+          </a:p>
+          <a:p xmlns:a="http://schemas.openxmlformats.org/drawingml/2006/main">
+            <a:r>
+              <a:t>O que destacar:</a:t>
+            </a:r>
+          </a:p>
+          <a:p xmlns:a="http://schemas.openxmlformats.org/drawingml/2006/main">
+            <a:r>
+              <a:t>- Mostre o comando completo, execute uma linha por vez quando houver mais de uma e mantenha o terminal visível.</a:t>
+            </a:r>
+          </a:p>
+          <a:p xmlns:a="http://schemas.openxmlformats.org/drawingml/2006/main">
+            <a:r>
+              <a:t/>
+            </a:r>
+          </a:p>
+          <a:p xmlns:a="http://schemas.openxmlformats.org/drawingml/2006/main">
+            <a:r>
+              <a:t>Transição:</a:t>
+            </a:r>
+          </a:p>
+          <a:p xmlns:a="http://schemas.openxmlformats.org/drawingml/2006/main">
+            <a:r>
+              <a:t>Com esse ponto estabelecido, avance para “Demonstração — observe”.</a:t>
             </a:r>
           </a:p>
           <a:p xmlns:a="http://schemas.openxmlformats.org/drawingml/2006/main">
@@ -1037,7 +1287,57 @@
           <a:lstStyle xmlns:a="http://schemas.openxmlformats.org/drawingml/2006/main"/>
           <a:p xmlns:a="http://schemas.openxmlformats.org/drawingml/2006/main">
             <a:r>
-              <a:t>Durante a execução, destaque: MetricFlow consultado; Artifact OSI validado; 10 perguntas executadas em DuckDB.</a:t>
+              <a:t>[Roteiro recomendado]</a:t>
+            </a:r>
+          </a:p>
+          <a:p xmlns:a="http://schemas.openxmlformats.org/drawingml/2006/main">
+            <a:r>
+              <a:t>[Tempo sugerido: 01:10]</a:t>
+            </a:r>
+          </a:p>
+          <a:p xmlns:a="http://schemas.openxmlformats.org/drawingml/2006/main">
+            <a:r>
+              <a:t/>
+            </a:r>
+          </a:p>
+          <a:p xmlns:a="http://schemas.openxmlformats.org/drawingml/2006/main">
+            <a:r>
+              <a:t>Fala sugerida:</a:t>
+            </a:r>
+          </a:p>
+          <a:p xmlns:a="http://schemas.openxmlformats.org/drawingml/2006/main">
+            <a:r>
+              <a:t>Enquanto a execução acontece, não olhe apenas para a mensagem final. Observe metricFlow consultado, Artifact OSI validado e 10 perguntas executadas em DuckDB. Cada sinal responde a uma pergunta diferente sobre o pipeline. Se um deles divergir, interrompa a demonstração e investigue; o objetivo do hands-on é produzir evidência, não apenas chegar rapidamente a uma tela verde.</a:t>
+            </a:r>
+          </a:p>
+          <a:p xmlns:a="http://schemas.openxmlformats.org/drawingml/2006/main">
+            <a:r>
+              <a:t/>
+            </a:r>
+          </a:p>
+          <a:p xmlns:a="http://schemas.openxmlformats.org/drawingml/2006/main">
+            <a:r>
+              <a:t>O que destacar:</a:t>
+            </a:r>
+          </a:p>
+          <a:p xmlns:a="http://schemas.openxmlformats.org/drawingml/2006/main">
+            <a:r>
+              <a:t>- Marque cada observação quando ela aparecer no terminal ou no artifact correspondente.</a:t>
+            </a:r>
+          </a:p>
+          <a:p xmlns:a="http://schemas.openxmlformats.org/drawingml/2006/main">
+            <a:r>
+              <a:t/>
+            </a:r>
+          </a:p>
+          <a:p xmlns:a="http://schemas.openxmlformats.org/drawingml/2006/main">
+            <a:r>
+              <a:t>Transição:</a:t>
+            </a:r>
+          </a:p>
+          <a:p xmlns:a="http://schemas.openxmlformats.org/drawingml/2006/main">
+            <a:r>
+              <a:t>Com esse ponto estabelecido, avance para “RESULTADO ESPERADO”.</a:t>
             </a:r>
           </a:p>
           <a:p xmlns:a="http://schemas.openxmlformats.org/drawingml/2006/main">
@@ -1152,7 +1452,57 @@
           <a:lstStyle xmlns:a="http://schemas.openxmlformats.org/drawingml/2006/main"/>
           <a:p xmlns:a="http://schemas.openxmlformats.org/drawingml/2006/main">
             <a:r>
-              <a:t>Confirme o resultado esperado: Mesmo valor via métrica e SQL. Se o valor divergir, não avance sem investigar.</a:t>
+              <a:t>[Roteiro recomendado]</a:t>
+            </a:r>
+          </a:p>
+          <a:p xmlns:a="http://schemas.openxmlformats.org/drawingml/2006/main">
+            <a:r>
+              <a:t>[Tempo sugerido: 00:45]</a:t>
+            </a:r>
+          </a:p>
+          <a:p xmlns:a="http://schemas.openxmlformats.org/drawingml/2006/main">
+            <a:r>
+              <a:t/>
+            </a:r>
+          </a:p>
+          <a:p xmlns:a="http://schemas.openxmlformats.org/drawingml/2006/main">
+            <a:r>
+              <a:t>Fala sugerida:</a:t>
+            </a:r>
+          </a:p>
+          <a:p xmlns:a="http://schemas.openxmlformats.org/drawingml/2006/main">
+            <a:r>
+              <a:t>Este é o ponto de parada da demonstração: Mesmo valor via métrica e SQL. Esse resultado confirma que a etapa executada produziu a evidência esperada para o checkpoint 04. Se o valor, o status ou o artifact estiver diferente, não trate a divergência como detalhe de ambiente. Use o diagnóstico do curso e só avance quando a causa estiver compreendida.</a:t>
+            </a:r>
+          </a:p>
+          <a:p xmlns:a="http://schemas.openxmlformats.org/drawingml/2006/main">
+            <a:r>
+              <a:t/>
+            </a:r>
+          </a:p>
+          <a:p xmlns:a="http://schemas.openxmlformats.org/drawingml/2006/main">
+            <a:r>
+              <a:t>O que destacar:</a:t>
+            </a:r>
+          </a:p>
+          <a:p xmlns:a="http://schemas.openxmlformats.org/drawingml/2006/main">
+            <a:r>
+              <a:t>- Compare o resultado do terminal com a frase central do slide e registre a evidência antes de continuar.</a:t>
+            </a:r>
+          </a:p>
+          <a:p xmlns:a="http://schemas.openxmlformats.org/drawingml/2006/main">
+            <a:r>
+              <a:t/>
+            </a:r>
+          </a:p>
+          <a:p xmlns:a="http://schemas.openxmlformats.org/drawingml/2006/main">
+            <a:r>
+              <a:t>Transição:</a:t>
+            </a:r>
+          </a:p>
+          <a:p xmlns:a="http://schemas.openxmlformats.org/drawingml/2006/main">
+            <a:r>
+              <a:t>Com esse ponto estabelecido, avance para “O mesmo recurso afeta três decisões”.</a:t>
             </a:r>
           </a:p>
           <a:p xmlns:a="http://schemas.openxmlformats.org/drawingml/2006/main">
@@ -1267,7 +1617,57 @@
           <a:lstStyle xmlns:a="http://schemas.openxmlformats.org/drawingml/2006/main"/>
           <a:p xmlns:a="http://schemas.openxmlformats.org/drawingml/2006/main">
             <a:r>
-              <a:t>Conecte a técnica aos efeitos: Governança: fórmula versionada; FinOps: reuso mensurável; IA: contexto mais curto. Não prometa economia sem medição.</a:t>
+              <a:t>[Roteiro recomendado]</a:t>
+            </a:r>
+          </a:p>
+          <a:p xmlns:a="http://schemas.openxmlformats.org/drawingml/2006/main">
+            <a:r>
+              <a:t>[Tempo sugerido: 01:00]</a:t>
+            </a:r>
+          </a:p>
+          <a:p xmlns:a="http://schemas.openxmlformats.org/drawingml/2006/main">
+            <a:r>
+              <a:t/>
+            </a:r>
+          </a:p>
+          <a:p xmlns:a="http://schemas.openxmlformats.org/drawingml/2006/main">
+            <a:r>
+              <a:t>Fala sugerida:</a:t>
+            </a:r>
+          </a:p>
+          <a:p xmlns:a="http://schemas.openxmlformats.org/drawingml/2006/main">
+            <a:r>
+              <a:t>Antes de seguir, conecte a técnica às decisões que ela afeta: Governança: fórmula versionada, FinOps: reuso mensurável e IA: contexto mais curto. Governança define responsabilidade e consistência; FinOps pergunta quanto trabalho estamos repetindo; e IA depende do contexto que decidimos expor. A mesma implementação pode melhorar os três eixos, mas os ganhos devem ser medidos separadamente.</a:t>
+            </a:r>
+          </a:p>
+          <a:p xmlns:a="http://schemas.openxmlformats.org/drawingml/2006/main">
+            <a:r>
+              <a:t/>
+            </a:r>
+          </a:p>
+          <a:p xmlns:a="http://schemas.openxmlformats.org/drawingml/2006/main">
+            <a:r>
+              <a:t>O que destacar:</a:t>
+            </a:r>
+          </a:p>
+          <a:p xmlns:a="http://schemas.openxmlformats.org/drawingml/2006/main">
+            <a:r>
+              <a:t>- Percorra os três eixos e evite apresentar economia ou acurácia como consequência automática.</a:t>
+            </a:r>
+          </a:p>
+          <a:p xmlns:a="http://schemas.openxmlformats.org/drawingml/2006/main">
+            <a:r>
+              <a:t/>
+            </a:r>
+          </a:p>
+          <a:p xmlns:a="http://schemas.openxmlformats.org/drawingml/2006/main">
+            <a:r>
+              <a:t>Transição:</a:t>
+            </a:r>
+          </a:p>
+          <a:p xmlns:a="http://schemas.openxmlformats.org/drawingml/2006/main">
+            <a:r>
+              <a:t>Com esse ponto estabelecido, avance para “83 métricas”.</a:t>
             </a:r>
           </a:p>
           <a:p xmlns:a="http://schemas.openxmlformats.org/drawingml/2006/main">
@@ -1382,7 +1782,57 @@
           <a:lstStyle xmlns:a="http://schemas.openxmlformats.org/drawingml/2006/main"/>
           <a:p xmlns:a="http://schemas.openxmlformats.org/drawingml/2006/main">
             <a:r>
-              <a:t>83 métricas: mantidas pela Inventa. Resultado reportado; o mecanismo é centralização com ownership.</a:t>
+              <a:t>[Roteiro recomendado]</a:t>
+            </a:r>
+          </a:p>
+          <a:p xmlns:a="http://schemas.openxmlformats.org/drawingml/2006/main">
+            <a:r>
+              <a:t>[Tempo sugerido: 00:55]</a:t>
+            </a:r>
+          </a:p>
+          <a:p xmlns:a="http://schemas.openxmlformats.org/drawingml/2006/main">
+            <a:r>
+              <a:t/>
+            </a:r>
+          </a:p>
+          <a:p xmlns:a="http://schemas.openxmlformats.org/drawingml/2006/main">
+            <a:r>
+              <a:t>Fala sugerida:</a:t>
+            </a:r>
+          </a:p>
+          <a:p xmlns:a="http://schemas.openxmlformats.org/drawingml/2006/main">
+            <a:r>
+              <a:t>Aqui temos 83 métricas: mantidas pela Inventa. O número ajuda a dimensionar o exemplo, mas precisa ser lido com a ressalva correta. Resultado reportado; o mecanismo é centralização com ownership. Use o case como evidência contextual e não como promessa de que outro projeto repetirá o mesmo resultado sem as mesmas condições.</a:t>
+            </a:r>
+          </a:p>
+          <a:p xmlns:a="http://schemas.openxmlformats.org/drawingml/2006/main">
+            <a:r>
+              <a:t/>
+            </a:r>
+          </a:p>
+          <a:p xmlns:a="http://schemas.openxmlformats.org/drawingml/2006/main">
+            <a:r>
+              <a:t>O que destacar:</a:t>
+            </a:r>
+          </a:p>
+          <a:p xmlns:a="http://schemas.openxmlformats.org/drawingml/2006/main">
+            <a:r>
+              <a:t>- Apresente primeiro o número, depois a definição e termine obrigatoriamente com a ressalva.</a:t>
+            </a:r>
+          </a:p>
+          <a:p xmlns:a="http://schemas.openxmlformats.org/drawingml/2006/main">
+            <a:r>
+              <a:t/>
+            </a:r>
+          </a:p>
+          <a:p xmlns:a="http://schemas.openxmlformats.org/drawingml/2006/main">
+            <a:r>
+              <a:t>Transição:</a:t>
+            </a:r>
+          </a:p>
+          <a:p xmlns:a="http://schemas.openxmlformats.org/drawingml/2006/main">
+            <a:r>
+              <a:t>Com esse ponto estabelecido, avance para “Limitações que precisam permanecer visíveis”.</a:t>
             </a:r>
           </a:p>
           <a:p xmlns:a="http://schemas.openxmlformats.org/drawingml/2006/main">
@@ -1497,7 +1947,57 @@
           <a:lstStyle xmlns:a="http://schemas.openxmlformats.org/drawingml/2006/main"/>
           <a:p xmlns:a="http://schemas.openxmlformats.org/drawingml/2006/main">
             <a:r>
-              <a:t>Apresente os limites sem minimizá-los: OSI continua evoluindo; Export exige freshness e lineage; API local não é a Semantic Layer gerenciada.</a:t>
+              <a:t>[Roteiro recomendado]</a:t>
+            </a:r>
+          </a:p>
+          <a:p xmlns:a="http://schemas.openxmlformats.org/drawingml/2006/main">
+            <a:r>
+              <a:t>[Tempo sugerido: 01:00]</a:t>
+            </a:r>
+          </a:p>
+          <a:p xmlns:a="http://schemas.openxmlformats.org/drawingml/2006/main">
+            <a:r>
+              <a:t/>
+            </a:r>
+          </a:p>
+          <a:p xmlns:a="http://schemas.openxmlformats.org/drawingml/2006/main">
+            <a:r>
+              <a:t>Fala sugerida:</a:t>
+            </a:r>
+          </a:p>
+          <a:p xmlns:a="http://schemas.openxmlformats.org/drawingml/2006/main">
+            <a:r>
+              <a:t>Também precisamos declarar os limites da recomendação. Neste cenário, considere OSI continua evoluindo, Export exige freshness e lineage e API local não é a Semantic Layer gerenciada. Esses pontos não anulam a técnica; eles delimitam onde a demonstração é válida e quais condições precisam ser verificadas antes de levar o padrão para produção. Tratar limites como parte do design evita transformar uma boa prática em regra universal.</a:t>
+            </a:r>
+          </a:p>
+          <a:p xmlns:a="http://schemas.openxmlformats.org/drawingml/2006/main">
+            <a:r>
+              <a:t/>
+            </a:r>
+          </a:p>
+          <a:p xmlns:a="http://schemas.openxmlformats.org/drawingml/2006/main">
+            <a:r>
+              <a:t>O que destacar:</a:t>
+            </a:r>
+          </a:p>
+          <a:p xmlns:a="http://schemas.openxmlformats.org/drawingml/2006/main">
+            <a:r>
+              <a:t>- Leia os limites com o mesmo peso dado aos benefícios e diferencie restrição do laboratório de restrição do produto.</a:t>
+            </a:r>
+          </a:p>
+          <a:p xmlns:a="http://schemas.openxmlformats.org/drawingml/2006/main">
+            <a:r>
+              <a:t/>
+            </a:r>
+          </a:p>
+          <a:p xmlns:a="http://schemas.openxmlformats.org/drawingml/2006/main">
+            <a:r>
+              <a:t>Transição:</a:t>
+            </a:r>
+          </a:p>
+          <a:p xmlns:a="http://schemas.openxmlformats.org/drawingml/2006/main">
+            <a:r>
+              <a:t>Com esse ponto estabelecido, avance para “RADAR”.</a:t>
             </a:r>
           </a:p>
           <a:p xmlns:a="http://schemas.openxmlformats.org/drawingml/2006/main">
@@ -1612,7 +2112,57 @@
           <a:lstStyle xmlns:a="http://schemas.openxmlformats.org/drawingml/2006/main"/>
           <a:p xmlns:a="http://schemas.openxmlformats.org/drawingml/2006/main">
             <a:r>
-              <a:t>APIs, cache e integrações hospedadas ficam para a temporada de plataforma. Reforce que beta e preview não fazem parte da aceitação.</a:t>
+              <a:t>[Roteiro recomendado]</a:t>
+            </a:r>
+          </a:p>
+          <a:p xmlns:a="http://schemas.openxmlformats.org/drawingml/2006/main">
+            <a:r>
+              <a:t>[Tempo sugerido: 00:55]</a:t>
+            </a:r>
+          </a:p>
+          <a:p xmlns:a="http://schemas.openxmlformats.org/drawingml/2006/main">
+            <a:r>
+              <a:t/>
+            </a:r>
+          </a:p>
+          <a:p xmlns:a="http://schemas.openxmlformats.org/drawingml/2006/main">
+            <a:r>
+              <a:t>Fala sugerida:</a:t>
+            </a:r>
+          </a:p>
+          <a:p xmlns:a="http://schemas.openxmlformats.org/drawingml/2006/main">
+            <a:r>
+              <a:t>Este é o nosso Radar: APIs, cache e integrações hospedadas ficam para a temporada de plataforma. A intenção é mostrar a direção da ferramenta sem misturar preview com o caminho suportado da aula. Novidade observada não é recomendação de produção. Para adotar qualquer recurso futuro, confirme maturidade, adaptador, documentação e impacto sobre o projeto antes de alterar o baseline estável.</a:t>
+            </a:r>
+          </a:p>
+          <a:p xmlns:a="http://schemas.openxmlformats.org/drawingml/2006/main">
+            <a:r>
+              <a:t/>
+            </a:r>
+          </a:p>
+          <a:p xmlns:a="http://schemas.openxmlformats.org/drawingml/2006/main">
+            <a:r>
+              <a:t>O que destacar:</a:t>
+            </a:r>
+          </a:p>
+          <a:p xmlns:a="http://schemas.openxmlformats.org/drawingml/2006/main">
+            <a:r>
+              <a:t>- Reforce visualmente a regra do rodapé e não execute comandos beta ou preview como parte obrigatória da aula.</a:t>
+            </a:r>
+          </a:p>
+          <a:p xmlns:a="http://schemas.openxmlformats.org/drawingml/2006/main">
+            <a:r>
+              <a:t/>
+            </a:r>
+          </a:p>
+          <a:p xmlns:a="http://schemas.openxmlformats.org/drawingml/2006/main">
+            <a:r>
+              <a:t>Transição:</a:t>
+            </a:r>
+          </a:p>
+          <a:p xmlns:a="http://schemas.openxmlformats.org/drawingml/2006/main">
+            <a:r>
+              <a:t>Com esse ponto estabelecido, avance para “PRÓXIMO PASSO”.</a:t>
             </a:r>
           </a:p>
           <a:p xmlns:a="http://schemas.openxmlformats.org/drawingml/2006/main">
@@ -1727,7 +2277,57 @@
           <a:lstStyle xmlns:a="http://schemas.openxmlformats.org/drawingml/2006/main"/>
           <a:p xmlns:a="http://schemas.openxmlformats.org/drawingml/2006/main">
             <a:r>
-              <a:t>Interoperabilidade começa quando o consumidor não precisa copiar a fórmula. Use o diagrama para antecipar o problema que será comprovado no laboratório.</a:t>
+              <a:t>[Roteiro recomendado]</a:t>
+            </a:r>
+          </a:p>
+          <a:p xmlns:a="http://schemas.openxmlformats.org/drawingml/2006/main">
+            <a:r>
+              <a:t>[Tempo sugerido: 01:00]</a:t>
+            </a:r>
+          </a:p>
+          <a:p xmlns:a="http://schemas.openxmlformats.org/drawingml/2006/main">
+            <a:r>
+              <a:t/>
+            </a:r>
+          </a:p>
+          <a:p xmlns:a="http://schemas.openxmlformats.org/drawingml/2006/main">
+            <a:r>
+              <a:t>Fala sugerida:</a:t>
+            </a:r>
+          </a:p>
+          <a:p xmlns:a="http://schemas.openxmlformats.org/drawingml/2006/main">
+            <a:r>
+              <a:t>Quero começar com uma provocação: Interoperabilidade começa quando o consumidor não precisa copiar a fórmula. Essa pergunta orienta toda a aula. Em vez de aceitar uma afirmação porque ela parece correta, vamos procurar uma definição verificável e uma demonstração executável. Guarde essa tensão, porque voltaremos a ela quando compararmos o conceito com o resultado do laboratório.</a:t>
+            </a:r>
+          </a:p>
+          <a:p xmlns:a="http://schemas.openxmlformats.org/drawingml/2006/main">
+            <a:r>
+              <a:t/>
+            </a:r>
+          </a:p>
+          <a:p xmlns:a="http://schemas.openxmlformats.org/drawingml/2006/main">
+            <a:r>
+              <a:t>O que destacar:</a:t>
+            </a:r>
+          </a:p>
+          <a:p xmlns:a="http://schemas.openxmlformats.org/drawingml/2006/main">
+            <a:r>
+              <a:t>- Dê uma pausa depois da provocação e use o diagrama como mapa do problema, sem explicar todas as etapas ainda.</a:t>
+            </a:r>
+          </a:p>
+          <a:p xmlns:a="http://schemas.openxmlformats.org/drawingml/2006/main">
+            <a:r>
+              <a:t/>
+            </a:r>
+          </a:p>
+          <a:p xmlns:a="http://schemas.openxmlformats.org/drawingml/2006/main">
+            <a:r>
+              <a:t>Transição:</a:t>
+            </a:r>
+          </a:p>
+          <a:p xmlns:a="http://schemas.openxmlformats.org/drawingml/2006/main">
+            <a:r>
+              <a:t>Com esse ponto estabelecido, avance para “Ao final, você consegue...”.</a:t>
             </a:r>
           </a:p>
           <a:p xmlns:a="http://schemas.openxmlformats.org/drawingml/2006/main">
@@ -1842,7 +2442,57 @@
           <a:lstStyle xmlns:a="http://schemas.openxmlformats.org/drawingml/2006/main"/>
           <a:p xmlns:a="http://schemas.openxmlformats.org/drawingml/2006/main">
             <a:r>
-              <a:t>Prove a mesma métrica via MetricFlow e SQL sem copiar a fórmula. Encerre conectando a aula ao próximo checkpoint.</a:t>
+              <a:t>[Roteiro recomendado]</a:t>
+            </a:r>
+          </a:p>
+          <a:p xmlns:a="http://schemas.openxmlformats.org/drawingml/2006/main">
+            <a:r>
+              <a:t>[Tempo sugerido: 00:40]</a:t>
+            </a:r>
+          </a:p>
+          <a:p xmlns:a="http://schemas.openxmlformats.org/drawingml/2006/main">
+            <a:r>
+              <a:t/>
+            </a:r>
+          </a:p>
+          <a:p xmlns:a="http://schemas.openxmlformats.org/drawingml/2006/main">
+            <a:r>
+              <a:t>Fala sugerida:</a:t>
+            </a:r>
+          </a:p>
+          <a:p xmlns:a="http://schemas.openxmlformats.org/drawingml/2006/main">
+            <a:r>
+              <a:t>Prove a mesma métrica via MetricFlow e SQL sem copiar a fórmula. Faça essa etapa antes de seguir para o próximo episódio, porque o curso é cumulativo e o checkpoint atual se torna a base da aula seguinte. Se houver divergência, use o relatório de suporte e registre o que foi observado. O objetivo é avançar com um estado conhecido e reproduzível, não apenas assistir ao conteúdo.</a:t>
+            </a:r>
+          </a:p>
+          <a:p xmlns:a="http://schemas.openxmlformats.org/drawingml/2006/main">
+            <a:r>
+              <a:t/>
+            </a:r>
+          </a:p>
+          <a:p xmlns:a="http://schemas.openxmlformats.org/drawingml/2006/main">
+            <a:r>
+              <a:t>O que destacar:</a:t>
+            </a:r>
+          </a:p>
+          <a:p xmlns:a="http://schemas.openxmlformats.org/drawingml/2006/main">
+            <a:r>
+              <a:t>- Mostre o checkpoint e indique no repositório onde ficam o roteiro, os comandos e as referências da aula.</a:t>
+            </a:r>
+          </a:p>
+          <a:p xmlns:a="http://schemas.openxmlformats.org/drawingml/2006/main">
+            <a:r>
+              <a:t/>
+            </a:r>
+          </a:p>
+          <a:p xmlns:a="http://schemas.openxmlformats.org/drawingml/2006/main">
+            <a:r>
+              <a:t>Transição:</a:t>
+            </a:r>
+          </a:p>
+          <a:p xmlns:a="http://schemas.openxmlformats.org/drawingml/2006/main">
+            <a:r>
+              <a:t>Encerre retomando a pergunta inicial e confirme que o aluno sabe qual ação executar depois do episódio 4.</a:t>
             </a:r>
           </a:p>
           <a:p xmlns:a="http://schemas.openxmlformats.org/drawingml/2006/main">
@@ -1957,7 +2607,57 @@
           <a:lstStyle xmlns:a="http://schemas.openxmlformats.org/drawingml/2006/main"/>
           <a:p xmlns:a="http://schemas.openxmlformats.org/drawingml/2006/main">
             <a:r>
-              <a:t>Explique os três resultados observáveis da aula: Consultar MetricFlow; Publicar SQL governado; Validar um artifact OSI.</a:t>
+              <a:t>[Roteiro recomendado]</a:t>
+            </a:r>
+          </a:p>
+          <a:p xmlns:a="http://schemas.openxmlformats.org/drawingml/2006/main">
+            <a:r>
+              <a:t>[Tempo sugerido: 01:00]</a:t>
+            </a:r>
+          </a:p>
+          <a:p xmlns:a="http://schemas.openxmlformats.org/drawingml/2006/main">
+            <a:r>
+              <a:t/>
+            </a:r>
+          </a:p>
+          <a:p xmlns:a="http://schemas.openxmlformats.org/drawingml/2006/main">
+            <a:r>
+              <a:t>Fala sugerida:</a:t>
+            </a:r>
+          </a:p>
+          <a:p xmlns:a="http://schemas.openxmlformats.org/drawingml/2006/main">
+            <a:r>
+              <a:t>Ao final desta aula, você deverá conseguir consultar MetricFlow, Publicar SQL governado e Validar um artifact OSI. Esses resultados formam uma sequência: primeiro entendemos a regra, depois observamos sua representação no projeto e, por fim, comprovamos o comportamento no checkpoint. Se alguma dessas três partes não estiver clara, volte ao slide correspondente antes de executar a demonstração.</a:t>
+            </a:r>
+          </a:p>
+          <a:p xmlns:a="http://schemas.openxmlformats.org/drawingml/2006/main">
+            <a:r>
+              <a:t/>
+            </a:r>
+          </a:p>
+          <a:p xmlns:a="http://schemas.openxmlformats.org/drawingml/2006/main">
+            <a:r>
+              <a:t>O que destacar:</a:t>
+            </a:r>
+          </a:p>
+          <a:p xmlns:a="http://schemas.openxmlformats.org/drawingml/2006/main">
+            <a:r>
+              <a:t>- Percorra os objetivos da esquerda para a direita e apresente-os como resultados observáveis, não como uma agenda abstrata.</a:t>
+            </a:r>
+          </a:p>
+          <a:p xmlns:a="http://schemas.openxmlformats.org/drawingml/2006/main">
+            <a:r>
+              <a:t/>
+            </a:r>
+          </a:p>
+          <a:p xmlns:a="http://schemas.openxmlformats.org/drawingml/2006/main">
+            <a:r>
+              <a:t>Transição:</a:t>
+            </a:r>
+          </a:p>
+          <a:p xmlns:a="http://schemas.openxmlformats.org/drawingml/2006/main">
+            <a:r>
+              <a:t>Com esse ponto estabelecido, avance para “Três interfaces, uma fonte de significado”.</a:t>
             </a:r>
           </a:p>
           <a:p xmlns:a="http://schemas.openxmlformats.org/drawingml/2006/main">
@@ -2072,7 +2772,57 @@
           <a:lstStyle xmlns:a="http://schemas.openxmlformats.org/drawingml/2006/main"/>
           <a:p xmlns:a="http://schemas.openxmlformats.org/drawingml/2006/main">
             <a:r>
-              <a:t>MetricFlow, SQL e OSI reutilizam o mesmo contrato semântico. Desenvolva os pontos: Consulta local; Fachada estável; Artifact versionado.</a:t>
+              <a:t>[Roteiro recomendado]</a:t>
+            </a:r>
+          </a:p>
+          <a:p xmlns:a="http://schemas.openxmlformats.org/drawingml/2006/main">
+            <a:r>
+              <a:t>[Tempo sugerido: 01:10]</a:t>
+            </a:r>
+          </a:p>
+          <a:p xmlns:a="http://schemas.openxmlformats.org/drawingml/2006/main">
+            <a:r>
+              <a:t/>
+            </a:r>
+          </a:p>
+          <a:p xmlns:a="http://schemas.openxmlformats.org/drawingml/2006/main">
+            <a:r>
+              <a:t>Fala sugerida:</a:t>
+            </a:r>
+          </a:p>
+          <a:p xmlns:a="http://schemas.openxmlformats.org/drawingml/2006/main">
+            <a:r>
+              <a:t>A mensagem principal deste slide é: MetricFlow, SQL e OSI reutilizam o mesmo contrato semântico. Para tornar isso concreto, observe consulta local, Fachada estável e Artifact versionado. Esses pontos devem ser entendidos em conjunto; não são funcionalidades isoladas. No projeto, essa combinação transforma uma convenção informal em algo que pode ser revisado, testado ou consumido de maneira consistente.</a:t>
+            </a:r>
+          </a:p>
+          <a:p xmlns:a="http://schemas.openxmlformats.org/drawingml/2006/main">
+            <a:r>
+              <a:t/>
+            </a:r>
+          </a:p>
+          <a:p xmlns:a="http://schemas.openxmlformats.org/drawingml/2006/main">
+            <a:r>
+              <a:t>O que destacar:</a:t>
+            </a:r>
+          </a:p>
+          <a:p xmlns:a="http://schemas.openxmlformats.org/drawingml/2006/main">
+            <a:r>
+              <a:t>- Comece pelo título, leia a afirmação abaixo dele e depois desenvolva os itens sem repetir o texto palavra por palavra.</a:t>
+            </a:r>
+          </a:p>
+          <a:p xmlns:a="http://schemas.openxmlformats.org/drawingml/2006/main">
+            <a:r>
+              <a:t/>
+            </a:r>
+          </a:p>
+          <a:p xmlns:a="http://schemas.openxmlformats.org/drawingml/2006/main">
+            <a:r>
+              <a:t>Transição:</a:t>
+            </a:r>
+          </a:p>
+          <a:p xmlns:a="http://schemas.openxmlformats.org/drawingml/2006/main">
+            <a:r>
+              <a:t>Com esse ponto estabelecido, avance para “Consulta lógica reduz acoplamento”.</a:t>
             </a:r>
           </a:p>
           <a:p xmlns:a="http://schemas.openxmlformats.org/drawingml/2006/main">
@@ -2187,7 +2937,57 @@
           <a:lstStyle xmlns:a="http://schemas.openxmlformats.org/drawingml/2006/main"/>
           <a:p xmlns:a="http://schemas.openxmlformats.org/drawingml/2006/main">
             <a:r>
-              <a:t>O consumidor pede métrica e dimensão; o compilador resolve o caminho. Desenvolva os pontos: Nome estável; Filtro permitido; SQL inspecionável.</a:t>
+              <a:t>[Roteiro recomendado]</a:t>
+            </a:r>
+          </a:p>
+          <a:p xmlns:a="http://schemas.openxmlformats.org/drawingml/2006/main">
+            <a:r>
+              <a:t>[Tempo sugerido: 01:10]</a:t>
+            </a:r>
+          </a:p>
+          <a:p xmlns:a="http://schemas.openxmlformats.org/drawingml/2006/main">
+            <a:r>
+              <a:t/>
+            </a:r>
+          </a:p>
+          <a:p xmlns:a="http://schemas.openxmlformats.org/drawingml/2006/main">
+            <a:r>
+              <a:t>Fala sugerida:</a:t>
+            </a:r>
+          </a:p>
+          <a:p xmlns:a="http://schemas.openxmlformats.org/drawingml/2006/main">
+            <a:r>
+              <a:t>A mensagem principal deste slide é: O consumidor pede métrica e dimensão; o compilador resolve o caminho. Para tornar isso concreto, observe nome estável, Filtro permitido e SQL inspecionável. Esses pontos devem ser entendidos em conjunto; não são funcionalidades isoladas. No projeto, essa combinação transforma uma convenção informal em algo que pode ser revisado, testado ou consumido de maneira consistente.</a:t>
+            </a:r>
+          </a:p>
+          <a:p xmlns:a="http://schemas.openxmlformats.org/drawingml/2006/main">
+            <a:r>
+              <a:t/>
+            </a:r>
+          </a:p>
+          <a:p xmlns:a="http://schemas.openxmlformats.org/drawingml/2006/main">
+            <a:r>
+              <a:t>O que destacar:</a:t>
+            </a:r>
+          </a:p>
+          <a:p xmlns:a="http://schemas.openxmlformats.org/drawingml/2006/main">
+            <a:r>
+              <a:t>- Comece pelo título, leia a afirmação abaixo dele e depois desenvolva os itens sem repetir o texto palavra por palavra.</a:t>
+            </a:r>
+          </a:p>
+          <a:p xmlns:a="http://schemas.openxmlformats.org/drawingml/2006/main">
+            <a:r>
+              <a:t/>
+            </a:r>
+          </a:p>
+          <a:p xmlns:a="http://schemas.openxmlformats.org/drawingml/2006/main">
+            <a:r>
+              <a:t>Transição:</a:t>
+            </a:r>
+          </a:p>
+          <a:p xmlns:a="http://schemas.openxmlformats.org/drawingml/2006/main">
+            <a:r>
+              <a:t>Com esse ponto estabelecido, avance para “Consulta lógica reduz acoplamento”.</a:t>
             </a:r>
           </a:p>
           <a:p xmlns:a="http://schemas.openxmlformats.org/drawingml/2006/main">
@@ -2302,7 +3102,57 @@
           <a:lstStyle xmlns:a="http://schemas.openxmlformats.org/drawingml/2006/main"/>
           <a:p xmlns:a="http://schemas.openxmlformats.org/drawingml/2006/main">
             <a:r>
-              <a:t>Use a composição para explicar visualmente: O consumidor pede métrica e dimensão; o compilador resolve o caminho. Nome estável Filtro permitido SQL inspecionável</a:t>
+              <a:t>[Roteiro recomendado]</a:t>
+            </a:r>
+          </a:p>
+          <a:p xmlns:a="http://schemas.openxmlformats.org/drawingml/2006/main">
+            <a:r>
+              <a:t>[Tempo sugerido: 00:55]</a:t>
+            </a:r>
+          </a:p>
+          <a:p xmlns:a="http://schemas.openxmlformats.org/drawingml/2006/main">
+            <a:r>
+              <a:t/>
+            </a:r>
+          </a:p>
+          <a:p xmlns:a="http://schemas.openxmlformats.org/drawingml/2006/main">
+            <a:r>
+              <a:t>Fala sugerida:</a:t>
+            </a:r>
+          </a:p>
+          <a:p xmlns:a="http://schemas.openxmlformats.org/drawingml/2006/main">
+            <a:r>
+              <a:t>Agora vamos ler a ideia visualmente. O consumidor pede métrica e dimensão; o compilador resolve o caminho. Siga a composição na ordem mostrada e conecte pedido, Plano, SQL e Resultado. A imagem ou o fluxo não cria uma regra nova; ele torna visível a relação que acabamos de explicar. Use a disposição dos elementos para reforçar causa, dependência ou comparação.</a:t>
+            </a:r>
+          </a:p>
+          <a:p xmlns:a="http://schemas.openxmlformats.org/drawingml/2006/main">
+            <a:r>
+              <a:t/>
+            </a:r>
+          </a:p>
+          <a:p xmlns:a="http://schemas.openxmlformats.org/drawingml/2006/main">
+            <a:r>
+              <a:t>O que destacar:</a:t>
+            </a:r>
+          </a:p>
+          <a:p xmlns:a="http://schemas.openxmlformats.org/drawingml/2006/main">
+            <a:r>
+              <a:t>- Acompanhe o fluxo ou a comparação com o cursor e preserve a ordem de leitura do slide.</a:t>
+            </a:r>
+          </a:p>
+          <a:p xmlns:a="http://schemas.openxmlformats.org/drawingml/2006/main">
+            <a:r>
+              <a:t/>
+            </a:r>
+          </a:p>
+          <a:p xmlns:a="http://schemas.openxmlformats.org/drawingml/2006/main">
+            <a:r>
+              <a:t>Transição:</a:t>
+            </a:r>
+          </a:p>
+          <a:p xmlns:a="http://schemas.openxmlformats.org/drawingml/2006/main">
+            <a:r>
+              <a:t>Com esse ponto estabelecido, avance para “SQL governado continua útil”.</a:t>
             </a:r>
           </a:p>
           <a:p xmlns:a="http://schemas.openxmlformats.org/drawingml/2006/main">
@@ -2417,7 +3267,57 @@
           <a:lstStyle xmlns:a="http://schemas.openxmlformats.org/drawingml/2006/main"/>
           <a:p xmlns:a="http://schemas.openxmlformats.org/drawingml/2006/main">
             <a:r>
-              <a:t>BI e APIs podem consumir uma fachada sem reimplementar regra. Desenvolva os pontos: Schema e versão; Owner e SLA; Freshness e lineage.</a:t>
+              <a:t>[Roteiro recomendado]</a:t>
+            </a:r>
+          </a:p>
+          <a:p xmlns:a="http://schemas.openxmlformats.org/drawingml/2006/main">
+            <a:r>
+              <a:t>[Tempo sugerido: 01:10]</a:t>
+            </a:r>
+          </a:p>
+          <a:p xmlns:a="http://schemas.openxmlformats.org/drawingml/2006/main">
+            <a:r>
+              <a:t/>
+            </a:r>
+          </a:p>
+          <a:p xmlns:a="http://schemas.openxmlformats.org/drawingml/2006/main">
+            <a:r>
+              <a:t>Fala sugerida:</a:t>
+            </a:r>
+          </a:p>
+          <a:p xmlns:a="http://schemas.openxmlformats.org/drawingml/2006/main">
+            <a:r>
+              <a:t>A mensagem principal deste slide é: BI e APIs podem consumir uma fachada sem reimplementar regra. Para tornar isso concreto, observe schema e versão, Owner e SLA e Freshness e lineage. Esses pontos devem ser entendidos em conjunto; não são funcionalidades isoladas. No projeto, essa combinação transforma uma convenção informal em algo que pode ser revisado, testado ou consumido de maneira consistente.</a:t>
+            </a:r>
+          </a:p>
+          <a:p xmlns:a="http://schemas.openxmlformats.org/drawingml/2006/main">
+            <a:r>
+              <a:t/>
+            </a:r>
+          </a:p>
+          <a:p xmlns:a="http://schemas.openxmlformats.org/drawingml/2006/main">
+            <a:r>
+              <a:t>O que destacar:</a:t>
+            </a:r>
+          </a:p>
+          <a:p xmlns:a="http://schemas.openxmlformats.org/drawingml/2006/main">
+            <a:r>
+              <a:t>- Comece pelo título, leia a afirmação abaixo dele e depois desenvolva os itens sem repetir o texto palavra por palavra.</a:t>
+            </a:r>
+          </a:p>
+          <a:p xmlns:a="http://schemas.openxmlformats.org/drawingml/2006/main">
+            <a:r>
+              <a:t/>
+            </a:r>
+          </a:p>
+          <a:p xmlns:a="http://schemas.openxmlformats.org/drawingml/2006/main">
+            <a:r>
+              <a:t>Transição:</a:t>
+            </a:r>
+          </a:p>
+          <a:p xmlns:a="http://schemas.openxmlformats.org/drawingml/2006/main">
+            <a:r>
+              <a:t>Com esse ponto estabelecido, avance para “SQL governado continua útil”.</a:t>
             </a:r>
           </a:p>
           <a:p xmlns:a="http://schemas.openxmlformats.org/drawingml/2006/main">
@@ -2532,7 +3432,57 @@
           <a:lstStyle xmlns:a="http://schemas.openxmlformats.org/drawingml/2006/main"/>
           <a:p xmlns:a="http://schemas.openxmlformats.org/drawingml/2006/main">
             <a:r>
-              <a:t>Use a composição para explicar visualmente: BI e APIs podem consumir uma fachada sem reimplementar regra. Schema e versão Owner e SLA Freshness e lineage</a:t>
+              <a:t>[Roteiro recomendado]</a:t>
+            </a:r>
+          </a:p>
+          <a:p xmlns:a="http://schemas.openxmlformats.org/drawingml/2006/main">
+            <a:r>
+              <a:t>[Tempo sugerido: 00:55]</a:t>
+            </a:r>
+          </a:p>
+          <a:p xmlns:a="http://schemas.openxmlformats.org/drawingml/2006/main">
+            <a:r>
+              <a:t/>
+            </a:r>
+          </a:p>
+          <a:p xmlns:a="http://schemas.openxmlformats.org/drawingml/2006/main">
+            <a:r>
+              <a:t>Fala sugerida:</a:t>
+            </a:r>
+          </a:p>
+          <a:p xmlns:a="http://schemas.openxmlformats.org/drawingml/2006/main">
+            <a:r>
+              <a:t>Agora vamos ler a ideia visualmente. BI e APIs podem consumir uma fachada sem reimplementar regra. Siga a composição na ordem mostrada e conecte contrato, Consumidor, Schema e versão, Owner e SLA e Freshness e lineage. A imagem ou o fluxo não cria uma regra nova; ele torna visível a relação que acabamos de explicar. Use a disposição dos elementos para reforçar causa, dependência ou comparação.</a:t>
+            </a:r>
+          </a:p>
+          <a:p xmlns:a="http://schemas.openxmlformats.org/drawingml/2006/main">
+            <a:r>
+              <a:t/>
+            </a:r>
+          </a:p>
+          <a:p xmlns:a="http://schemas.openxmlformats.org/drawingml/2006/main">
+            <a:r>
+              <a:t>O que destacar:</a:t>
+            </a:r>
+          </a:p>
+          <a:p xmlns:a="http://schemas.openxmlformats.org/drawingml/2006/main">
+            <a:r>
+              <a:t>- Acompanhe o fluxo ou a comparação com o cursor e preserve a ordem de leitura do slide.</a:t>
+            </a:r>
+          </a:p>
+          <a:p xmlns:a="http://schemas.openxmlformats.org/drawingml/2006/main">
+            <a:r>
+              <a:t/>
+            </a:r>
+          </a:p>
+          <a:p xmlns:a="http://schemas.openxmlformats.org/drawingml/2006/main">
+            <a:r>
+              <a:t>Transição:</a:t>
+            </a:r>
+          </a:p>
+          <a:p xmlns:a="http://schemas.openxmlformats.org/drawingml/2006/main">
+            <a:r>
+              <a:t>Com esse ponto estabelecido, avance para “OSI é um contrato, não um conector mágico”.</a:t>
             </a:r>
           </a:p>
           <a:p xmlns:a="http://schemas.openxmlformats.org/drawingml/2006/main">
@@ -2647,7 +3597,57 @@
           <a:lstStyle xmlns:a="http://schemas.openxmlformats.org/drawingml/2006/main"/>
           <a:p xmlns:a="http://schemas.openxmlformats.org/drawingml/2006/main">
             <a:r>
-              <a:t>O artifact descreve semântica; cada consumidor ainda precisa implementar compatibilidade. Desenvolva os pontos: Documento validável; Versão explícita; Sem promessa de universalidade.</a:t>
+              <a:t>[Roteiro recomendado]</a:t>
+            </a:r>
+          </a:p>
+          <a:p xmlns:a="http://schemas.openxmlformats.org/drawingml/2006/main">
+            <a:r>
+              <a:t>[Tempo sugerido: 01:10]</a:t>
+            </a:r>
+          </a:p>
+          <a:p xmlns:a="http://schemas.openxmlformats.org/drawingml/2006/main">
+            <a:r>
+              <a:t/>
+            </a:r>
+          </a:p>
+          <a:p xmlns:a="http://schemas.openxmlformats.org/drawingml/2006/main">
+            <a:r>
+              <a:t>Fala sugerida:</a:t>
+            </a:r>
+          </a:p>
+          <a:p xmlns:a="http://schemas.openxmlformats.org/drawingml/2006/main">
+            <a:r>
+              <a:t>A mensagem principal deste slide é: O artifact descreve semântica; cada consumidor ainda precisa implementar compatibilidade. Para tornar isso concreto, observe documento validável, Versão explícita e Sem promessa de universalidade. Esses pontos devem ser entendidos em conjunto; não são funcionalidades isoladas. No projeto, essa combinação transforma uma convenção informal em algo que pode ser revisado, testado ou consumido de maneira consistente.</a:t>
+            </a:r>
+          </a:p>
+          <a:p xmlns:a="http://schemas.openxmlformats.org/drawingml/2006/main">
+            <a:r>
+              <a:t/>
+            </a:r>
+          </a:p>
+          <a:p xmlns:a="http://schemas.openxmlformats.org/drawingml/2006/main">
+            <a:r>
+              <a:t>O que destacar:</a:t>
+            </a:r>
+          </a:p>
+          <a:p xmlns:a="http://schemas.openxmlformats.org/drawingml/2006/main">
+            <a:r>
+              <a:t>- Comece pelo título, leia a afirmação abaixo dele e depois desenvolva os itens sem repetir o texto palavra por palavra.</a:t>
+            </a:r>
+          </a:p>
+          <a:p xmlns:a="http://schemas.openxmlformats.org/drawingml/2006/main">
+            <a:r>
+              <a:t/>
+            </a:r>
+          </a:p>
+          <a:p xmlns:a="http://schemas.openxmlformats.org/drawingml/2006/main">
+            <a:r>
+              <a:t>Transição:</a:t>
+            </a:r>
+          </a:p>
+          <a:p xmlns:a="http://schemas.openxmlformats.org/drawingml/2006/main">
+            <a:r>
+              <a:t>Com esse ponto estabelecido, avance para “OSI é um contrato, não um conector mágico”.</a:t>
             </a:r>
           </a:p>
           <a:p xmlns:a="http://schemas.openxmlformats.org/drawingml/2006/main">
@@ -2794,7 +3794,7 @@
   </p:cSld>
   <p:clrMap bg1="lt1" tx1="dk1" bg2="lt2" tx2="dk2" accent1="accent1" accent2="accent2" accent3="accent3" accent4="accent4" accent5="accent5" accent6="accent6" hlink="hlink" folHlink="folHlink"/>
   <p:sldLayoutIdLst>
-    <p:sldLayoutId xmlns:r="http://schemas.openxmlformats.org/officeDocument/2006/relationships" id="2147483649" r:id="Ref10cbc36aac4a49"/>
+    <p:sldLayoutId xmlns:r="http://schemas.openxmlformats.org/officeDocument/2006/relationships" id="2147483649" r:id="R0cd73de1fff648dc"/>
   </p:sldLayoutIdLst>
   <p:txStyles>
     <p:titleStyle>
@@ -3092,8 +4092,8 @@
   </p:cSld>
   <p:clrMap bg1="lt1" tx1="dk1" bg2="lt2" tx2="dk2" accent1="accent1" accent2="accent2" accent3="accent3" accent4="accent4" accent5="accent5" accent6="accent6" hlink="hlink" folHlink="folHlink"/>
   <p:sldLayoutIdLst>
-    <p:sldLayoutId xmlns:r="http://schemas.openxmlformats.org/officeDocument/2006/relationships" id="2147483651" r:id="Rc3df15314823482e"/>
-    <p:sldLayoutId xmlns:r="http://schemas.openxmlformats.org/officeDocument/2006/relationships" id="2147483652" r:id="Re575f770705f4a10"/>
+    <p:sldLayoutId xmlns:r="http://schemas.openxmlformats.org/officeDocument/2006/relationships" id="2147483651" r:id="R3b585148bd984738"/>
+    <p:sldLayoutId xmlns:r="http://schemas.openxmlformats.org/officeDocument/2006/relationships" id="2147483652" r:id="R18810c917ebd4da9"/>
   </p:sldLayoutIdLst>
 </p:sldMaster>
 </file>
@@ -3617,14 +4617,14 @@
       </p:grpSpPr>
       <p:pic>
         <p:nvPicPr>
-          <p:cNvPr id="9" name="" descr="Ilustração conceitual autoral da capa: EPISÓDIO 4 — Semântica aberta e interoperável."/>
+          <p:cNvPr id="10" name="" descr="Ilustração conceitual autoral da capa: EPISÓDIO 4 — Semântica aberta e interoperável."/>
           <p:cNvPicPr>
             <a:picLocks xmlns:a="http://schemas.openxmlformats.org/drawingml/2006/main" noChangeAspect="1"/>
           </p:cNvPicPr>
           <p:nvPr/>
         </p:nvPicPr>
         <p:blipFill>
-          <a:blip xmlns:r="http://schemas.openxmlformats.org/officeDocument/2006/relationships" xmlns:a="http://schemas.openxmlformats.org/drawingml/2006/main" r:embed="Rd42d1c019f094230"/>
+          <a:blip xmlns:r="http://schemas.openxmlformats.org/officeDocument/2006/relationships" xmlns:a="http://schemas.openxmlformats.org/drawingml/2006/main" r:embed="R6e617f72148d4492"/>
           <a:srcRect xmlns:a="http://schemas.openxmlformats.org/drawingml/2006/main" l="19785" t="0" r="19785" b="0"/>
           <a:stretch xmlns:a="http://schemas.openxmlformats.org/drawingml/2006/main">
             <a:fillRect l="0" t="0" r="0" b="0"/>
@@ -3737,6 +4737,7 @@
           <a:lstStyle xmlns:a="http://schemas.openxmlformats.org/drawingml/2006/main"/>
           <a:p xmlns:a="http://schemas.openxmlformats.org/drawingml/2006/main">
             <a:pPr>
+              <a:buNone/>
               <a:defRPr sz="1350" b="1">
                 <a:solidFill>
                   <a:srgbClr val="1EC5FF"/>
@@ -3787,6 +4788,7 @@
           <a:lstStyle xmlns:a="http://schemas.openxmlformats.org/drawingml/2006/main"/>
           <a:p xmlns:a="http://schemas.openxmlformats.org/drawingml/2006/main">
             <a:pPr>
+              <a:buNone/>
               <a:defRPr sz="3225" b="1">
                 <a:solidFill>
                   <a:srgbClr val="FFFFFF"/>
@@ -3837,6 +4839,7 @@
           <a:lstStyle xmlns:a="http://schemas.openxmlformats.org/drawingml/2006/main"/>
           <a:p xmlns:a="http://schemas.openxmlformats.org/drawingml/2006/main">
             <a:pPr>
+              <a:buNone/>
               <a:defRPr sz="1800">
                 <a:solidFill>
                   <a:srgbClr val="E2F2FF"/>
@@ -3918,6 +4921,7 @@
           <a:lstStyle xmlns:a="http://schemas.openxmlformats.org/drawingml/2006/main"/>
           <a:p xmlns:a="http://schemas.openxmlformats.org/drawingml/2006/main">
             <a:pPr>
+              <a:buNone/>
               <a:defRPr sz="1200" b="1">
                 <a:solidFill>
                   <a:srgbClr val="FFFFFF">
@@ -4009,6 +5013,7 @@
           <a:lstStyle xmlns:a="http://schemas.openxmlformats.org/drawingml/2006/main"/>
           <a:p xmlns:a="http://schemas.openxmlformats.org/drawingml/2006/main">
             <a:pPr>
+              <a:buNone/>
               <a:defRPr sz="2925" b="1">
                 <a:solidFill>
                   <a:srgbClr val="FFFFFF"/>
@@ -4092,6 +5097,7 @@
           <a:lstStyle xmlns:a="http://schemas.openxmlformats.org/drawingml/2006/main"/>
           <a:p xmlns:a="http://schemas.openxmlformats.org/drawingml/2006/main">
             <a:pPr algn="ctr">
+              <a:buNone/>
               <a:defRPr sz="1575" b="1">
                 <a:solidFill>
                   <a:srgbClr val="FFFFFF"/>
@@ -4175,6 +5181,7 @@
           <a:lstStyle xmlns:a="http://schemas.openxmlformats.org/drawingml/2006/main"/>
           <a:p xmlns:a="http://schemas.openxmlformats.org/drawingml/2006/main">
             <a:pPr algn="ctr">
+              <a:buNone/>
               <a:defRPr sz="1575" b="1">
                 <a:solidFill>
                   <a:srgbClr val="FFFFFF"/>
@@ -4258,6 +5265,7 @@
           <a:lstStyle xmlns:a="http://schemas.openxmlformats.org/drawingml/2006/main"/>
           <a:p xmlns:a="http://schemas.openxmlformats.org/drawingml/2006/main">
             <a:pPr algn="ctr">
+              <a:buNone/>
               <a:defRPr sz="1575" b="1">
                 <a:solidFill>
                   <a:srgbClr val="FFFFFF"/>
@@ -4308,6 +5316,7 @@
           <a:lstStyle xmlns:a="http://schemas.openxmlformats.org/drawingml/2006/main"/>
           <a:p xmlns:a="http://schemas.openxmlformats.org/drawingml/2006/main">
             <a:pPr>
+              <a:buNone/>
               <a:defRPr sz="1050" b="1">
                 <a:solidFill>
                   <a:srgbClr val="1EC5FF"/>
@@ -4391,6 +5400,7 @@
           <a:lstStyle xmlns:a="http://schemas.openxmlformats.org/drawingml/2006/main"/>
           <a:p xmlns:a="http://schemas.openxmlformats.org/drawingml/2006/main">
             <a:pPr>
+              <a:buNone/>
               <a:defRPr sz="825">
                 <a:solidFill>
                   <a:srgbClr val="FFFFFF">
@@ -4445,6 +5455,7 @@
           <a:lstStyle xmlns:a="http://schemas.openxmlformats.org/drawingml/2006/main"/>
           <a:p xmlns:a="http://schemas.openxmlformats.org/drawingml/2006/main">
             <a:pPr algn="r">
+              <a:buNone/>
               <a:defRPr sz="825" b="1">
                 <a:solidFill>
                   <a:srgbClr val="FFFFFF">
@@ -4536,6 +5547,7 @@
           <a:lstStyle xmlns:a="http://schemas.openxmlformats.org/drawingml/2006/main"/>
           <a:p xmlns:a="http://schemas.openxmlformats.org/drawingml/2006/main">
             <a:pPr>
+              <a:buNone/>
               <a:defRPr sz="2925" b="1">
                 <a:solidFill>
                   <a:srgbClr val="FFFFFF"/>
@@ -4586,6 +5598,7 @@
           <a:lstStyle xmlns:a="http://schemas.openxmlformats.org/drawingml/2006/main"/>
           <a:p xmlns:a="http://schemas.openxmlformats.org/drawingml/2006/main">
             <a:pPr>
+              <a:buNone/>
               <a:defRPr sz="1650">
                 <a:solidFill>
                   <a:srgbClr val="E2F2FF"/>
@@ -4636,6 +5649,7 @@
           <a:lstStyle xmlns:a="http://schemas.openxmlformats.org/drawingml/2006/main"/>
           <a:p xmlns:a="http://schemas.openxmlformats.org/drawingml/2006/main">
             <a:pPr>
+              <a:buNone/>
               <a:defRPr sz="1800">
                 <a:solidFill>
                   <a:srgbClr val="FFFFFF"/>
@@ -4653,6 +5667,7 @@
           </a:p>
           <a:p xmlns:a="http://schemas.openxmlformats.org/drawingml/2006/main">
             <a:pPr>
+              <a:buNone/>
               <a:defRPr sz="1800">
                 <a:solidFill>
                   <a:srgbClr val="FFFFFF"/>
@@ -4670,6 +5685,7 @@
           </a:p>
           <a:p xmlns:a="http://schemas.openxmlformats.org/drawingml/2006/main">
             <a:pPr>
+              <a:buNone/>
               <a:defRPr sz="1800">
                 <a:solidFill>
                   <a:srgbClr val="FFFFFF"/>
@@ -4794,6 +5810,7 @@
           <a:lstStyle xmlns:a="http://schemas.openxmlformats.org/drawingml/2006/main"/>
           <a:p xmlns:a="http://schemas.openxmlformats.org/drawingml/2006/main">
             <a:pPr algn="ctr">
+              <a:buNone/>
               <a:defRPr sz="4650" b="1">
                 <a:solidFill>
                   <a:srgbClr val="1EC5FF"/>
@@ -4844,6 +5861,7 @@
           <a:lstStyle xmlns:a="http://schemas.openxmlformats.org/drawingml/2006/main"/>
           <a:p xmlns:a="http://schemas.openxmlformats.org/drawingml/2006/main">
             <a:pPr>
+              <a:buNone/>
               <a:defRPr sz="1050" b="1">
                 <a:solidFill>
                   <a:srgbClr val="1EC5FF"/>
@@ -4927,6 +5945,7 @@
           <a:lstStyle xmlns:a="http://schemas.openxmlformats.org/drawingml/2006/main"/>
           <a:p xmlns:a="http://schemas.openxmlformats.org/drawingml/2006/main">
             <a:pPr>
+              <a:buNone/>
               <a:defRPr sz="825">
                 <a:solidFill>
                   <a:srgbClr val="FFFFFF">
@@ -4981,6 +6000,7 @@
           <a:lstStyle xmlns:a="http://schemas.openxmlformats.org/drawingml/2006/main"/>
           <a:p xmlns:a="http://schemas.openxmlformats.org/drawingml/2006/main">
             <a:pPr algn="r">
+              <a:buNone/>
               <a:defRPr sz="825" b="1">
                 <a:solidFill>
                   <a:srgbClr val="FFFFFF">
@@ -5064,6 +6084,7 @@
           <a:lstStyle xmlns:a="http://schemas.openxmlformats.org/drawingml/2006/main"/>
           <a:p xmlns:a="http://schemas.openxmlformats.org/drawingml/2006/main">
             <a:pPr>
+              <a:buNone/>
               <a:defRPr sz="2925" b="1">
                 <a:solidFill>
                   <a:srgbClr val="0B1F3A"/>
@@ -5120,6 +6141,7 @@
           <a:lstStyle xmlns:a="http://schemas.openxmlformats.org/drawingml/2006/main"/>
           <a:p xmlns:a="http://schemas.openxmlformats.org/drawingml/2006/main">
             <a:pPr algn="ctr">
+              <a:buNone/>
               <a:defRPr sz="1575" b="1">
                 <a:solidFill>
                   <a:srgbClr val="0B1F3A"/>
@@ -5176,6 +6198,7 @@
           <a:lstStyle xmlns:a="http://schemas.openxmlformats.org/drawingml/2006/main"/>
           <a:p xmlns:a="http://schemas.openxmlformats.org/drawingml/2006/main">
             <a:pPr algn="ctr">
+              <a:buNone/>
               <a:defRPr sz="1575" b="1">
                 <a:solidFill>
                   <a:srgbClr val="0B1F3A"/>
@@ -5232,6 +6255,7 @@
           <a:lstStyle xmlns:a="http://schemas.openxmlformats.org/drawingml/2006/main"/>
           <a:p xmlns:a="http://schemas.openxmlformats.org/drawingml/2006/main">
             <a:pPr algn="ctr">
+              <a:buNone/>
               <a:defRPr sz="1575" b="1">
                 <a:solidFill>
                   <a:srgbClr val="0B1F3A"/>
@@ -5288,6 +6312,7 @@
           <a:lstStyle xmlns:a="http://schemas.openxmlformats.org/drawingml/2006/main"/>
           <a:p xmlns:a="http://schemas.openxmlformats.org/drawingml/2006/main">
             <a:pPr algn="ctr">
+              <a:buNone/>
               <a:defRPr sz="1575" b="1">
                 <a:solidFill>
                   <a:srgbClr val="0B1F3A"/>
@@ -5307,7 +6332,7 @@
       </p:sp>
       <p:cxnSp>
         <p:nvCxnSpPr>
-          <p:cNvPr id="18" name=""/>
+          <p:cNvPr id="26" name=""/>
           <p:cNvCxnSpPr>
             <a:stCxn xmlns:a="http://schemas.openxmlformats.org/drawingml/2006/main" id="2" idx="3"/>
             <a:endCxn xmlns:a="http://schemas.openxmlformats.org/drawingml/2006/main" id="3" idx="1"/>
@@ -5333,7 +6358,7 @@
       </p:cxnSp>
       <p:cxnSp>
         <p:nvCxnSpPr>
-          <p:cNvPr id="19" name=""/>
+          <p:cNvPr id="27" name=""/>
           <p:cNvCxnSpPr>
             <a:stCxn xmlns:a="http://schemas.openxmlformats.org/drawingml/2006/main" id="3" idx="3"/>
             <a:endCxn xmlns:a="http://schemas.openxmlformats.org/drawingml/2006/main" id="4" idx="1"/>
@@ -5359,7 +6384,7 @@
       </p:cxnSp>
       <p:cxnSp>
         <p:nvCxnSpPr>
-          <p:cNvPr id="20" name=""/>
+          <p:cNvPr id="28" name=""/>
           <p:cNvCxnSpPr>
             <a:stCxn xmlns:a="http://schemas.openxmlformats.org/drawingml/2006/main" id="4" idx="3"/>
             <a:endCxn xmlns:a="http://schemas.openxmlformats.org/drawingml/2006/main" id="5" idx="1"/>
@@ -5416,6 +6441,7 @@
           <a:lstStyle xmlns:a="http://schemas.openxmlformats.org/drawingml/2006/main"/>
           <a:p xmlns:a="http://schemas.openxmlformats.org/drawingml/2006/main">
             <a:pPr>
+              <a:buNone/>
               <a:defRPr sz="1050" b="1">
                 <a:solidFill>
                   <a:srgbClr val="1565C0"/>
@@ -5499,6 +6525,7 @@
           <a:lstStyle xmlns:a="http://schemas.openxmlformats.org/drawingml/2006/main"/>
           <a:p xmlns:a="http://schemas.openxmlformats.org/drawingml/2006/main">
             <a:pPr>
+              <a:buNone/>
               <a:defRPr sz="825">
                 <a:solidFill>
                   <a:srgbClr val="0B1F3A">
@@ -5553,6 +6580,7 @@
           <a:lstStyle xmlns:a="http://schemas.openxmlformats.org/drawingml/2006/main"/>
           <a:p xmlns:a="http://schemas.openxmlformats.org/drawingml/2006/main">
             <a:pPr algn="r">
+              <a:buNone/>
               <a:defRPr sz="825" b="1">
                 <a:solidFill>
                   <a:srgbClr val="0B1F3A">
@@ -5644,6 +6672,7 @@
           <a:lstStyle xmlns:a="http://schemas.openxmlformats.org/drawingml/2006/main"/>
           <a:p xmlns:a="http://schemas.openxmlformats.org/drawingml/2006/main">
             <a:pPr>
+              <a:buNone/>
               <a:defRPr sz="2925" b="1">
                 <a:solidFill>
                   <a:srgbClr val="FFFFFF"/>
@@ -5729,6 +6758,7 @@
           <a:lstStyle xmlns:a="http://schemas.openxmlformats.org/drawingml/2006/main"/>
           <a:p xmlns:a="http://schemas.openxmlformats.org/drawingml/2006/main">
             <a:pPr>
+              <a:buNone/>
               <a:defRPr sz="1875" b="1">
                 <a:solidFill>
                   <a:srgbClr val="1EC5FF"/>
@@ -5779,6 +6809,7 @@
           <a:lstStyle xmlns:a="http://schemas.openxmlformats.org/drawingml/2006/main"/>
           <a:p xmlns:a="http://schemas.openxmlformats.org/drawingml/2006/main">
             <a:pPr>
+              <a:buNone/>
               <a:defRPr sz="1425">
                 <a:solidFill>
                   <a:srgbClr val="E2F2FF"/>
@@ -5829,6 +6860,7 @@
           <a:lstStyle xmlns:a="http://schemas.openxmlformats.org/drawingml/2006/main"/>
           <a:p xmlns:a="http://schemas.openxmlformats.org/drawingml/2006/main">
             <a:pPr>
+              <a:buNone/>
               <a:defRPr sz="1050" b="1">
                 <a:solidFill>
                   <a:srgbClr val="1EC5FF"/>
@@ -5912,6 +6944,7 @@
           <a:lstStyle xmlns:a="http://schemas.openxmlformats.org/drawingml/2006/main"/>
           <a:p xmlns:a="http://schemas.openxmlformats.org/drawingml/2006/main">
             <a:pPr>
+              <a:buNone/>
               <a:defRPr sz="825">
                 <a:solidFill>
                   <a:srgbClr val="FFFFFF">
@@ -5966,6 +6999,7 @@
           <a:lstStyle xmlns:a="http://schemas.openxmlformats.org/drawingml/2006/main"/>
           <a:p xmlns:a="http://schemas.openxmlformats.org/drawingml/2006/main">
             <a:pPr algn="r">
+              <a:buNone/>
               <a:defRPr sz="825" b="1">
                 <a:solidFill>
                   <a:srgbClr val="FFFFFF">
@@ -6049,6 +7083,7 @@
           <a:lstStyle xmlns:a="http://schemas.openxmlformats.org/drawingml/2006/main"/>
           <a:p xmlns:a="http://schemas.openxmlformats.org/drawingml/2006/main">
             <a:pPr>
+              <a:buNone/>
               <a:defRPr sz="2925" b="1">
                 <a:solidFill>
                   <a:srgbClr val="0B1F3A"/>
@@ -6099,6 +7134,7 @@
           <a:lstStyle xmlns:a="http://schemas.openxmlformats.org/drawingml/2006/main"/>
           <a:p xmlns:a="http://schemas.openxmlformats.org/drawingml/2006/main">
             <a:pPr>
+              <a:buNone/>
               <a:defRPr sz="3450" b="1">
                 <a:solidFill>
                   <a:srgbClr val="1565C0"/>
@@ -6149,6 +7185,7 @@
           <a:lstStyle xmlns:a="http://schemas.openxmlformats.org/drawingml/2006/main"/>
           <a:p xmlns:a="http://schemas.openxmlformats.org/drawingml/2006/main">
             <a:pPr>
+              <a:buNone/>
               <a:defRPr sz="1575" b="1">
                 <a:solidFill>
                   <a:srgbClr val="0B1F3A"/>
@@ -6230,6 +7267,7 @@
           <a:lstStyle xmlns:a="http://schemas.openxmlformats.org/drawingml/2006/main"/>
           <a:p xmlns:a="http://schemas.openxmlformats.org/drawingml/2006/main">
             <a:pPr>
+              <a:buNone/>
               <a:defRPr sz="3450" b="1">
                 <a:solidFill>
                   <a:srgbClr val="1565C0"/>
@@ -6280,6 +7318,7 @@
           <a:lstStyle xmlns:a="http://schemas.openxmlformats.org/drawingml/2006/main"/>
           <a:p xmlns:a="http://schemas.openxmlformats.org/drawingml/2006/main">
             <a:pPr>
+              <a:buNone/>
               <a:defRPr sz="1575" b="1">
                 <a:solidFill>
                   <a:srgbClr val="0B1F3A"/>
@@ -6361,6 +7400,7 @@
           <a:lstStyle xmlns:a="http://schemas.openxmlformats.org/drawingml/2006/main"/>
           <a:p xmlns:a="http://schemas.openxmlformats.org/drawingml/2006/main">
             <a:pPr>
+              <a:buNone/>
               <a:defRPr sz="3450" b="1">
                 <a:solidFill>
                   <a:srgbClr val="1565C0"/>
@@ -6411,6 +7451,7 @@
           <a:lstStyle xmlns:a="http://schemas.openxmlformats.org/drawingml/2006/main"/>
           <a:p xmlns:a="http://schemas.openxmlformats.org/drawingml/2006/main">
             <a:pPr>
+              <a:buNone/>
               <a:defRPr sz="1575" b="1">
                 <a:solidFill>
                   <a:srgbClr val="0B1F3A"/>
@@ -6461,6 +7502,7 @@
           <a:lstStyle xmlns:a="http://schemas.openxmlformats.org/drawingml/2006/main"/>
           <a:p xmlns:a="http://schemas.openxmlformats.org/drawingml/2006/main">
             <a:pPr>
+              <a:buNone/>
               <a:defRPr sz="1050" b="1">
                 <a:solidFill>
                   <a:srgbClr val="1565C0"/>
@@ -6544,6 +7586,7 @@
           <a:lstStyle xmlns:a="http://schemas.openxmlformats.org/drawingml/2006/main"/>
           <a:p xmlns:a="http://schemas.openxmlformats.org/drawingml/2006/main">
             <a:pPr>
+              <a:buNone/>
               <a:defRPr sz="825">
                 <a:solidFill>
                   <a:srgbClr val="0B1F3A">
@@ -6598,6 +7641,7 @@
           <a:lstStyle xmlns:a="http://schemas.openxmlformats.org/drawingml/2006/main"/>
           <a:p xmlns:a="http://schemas.openxmlformats.org/drawingml/2006/main">
             <a:pPr algn="r">
+              <a:buNone/>
               <a:defRPr sz="825" b="1">
                 <a:solidFill>
                   <a:srgbClr val="0B1F3A">
@@ -6689,6 +7733,7 @@
           <a:lstStyle xmlns:a="http://schemas.openxmlformats.org/drawingml/2006/main"/>
           <a:p xmlns:a="http://schemas.openxmlformats.org/drawingml/2006/main">
             <a:pPr>
+              <a:buNone/>
               <a:defRPr sz="1350" b="1">
                 <a:solidFill>
                   <a:srgbClr val="1EC5FF"/>
@@ -6739,6 +7784,7 @@
           <a:lstStyle xmlns:a="http://schemas.openxmlformats.org/drawingml/2006/main"/>
           <a:p xmlns:a="http://schemas.openxmlformats.org/drawingml/2006/main">
             <a:pPr>
+              <a:buNone/>
               <a:defRPr sz="3450" b="1">
                 <a:solidFill>
                   <a:srgbClr val="FFFFFF"/>
@@ -6789,6 +7835,7 @@
           <a:lstStyle xmlns:a="http://schemas.openxmlformats.org/drawingml/2006/main"/>
           <a:p xmlns:a="http://schemas.openxmlformats.org/drawingml/2006/main">
             <a:pPr>
+              <a:buNone/>
               <a:defRPr sz="1650">
                 <a:solidFill>
                   <a:srgbClr val="E2F2FF"/>
@@ -6913,6 +7960,7 @@
           <a:lstStyle xmlns:a="http://schemas.openxmlformats.org/drawingml/2006/main"/>
           <a:p xmlns:a="http://schemas.openxmlformats.org/drawingml/2006/main">
             <a:pPr>
+              <a:buNone/>
               <a:defRPr sz="1050" b="1">
                 <a:solidFill>
                   <a:srgbClr val="1EC5FF"/>
@@ -6996,6 +8044,7 @@
           <a:lstStyle xmlns:a="http://schemas.openxmlformats.org/drawingml/2006/main"/>
           <a:p xmlns:a="http://schemas.openxmlformats.org/drawingml/2006/main">
             <a:pPr>
+              <a:buNone/>
               <a:defRPr sz="825">
                 <a:solidFill>
                   <a:srgbClr val="FFFFFF">
@@ -7050,6 +8099,7 @@
           <a:lstStyle xmlns:a="http://schemas.openxmlformats.org/drawingml/2006/main"/>
           <a:p xmlns:a="http://schemas.openxmlformats.org/drawingml/2006/main">
             <a:pPr algn="r">
+              <a:buNone/>
               <a:defRPr sz="825" b="1">
                 <a:solidFill>
                   <a:srgbClr val="FFFFFF">
@@ -7133,6 +8183,7 @@
           <a:lstStyle xmlns:a="http://schemas.openxmlformats.org/drawingml/2006/main"/>
           <a:p xmlns:a="http://schemas.openxmlformats.org/drawingml/2006/main">
             <a:pPr>
+              <a:buNone/>
               <a:defRPr sz="2925" b="1">
                 <a:solidFill>
                   <a:srgbClr val="0B1F3A"/>
@@ -7183,6 +8234,7 @@
           <a:lstStyle xmlns:a="http://schemas.openxmlformats.org/drawingml/2006/main"/>
           <a:p xmlns:a="http://schemas.openxmlformats.org/drawingml/2006/main">
             <a:pPr>
+              <a:buNone/>
               <a:defRPr sz="3450" b="1">
                 <a:solidFill>
                   <a:srgbClr val="1565C0"/>
@@ -7233,6 +8285,7 @@
           <a:lstStyle xmlns:a="http://schemas.openxmlformats.org/drawingml/2006/main"/>
           <a:p xmlns:a="http://schemas.openxmlformats.org/drawingml/2006/main">
             <a:pPr>
+              <a:buNone/>
               <a:defRPr sz="1575" b="1">
                 <a:solidFill>
                   <a:srgbClr val="0B1F3A"/>
@@ -7314,6 +8367,7 @@
           <a:lstStyle xmlns:a="http://schemas.openxmlformats.org/drawingml/2006/main"/>
           <a:p xmlns:a="http://schemas.openxmlformats.org/drawingml/2006/main">
             <a:pPr>
+              <a:buNone/>
               <a:defRPr sz="3450" b="1">
                 <a:solidFill>
                   <a:srgbClr val="1565C0"/>
@@ -7364,6 +8418,7 @@
           <a:lstStyle xmlns:a="http://schemas.openxmlformats.org/drawingml/2006/main"/>
           <a:p xmlns:a="http://schemas.openxmlformats.org/drawingml/2006/main">
             <a:pPr>
+              <a:buNone/>
               <a:defRPr sz="1575" b="1">
                 <a:solidFill>
                   <a:srgbClr val="0B1F3A"/>
@@ -7445,6 +8500,7 @@
           <a:lstStyle xmlns:a="http://schemas.openxmlformats.org/drawingml/2006/main"/>
           <a:p xmlns:a="http://schemas.openxmlformats.org/drawingml/2006/main">
             <a:pPr>
+              <a:buNone/>
               <a:defRPr sz="3450" b="1">
                 <a:solidFill>
                   <a:srgbClr val="1565C0"/>
@@ -7495,6 +8551,7 @@
           <a:lstStyle xmlns:a="http://schemas.openxmlformats.org/drawingml/2006/main"/>
           <a:p xmlns:a="http://schemas.openxmlformats.org/drawingml/2006/main">
             <a:pPr>
+              <a:buNone/>
               <a:defRPr sz="1575" b="1">
                 <a:solidFill>
                   <a:srgbClr val="0B1F3A"/>
@@ -7545,6 +8602,7 @@
           <a:lstStyle xmlns:a="http://schemas.openxmlformats.org/drawingml/2006/main"/>
           <a:p xmlns:a="http://schemas.openxmlformats.org/drawingml/2006/main">
             <a:pPr>
+              <a:buNone/>
               <a:defRPr sz="1050" b="1">
                 <a:solidFill>
                   <a:srgbClr val="1565C0"/>
@@ -7628,6 +8686,7 @@
           <a:lstStyle xmlns:a="http://schemas.openxmlformats.org/drawingml/2006/main"/>
           <a:p xmlns:a="http://schemas.openxmlformats.org/drawingml/2006/main">
             <a:pPr>
+              <a:buNone/>
               <a:defRPr sz="825">
                 <a:solidFill>
                   <a:srgbClr val="0B1F3A">
@@ -7682,6 +8741,7 @@
           <a:lstStyle xmlns:a="http://schemas.openxmlformats.org/drawingml/2006/main"/>
           <a:p xmlns:a="http://schemas.openxmlformats.org/drawingml/2006/main">
             <a:pPr algn="r">
+              <a:buNone/>
               <a:defRPr sz="825" b="1">
                 <a:solidFill>
                   <a:srgbClr val="0B1F3A">
@@ -7773,6 +8833,7 @@
           <a:lstStyle xmlns:a="http://schemas.openxmlformats.org/drawingml/2006/main"/>
           <a:p xmlns:a="http://schemas.openxmlformats.org/drawingml/2006/main">
             <a:pPr>
+              <a:buNone/>
               <a:defRPr sz="5550" b="1">
                 <a:solidFill>
                   <a:srgbClr val="1EC5FF"/>
@@ -7823,6 +8884,7 @@
           <a:lstStyle xmlns:a="http://schemas.openxmlformats.org/drawingml/2006/main"/>
           <a:p xmlns:a="http://schemas.openxmlformats.org/drawingml/2006/main">
             <a:pPr>
+              <a:buNone/>
               <a:defRPr sz="2250" b="1">
                 <a:solidFill>
                   <a:srgbClr val="FFFFFF"/>
@@ -7906,6 +8968,7 @@
           <a:lstStyle xmlns:a="http://schemas.openxmlformats.org/drawingml/2006/main"/>
           <a:p xmlns:a="http://schemas.openxmlformats.org/drawingml/2006/main">
             <a:pPr>
+              <a:buNone/>
               <a:defRPr sz="1800">
                 <a:solidFill>
                   <a:srgbClr val="E2F2FF"/>
@@ -7956,6 +9019,7 @@
           <a:lstStyle xmlns:a="http://schemas.openxmlformats.org/drawingml/2006/main"/>
           <a:p xmlns:a="http://schemas.openxmlformats.org/drawingml/2006/main">
             <a:pPr>
+              <a:buNone/>
               <a:defRPr sz="1050" b="1">
                 <a:solidFill>
                   <a:srgbClr val="1EC5FF"/>
@@ -8039,6 +9103,7 @@
           <a:lstStyle xmlns:a="http://schemas.openxmlformats.org/drawingml/2006/main"/>
           <a:p xmlns:a="http://schemas.openxmlformats.org/drawingml/2006/main">
             <a:pPr>
+              <a:buNone/>
               <a:defRPr sz="825">
                 <a:solidFill>
                   <a:srgbClr val="FFFFFF">
@@ -8093,6 +9158,7 @@
           <a:lstStyle xmlns:a="http://schemas.openxmlformats.org/drawingml/2006/main"/>
           <a:p xmlns:a="http://schemas.openxmlformats.org/drawingml/2006/main">
             <a:pPr algn="r">
+              <a:buNone/>
               <a:defRPr sz="825" b="1">
                 <a:solidFill>
                   <a:srgbClr val="FFFFFF">
@@ -8176,6 +9242,7 @@
           <a:lstStyle xmlns:a="http://schemas.openxmlformats.org/drawingml/2006/main"/>
           <a:p xmlns:a="http://schemas.openxmlformats.org/drawingml/2006/main">
             <a:pPr>
+              <a:buNone/>
               <a:defRPr sz="2925" b="1">
                 <a:solidFill>
                   <a:srgbClr val="0B1F3A"/>
@@ -8226,6 +9293,7 @@
           <a:lstStyle xmlns:a="http://schemas.openxmlformats.org/drawingml/2006/main"/>
           <a:p xmlns:a="http://schemas.openxmlformats.org/drawingml/2006/main">
             <a:pPr>
+              <a:buNone/>
               <a:defRPr sz="1950">
                 <a:solidFill>
                   <a:srgbClr val="0B1F3A"/>
@@ -8243,6 +9311,7 @@
           </a:p>
           <a:p xmlns:a="http://schemas.openxmlformats.org/drawingml/2006/main">
             <a:pPr>
+              <a:buNone/>
               <a:defRPr sz="1950">
                 <a:solidFill>
                   <a:srgbClr val="0B1F3A"/>
@@ -8260,6 +9329,7 @@
           </a:p>
           <a:p xmlns:a="http://schemas.openxmlformats.org/drawingml/2006/main">
             <a:pPr>
+              <a:buNone/>
               <a:defRPr sz="1950">
                 <a:solidFill>
                   <a:srgbClr val="0B1F3A"/>
@@ -8310,6 +9380,7 @@
           <a:lstStyle xmlns:a="http://schemas.openxmlformats.org/drawingml/2006/main"/>
           <a:p xmlns:a="http://schemas.openxmlformats.org/drawingml/2006/main">
             <a:pPr>
+              <a:buNone/>
               <a:defRPr sz="1050" b="1">
                 <a:solidFill>
                   <a:srgbClr val="1565C0"/>
@@ -8393,6 +9464,7 @@
           <a:lstStyle xmlns:a="http://schemas.openxmlformats.org/drawingml/2006/main"/>
           <a:p xmlns:a="http://schemas.openxmlformats.org/drawingml/2006/main">
             <a:pPr>
+              <a:buNone/>
               <a:defRPr sz="825">
                 <a:solidFill>
                   <a:srgbClr val="0B1F3A">
@@ -8447,6 +9519,7 @@
           <a:lstStyle xmlns:a="http://schemas.openxmlformats.org/drawingml/2006/main"/>
           <a:p xmlns:a="http://schemas.openxmlformats.org/drawingml/2006/main">
             <a:pPr algn="r">
+              <a:buNone/>
               <a:defRPr sz="825" b="1">
                 <a:solidFill>
                   <a:srgbClr val="0B1F3A">
@@ -8538,6 +9611,7 @@
           <a:lstStyle xmlns:a="http://schemas.openxmlformats.org/drawingml/2006/main"/>
           <a:p xmlns:a="http://schemas.openxmlformats.org/drawingml/2006/main">
             <a:pPr>
+              <a:buNone/>
               <a:defRPr sz="1500" b="1">
                 <a:solidFill>
                   <a:srgbClr val="1EC5FF"/>
@@ -8588,6 +9662,7 @@
           <a:lstStyle xmlns:a="http://schemas.openxmlformats.org/drawingml/2006/main"/>
           <a:p xmlns:a="http://schemas.openxmlformats.org/drawingml/2006/main">
             <a:pPr>
+              <a:buNone/>
               <a:defRPr sz="2850" b="1">
                 <a:solidFill>
                   <a:srgbClr val="FFFFFF"/>
@@ -8638,6 +9713,7 @@
           <a:lstStyle xmlns:a="http://schemas.openxmlformats.org/drawingml/2006/main"/>
           <a:p xmlns:a="http://schemas.openxmlformats.org/drawingml/2006/main">
             <a:pPr>
+              <a:buNone/>
               <a:defRPr sz="1500">
                 <a:solidFill>
                   <a:srgbClr val="E2F2FF"/>
@@ -8762,6 +9838,7 @@
           <a:lstStyle xmlns:a="http://schemas.openxmlformats.org/drawingml/2006/main"/>
           <a:p xmlns:a="http://schemas.openxmlformats.org/drawingml/2006/main">
             <a:pPr>
+              <a:buNone/>
               <a:defRPr sz="1050" b="1">
                 <a:solidFill>
                   <a:srgbClr val="1EC5FF"/>
@@ -8845,6 +9922,7 @@
           <a:lstStyle xmlns:a="http://schemas.openxmlformats.org/drawingml/2006/main"/>
           <a:p xmlns:a="http://schemas.openxmlformats.org/drawingml/2006/main">
             <a:pPr>
+              <a:buNone/>
               <a:defRPr sz="825">
                 <a:solidFill>
                   <a:srgbClr val="FFFFFF">
@@ -8899,6 +9977,7 @@
           <a:lstStyle xmlns:a="http://schemas.openxmlformats.org/drawingml/2006/main"/>
           <a:p xmlns:a="http://schemas.openxmlformats.org/drawingml/2006/main">
             <a:pPr algn="r">
+              <a:buNone/>
               <a:defRPr sz="825" b="1">
                 <a:solidFill>
                   <a:srgbClr val="FFFFFF">
@@ -8982,6 +10061,7 @@
           <a:lstStyle xmlns:a="http://schemas.openxmlformats.org/drawingml/2006/main"/>
           <a:p xmlns:a="http://schemas.openxmlformats.org/drawingml/2006/main">
             <a:pPr>
+              <a:buNone/>
               <a:defRPr sz="2850" b="1">
                 <a:solidFill>
                   <a:srgbClr val="0B1F3A"/>
@@ -9063,6 +10143,7 @@
           <a:lstStyle xmlns:a="http://schemas.openxmlformats.org/drawingml/2006/main"/>
           <a:p xmlns:a="http://schemas.openxmlformats.org/drawingml/2006/main">
             <a:pPr>
+              <a:buNone/>
               <a:defRPr sz="1425" b="1">
                 <a:solidFill>
                   <a:srgbClr val="1565C0"/>
@@ -9117,14 +10198,14 @@
       </p:sp>
       <p:pic>
         <p:nvPicPr>
-          <p:cNvPr id="14" name="" descr="Diagrama didático autoral que apresenta: Interoperabilidade começa quando o consumidor não precisa copiar a fórmula. — A pergunta que guia a aula."/>
+          <p:cNvPr id="16" name="" descr="Diagrama didático autoral que apresenta: Interoperabilidade começa quando o consumidor não precisa copiar a fórmula. — A pergunta que guia a aula."/>
           <p:cNvPicPr>
             <a:picLocks xmlns:a="http://schemas.openxmlformats.org/drawingml/2006/main" noChangeAspect="1"/>
           </p:cNvPicPr>
           <p:nvPr/>
         </p:nvPicPr>
         <p:blipFill>
-          <a:blip xmlns:r="http://schemas.openxmlformats.org/officeDocument/2006/relationships" xmlns:a="http://schemas.openxmlformats.org/drawingml/2006/main" r:embed="R771c365560224236"/>
+          <a:blip xmlns:r="http://schemas.openxmlformats.org/officeDocument/2006/relationships" xmlns:a="http://schemas.openxmlformats.org/drawingml/2006/main" r:embed="R4b3f09543842440a"/>
           <a:stretch xmlns:a="http://schemas.openxmlformats.org/drawingml/2006/main"/>
         </p:blipFill>
         <p:spPr>
@@ -9170,6 +10251,7 @@
           <a:lstStyle xmlns:a="http://schemas.openxmlformats.org/drawingml/2006/main"/>
           <a:p xmlns:a="http://schemas.openxmlformats.org/drawingml/2006/main">
             <a:pPr>
+              <a:buNone/>
               <a:defRPr sz="1050" b="1">
                 <a:solidFill>
                   <a:srgbClr val="1565C0"/>
@@ -9253,6 +10335,7 @@
           <a:lstStyle xmlns:a="http://schemas.openxmlformats.org/drawingml/2006/main"/>
           <a:p xmlns:a="http://schemas.openxmlformats.org/drawingml/2006/main">
             <a:pPr>
+              <a:buNone/>
               <a:defRPr sz="825">
                 <a:solidFill>
                   <a:srgbClr val="0B1F3A">
@@ -9307,6 +10390,7 @@
           <a:lstStyle xmlns:a="http://schemas.openxmlformats.org/drawingml/2006/main"/>
           <a:p xmlns:a="http://schemas.openxmlformats.org/drawingml/2006/main">
             <a:pPr algn="r">
+              <a:buNone/>
               <a:defRPr sz="825" b="1">
                 <a:solidFill>
                   <a:srgbClr val="0B1F3A">
@@ -9390,6 +10474,7 @@
           <a:lstStyle xmlns:a="http://schemas.openxmlformats.org/drawingml/2006/main"/>
           <a:p xmlns:a="http://schemas.openxmlformats.org/drawingml/2006/main">
             <a:pPr>
+              <a:buNone/>
               <a:defRPr sz="1350" b="1">
                 <a:solidFill>
                   <a:srgbClr val="1565C0"/>
@@ -9440,6 +10525,7 @@
           <a:lstStyle xmlns:a="http://schemas.openxmlformats.org/drawingml/2006/main"/>
           <a:p xmlns:a="http://schemas.openxmlformats.org/drawingml/2006/main">
             <a:pPr>
+              <a:buNone/>
               <a:defRPr sz="3300" b="1">
                 <a:solidFill>
                   <a:srgbClr val="0B1F3A"/>
@@ -9490,6 +10576,7 @@
           <a:lstStyle xmlns:a="http://schemas.openxmlformats.org/drawingml/2006/main"/>
           <a:p xmlns:a="http://schemas.openxmlformats.org/drawingml/2006/main">
             <a:pPr>
+              <a:buNone/>
               <a:defRPr sz="1500">
                 <a:solidFill>
                   <a:srgbClr val="5C6F86"/>
@@ -9540,6 +10627,7 @@
           <a:lstStyle xmlns:a="http://schemas.openxmlformats.org/drawingml/2006/main"/>
           <a:p xmlns:a="http://schemas.openxmlformats.org/drawingml/2006/main">
             <a:pPr>
+              <a:buNone/>
               <a:defRPr sz="1050" b="1">
                 <a:solidFill>
                   <a:srgbClr val="1565C0"/>
@@ -9623,6 +10711,7 @@
           <a:lstStyle xmlns:a="http://schemas.openxmlformats.org/drawingml/2006/main"/>
           <a:p xmlns:a="http://schemas.openxmlformats.org/drawingml/2006/main">
             <a:pPr>
+              <a:buNone/>
               <a:defRPr sz="825">
                 <a:solidFill>
                   <a:srgbClr val="0B1F3A">
@@ -9677,6 +10766,7 @@
           <a:lstStyle xmlns:a="http://schemas.openxmlformats.org/drawingml/2006/main"/>
           <a:p xmlns:a="http://schemas.openxmlformats.org/drawingml/2006/main">
             <a:pPr algn="r">
+              <a:buNone/>
               <a:defRPr sz="825" b="1">
                 <a:solidFill>
                   <a:srgbClr val="0B1F3A">
@@ -9768,6 +10858,7 @@
           <a:lstStyle xmlns:a="http://schemas.openxmlformats.org/drawingml/2006/main"/>
           <a:p xmlns:a="http://schemas.openxmlformats.org/drawingml/2006/main">
             <a:pPr>
+              <a:buNone/>
               <a:defRPr sz="2925" b="1">
                 <a:solidFill>
                   <a:srgbClr val="FFFFFF"/>
@@ -9818,6 +10909,7 @@
           <a:lstStyle xmlns:a="http://schemas.openxmlformats.org/drawingml/2006/main"/>
           <a:p xmlns:a="http://schemas.openxmlformats.org/drawingml/2006/main">
             <a:pPr>
+              <a:buNone/>
               <a:defRPr sz="3450" b="1">
                 <a:solidFill>
                   <a:srgbClr val="1EC5FF"/>
@@ -9868,6 +10960,7 @@
           <a:lstStyle xmlns:a="http://schemas.openxmlformats.org/drawingml/2006/main"/>
           <a:p xmlns:a="http://schemas.openxmlformats.org/drawingml/2006/main">
             <a:pPr>
+              <a:buNone/>
               <a:defRPr sz="1575" b="1">
                 <a:solidFill>
                   <a:srgbClr val="FFFFFF"/>
@@ -9949,6 +11042,7 @@
           <a:lstStyle xmlns:a="http://schemas.openxmlformats.org/drawingml/2006/main"/>
           <a:p xmlns:a="http://schemas.openxmlformats.org/drawingml/2006/main">
             <a:pPr>
+              <a:buNone/>
               <a:defRPr sz="3450" b="1">
                 <a:solidFill>
                   <a:srgbClr val="1EC5FF"/>
@@ -9999,6 +11093,7 @@
           <a:lstStyle xmlns:a="http://schemas.openxmlformats.org/drawingml/2006/main"/>
           <a:p xmlns:a="http://schemas.openxmlformats.org/drawingml/2006/main">
             <a:pPr>
+              <a:buNone/>
               <a:defRPr sz="1575" b="1">
                 <a:solidFill>
                   <a:srgbClr val="FFFFFF"/>
@@ -10080,6 +11175,7 @@
           <a:lstStyle xmlns:a="http://schemas.openxmlformats.org/drawingml/2006/main"/>
           <a:p xmlns:a="http://schemas.openxmlformats.org/drawingml/2006/main">
             <a:pPr>
+              <a:buNone/>
               <a:defRPr sz="3450" b="1">
                 <a:solidFill>
                   <a:srgbClr val="1EC5FF"/>
@@ -10130,6 +11226,7 @@
           <a:lstStyle xmlns:a="http://schemas.openxmlformats.org/drawingml/2006/main"/>
           <a:p xmlns:a="http://schemas.openxmlformats.org/drawingml/2006/main">
             <a:pPr>
+              <a:buNone/>
               <a:defRPr sz="1575" b="1">
                 <a:solidFill>
                   <a:srgbClr val="FFFFFF"/>
@@ -10180,6 +11277,7 @@
           <a:lstStyle xmlns:a="http://schemas.openxmlformats.org/drawingml/2006/main"/>
           <a:p xmlns:a="http://schemas.openxmlformats.org/drawingml/2006/main">
             <a:pPr>
+              <a:buNone/>
               <a:defRPr sz="1050" b="1">
                 <a:solidFill>
                   <a:srgbClr val="1EC5FF"/>
@@ -10263,6 +11361,7 @@
           <a:lstStyle xmlns:a="http://schemas.openxmlformats.org/drawingml/2006/main"/>
           <a:p xmlns:a="http://schemas.openxmlformats.org/drawingml/2006/main">
             <a:pPr>
+              <a:buNone/>
               <a:defRPr sz="825">
                 <a:solidFill>
                   <a:srgbClr val="FFFFFF">
@@ -10317,6 +11416,7 @@
           <a:lstStyle xmlns:a="http://schemas.openxmlformats.org/drawingml/2006/main"/>
           <a:p xmlns:a="http://schemas.openxmlformats.org/drawingml/2006/main">
             <a:pPr algn="r">
+              <a:buNone/>
               <a:defRPr sz="825" b="1">
                 <a:solidFill>
                   <a:srgbClr val="FFFFFF">
@@ -10408,6 +11508,7 @@
           <a:lstStyle xmlns:a="http://schemas.openxmlformats.org/drawingml/2006/main"/>
           <a:p xmlns:a="http://schemas.openxmlformats.org/drawingml/2006/main">
             <a:pPr>
+              <a:buNone/>
               <a:defRPr sz="2925" b="1">
                 <a:solidFill>
                   <a:srgbClr val="FFFFFF"/>
@@ -10458,6 +11559,7 @@
           <a:lstStyle xmlns:a="http://schemas.openxmlformats.org/drawingml/2006/main"/>
           <a:p xmlns:a="http://schemas.openxmlformats.org/drawingml/2006/main">
             <a:pPr>
+              <a:buNone/>
               <a:defRPr sz="1650">
                 <a:solidFill>
                   <a:srgbClr val="E2F2FF"/>
@@ -10508,6 +11610,7 @@
           <a:lstStyle xmlns:a="http://schemas.openxmlformats.org/drawingml/2006/main"/>
           <a:p xmlns:a="http://schemas.openxmlformats.org/drawingml/2006/main">
             <a:pPr>
+              <a:buNone/>
               <a:defRPr sz="1800">
                 <a:solidFill>
                   <a:srgbClr val="FFFFFF"/>
@@ -10525,6 +11628,7 @@
           </a:p>
           <a:p xmlns:a="http://schemas.openxmlformats.org/drawingml/2006/main">
             <a:pPr>
+              <a:buNone/>
               <a:defRPr sz="1800">
                 <a:solidFill>
                   <a:srgbClr val="FFFFFF"/>
@@ -10542,6 +11646,7 @@
           </a:p>
           <a:p xmlns:a="http://schemas.openxmlformats.org/drawingml/2006/main">
             <a:pPr>
+              <a:buNone/>
               <a:defRPr sz="1800">
                 <a:solidFill>
                   <a:srgbClr val="FFFFFF"/>
@@ -10666,6 +11771,7 @@
           <a:lstStyle xmlns:a="http://schemas.openxmlformats.org/drawingml/2006/main"/>
           <a:p xmlns:a="http://schemas.openxmlformats.org/drawingml/2006/main">
             <a:pPr algn="ctr">
+              <a:buNone/>
               <a:defRPr sz="4650" b="1">
                 <a:solidFill>
                   <a:srgbClr val="1EC5FF"/>
@@ -10716,6 +11822,7 @@
           <a:lstStyle xmlns:a="http://schemas.openxmlformats.org/drawingml/2006/main"/>
           <a:p xmlns:a="http://schemas.openxmlformats.org/drawingml/2006/main">
             <a:pPr>
+              <a:buNone/>
               <a:defRPr sz="1050" b="1">
                 <a:solidFill>
                   <a:srgbClr val="1EC5FF"/>
@@ -10799,6 +11906,7 @@
           <a:lstStyle xmlns:a="http://schemas.openxmlformats.org/drawingml/2006/main"/>
           <a:p xmlns:a="http://schemas.openxmlformats.org/drawingml/2006/main">
             <a:pPr>
+              <a:buNone/>
               <a:defRPr sz="825">
                 <a:solidFill>
                   <a:srgbClr val="FFFFFF">
@@ -10853,6 +11961,7 @@
           <a:lstStyle xmlns:a="http://schemas.openxmlformats.org/drawingml/2006/main"/>
           <a:p xmlns:a="http://schemas.openxmlformats.org/drawingml/2006/main">
             <a:pPr algn="r">
+              <a:buNone/>
               <a:defRPr sz="825" b="1">
                 <a:solidFill>
                   <a:srgbClr val="FFFFFF">
@@ -10936,6 +12045,7 @@
           <a:lstStyle xmlns:a="http://schemas.openxmlformats.org/drawingml/2006/main"/>
           <a:p xmlns:a="http://schemas.openxmlformats.org/drawingml/2006/main">
             <a:pPr>
+              <a:buNone/>
               <a:defRPr sz="2925" b="1">
                 <a:solidFill>
                   <a:srgbClr val="0B1F3A"/>
@@ -10986,6 +12096,7 @@
           <a:lstStyle xmlns:a="http://schemas.openxmlformats.org/drawingml/2006/main"/>
           <a:p xmlns:a="http://schemas.openxmlformats.org/drawingml/2006/main">
             <a:pPr>
+              <a:buNone/>
               <a:defRPr sz="1650">
                 <a:solidFill>
                   <a:srgbClr val="5C6F86"/>
@@ -11036,6 +12147,7 @@
           <a:lstStyle xmlns:a="http://schemas.openxmlformats.org/drawingml/2006/main"/>
           <a:p xmlns:a="http://schemas.openxmlformats.org/drawingml/2006/main">
             <a:pPr>
+              <a:buNone/>
               <a:defRPr sz="1800">
                 <a:solidFill>
                   <a:srgbClr val="0B1F3A"/>
@@ -11053,6 +12165,7 @@
           </a:p>
           <a:p xmlns:a="http://schemas.openxmlformats.org/drawingml/2006/main">
             <a:pPr>
+              <a:buNone/>
               <a:defRPr sz="1800">
                 <a:solidFill>
                   <a:srgbClr val="0B1F3A"/>
@@ -11070,6 +12183,7 @@
           </a:p>
           <a:p xmlns:a="http://schemas.openxmlformats.org/drawingml/2006/main">
             <a:pPr>
+              <a:buNone/>
               <a:defRPr sz="1800">
                 <a:solidFill>
                   <a:srgbClr val="0B1F3A"/>
@@ -11194,6 +12308,7 @@
           <a:lstStyle xmlns:a="http://schemas.openxmlformats.org/drawingml/2006/main"/>
           <a:p xmlns:a="http://schemas.openxmlformats.org/drawingml/2006/main">
             <a:pPr algn="ctr">
+              <a:buNone/>
               <a:defRPr sz="4650" b="1">
                 <a:solidFill>
                   <a:srgbClr val="1565C0"/>
@@ -11244,6 +12359,7 @@
           <a:lstStyle xmlns:a="http://schemas.openxmlformats.org/drawingml/2006/main"/>
           <a:p xmlns:a="http://schemas.openxmlformats.org/drawingml/2006/main">
             <a:pPr>
+              <a:buNone/>
               <a:defRPr sz="1050" b="1">
                 <a:solidFill>
                   <a:srgbClr val="1565C0"/>
@@ -11327,6 +12443,7 @@
           <a:lstStyle xmlns:a="http://schemas.openxmlformats.org/drawingml/2006/main"/>
           <a:p xmlns:a="http://schemas.openxmlformats.org/drawingml/2006/main">
             <a:pPr>
+              <a:buNone/>
               <a:defRPr sz="825">
                 <a:solidFill>
                   <a:srgbClr val="0B1F3A">
@@ -11381,6 +12498,7 @@
           <a:lstStyle xmlns:a="http://schemas.openxmlformats.org/drawingml/2006/main"/>
           <a:p xmlns:a="http://schemas.openxmlformats.org/drawingml/2006/main">
             <a:pPr algn="r">
+              <a:buNone/>
               <a:defRPr sz="825" b="1">
                 <a:solidFill>
                   <a:srgbClr val="0B1F3A">
@@ -11472,6 +12590,7 @@
           <a:lstStyle xmlns:a="http://schemas.openxmlformats.org/drawingml/2006/main"/>
           <a:p xmlns:a="http://schemas.openxmlformats.org/drawingml/2006/main">
             <a:pPr>
+              <a:buNone/>
               <a:defRPr sz="2925" b="1">
                 <a:solidFill>
                   <a:srgbClr val="FFFFFF"/>
@@ -11522,6 +12641,7 @@
           <a:lstStyle xmlns:a="http://schemas.openxmlformats.org/drawingml/2006/main"/>
           <a:p xmlns:a="http://schemas.openxmlformats.org/drawingml/2006/main">
             <a:pPr>
+              <a:buNone/>
               <a:defRPr sz="3450" b="1">
                 <a:solidFill>
                   <a:srgbClr val="1EC5FF"/>
@@ -11572,6 +12692,7 @@
           <a:lstStyle xmlns:a="http://schemas.openxmlformats.org/drawingml/2006/main"/>
           <a:p xmlns:a="http://schemas.openxmlformats.org/drawingml/2006/main">
             <a:pPr>
+              <a:buNone/>
               <a:defRPr sz="1575" b="1">
                 <a:solidFill>
                   <a:srgbClr val="FFFFFF"/>
@@ -11653,6 +12774,7 @@
           <a:lstStyle xmlns:a="http://schemas.openxmlformats.org/drawingml/2006/main"/>
           <a:p xmlns:a="http://schemas.openxmlformats.org/drawingml/2006/main">
             <a:pPr>
+              <a:buNone/>
               <a:defRPr sz="3450" b="1">
                 <a:solidFill>
                   <a:srgbClr val="1EC5FF"/>
@@ -11703,6 +12825,7 @@
           <a:lstStyle xmlns:a="http://schemas.openxmlformats.org/drawingml/2006/main"/>
           <a:p xmlns:a="http://schemas.openxmlformats.org/drawingml/2006/main">
             <a:pPr>
+              <a:buNone/>
               <a:defRPr sz="1575" b="1">
                 <a:solidFill>
                   <a:srgbClr val="FFFFFF"/>
@@ -11784,6 +12907,7 @@
           <a:lstStyle xmlns:a="http://schemas.openxmlformats.org/drawingml/2006/main"/>
           <a:p xmlns:a="http://schemas.openxmlformats.org/drawingml/2006/main">
             <a:pPr>
+              <a:buNone/>
               <a:defRPr sz="3450" b="1">
                 <a:solidFill>
                   <a:srgbClr val="1EC5FF"/>
@@ -11834,6 +12958,7 @@
           <a:lstStyle xmlns:a="http://schemas.openxmlformats.org/drawingml/2006/main"/>
           <a:p xmlns:a="http://schemas.openxmlformats.org/drawingml/2006/main">
             <a:pPr>
+              <a:buNone/>
               <a:defRPr sz="1575" b="1">
                 <a:solidFill>
                   <a:srgbClr val="FFFFFF"/>
@@ -11915,6 +13040,7 @@
           <a:lstStyle xmlns:a="http://schemas.openxmlformats.org/drawingml/2006/main"/>
           <a:p xmlns:a="http://schemas.openxmlformats.org/drawingml/2006/main">
             <a:pPr>
+              <a:buNone/>
               <a:defRPr sz="3450" b="1">
                 <a:solidFill>
                   <a:srgbClr val="1EC5FF"/>
@@ -11965,6 +13091,7 @@
           <a:lstStyle xmlns:a="http://schemas.openxmlformats.org/drawingml/2006/main"/>
           <a:p xmlns:a="http://schemas.openxmlformats.org/drawingml/2006/main">
             <a:pPr>
+              <a:buNone/>
               <a:defRPr sz="1575" b="1">
                 <a:solidFill>
                   <a:srgbClr val="FFFFFF"/>
@@ -12015,6 +13142,7 @@
           <a:lstStyle xmlns:a="http://schemas.openxmlformats.org/drawingml/2006/main"/>
           <a:p xmlns:a="http://schemas.openxmlformats.org/drawingml/2006/main">
             <a:pPr>
+              <a:buNone/>
               <a:defRPr sz="1050" b="1">
                 <a:solidFill>
                   <a:srgbClr val="1EC5FF"/>
@@ -12098,6 +13226,7 @@
           <a:lstStyle xmlns:a="http://schemas.openxmlformats.org/drawingml/2006/main"/>
           <a:p xmlns:a="http://schemas.openxmlformats.org/drawingml/2006/main">
             <a:pPr>
+              <a:buNone/>
               <a:defRPr sz="825">
                 <a:solidFill>
                   <a:srgbClr val="FFFFFF">
@@ -12152,6 +13281,7 @@
           <a:lstStyle xmlns:a="http://schemas.openxmlformats.org/drawingml/2006/main"/>
           <a:p xmlns:a="http://schemas.openxmlformats.org/drawingml/2006/main">
             <a:pPr algn="r">
+              <a:buNone/>
               <a:defRPr sz="825" b="1">
                 <a:solidFill>
                   <a:srgbClr val="FFFFFF">
@@ -12243,6 +13373,7 @@
           <a:lstStyle xmlns:a="http://schemas.openxmlformats.org/drawingml/2006/main"/>
           <a:p xmlns:a="http://schemas.openxmlformats.org/drawingml/2006/main">
             <a:pPr>
+              <a:buNone/>
               <a:defRPr sz="2925" b="1">
                 <a:solidFill>
                   <a:srgbClr val="FFFFFF"/>
@@ -12293,6 +13424,7 @@
           <a:lstStyle xmlns:a="http://schemas.openxmlformats.org/drawingml/2006/main"/>
           <a:p xmlns:a="http://schemas.openxmlformats.org/drawingml/2006/main">
             <a:pPr>
+              <a:buNone/>
               <a:defRPr sz="1650">
                 <a:solidFill>
                   <a:srgbClr val="E2F2FF"/>
@@ -12343,6 +13475,7 @@
           <a:lstStyle xmlns:a="http://schemas.openxmlformats.org/drawingml/2006/main"/>
           <a:p xmlns:a="http://schemas.openxmlformats.org/drawingml/2006/main">
             <a:pPr>
+              <a:buNone/>
               <a:defRPr sz="1800">
                 <a:solidFill>
                   <a:srgbClr val="FFFFFF"/>
@@ -12360,6 +13493,7 @@
           </a:p>
           <a:p xmlns:a="http://schemas.openxmlformats.org/drawingml/2006/main">
             <a:pPr>
+              <a:buNone/>
               <a:defRPr sz="1800">
                 <a:solidFill>
                   <a:srgbClr val="FFFFFF"/>
@@ -12377,6 +13511,7 @@
           </a:p>
           <a:p xmlns:a="http://schemas.openxmlformats.org/drawingml/2006/main">
             <a:pPr>
+              <a:buNone/>
               <a:defRPr sz="1800">
                 <a:solidFill>
                   <a:srgbClr val="FFFFFF"/>
@@ -12501,6 +13636,7 @@
           <a:lstStyle xmlns:a="http://schemas.openxmlformats.org/drawingml/2006/main"/>
           <a:p xmlns:a="http://schemas.openxmlformats.org/drawingml/2006/main">
             <a:pPr algn="ctr">
+              <a:buNone/>
               <a:defRPr sz="4650" b="1">
                 <a:solidFill>
                   <a:srgbClr val="1EC5FF"/>
@@ -12551,6 +13687,7 @@
           <a:lstStyle xmlns:a="http://schemas.openxmlformats.org/drawingml/2006/main"/>
           <a:p xmlns:a="http://schemas.openxmlformats.org/drawingml/2006/main">
             <a:pPr>
+              <a:buNone/>
               <a:defRPr sz="1050" b="1">
                 <a:solidFill>
                   <a:srgbClr val="1EC5FF"/>
@@ -12634,6 +13771,7 @@
           <a:lstStyle xmlns:a="http://schemas.openxmlformats.org/drawingml/2006/main"/>
           <a:p xmlns:a="http://schemas.openxmlformats.org/drawingml/2006/main">
             <a:pPr>
+              <a:buNone/>
               <a:defRPr sz="825">
                 <a:solidFill>
                   <a:srgbClr val="FFFFFF">
@@ -12688,6 +13826,7 @@
           <a:lstStyle xmlns:a="http://schemas.openxmlformats.org/drawingml/2006/main"/>
           <a:p xmlns:a="http://schemas.openxmlformats.org/drawingml/2006/main">
             <a:pPr algn="r">
+              <a:buNone/>
               <a:defRPr sz="825" b="1">
                 <a:solidFill>
                   <a:srgbClr val="FFFFFF">
@@ -12771,6 +13910,7 @@
           <a:lstStyle xmlns:a="http://schemas.openxmlformats.org/drawingml/2006/main"/>
           <a:p xmlns:a="http://schemas.openxmlformats.org/drawingml/2006/main">
             <a:pPr>
+              <a:buNone/>
               <a:defRPr sz="2925" b="1">
                 <a:solidFill>
                   <a:srgbClr val="0B1F3A"/>
@@ -12821,6 +13961,7 @@
           <a:lstStyle xmlns:a="http://schemas.openxmlformats.org/drawingml/2006/main"/>
           <a:p xmlns:a="http://schemas.openxmlformats.org/drawingml/2006/main">
             <a:pPr>
+              <a:buNone/>
               <a:defRPr sz="2100" b="1">
                 <a:solidFill>
                   <a:srgbClr val="1565C0"/>
@@ -12871,6 +14012,7 @@
           <a:lstStyle xmlns:a="http://schemas.openxmlformats.org/drawingml/2006/main"/>
           <a:p xmlns:a="http://schemas.openxmlformats.org/drawingml/2006/main">
             <a:pPr>
+              <a:buNone/>
               <a:defRPr sz="2100" b="1">
                 <a:solidFill>
                   <a:srgbClr val="1565C0"/>
@@ -12952,6 +14094,7 @@
           <a:lstStyle xmlns:a="http://schemas.openxmlformats.org/drawingml/2006/main"/>
           <a:p xmlns:a="http://schemas.openxmlformats.org/drawingml/2006/main">
             <a:pPr>
+              <a:buNone/>
               <a:defRPr sz="1650">
                 <a:solidFill>
                   <a:srgbClr val="0B1F3A"/>
@@ -12969,6 +14112,7 @@
           </a:p>
           <a:p xmlns:a="http://schemas.openxmlformats.org/drawingml/2006/main">
             <a:pPr>
+              <a:buNone/>
               <a:defRPr sz="1650">
                 <a:solidFill>
                   <a:srgbClr val="0B1F3A"/>
@@ -13019,6 +14163,7 @@
           <a:lstStyle xmlns:a="http://schemas.openxmlformats.org/drawingml/2006/main"/>
           <a:p xmlns:a="http://schemas.openxmlformats.org/drawingml/2006/main">
             <a:pPr>
+              <a:buNone/>
               <a:defRPr sz="1650">
                 <a:solidFill>
                   <a:srgbClr val="0B1F3A"/>
@@ -13069,6 +14214,7 @@
           <a:lstStyle xmlns:a="http://schemas.openxmlformats.org/drawingml/2006/main"/>
           <a:p xmlns:a="http://schemas.openxmlformats.org/drawingml/2006/main">
             <a:pPr>
+              <a:buNone/>
               <a:defRPr sz="1050" b="1">
                 <a:solidFill>
                   <a:srgbClr val="1565C0"/>
@@ -13152,6 +14298,7 @@
           <a:lstStyle xmlns:a="http://schemas.openxmlformats.org/drawingml/2006/main"/>
           <a:p xmlns:a="http://schemas.openxmlformats.org/drawingml/2006/main">
             <a:pPr>
+              <a:buNone/>
               <a:defRPr sz="825">
                 <a:solidFill>
                   <a:srgbClr val="0B1F3A">
@@ -13206,6 +14353,7 @@
           <a:lstStyle xmlns:a="http://schemas.openxmlformats.org/drawingml/2006/main"/>
           <a:p xmlns:a="http://schemas.openxmlformats.org/drawingml/2006/main">
             <a:pPr algn="r">
+              <a:buNone/>
               <a:defRPr sz="825" b="1">
                 <a:solidFill>
                   <a:srgbClr val="0B1F3A">
@@ -13289,6 +14437,7 @@
           <a:lstStyle xmlns:a="http://schemas.openxmlformats.org/drawingml/2006/main"/>
           <a:p xmlns:a="http://schemas.openxmlformats.org/drawingml/2006/main">
             <a:pPr>
+              <a:buNone/>
               <a:defRPr sz="2925" b="1">
                 <a:solidFill>
                   <a:srgbClr val="0B1F3A"/>
@@ -13339,6 +14488,7 @@
           <a:lstStyle xmlns:a="http://schemas.openxmlformats.org/drawingml/2006/main"/>
           <a:p xmlns:a="http://schemas.openxmlformats.org/drawingml/2006/main">
             <a:pPr>
+              <a:buNone/>
               <a:defRPr sz="1650">
                 <a:solidFill>
                   <a:srgbClr val="5C6F86"/>
@@ -13389,6 +14539,7 @@
           <a:lstStyle xmlns:a="http://schemas.openxmlformats.org/drawingml/2006/main"/>
           <a:p xmlns:a="http://schemas.openxmlformats.org/drawingml/2006/main">
             <a:pPr>
+              <a:buNone/>
               <a:defRPr sz="1800">
                 <a:solidFill>
                   <a:srgbClr val="0B1F3A"/>
@@ -13406,6 +14557,7 @@
           </a:p>
           <a:p xmlns:a="http://schemas.openxmlformats.org/drawingml/2006/main">
             <a:pPr>
+              <a:buNone/>
               <a:defRPr sz="1800">
                 <a:solidFill>
                   <a:srgbClr val="0B1F3A"/>
@@ -13423,6 +14575,7 @@
           </a:p>
           <a:p xmlns:a="http://schemas.openxmlformats.org/drawingml/2006/main">
             <a:pPr>
+              <a:buNone/>
               <a:defRPr sz="1800">
                 <a:solidFill>
                   <a:srgbClr val="0B1F3A"/>
@@ -13547,6 +14700,7 @@
           <a:lstStyle xmlns:a="http://schemas.openxmlformats.org/drawingml/2006/main"/>
           <a:p xmlns:a="http://schemas.openxmlformats.org/drawingml/2006/main">
             <a:pPr algn="ctr">
+              <a:buNone/>
               <a:defRPr sz="4650" b="1">
                 <a:solidFill>
                   <a:srgbClr val="1565C0"/>
@@ -13597,6 +14751,7 @@
           <a:lstStyle xmlns:a="http://schemas.openxmlformats.org/drawingml/2006/main"/>
           <a:p xmlns:a="http://schemas.openxmlformats.org/drawingml/2006/main">
             <a:pPr>
+              <a:buNone/>
               <a:defRPr sz="1050" b="1">
                 <a:solidFill>
                   <a:srgbClr val="1565C0"/>
@@ -13680,6 +14835,7 @@
           <a:lstStyle xmlns:a="http://schemas.openxmlformats.org/drawingml/2006/main"/>
           <a:p xmlns:a="http://schemas.openxmlformats.org/drawingml/2006/main">
             <a:pPr>
+              <a:buNone/>
               <a:defRPr sz="825">
                 <a:solidFill>
                   <a:srgbClr val="0B1F3A">
@@ -13734,6 +14890,7 @@
           <a:lstStyle xmlns:a="http://schemas.openxmlformats.org/drawingml/2006/main"/>
           <a:p xmlns:a="http://schemas.openxmlformats.org/drawingml/2006/main">
             <a:pPr algn="r">
+              <a:buNone/>
               <a:defRPr sz="825" b="1">
                 <a:solidFill>
                   <a:srgbClr val="0B1F3A">

--- a/assets/decks/episodio-04-semantica-aberta-interoperavel.pptx
+++ b/assets/decks/episodio-04-semantica-aberta-interoperavel.pptx
@@ -2,33 +2,33 @@
 <file path=ppt/presentation.xml><?xml version="1.0" encoding="utf-8"?>
 <p:presentation xmlns:p="http://schemas.openxmlformats.org/presentationml/2006/main">
   <p:sldMasterIdLst>
-    <p:sldMasterId xmlns:r="http://schemas.openxmlformats.org/officeDocument/2006/relationships" id="2147483648" r:id="R7dc1e42de2d142de"/>
-    <p:sldMasterId xmlns:r="http://schemas.openxmlformats.org/officeDocument/2006/relationships" id="2147483650" r:id="Rb5ffea67b1224881"/>
+    <p:sldMasterId xmlns:r="http://schemas.openxmlformats.org/officeDocument/2006/relationships" id="2147483648" r:id="Rb8c038a26ac74342"/>
+    <p:sldMasterId xmlns:r="http://schemas.openxmlformats.org/officeDocument/2006/relationships" id="2147483650" r:id="R95739d479ac04afc"/>
   </p:sldMasterIdLst>
   <p:notesMasterIdLst>
-    <p:notesMasterId xmlns:r="http://schemas.openxmlformats.org/officeDocument/2006/relationships" r:id="Ree62fc8049864c59"/>
+    <p:notesMasterId xmlns:r="http://schemas.openxmlformats.org/officeDocument/2006/relationships" r:id="Rc797b68fcc884681"/>
   </p:notesMasterIdLst>
   <p:sldIdLst>
-    <p:sldId xmlns:r="http://schemas.openxmlformats.org/officeDocument/2006/relationships" id="256" r:id="R69c74e9e026b4503"/>
-    <p:sldId xmlns:r="http://schemas.openxmlformats.org/officeDocument/2006/relationships" id="257" r:id="Re77390c64bfa41e7"/>
-    <p:sldId xmlns:r="http://schemas.openxmlformats.org/officeDocument/2006/relationships" id="258" r:id="Ra758b87900934be8"/>
-    <p:sldId xmlns:r="http://schemas.openxmlformats.org/officeDocument/2006/relationships" id="259" r:id="R0861128c7ba8405c"/>
-    <p:sldId xmlns:r="http://schemas.openxmlformats.org/officeDocument/2006/relationships" id="260" r:id="R5e8862c1a7254eda"/>
-    <p:sldId xmlns:r="http://schemas.openxmlformats.org/officeDocument/2006/relationships" id="261" r:id="Rfb778f45cd2b4dfd"/>
-    <p:sldId xmlns:r="http://schemas.openxmlformats.org/officeDocument/2006/relationships" id="262" r:id="Raa2ea39fd1fc4760"/>
-    <p:sldId xmlns:r="http://schemas.openxmlformats.org/officeDocument/2006/relationships" id="263" r:id="R9539a3e7b2594203"/>
-    <p:sldId xmlns:r="http://schemas.openxmlformats.org/officeDocument/2006/relationships" id="264" r:id="R4e2c8f6d53734050"/>
-    <p:sldId xmlns:r="http://schemas.openxmlformats.org/officeDocument/2006/relationships" id="265" r:id="Rfa74178c95c44fb1"/>
-    <p:sldId xmlns:r="http://schemas.openxmlformats.org/officeDocument/2006/relationships" id="266" r:id="R09127273cd224e9b"/>
-    <p:sldId xmlns:r="http://schemas.openxmlformats.org/officeDocument/2006/relationships" id="267" r:id="Rf6fa95309f5e4db0"/>
-    <p:sldId xmlns:r="http://schemas.openxmlformats.org/officeDocument/2006/relationships" id="268" r:id="R58acb9204c7c44b6"/>
-    <p:sldId xmlns:r="http://schemas.openxmlformats.org/officeDocument/2006/relationships" id="269" r:id="Rc14634212fd74af0"/>
-    <p:sldId xmlns:r="http://schemas.openxmlformats.org/officeDocument/2006/relationships" id="270" r:id="R2c5d7ba504c94a82"/>
-    <p:sldId xmlns:r="http://schemas.openxmlformats.org/officeDocument/2006/relationships" id="271" r:id="R960c50ff93764133"/>
-    <p:sldId xmlns:r="http://schemas.openxmlformats.org/officeDocument/2006/relationships" id="272" r:id="R13815bed750a4ab4"/>
-    <p:sldId xmlns:r="http://schemas.openxmlformats.org/officeDocument/2006/relationships" id="273" r:id="R5b49511c4ff04c0f"/>
-    <p:sldId xmlns:r="http://schemas.openxmlformats.org/officeDocument/2006/relationships" id="274" r:id="R31ab54a109744e1c"/>
-    <p:sldId xmlns:r="http://schemas.openxmlformats.org/officeDocument/2006/relationships" id="275" r:id="Rbf5e221ce56a420b"/>
+    <p:sldId xmlns:r="http://schemas.openxmlformats.org/officeDocument/2006/relationships" id="256" r:id="Rf74499d18fe1439b"/>
+    <p:sldId xmlns:r="http://schemas.openxmlformats.org/officeDocument/2006/relationships" id="257" r:id="R91ad48fed0314291"/>
+    <p:sldId xmlns:r="http://schemas.openxmlformats.org/officeDocument/2006/relationships" id="258" r:id="R66b9aa260a9044fa"/>
+    <p:sldId xmlns:r="http://schemas.openxmlformats.org/officeDocument/2006/relationships" id="259" r:id="R5e194a0fcf904e1c"/>
+    <p:sldId xmlns:r="http://schemas.openxmlformats.org/officeDocument/2006/relationships" id="260" r:id="Racd3d3c4cffd468b"/>
+    <p:sldId xmlns:r="http://schemas.openxmlformats.org/officeDocument/2006/relationships" id="261" r:id="R9606a61ea58d4de9"/>
+    <p:sldId xmlns:r="http://schemas.openxmlformats.org/officeDocument/2006/relationships" id="262" r:id="R95155d9b0d234651"/>
+    <p:sldId xmlns:r="http://schemas.openxmlformats.org/officeDocument/2006/relationships" id="263" r:id="Rea40b6f1ad974442"/>
+    <p:sldId xmlns:r="http://schemas.openxmlformats.org/officeDocument/2006/relationships" id="264" r:id="R8330d685304f4fab"/>
+    <p:sldId xmlns:r="http://schemas.openxmlformats.org/officeDocument/2006/relationships" id="265" r:id="Raddf89974e4d4be5"/>
+    <p:sldId xmlns:r="http://schemas.openxmlformats.org/officeDocument/2006/relationships" id="266" r:id="R4fce361e682c4810"/>
+    <p:sldId xmlns:r="http://schemas.openxmlformats.org/officeDocument/2006/relationships" id="267" r:id="Rf6e7084ced2646f2"/>
+    <p:sldId xmlns:r="http://schemas.openxmlformats.org/officeDocument/2006/relationships" id="268" r:id="Rb0eb20ea46494fb7"/>
+    <p:sldId xmlns:r="http://schemas.openxmlformats.org/officeDocument/2006/relationships" id="269" r:id="R3c66ae38520d4ba1"/>
+    <p:sldId xmlns:r="http://schemas.openxmlformats.org/officeDocument/2006/relationships" id="270" r:id="R67c80a1c21574b28"/>
+    <p:sldId xmlns:r="http://schemas.openxmlformats.org/officeDocument/2006/relationships" id="271" r:id="Ree0485642f274eda"/>
+    <p:sldId xmlns:r="http://schemas.openxmlformats.org/officeDocument/2006/relationships" id="272" r:id="R692dd86651bd4309"/>
+    <p:sldId xmlns:r="http://schemas.openxmlformats.org/officeDocument/2006/relationships" id="273" r:id="Rcd42604e1adc4e2e"/>
+    <p:sldId xmlns:r="http://schemas.openxmlformats.org/officeDocument/2006/relationships" id="274" r:id="R246a1b338deb4542"/>
+    <p:sldId xmlns:r="http://schemas.openxmlformats.org/officeDocument/2006/relationships" id="275" r:id="Rf592a5c30fb7449a"/>
   </p:sldIdLst>
   <p:sldSz cx="12192000" cy="6858000"/>
   <p:notesSz cx="6858000" cy="9144000"/>
@@ -542,6 +542,11 @@
           </a:p>
           <a:p xmlns:a="http://schemas.openxmlformats.org/drawingml/2006/main">
             <a:r>
+              <a:t>- https://rescuepoint.com.br/assets/img/logo.png</a:t>
+            </a:r>
+          </a:p>
+          <a:p xmlns:a="http://schemas.openxmlformats.org/drawingml/2006/main">
+            <a:r>
               <a:t>- https://github.com/AnselmoBorges/dbt-moderno-na-pratica/blob/main/roteiros/04-semantica-aberta-interoperavel.md</a:t>
             </a:r>
           </a:p>
@@ -707,6 +712,11 @@
           </a:p>
           <a:p xmlns:a="http://schemas.openxmlformats.org/drawingml/2006/main">
             <a:r>
+              <a:t>- https://rescuepoint.com.br/assets/img/logo.png</a:t>
+            </a:r>
+          </a:p>
+          <a:p xmlns:a="http://schemas.openxmlformats.org/drawingml/2006/main">
+            <a:r>
               <a:t>- https://github.com/AnselmoBorges/dbt-moderno-na-pratica/blob/main/roteiros/04-semantica-aberta-interoperavel.md</a:t>
             </a:r>
           </a:p>
@@ -872,6 +882,11 @@
           </a:p>
           <a:p xmlns:a="http://schemas.openxmlformats.org/drawingml/2006/main">
             <a:r>
+              <a:t>- https://rescuepoint.com.br/assets/img/logo.png</a:t>
+            </a:r>
+          </a:p>
+          <a:p xmlns:a="http://schemas.openxmlformats.org/drawingml/2006/main">
+            <a:r>
               <a:t>- https://github.com/AnselmoBorges/dbt-moderno-na-pratica/blob/main/roteiros/04-semantica-aberta-interoperavel.md</a:t>
             </a:r>
           </a:p>
@@ -1037,6 +1052,11 @@
           </a:p>
           <a:p xmlns:a="http://schemas.openxmlformats.org/drawingml/2006/main">
             <a:r>
+              <a:t>- https://rescuepoint.com.br/assets/img/logo.png</a:t>
+            </a:r>
+          </a:p>
+          <a:p xmlns:a="http://schemas.openxmlformats.org/drawingml/2006/main">
+            <a:r>
               <a:t>- https://github.com/AnselmoBorges/dbt-moderno-na-pratica/blob/main/roteiros/04-semantica-aberta-interoperavel.md</a:t>
             </a:r>
           </a:p>
@@ -1202,6 +1222,11 @@
           </a:p>
           <a:p xmlns:a="http://schemas.openxmlformats.org/drawingml/2006/main">
             <a:r>
+              <a:t>- https://rescuepoint.com.br/assets/img/logo.png</a:t>
+            </a:r>
+          </a:p>
+          <a:p xmlns:a="http://schemas.openxmlformats.org/drawingml/2006/main">
+            <a:r>
               <a:t>- https://github.com/AnselmoBorges/dbt-moderno-na-pratica/blob/main/roteiros/04-semantica-aberta-interoperavel.md</a:t>
             </a:r>
           </a:p>
@@ -1367,6 +1392,11 @@
           </a:p>
           <a:p xmlns:a="http://schemas.openxmlformats.org/drawingml/2006/main">
             <a:r>
+              <a:t>- https://rescuepoint.com.br/assets/img/logo.png</a:t>
+            </a:r>
+          </a:p>
+          <a:p xmlns:a="http://schemas.openxmlformats.org/drawingml/2006/main">
+            <a:r>
               <a:t>- https://github.com/AnselmoBorges/dbt-moderno-na-pratica/blob/main/roteiros/04-semantica-aberta-interoperavel.md</a:t>
             </a:r>
           </a:p>
@@ -1532,6 +1562,11 @@
           </a:p>
           <a:p xmlns:a="http://schemas.openxmlformats.org/drawingml/2006/main">
             <a:r>
+              <a:t>- https://rescuepoint.com.br/assets/img/logo.png</a:t>
+            </a:r>
+          </a:p>
+          <a:p xmlns:a="http://schemas.openxmlformats.org/drawingml/2006/main">
+            <a:r>
               <a:t>- https://github.com/AnselmoBorges/dbt-moderno-na-pratica/blob/main/roteiros/04-semantica-aberta-interoperavel.md</a:t>
             </a:r>
           </a:p>
@@ -1697,6 +1732,11 @@
           </a:p>
           <a:p xmlns:a="http://schemas.openxmlformats.org/drawingml/2006/main">
             <a:r>
+              <a:t>- https://rescuepoint.com.br/assets/img/logo.png</a:t>
+            </a:r>
+          </a:p>
+          <a:p xmlns:a="http://schemas.openxmlformats.org/drawingml/2006/main">
+            <a:r>
               <a:t>- https://github.com/AnselmoBorges/dbt-moderno-na-pratica/blob/main/roteiros/04-semantica-aberta-interoperavel.md</a:t>
             </a:r>
           </a:p>
@@ -1862,6 +1902,11 @@
           </a:p>
           <a:p xmlns:a="http://schemas.openxmlformats.org/drawingml/2006/main">
             <a:r>
+              <a:t>- https://rescuepoint.com.br/assets/img/logo.png</a:t>
+            </a:r>
+          </a:p>
+          <a:p xmlns:a="http://schemas.openxmlformats.org/drawingml/2006/main">
+            <a:r>
               <a:t>- https://github.com/AnselmoBorges/dbt-moderno-na-pratica/blob/main/roteiros/04-semantica-aberta-interoperavel.md</a:t>
             </a:r>
           </a:p>
@@ -2027,6 +2072,11 @@
           </a:p>
           <a:p xmlns:a="http://schemas.openxmlformats.org/drawingml/2006/main">
             <a:r>
+              <a:t>- https://rescuepoint.com.br/assets/img/logo.png</a:t>
+            </a:r>
+          </a:p>
+          <a:p xmlns:a="http://schemas.openxmlformats.org/drawingml/2006/main">
+            <a:r>
               <a:t>- https://github.com/AnselmoBorges/dbt-moderno-na-pratica/blob/main/roteiros/04-semantica-aberta-interoperavel.md</a:t>
             </a:r>
           </a:p>
@@ -2192,6 +2242,11 @@
           </a:p>
           <a:p xmlns:a="http://schemas.openxmlformats.org/drawingml/2006/main">
             <a:r>
+              <a:t>- https://rescuepoint.com.br/assets/img/logo.png</a:t>
+            </a:r>
+          </a:p>
+          <a:p xmlns:a="http://schemas.openxmlformats.org/drawingml/2006/main">
+            <a:r>
               <a:t>- https://github.com/AnselmoBorges/dbt-moderno-na-pratica/blob/main/roteiros/04-semantica-aberta-interoperavel.md</a:t>
             </a:r>
           </a:p>
@@ -2357,6 +2412,11 @@
           </a:p>
           <a:p xmlns:a="http://schemas.openxmlformats.org/drawingml/2006/main">
             <a:r>
+              <a:t>- https://rescuepoint.com.br/assets/img/logo.png</a:t>
+            </a:r>
+          </a:p>
+          <a:p xmlns:a="http://schemas.openxmlformats.org/drawingml/2006/main">
+            <a:r>
               <a:t>- https://github.com/AnselmoBorges/dbt-moderno-na-pratica/blob/main/roteiros/04-semantica-aberta-interoperavel.md</a:t>
             </a:r>
           </a:p>
@@ -2522,6 +2582,11 @@
           </a:p>
           <a:p xmlns:a="http://schemas.openxmlformats.org/drawingml/2006/main">
             <a:r>
+              <a:t>- https://rescuepoint.com.br/assets/img/logo.png</a:t>
+            </a:r>
+          </a:p>
+          <a:p xmlns:a="http://schemas.openxmlformats.org/drawingml/2006/main">
+            <a:r>
               <a:t>- https://github.com/AnselmoBorges/dbt-moderno-na-pratica/blob/main/roteiros/04-semantica-aberta-interoperavel.md</a:t>
             </a:r>
           </a:p>
@@ -2687,6 +2752,11 @@
           </a:p>
           <a:p xmlns:a="http://schemas.openxmlformats.org/drawingml/2006/main">
             <a:r>
+              <a:t>- https://rescuepoint.com.br/assets/img/logo.png</a:t>
+            </a:r>
+          </a:p>
+          <a:p xmlns:a="http://schemas.openxmlformats.org/drawingml/2006/main">
+            <a:r>
               <a:t>- https://github.com/AnselmoBorges/dbt-moderno-na-pratica/blob/main/roteiros/04-semantica-aberta-interoperavel.md</a:t>
             </a:r>
           </a:p>
@@ -2852,6 +2922,11 @@
           </a:p>
           <a:p xmlns:a="http://schemas.openxmlformats.org/drawingml/2006/main">
             <a:r>
+              <a:t>- https://rescuepoint.com.br/assets/img/logo.png</a:t>
+            </a:r>
+          </a:p>
+          <a:p xmlns:a="http://schemas.openxmlformats.org/drawingml/2006/main">
+            <a:r>
               <a:t>- https://github.com/AnselmoBorges/dbt-moderno-na-pratica/blob/main/roteiros/04-semantica-aberta-interoperavel.md</a:t>
             </a:r>
           </a:p>
@@ -3017,6 +3092,11 @@
           </a:p>
           <a:p xmlns:a="http://schemas.openxmlformats.org/drawingml/2006/main">
             <a:r>
+              <a:t>- https://rescuepoint.com.br/assets/img/logo.png</a:t>
+            </a:r>
+          </a:p>
+          <a:p xmlns:a="http://schemas.openxmlformats.org/drawingml/2006/main">
+            <a:r>
               <a:t>- https://github.com/AnselmoBorges/dbt-moderno-na-pratica/blob/main/roteiros/04-semantica-aberta-interoperavel.md</a:t>
             </a:r>
           </a:p>
@@ -3182,6 +3262,11 @@
           </a:p>
           <a:p xmlns:a="http://schemas.openxmlformats.org/drawingml/2006/main">
             <a:r>
+              <a:t>- https://rescuepoint.com.br/assets/img/logo.png</a:t>
+            </a:r>
+          </a:p>
+          <a:p xmlns:a="http://schemas.openxmlformats.org/drawingml/2006/main">
+            <a:r>
               <a:t>- https://github.com/AnselmoBorges/dbt-moderno-na-pratica/blob/main/roteiros/04-semantica-aberta-interoperavel.md</a:t>
             </a:r>
           </a:p>
@@ -3347,6 +3432,11 @@
           </a:p>
           <a:p xmlns:a="http://schemas.openxmlformats.org/drawingml/2006/main">
             <a:r>
+              <a:t>- https://rescuepoint.com.br/assets/img/logo.png</a:t>
+            </a:r>
+          </a:p>
+          <a:p xmlns:a="http://schemas.openxmlformats.org/drawingml/2006/main">
+            <a:r>
               <a:t>- https://github.com/AnselmoBorges/dbt-moderno-na-pratica/blob/main/roteiros/04-semantica-aberta-interoperavel.md</a:t>
             </a:r>
           </a:p>
@@ -3512,6 +3602,11 @@
           </a:p>
           <a:p xmlns:a="http://schemas.openxmlformats.org/drawingml/2006/main">
             <a:r>
+              <a:t>- https://rescuepoint.com.br/assets/img/logo.png</a:t>
+            </a:r>
+          </a:p>
+          <a:p xmlns:a="http://schemas.openxmlformats.org/drawingml/2006/main">
+            <a:r>
               <a:t>- https://github.com/AnselmoBorges/dbt-moderno-na-pratica/blob/main/roteiros/04-semantica-aberta-interoperavel.md</a:t>
             </a:r>
           </a:p>
@@ -3673,6 +3768,11 @@
           <a:p xmlns:a="http://schemas.openxmlformats.org/drawingml/2006/main">
             <a:r>
               <a:t>- https://www.getdbt.com/blog/how-the-dbt-semantic-layer-works</a:t>
+            </a:r>
+          </a:p>
+          <a:p xmlns:a="http://schemas.openxmlformats.org/drawingml/2006/main">
+            <a:r>
+              <a:t>- https://rescuepoint.com.br/assets/img/logo.png</a:t>
             </a:r>
           </a:p>
           <a:p xmlns:a="http://schemas.openxmlformats.org/drawingml/2006/main">
@@ -3794,7 +3894,7 @@
   </p:cSld>
   <p:clrMap bg1="lt1" tx1="dk1" bg2="lt2" tx2="dk2" accent1="accent1" accent2="accent2" accent3="accent3" accent4="accent4" accent5="accent5" accent6="accent6" hlink="hlink" folHlink="folHlink"/>
   <p:sldLayoutIdLst>
-    <p:sldLayoutId xmlns:r="http://schemas.openxmlformats.org/officeDocument/2006/relationships" id="2147483649" r:id="R0cd73de1fff648dc"/>
+    <p:sldLayoutId xmlns:r="http://schemas.openxmlformats.org/officeDocument/2006/relationships" id="2147483649" r:id="R99edea73deb74b08"/>
   </p:sldLayoutIdLst>
   <p:txStyles>
     <p:titleStyle>
@@ -4092,8 +4192,8 @@
   </p:cSld>
   <p:clrMap bg1="lt1" tx1="dk1" bg2="lt2" tx2="dk2" accent1="accent1" accent2="accent2" accent3="accent3" accent4="accent4" accent5="accent5" accent6="accent6" hlink="hlink" folHlink="folHlink"/>
   <p:sldLayoutIdLst>
-    <p:sldLayoutId xmlns:r="http://schemas.openxmlformats.org/officeDocument/2006/relationships" id="2147483651" r:id="R3b585148bd984738"/>
-    <p:sldLayoutId xmlns:r="http://schemas.openxmlformats.org/officeDocument/2006/relationships" id="2147483652" r:id="R18810c917ebd4da9"/>
+    <p:sldLayoutId xmlns:r="http://schemas.openxmlformats.org/officeDocument/2006/relationships" id="2147483651" r:id="R76e2bbd006914515"/>
+    <p:sldLayoutId xmlns:r="http://schemas.openxmlformats.org/officeDocument/2006/relationships" id="2147483652" r:id="R9dd2f5d1a04045c4"/>
   </p:sldLayoutIdLst>
 </p:sldMaster>
 </file>
@@ -4617,14 +4717,14 @@
       </p:grpSpPr>
       <p:pic>
         <p:nvPicPr>
-          <p:cNvPr id="10" name="" descr="Ilustração conceitual autoral da capa: EPISÓDIO 4 — Semântica aberta e interoperável."/>
+          <p:cNvPr id="13" name="" descr="Ilustração conceitual autoral da capa: EPISÓDIO 4 — Semântica aberta e interoperável."/>
           <p:cNvPicPr>
             <a:picLocks xmlns:a="http://schemas.openxmlformats.org/drawingml/2006/main" noChangeAspect="1"/>
           </p:cNvPicPr>
           <p:nvPr/>
         </p:nvPicPr>
         <p:blipFill>
-          <a:blip xmlns:r="http://schemas.openxmlformats.org/officeDocument/2006/relationships" xmlns:a="http://schemas.openxmlformats.org/drawingml/2006/main" r:embed="R6e617f72148d4492"/>
+          <a:blip xmlns:r="http://schemas.openxmlformats.org/officeDocument/2006/relationships" xmlns:a="http://schemas.openxmlformats.org/drawingml/2006/main" r:embed="R4c94e64cd5c84769"/>
           <a:srcRect xmlns:a="http://schemas.openxmlformats.org/drawingml/2006/main" l="19785" t="0" r="19785" b="0"/>
           <a:stretch xmlns:a="http://schemas.openxmlformats.org/drawingml/2006/main">
             <a:fillRect l="0" t="0" r="0" b="0"/>
@@ -4645,7 +4745,7 @@
           <p:cNvPr id="2" name="cover-text-surface">
             <a:extLst xmlns:a="http://schemas.openxmlformats.org/drawingml/2006/main">
               <a:ext uri="{FF2B5EF4-FFF2-40B4-BE49-F238E27FC236}">
-                <a16:creationId xmlns:a16="http://schemas.microsoft.com/office/drawing/2014/main" id="{05071A4F-E0E4-4107-B1F1-B49B72EBB9CA}"/>
+                <a16:creationId xmlns:a16="http://schemas.microsoft.com/office/drawing/2014/main" id="{292104A5-E036-4131-8176-78E678A3FD62}"/>
               </a:ext>
             </a:extLst>
           </p:cNvPr>
@@ -4678,7 +4778,7 @@
           <p:cNvPr id="3" name="cover-divider">
             <a:extLst xmlns:a="http://schemas.openxmlformats.org/drawingml/2006/main">
               <a:ext uri="{FF2B5EF4-FFF2-40B4-BE49-F238E27FC236}">
-                <a16:creationId xmlns:a16="http://schemas.microsoft.com/office/drawing/2014/main" id="{6679936D-B18C-47F9-AB37-13606E777158}"/>
+                <a16:creationId xmlns:a16="http://schemas.microsoft.com/office/drawing/2014/main" id="{43509F47-B8C9-443B-9734-16A28BB80114}"/>
               </a:ext>
             </a:extLst>
           </p:cNvPr>
@@ -4709,7 +4809,7 @@
           <p:cNvPr id="4" name="cover-episode">
             <a:extLst xmlns:a="http://schemas.openxmlformats.org/drawingml/2006/main">
               <a:ext uri="{FF2B5EF4-FFF2-40B4-BE49-F238E27FC236}">
-                <a16:creationId xmlns:a16="http://schemas.microsoft.com/office/drawing/2014/main" id="{291875C4-902B-412F-988A-F483EDA42E0D}"/>
+                <a16:creationId xmlns:a16="http://schemas.microsoft.com/office/drawing/2014/main" id="{867E6524-E5CD-4C28-810C-5CBE8D6185BE}"/>
               </a:ext>
             </a:extLst>
           </p:cNvPr>
@@ -4757,10 +4857,69 @@
       </p:sp>
       <p:sp>
         <p:nvSpPr>
-          <p:cNvPr id="5" name="cover-title">
-            <a:extLst xmlns:a="http://schemas.openxmlformats.org/drawingml/2006/main">
-              <a:ext uri="{FF2B5EF4-FFF2-40B4-BE49-F238E27FC236}">
-                <a16:creationId xmlns:a16="http://schemas.microsoft.com/office/drawing/2014/main" id="{7F6EFB5A-33BA-4F4E-85D7-73B4201D9C11}"/>
+          <p:cNvPr id="5" name="rescue-point-logo-background">
+            <a:extLst xmlns:a="http://schemas.openxmlformats.org/drawingml/2006/main">
+              <a:ext uri="{FF2B5EF4-FFF2-40B4-BE49-F238E27FC236}">
+                <a16:creationId xmlns:a16="http://schemas.microsoft.com/office/drawing/2014/main" id="{4E574079-B695-4A8A-A602-12681D14BD27}"/>
+              </a:ext>
+            </a:extLst>
+          </p:cNvPr>
+          <p:cNvSpPr>
+            <a:spLocks xmlns:a="http://schemas.openxmlformats.org/drawingml/2006/main" noGrp="1"/>
+          </p:cNvSpPr>
+          <p:nvPr/>
+        </p:nvSpPr>
+        <p:spPr>
+          <a:xfrm xmlns:a="http://schemas.openxmlformats.org/drawingml/2006/main">
+            <a:off x="9772650" y="133350"/>
+            <a:ext cx="1733550" cy="457200"/>
+          </a:xfrm>
+          <a:prstGeom xmlns:a="http://schemas.openxmlformats.org/drawingml/2006/main" prst="roundRect">
+            <a:avLst>
+              <a:gd name="adj" fmla="val 16667"/>
+            </a:avLst>
+          </a:prstGeom>
+          <a:solidFill xmlns:a="http://schemas.openxmlformats.org/drawingml/2006/main">
+            <a:srgbClr val="06142E"/>
+          </a:solidFill>
+          <a:ln xmlns:a="http://schemas.openxmlformats.org/drawingml/2006/main" w="9525">
+            <a:solidFill>
+              <a:srgbClr val="1EC5FF">
+                <a:alpha val="33333"/>
+              </a:srgbClr>
+            </a:solidFill>
+            <a:prstDash val="solid"/>
+          </a:ln>
+        </p:spPr>
+      </p:sp>
+      <p:pic>
+        <p:nvPicPr>
+          <p:cNvPr id="18" name="" descr="Ilustração conceitual autoral da capa: EPISÓDIO 4 — Semântica aberta e interoperável."/>
+          <p:cNvPicPr>
+            <a:picLocks xmlns:a="http://schemas.openxmlformats.org/drawingml/2006/main" noChangeAspect="1"/>
+          </p:cNvPicPr>
+          <p:nvPr/>
+        </p:nvPicPr>
+        <p:blipFill>
+          <a:blip xmlns:r="http://schemas.openxmlformats.org/officeDocument/2006/relationships" xmlns:a="http://schemas.openxmlformats.org/drawingml/2006/main" r:embed="R71049697783c4e46"/>
+          <a:stretch xmlns:a="http://schemas.openxmlformats.org/drawingml/2006/main"/>
+        </p:blipFill>
+        <p:spPr>
+          <a:xfrm xmlns:a="http://schemas.openxmlformats.org/drawingml/2006/main">
+            <a:off x="9893718" y="209550"/>
+            <a:ext cx="1491414" cy="323850"/>
+          </a:xfrm>
+          <a:prstGeom xmlns:a="http://schemas.openxmlformats.org/drawingml/2006/main" prst="rect">
+            <a:avLst/>
+          </a:prstGeom>
+        </p:spPr>
+      </p:pic>
+      <p:sp>
+        <p:nvSpPr>
+          <p:cNvPr id="7" name="cover-title">
+            <a:extLst xmlns:a="http://schemas.openxmlformats.org/drawingml/2006/main">
+              <a:ext uri="{FF2B5EF4-FFF2-40B4-BE49-F238E27FC236}">
+                <a16:creationId xmlns:a16="http://schemas.microsoft.com/office/drawing/2014/main" id="{19F511DD-E3B0-4A5B-BCDA-C4914768B403}"/>
               </a:ext>
             </a:extLst>
           </p:cNvPr>
@@ -4808,10 +4967,10 @@
       </p:sp>
       <p:sp>
         <p:nvSpPr>
-          <p:cNvPr id="6" name="cover-subtitle">
-            <a:extLst xmlns:a="http://schemas.openxmlformats.org/drawingml/2006/main">
-              <a:ext uri="{FF2B5EF4-FFF2-40B4-BE49-F238E27FC236}">
-                <a16:creationId xmlns:a16="http://schemas.microsoft.com/office/drawing/2014/main" id="{BE67F3C0-A085-4FD5-A48A-69520B7DAA54}"/>
+          <p:cNvPr id="8" name="cover-subtitle">
+            <a:extLst xmlns:a="http://schemas.openxmlformats.org/drawingml/2006/main">
+              <a:ext uri="{FF2B5EF4-FFF2-40B4-BE49-F238E27FC236}">
+                <a16:creationId xmlns:a16="http://schemas.microsoft.com/office/drawing/2014/main" id="{B0183F0A-D38B-4312-8C60-73803DB9A508}"/>
               </a:ext>
             </a:extLst>
           </p:cNvPr>
@@ -4859,10 +5018,10 @@
       </p:sp>
       <p:sp>
         <p:nvSpPr>
-          <p:cNvPr id="7" name="cover-accent">
-            <a:extLst xmlns:a="http://schemas.openxmlformats.org/drawingml/2006/main">
-              <a:ext uri="{FF2B5EF4-FFF2-40B4-BE49-F238E27FC236}">
-                <a16:creationId xmlns:a16="http://schemas.microsoft.com/office/drawing/2014/main" id="{7A4552D4-89D7-4773-9E6D-FF73B408977E}"/>
+          <p:cNvPr id="9" name="cover-accent">
+            <a:extLst xmlns:a="http://schemas.openxmlformats.org/drawingml/2006/main">
+              <a:ext uri="{FF2B5EF4-FFF2-40B4-BE49-F238E27FC236}">
+                <a16:creationId xmlns:a16="http://schemas.microsoft.com/office/drawing/2014/main" id="{C4D2ADA8-C126-47FD-A72C-4A13B073F42D}"/>
               </a:ext>
             </a:extLst>
           </p:cNvPr>
@@ -4890,10 +5049,10 @@
       </p:sp>
       <p:sp>
         <p:nvSpPr>
-          <p:cNvPr id="8" name="cover-meta">
-            <a:extLst xmlns:a="http://schemas.openxmlformats.org/drawingml/2006/main">
-              <a:ext uri="{FF2B5EF4-FFF2-40B4-BE49-F238E27FC236}">
-                <a16:creationId xmlns:a16="http://schemas.microsoft.com/office/drawing/2014/main" id="{4BD7C9D0-4731-4144-81C5-A9E456E697D7}"/>
+          <p:cNvPr id="10" name="cover-meta">
+            <a:extLst xmlns:a="http://schemas.openxmlformats.org/drawingml/2006/main">
+              <a:ext uri="{FF2B5EF4-FFF2-40B4-BE49-F238E27FC236}">
+                <a16:creationId xmlns:a16="http://schemas.microsoft.com/office/drawing/2014/main" id="{0DDE1668-7B1E-46EB-8A70-CCCB2CEFA485}"/>
               </a:ext>
             </a:extLst>
           </p:cNvPr>
@@ -4946,7 +5105,7 @@
     </p:spTree>
     <p:extLst>
       <p:ext uri="{BB962C8B-B14F-4D97-AF65-F5344CB8AC3E}">
-        <p14:creationId xmlns:p14="http://schemas.microsoft.com/office/powerpoint/2010/main" val="767281490"/>
+        <p14:creationId xmlns:p14="http://schemas.microsoft.com/office/powerpoint/2010/main" val="1626006072"/>
       </p:ext>
     </p:extLst>
   </p:cSld>
@@ -4982,10 +5141,10 @@
       </p:grpSpPr>
       <p:sp>
         <p:nvSpPr>
-          <p:cNvPr id="12" name="slide-title">
-            <a:extLst xmlns:a="http://schemas.openxmlformats.org/drawingml/2006/main">
-              <a:ext uri="{FF2B5EF4-FFF2-40B4-BE49-F238E27FC236}">
-                <a16:creationId xmlns:a16="http://schemas.microsoft.com/office/drawing/2014/main" id="{0AB50AFF-AA44-4F11-9B99-075D3E16FA65}"/>
+          <p:cNvPr id="14" name="slide-title">
+            <a:extLst xmlns:a="http://schemas.openxmlformats.org/drawingml/2006/main">
+              <a:ext uri="{FF2B5EF4-FFF2-40B4-BE49-F238E27FC236}">
+                <a16:creationId xmlns:a16="http://schemas.microsoft.com/office/drawing/2014/main" id="{4DC531E0-70CD-409F-A573-D81D5D2BC608}"/>
               </a:ext>
             </a:extLst>
           </p:cNvPr>
@@ -5036,7 +5195,7 @@
           <p:cNvPr id="2" name="status-dot-1">
             <a:extLst xmlns:a="http://schemas.openxmlformats.org/drawingml/2006/main">
               <a:ext uri="{FF2B5EF4-FFF2-40B4-BE49-F238E27FC236}">
-                <a16:creationId xmlns:a16="http://schemas.microsoft.com/office/drawing/2014/main" id="{F8ADA0B3-17A0-4AFF-B0B9-2E0143EE7E89}"/>
+                <a16:creationId xmlns:a16="http://schemas.microsoft.com/office/drawing/2014/main" id="{A7550407-D4B5-4AE9-8097-C8653139302A}"/>
               </a:ext>
             </a:extLst>
           </p:cNvPr>
@@ -5069,7 +5228,7 @@
           <p:cNvPr id="3" name="status-label-1">
             <a:extLst xmlns:a="http://schemas.openxmlformats.org/drawingml/2006/main">
               <a:ext uri="{FF2B5EF4-FFF2-40B4-BE49-F238E27FC236}">
-                <a16:creationId xmlns:a16="http://schemas.microsoft.com/office/drawing/2014/main" id="{19921E9D-CC38-4E3A-83AE-A7E476DFAF4C}"/>
+                <a16:creationId xmlns:a16="http://schemas.microsoft.com/office/drawing/2014/main" id="{0699AE7B-37ED-460B-849A-E04F113514F0}"/>
               </a:ext>
             </a:extLst>
           </p:cNvPr>
@@ -5120,7 +5279,7 @@
           <p:cNvPr id="4" name="status-dot-2">
             <a:extLst xmlns:a="http://schemas.openxmlformats.org/drawingml/2006/main">
               <a:ext uri="{FF2B5EF4-FFF2-40B4-BE49-F238E27FC236}">
-                <a16:creationId xmlns:a16="http://schemas.microsoft.com/office/drawing/2014/main" id="{0EFC7B9A-4421-45B7-ABF6-B7E957480220}"/>
+                <a16:creationId xmlns:a16="http://schemas.microsoft.com/office/drawing/2014/main" id="{4E165173-CE93-40A8-815B-65F43E2F799C}"/>
               </a:ext>
             </a:extLst>
           </p:cNvPr>
@@ -5153,7 +5312,7 @@
           <p:cNvPr id="5" name="status-label-2">
             <a:extLst xmlns:a="http://schemas.openxmlformats.org/drawingml/2006/main">
               <a:ext uri="{FF2B5EF4-FFF2-40B4-BE49-F238E27FC236}">
-                <a16:creationId xmlns:a16="http://schemas.microsoft.com/office/drawing/2014/main" id="{B87FF0ED-5F53-4C3B-A68C-DD4AB5AF3473}"/>
+                <a16:creationId xmlns:a16="http://schemas.microsoft.com/office/drawing/2014/main" id="{C92A9842-8CDF-444E-8816-400138F45F1A}"/>
               </a:ext>
             </a:extLst>
           </p:cNvPr>
@@ -5204,7 +5363,7 @@
           <p:cNvPr id="6" name="status-dot-3">
             <a:extLst xmlns:a="http://schemas.openxmlformats.org/drawingml/2006/main">
               <a:ext uri="{FF2B5EF4-FFF2-40B4-BE49-F238E27FC236}">
-                <a16:creationId xmlns:a16="http://schemas.microsoft.com/office/drawing/2014/main" id="{746B3391-4CDD-44B7-890F-D6B13F94B488}"/>
+                <a16:creationId xmlns:a16="http://schemas.microsoft.com/office/drawing/2014/main" id="{9E76940D-0FED-48CC-AEB4-3DF18DCF5F12}"/>
               </a:ext>
             </a:extLst>
           </p:cNvPr>
@@ -5237,7 +5396,7 @@
           <p:cNvPr id="7" name="status-label-3">
             <a:extLst xmlns:a="http://schemas.openxmlformats.org/drawingml/2006/main">
               <a:ext uri="{FF2B5EF4-FFF2-40B4-BE49-F238E27FC236}">
-                <a16:creationId xmlns:a16="http://schemas.microsoft.com/office/drawing/2014/main" id="{8EFF6786-8301-4891-87E5-0CCFD4C2EC82}"/>
+                <a16:creationId xmlns:a16="http://schemas.microsoft.com/office/drawing/2014/main" id="{1514355B-8457-4688-B24C-02DDB242DAF3}"/>
               </a:ext>
             </a:extLst>
           </p:cNvPr>
@@ -5288,7 +5447,7 @@
           <p:cNvPr id="8" name="eyebrow">
             <a:extLst xmlns:a="http://schemas.openxmlformats.org/drawingml/2006/main">
               <a:ext uri="{FF2B5EF4-FFF2-40B4-BE49-F238E27FC236}">
-                <a16:creationId xmlns:a16="http://schemas.microsoft.com/office/drawing/2014/main" id="{631AFA3E-A933-4993-9146-B007B6CCA894}"/>
+                <a16:creationId xmlns:a16="http://schemas.microsoft.com/office/drawing/2014/main" id="{0BACB847-E689-406F-BC7C-10B460E59FEC}"/>
               </a:ext>
             </a:extLst>
           </p:cNvPr>
@@ -5336,10 +5495,69 @@
       </p:sp>
       <p:sp>
         <p:nvSpPr>
-          <p:cNvPr id="9" name="footer-rule">
-            <a:extLst xmlns:a="http://schemas.openxmlformats.org/drawingml/2006/main">
-              <a:ext uri="{FF2B5EF4-FFF2-40B4-BE49-F238E27FC236}">
-                <a16:creationId xmlns:a16="http://schemas.microsoft.com/office/drawing/2014/main" id="{18E84BC6-113E-4E0D-A24D-DCBA37E04CA9}"/>
+          <p:cNvPr id="9" name="rescue-point-logo-background">
+            <a:extLst xmlns:a="http://schemas.openxmlformats.org/drawingml/2006/main">
+              <a:ext uri="{FF2B5EF4-FFF2-40B4-BE49-F238E27FC236}">
+                <a16:creationId xmlns:a16="http://schemas.microsoft.com/office/drawing/2014/main" id="{6406518E-FAD0-4F3E-9DD3-64B6B54728CB}"/>
+              </a:ext>
+            </a:extLst>
+          </p:cNvPr>
+          <p:cNvSpPr>
+            <a:spLocks xmlns:a="http://schemas.openxmlformats.org/drawingml/2006/main" noGrp="1"/>
+          </p:cNvSpPr>
+          <p:nvPr/>
+        </p:nvSpPr>
+        <p:spPr>
+          <a:xfrm xmlns:a="http://schemas.openxmlformats.org/drawingml/2006/main">
+            <a:off x="9772650" y="133350"/>
+            <a:ext cx="1733550" cy="457200"/>
+          </a:xfrm>
+          <a:prstGeom xmlns:a="http://schemas.openxmlformats.org/drawingml/2006/main" prst="roundRect">
+            <a:avLst>
+              <a:gd name="adj" fmla="val 16667"/>
+            </a:avLst>
+          </a:prstGeom>
+          <a:solidFill xmlns:a="http://schemas.openxmlformats.org/drawingml/2006/main">
+            <a:srgbClr val="06142E"/>
+          </a:solidFill>
+          <a:ln xmlns:a="http://schemas.openxmlformats.org/drawingml/2006/main" w="9525">
+            <a:solidFill>
+              <a:srgbClr val="1EC5FF">
+                <a:alpha val="33333"/>
+              </a:srgbClr>
+            </a:solidFill>
+            <a:prstDash val="solid"/>
+          </a:ln>
+        </p:spPr>
+      </p:sp>
+      <p:pic>
+        <p:nvPicPr>
+          <p:cNvPr id="25" name="" descr="Figura oficial da documentação dbt usada para explicar: OSI é um contrato, não um conector mágico — Artifact."/>
+          <p:cNvPicPr>
+            <a:picLocks xmlns:a="http://schemas.openxmlformats.org/drawingml/2006/main" noChangeAspect="1"/>
+          </p:cNvPicPr>
+          <p:nvPr/>
+        </p:nvPicPr>
+        <p:blipFill>
+          <a:blip xmlns:r="http://schemas.openxmlformats.org/officeDocument/2006/relationships" xmlns:a="http://schemas.openxmlformats.org/drawingml/2006/main" r:embed="Rae83cb79a36240f2"/>
+          <a:stretch xmlns:a="http://schemas.openxmlformats.org/drawingml/2006/main"/>
+        </p:blipFill>
+        <p:spPr>
+          <a:xfrm xmlns:a="http://schemas.openxmlformats.org/drawingml/2006/main">
+            <a:off x="9893718" y="209550"/>
+            <a:ext cx="1491414" cy="323850"/>
+          </a:xfrm>
+          <a:prstGeom xmlns:a="http://schemas.openxmlformats.org/drawingml/2006/main" prst="rect">
+            <a:avLst/>
+          </a:prstGeom>
+        </p:spPr>
+      </p:pic>
+      <p:sp>
+        <p:nvSpPr>
+          <p:cNvPr id="11" name="footer-rule">
+            <a:extLst xmlns:a="http://schemas.openxmlformats.org/drawingml/2006/main">
+              <a:ext uri="{FF2B5EF4-FFF2-40B4-BE49-F238E27FC236}">
+                <a16:creationId xmlns:a16="http://schemas.microsoft.com/office/drawing/2014/main" id="{CB26DC12-F764-4EF2-904C-88F178853156}"/>
               </a:ext>
             </a:extLst>
           </p:cNvPr>
@@ -5369,10 +5587,10 @@
       </p:sp>
       <p:sp>
         <p:nvSpPr>
-          <p:cNvPr id="10" name="footer">
-            <a:extLst xmlns:a="http://schemas.openxmlformats.org/drawingml/2006/main">
-              <a:ext uri="{FF2B5EF4-FFF2-40B4-BE49-F238E27FC236}">
-                <a16:creationId xmlns:a16="http://schemas.microsoft.com/office/drawing/2014/main" id="{837F865D-9DBA-4676-A8DC-133E2E6E946B}"/>
+          <p:cNvPr id="12" name="footer">
+            <a:extLst xmlns:a="http://schemas.openxmlformats.org/drawingml/2006/main">
+              <a:ext uri="{FF2B5EF4-FFF2-40B4-BE49-F238E27FC236}">
+                <a16:creationId xmlns:a16="http://schemas.microsoft.com/office/drawing/2014/main" id="{52622E70-ED7F-4DFF-B234-A8D349079F45}"/>
               </a:ext>
             </a:extLst>
           </p:cNvPr>
@@ -5424,10 +5642,10 @@
       </p:sp>
       <p:sp>
         <p:nvSpPr>
-          <p:cNvPr id="11" name="page-number">
-            <a:extLst xmlns:a="http://schemas.openxmlformats.org/drawingml/2006/main">
-              <a:ext uri="{FF2B5EF4-FFF2-40B4-BE49-F238E27FC236}">
-                <a16:creationId xmlns:a16="http://schemas.microsoft.com/office/drawing/2014/main" id="{36F8F1F1-BFED-4F92-AA7E-6C070F88FD1C}"/>
+          <p:cNvPr id="13" name="page-number">
+            <a:extLst xmlns:a="http://schemas.openxmlformats.org/drawingml/2006/main">
+              <a:ext uri="{FF2B5EF4-FFF2-40B4-BE49-F238E27FC236}">
+                <a16:creationId xmlns:a16="http://schemas.microsoft.com/office/drawing/2014/main" id="{7579B850-ECD1-4226-8F7C-9081B17263FC}"/>
               </a:ext>
             </a:extLst>
           </p:cNvPr>
@@ -5480,7 +5698,7 @@
     </p:spTree>
     <p:extLst>
       <p:ext uri="{BB962C8B-B14F-4D97-AF65-F5344CB8AC3E}">
-        <p14:creationId xmlns:p14="http://schemas.microsoft.com/office/powerpoint/2010/main" val="174383497"/>
+        <p14:creationId xmlns:p14="http://schemas.microsoft.com/office/powerpoint/2010/main" val="1286405737"/>
       </p:ext>
     </p:extLst>
   </p:cSld>
@@ -5516,10 +5734,10 @@
       </p:grpSpPr>
       <p:sp>
         <p:nvSpPr>
-          <p:cNvPr id="11" name="slide-title">
-            <a:extLst xmlns:a="http://schemas.openxmlformats.org/drawingml/2006/main">
-              <a:ext uri="{FF2B5EF4-FFF2-40B4-BE49-F238E27FC236}">
-                <a16:creationId xmlns:a16="http://schemas.microsoft.com/office/drawing/2014/main" id="{CC1AFA4F-91B6-4AD1-8739-2EC57FD18C45}"/>
+          <p:cNvPr id="13" name="slide-title">
+            <a:extLst xmlns:a="http://schemas.openxmlformats.org/drawingml/2006/main">
+              <a:ext uri="{FF2B5EF4-FFF2-40B4-BE49-F238E27FC236}">
+                <a16:creationId xmlns:a16="http://schemas.microsoft.com/office/drawing/2014/main" id="{A64A6833-A21F-4DDC-832E-DD9BCE81A401}"/>
               </a:ext>
             </a:extLst>
           </p:cNvPr>
@@ -5570,7 +5788,7 @@
           <p:cNvPr id="2" name="slide-subtitle">
             <a:extLst xmlns:a="http://schemas.openxmlformats.org/drawingml/2006/main">
               <a:ext uri="{FF2B5EF4-FFF2-40B4-BE49-F238E27FC236}">
-                <a16:creationId xmlns:a16="http://schemas.microsoft.com/office/drawing/2014/main" id="{EEFEA7B3-28CB-433E-9B2D-E960C07E9996}"/>
+                <a16:creationId xmlns:a16="http://schemas.microsoft.com/office/drawing/2014/main" id="{1461BDEE-A0A8-4F6A-8DFA-F655DA1AE2CF}"/>
               </a:ext>
             </a:extLst>
           </p:cNvPr>
@@ -5621,7 +5839,7 @@
           <p:cNvPr id="3" name="bullets">
             <a:extLst xmlns:a="http://schemas.openxmlformats.org/drawingml/2006/main">
               <a:ext uri="{FF2B5EF4-FFF2-40B4-BE49-F238E27FC236}">
-                <a16:creationId xmlns:a16="http://schemas.microsoft.com/office/drawing/2014/main" id="{220B02F5-9253-4AAA-9A07-B631CDB8B691}"/>
+                <a16:creationId xmlns:a16="http://schemas.microsoft.com/office/drawing/2014/main" id="{1E6CCFA7-C5E2-4529-AB32-C8A561446FBB}"/>
               </a:ext>
             </a:extLst>
           </p:cNvPr>
@@ -5708,7 +5926,7 @@
           <p:cNvPr id="4" name="ambient-glow">
             <a:extLst xmlns:a="http://schemas.openxmlformats.org/drawingml/2006/main">
               <a:ext uri="{FF2B5EF4-FFF2-40B4-BE49-F238E27FC236}">
-                <a16:creationId xmlns:a16="http://schemas.microsoft.com/office/drawing/2014/main" id="{72DB3DC4-0BA8-45EA-B605-C3D06B0D76E5}"/>
+                <a16:creationId xmlns:a16="http://schemas.microsoft.com/office/drawing/2014/main" id="{E82D1A77-08BA-4964-8D23-FC50370D8C77}"/>
               </a:ext>
             </a:extLst>
           </p:cNvPr>
@@ -5745,7 +5963,7 @@
           <p:cNvPr id="5" name="ambient-core">
             <a:extLst xmlns:a="http://schemas.openxmlformats.org/drawingml/2006/main">
               <a:ext uri="{FF2B5EF4-FFF2-40B4-BE49-F238E27FC236}">
-                <a16:creationId xmlns:a16="http://schemas.microsoft.com/office/drawing/2014/main" id="{6768A97E-7666-4053-9E05-52F36AD7C660}"/>
+                <a16:creationId xmlns:a16="http://schemas.microsoft.com/office/drawing/2014/main" id="{E11067A9-CE48-41A6-9F75-3BE06E297E69}"/>
               </a:ext>
             </a:extLst>
           </p:cNvPr>
@@ -5782,7 +6000,7 @@
           <p:cNvPr id="6" name="section-number">
             <a:extLst xmlns:a="http://schemas.openxmlformats.org/drawingml/2006/main">
               <a:ext uri="{FF2B5EF4-FFF2-40B4-BE49-F238E27FC236}">
-                <a16:creationId xmlns:a16="http://schemas.microsoft.com/office/drawing/2014/main" id="{361F0835-2328-4845-BB02-D785C52A6440}"/>
+                <a16:creationId xmlns:a16="http://schemas.microsoft.com/office/drawing/2014/main" id="{E11109BD-540B-42CC-8F51-ED3B9ABB740E}"/>
               </a:ext>
             </a:extLst>
           </p:cNvPr>
@@ -5833,7 +6051,7 @@
           <p:cNvPr id="7" name="eyebrow">
             <a:extLst xmlns:a="http://schemas.openxmlformats.org/drawingml/2006/main">
               <a:ext uri="{FF2B5EF4-FFF2-40B4-BE49-F238E27FC236}">
-                <a16:creationId xmlns:a16="http://schemas.microsoft.com/office/drawing/2014/main" id="{5A979F6A-AD52-433E-AB23-C5F34F1B693C}"/>
+                <a16:creationId xmlns:a16="http://schemas.microsoft.com/office/drawing/2014/main" id="{9B227F5F-1568-4984-9826-A6C196AADE69}"/>
               </a:ext>
             </a:extLst>
           </p:cNvPr>
@@ -5881,10 +6099,69 @@
       </p:sp>
       <p:sp>
         <p:nvSpPr>
-          <p:cNvPr id="8" name="footer-rule">
-            <a:extLst xmlns:a="http://schemas.openxmlformats.org/drawingml/2006/main">
-              <a:ext uri="{FF2B5EF4-FFF2-40B4-BE49-F238E27FC236}">
-                <a16:creationId xmlns:a16="http://schemas.microsoft.com/office/drawing/2014/main" id="{82F204AF-C254-4AA4-A382-5290F2C24E89}"/>
+          <p:cNvPr id="8" name="rescue-point-logo-background">
+            <a:extLst xmlns:a="http://schemas.openxmlformats.org/drawingml/2006/main">
+              <a:ext uri="{FF2B5EF4-FFF2-40B4-BE49-F238E27FC236}">
+                <a16:creationId xmlns:a16="http://schemas.microsoft.com/office/drawing/2014/main" id="{07207DB0-197C-433B-8960-9794F21B9BCE}"/>
+              </a:ext>
+            </a:extLst>
+          </p:cNvPr>
+          <p:cNvSpPr>
+            <a:spLocks xmlns:a="http://schemas.openxmlformats.org/drawingml/2006/main" noGrp="1"/>
+          </p:cNvSpPr>
+          <p:nvPr/>
+        </p:nvSpPr>
+        <p:spPr>
+          <a:xfrm xmlns:a="http://schemas.openxmlformats.org/drawingml/2006/main">
+            <a:off x="9772650" y="133350"/>
+            <a:ext cx="1733550" cy="457200"/>
+          </a:xfrm>
+          <a:prstGeom xmlns:a="http://schemas.openxmlformats.org/drawingml/2006/main" prst="roundRect">
+            <a:avLst>
+              <a:gd name="adj" fmla="val 16667"/>
+            </a:avLst>
+          </a:prstGeom>
+          <a:solidFill xmlns:a="http://schemas.openxmlformats.org/drawingml/2006/main">
+            <a:srgbClr val="06142E"/>
+          </a:solidFill>
+          <a:ln xmlns:a="http://schemas.openxmlformats.org/drawingml/2006/main" w="9525">
+            <a:solidFill>
+              <a:srgbClr val="1EC5FF">
+                <a:alpha val="33333"/>
+              </a:srgbClr>
+            </a:solidFill>
+            <a:prstDash val="solid"/>
+          </a:ln>
+        </p:spPr>
+      </p:sp>
+      <p:pic>
+        <p:nvPicPr>
+          <p:cNvPr id="23" name="" descr="Figura oficial da documentação dbt usada para explicar: Agentes ganham vocabulário compacto — Nomes de métricas comprimem contexto e reduzem joins inventados.."/>
+          <p:cNvPicPr>
+            <a:picLocks xmlns:a="http://schemas.openxmlformats.org/drawingml/2006/main" noChangeAspect="1"/>
+          </p:cNvPicPr>
+          <p:nvPr/>
+        </p:nvPicPr>
+        <p:blipFill>
+          <a:blip xmlns:r="http://schemas.openxmlformats.org/officeDocument/2006/relationships" xmlns:a="http://schemas.openxmlformats.org/drawingml/2006/main" r:embed="R6a5b27bf020b423a"/>
+          <a:stretch xmlns:a="http://schemas.openxmlformats.org/drawingml/2006/main"/>
+        </p:blipFill>
+        <p:spPr>
+          <a:xfrm xmlns:a="http://schemas.openxmlformats.org/drawingml/2006/main">
+            <a:off x="9893718" y="209550"/>
+            <a:ext cx="1491414" cy="323850"/>
+          </a:xfrm>
+          <a:prstGeom xmlns:a="http://schemas.openxmlformats.org/drawingml/2006/main" prst="rect">
+            <a:avLst/>
+          </a:prstGeom>
+        </p:spPr>
+      </p:pic>
+      <p:sp>
+        <p:nvSpPr>
+          <p:cNvPr id="10" name="footer-rule">
+            <a:extLst xmlns:a="http://schemas.openxmlformats.org/drawingml/2006/main">
+              <a:ext uri="{FF2B5EF4-FFF2-40B4-BE49-F238E27FC236}">
+                <a16:creationId xmlns:a16="http://schemas.microsoft.com/office/drawing/2014/main" id="{DA174777-18D3-4F1E-8731-05B4A205120A}"/>
               </a:ext>
             </a:extLst>
           </p:cNvPr>
@@ -5914,10 +6191,10 @@
       </p:sp>
       <p:sp>
         <p:nvSpPr>
-          <p:cNvPr id="9" name="footer">
-            <a:extLst xmlns:a="http://schemas.openxmlformats.org/drawingml/2006/main">
-              <a:ext uri="{FF2B5EF4-FFF2-40B4-BE49-F238E27FC236}">
-                <a16:creationId xmlns:a16="http://schemas.microsoft.com/office/drawing/2014/main" id="{916A0FC1-9B67-4156-814C-65720FB77A93}"/>
+          <p:cNvPr id="11" name="footer">
+            <a:extLst xmlns:a="http://schemas.openxmlformats.org/drawingml/2006/main">
+              <a:ext uri="{FF2B5EF4-FFF2-40B4-BE49-F238E27FC236}">
+                <a16:creationId xmlns:a16="http://schemas.microsoft.com/office/drawing/2014/main" id="{8ABAF450-F671-4FFA-9159-C2AF7C86B33B}"/>
               </a:ext>
             </a:extLst>
           </p:cNvPr>
@@ -5969,10 +6246,10 @@
       </p:sp>
       <p:sp>
         <p:nvSpPr>
-          <p:cNvPr id="10" name="page-number">
-            <a:extLst xmlns:a="http://schemas.openxmlformats.org/drawingml/2006/main">
-              <a:ext uri="{FF2B5EF4-FFF2-40B4-BE49-F238E27FC236}">
-                <a16:creationId xmlns:a16="http://schemas.microsoft.com/office/drawing/2014/main" id="{2C48792C-312B-43AE-9EEE-C5E09C942412}"/>
+          <p:cNvPr id="12" name="page-number">
+            <a:extLst xmlns:a="http://schemas.openxmlformats.org/drawingml/2006/main">
+              <a:ext uri="{FF2B5EF4-FFF2-40B4-BE49-F238E27FC236}">
+                <a16:creationId xmlns:a16="http://schemas.microsoft.com/office/drawing/2014/main" id="{4AB39217-926D-4BEE-A28C-92EA289C7D22}"/>
               </a:ext>
             </a:extLst>
           </p:cNvPr>
@@ -6025,7 +6302,7 @@
     </p:spTree>
     <p:extLst>
       <p:ext uri="{BB962C8B-B14F-4D97-AF65-F5344CB8AC3E}">
-        <p14:creationId xmlns:p14="http://schemas.microsoft.com/office/powerpoint/2010/main" val="160023343"/>
+        <p14:creationId xmlns:p14="http://schemas.microsoft.com/office/powerpoint/2010/main" val="922837757"/>
       </p:ext>
     </p:extLst>
   </p:cSld>
@@ -6053,10 +6330,10 @@
       </p:grpSpPr>
       <p:sp>
         <p:nvSpPr>
-          <p:cNvPr id="13" name="slide-title">
-            <a:extLst xmlns:a="http://schemas.openxmlformats.org/drawingml/2006/main">
-              <a:ext uri="{FF2B5EF4-FFF2-40B4-BE49-F238E27FC236}">
-                <a16:creationId xmlns:a16="http://schemas.microsoft.com/office/drawing/2014/main" id="{67FE505C-A579-4B6A-944C-3DD767B06F1D}"/>
+          <p:cNvPr id="15" name="slide-title">
+            <a:extLst xmlns:a="http://schemas.openxmlformats.org/drawingml/2006/main">
+              <a:ext uri="{FF2B5EF4-FFF2-40B4-BE49-F238E27FC236}">
+                <a16:creationId xmlns:a16="http://schemas.microsoft.com/office/drawing/2014/main" id="{80311DAE-D24D-448B-B638-75CBC2406844}"/>
               </a:ext>
             </a:extLst>
           </p:cNvPr>
@@ -6107,7 +6384,7 @@
           <p:cNvPr id="2" name="flow-1">
             <a:extLst xmlns:a="http://schemas.openxmlformats.org/drawingml/2006/main">
               <a:ext uri="{FF2B5EF4-FFF2-40B4-BE49-F238E27FC236}">
-                <a16:creationId xmlns:a16="http://schemas.microsoft.com/office/drawing/2014/main" id="{B2EAFBAB-E00D-4468-B149-89A229E18528}"/>
+                <a16:creationId xmlns:a16="http://schemas.microsoft.com/office/drawing/2014/main" id="{98257B5F-D488-40AE-B4E5-BDC2C5F95C29}"/>
               </a:ext>
             </a:extLst>
           </p:cNvPr>
@@ -6164,7 +6441,7 @@
           <p:cNvPr id="3" name="flow-2">
             <a:extLst xmlns:a="http://schemas.openxmlformats.org/drawingml/2006/main">
               <a:ext uri="{FF2B5EF4-FFF2-40B4-BE49-F238E27FC236}">
-                <a16:creationId xmlns:a16="http://schemas.microsoft.com/office/drawing/2014/main" id="{03F23558-50BA-4A2B-BB25-C627518829F4}"/>
+                <a16:creationId xmlns:a16="http://schemas.microsoft.com/office/drawing/2014/main" id="{EAA665F7-1443-4E39-A56E-8B6FDE57D04F}"/>
               </a:ext>
             </a:extLst>
           </p:cNvPr>
@@ -6221,7 +6498,7 @@
           <p:cNvPr id="4" name="flow-3">
             <a:extLst xmlns:a="http://schemas.openxmlformats.org/drawingml/2006/main">
               <a:ext uri="{FF2B5EF4-FFF2-40B4-BE49-F238E27FC236}">
-                <a16:creationId xmlns:a16="http://schemas.microsoft.com/office/drawing/2014/main" id="{62B12CF4-D933-4622-8527-6E3C5286ECF7}"/>
+                <a16:creationId xmlns:a16="http://schemas.microsoft.com/office/drawing/2014/main" id="{276214D6-FA85-4FC8-8215-891895BFA033}"/>
               </a:ext>
             </a:extLst>
           </p:cNvPr>
@@ -6278,7 +6555,7 @@
           <p:cNvPr id="5" name="flow-4">
             <a:extLst xmlns:a="http://schemas.openxmlformats.org/drawingml/2006/main">
               <a:ext uri="{FF2B5EF4-FFF2-40B4-BE49-F238E27FC236}">
-                <a16:creationId xmlns:a16="http://schemas.microsoft.com/office/drawing/2014/main" id="{C9AE7B80-3FC0-4378-B84A-CF2AAA9860D8}"/>
+                <a16:creationId xmlns:a16="http://schemas.microsoft.com/office/drawing/2014/main" id="{C05BA1B8-B268-4E03-A6E0-8EAB283C6E6A}"/>
               </a:ext>
             </a:extLst>
           </p:cNvPr>
@@ -6332,7 +6609,7 @@
       </p:sp>
       <p:cxnSp>
         <p:nvCxnSpPr>
-          <p:cNvPr id="26" name=""/>
+          <p:cNvPr id="29" name=""/>
           <p:cNvCxnSpPr>
             <a:stCxn xmlns:a="http://schemas.openxmlformats.org/drawingml/2006/main" id="2" idx="3"/>
             <a:endCxn xmlns:a="http://schemas.openxmlformats.org/drawingml/2006/main" id="3" idx="1"/>
@@ -6358,7 +6635,7 @@
       </p:cxnSp>
       <p:cxnSp>
         <p:nvCxnSpPr>
-          <p:cNvPr id="27" name=""/>
+          <p:cNvPr id="30" name=""/>
           <p:cNvCxnSpPr>
             <a:stCxn xmlns:a="http://schemas.openxmlformats.org/drawingml/2006/main" id="3" idx="3"/>
             <a:endCxn xmlns:a="http://schemas.openxmlformats.org/drawingml/2006/main" id="4" idx="1"/>
@@ -6384,7 +6661,7 @@
       </p:cxnSp>
       <p:cxnSp>
         <p:nvCxnSpPr>
-          <p:cNvPr id="28" name=""/>
+          <p:cNvPr id="31" name=""/>
           <p:cNvCxnSpPr>
             <a:stCxn xmlns:a="http://schemas.openxmlformats.org/drawingml/2006/main" id="4" idx="3"/>
             <a:endCxn xmlns:a="http://schemas.openxmlformats.org/drawingml/2006/main" id="5" idx="1"/>
@@ -6413,7 +6690,7 @@
           <p:cNvPr id="9" name="eyebrow">
             <a:extLst xmlns:a="http://schemas.openxmlformats.org/drawingml/2006/main">
               <a:ext uri="{FF2B5EF4-FFF2-40B4-BE49-F238E27FC236}">
-                <a16:creationId xmlns:a16="http://schemas.microsoft.com/office/drawing/2014/main" id="{E6F41B0D-65D3-48F4-8873-C5478DF375D7}"/>
+                <a16:creationId xmlns:a16="http://schemas.microsoft.com/office/drawing/2014/main" id="{8DDF771D-9D0C-41E9-A784-8854F5638B93}"/>
               </a:ext>
             </a:extLst>
           </p:cNvPr>
@@ -6461,10 +6738,69 @@
       </p:sp>
       <p:sp>
         <p:nvSpPr>
-          <p:cNvPr id="10" name="footer-rule">
-            <a:extLst xmlns:a="http://schemas.openxmlformats.org/drawingml/2006/main">
-              <a:ext uri="{FF2B5EF4-FFF2-40B4-BE49-F238E27FC236}">
-                <a16:creationId xmlns:a16="http://schemas.microsoft.com/office/drawing/2014/main" id="{030E49BE-68AE-4E4E-BAD3-8794E11F5347}"/>
+          <p:cNvPr id="10" name="rescue-point-logo-background">
+            <a:extLst xmlns:a="http://schemas.openxmlformats.org/drawingml/2006/main">
+              <a:ext uri="{FF2B5EF4-FFF2-40B4-BE49-F238E27FC236}">
+                <a16:creationId xmlns:a16="http://schemas.microsoft.com/office/drawing/2014/main" id="{2D1329CF-0A3C-4CA9-A98A-4B4A7D87D1EE}"/>
+              </a:ext>
+            </a:extLst>
+          </p:cNvPr>
+          <p:cNvSpPr>
+            <a:spLocks xmlns:a="http://schemas.openxmlformats.org/drawingml/2006/main" noGrp="1"/>
+          </p:cNvSpPr>
+          <p:nvPr/>
+        </p:nvSpPr>
+        <p:spPr>
+          <a:xfrm xmlns:a="http://schemas.openxmlformats.org/drawingml/2006/main">
+            <a:off x="9772650" y="133350"/>
+            <a:ext cx="1733550" cy="457200"/>
+          </a:xfrm>
+          <a:prstGeom xmlns:a="http://schemas.openxmlformats.org/drawingml/2006/main" prst="roundRect">
+            <a:avLst>
+              <a:gd name="adj" fmla="val 16667"/>
+            </a:avLst>
+          </a:prstGeom>
+          <a:solidFill xmlns:a="http://schemas.openxmlformats.org/drawingml/2006/main">
+            <a:srgbClr val="06142E"/>
+          </a:solidFill>
+          <a:ln xmlns:a="http://schemas.openxmlformats.org/drawingml/2006/main" w="9525">
+            <a:solidFill>
+              <a:srgbClr val="1EC5FF">
+                <a:alpha val="33333"/>
+              </a:srgbClr>
+            </a:solidFill>
+            <a:prstDash val="solid"/>
+          </a:ln>
+        </p:spPr>
+      </p:sp>
+      <p:pic>
+        <p:nvPicPr>
+          <p:cNvPr id="34" name="" descr="Figura oficial da documentação dbt usada para explicar: Agentes ganham vocabulário compacto — Pergunta."/>
+          <p:cNvPicPr>
+            <a:picLocks xmlns:a="http://schemas.openxmlformats.org/drawingml/2006/main" noChangeAspect="1"/>
+          </p:cNvPicPr>
+          <p:nvPr/>
+        </p:nvPicPr>
+        <p:blipFill>
+          <a:blip xmlns:r="http://schemas.openxmlformats.org/officeDocument/2006/relationships" xmlns:a="http://schemas.openxmlformats.org/drawingml/2006/main" r:embed="Rfa9f3a77b0eb4062"/>
+          <a:stretch xmlns:a="http://schemas.openxmlformats.org/drawingml/2006/main"/>
+        </p:blipFill>
+        <p:spPr>
+          <a:xfrm xmlns:a="http://schemas.openxmlformats.org/drawingml/2006/main">
+            <a:off x="9893718" y="209550"/>
+            <a:ext cx="1491414" cy="323850"/>
+          </a:xfrm>
+          <a:prstGeom xmlns:a="http://schemas.openxmlformats.org/drawingml/2006/main" prst="rect">
+            <a:avLst/>
+          </a:prstGeom>
+        </p:spPr>
+      </p:pic>
+      <p:sp>
+        <p:nvSpPr>
+          <p:cNvPr id="12" name="footer-rule">
+            <a:extLst xmlns:a="http://schemas.openxmlformats.org/drawingml/2006/main">
+              <a:ext uri="{FF2B5EF4-FFF2-40B4-BE49-F238E27FC236}">
+                <a16:creationId xmlns:a16="http://schemas.microsoft.com/office/drawing/2014/main" id="{9B1EF222-8397-4834-9AF7-6675CC3B0FC8}"/>
               </a:ext>
             </a:extLst>
           </p:cNvPr>
@@ -6494,10 +6830,10 @@
       </p:sp>
       <p:sp>
         <p:nvSpPr>
-          <p:cNvPr id="11" name="footer">
-            <a:extLst xmlns:a="http://schemas.openxmlformats.org/drawingml/2006/main">
-              <a:ext uri="{FF2B5EF4-FFF2-40B4-BE49-F238E27FC236}">
-                <a16:creationId xmlns:a16="http://schemas.microsoft.com/office/drawing/2014/main" id="{7D99CAB4-D7D9-4869-9A4C-F66F7B32413D}"/>
+          <p:cNvPr id="13" name="footer">
+            <a:extLst xmlns:a="http://schemas.openxmlformats.org/drawingml/2006/main">
+              <a:ext uri="{FF2B5EF4-FFF2-40B4-BE49-F238E27FC236}">
+                <a16:creationId xmlns:a16="http://schemas.microsoft.com/office/drawing/2014/main" id="{9EB9F2F8-C834-4CDC-82A6-C5827C0C7F43}"/>
               </a:ext>
             </a:extLst>
           </p:cNvPr>
@@ -6549,10 +6885,10 @@
       </p:sp>
       <p:sp>
         <p:nvSpPr>
-          <p:cNvPr id="12" name="page-number">
-            <a:extLst xmlns:a="http://schemas.openxmlformats.org/drawingml/2006/main">
-              <a:ext uri="{FF2B5EF4-FFF2-40B4-BE49-F238E27FC236}">
-                <a16:creationId xmlns:a16="http://schemas.microsoft.com/office/drawing/2014/main" id="{9DC19DD0-F3C3-44E5-A78E-104CEB6B8C08}"/>
+          <p:cNvPr id="14" name="page-number">
+            <a:extLst xmlns:a="http://schemas.openxmlformats.org/drawingml/2006/main">
+              <a:ext uri="{FF2B5EF4-FFF2-40B4-BE49-F238E27FC236}">
+                <a16:creationId xmlns:a16="http://schemas.microsoft.com/office/drawing/2014/main" id="{C3709840-9EDB-4C91-8AE5-0A31EA58ADC8}"/>
               </a:ext>
             </a:extLst>
           </p:cNvPr>
@@ -6605,7 +6941,7 @@
     </p:spTree>
     <p:extLst>
       <p:ext uri="{BB962C8B-B14F-4D97-AF65-F5344CB8AC3E}">
-        <p14:creationId xmlns:p14="http://schemas.microsoft.com/office/powerpoint/2010/main" val="1657812929"/>
+        <p14:creationId xmlns:p14="http://schemas.microsoft.com/office/powerpoint/2010/main" val="686381222"/>
       </p:ext>
     </p:extLst>
   </p:cSld>
@@ -6641,10 +6977,10 @@
       </p:grpSpPr>
       <p:sp>
         <p:nvSpPr>
-          <p:cNvPr id="9" name="slide-title">
-            <a:extLst xmlns:a="http://schemas.openxmlformats.org/drawingml/2006/main">
-              <a:ext uri="{FF2B5EF4-FFF2-40B4-BE49-F238E27FC236}">
-                <a16:creationId xmlns:a16="http://schemas.microsoft.com/office/drawing/2014/main" id="{29FF2EF4-4F24-48B2-B139-E7AECE8CD00A}"/>
+          <p:cNvPr id="11" name="slide-title">
+            <a:extLst xmlns:a="http://schemas.openxmlformats.org/drawingml/2006/main">
+              <a:ext uri="{FF2B5EF4-FFF2-40B4-BE49-F238E27FC236}">
+                <a16:creationId xmlns:a16="http://schemas.microsoft.com/office/drawing/2014/main" id="{32DD8F4E-CEDB-4236-A3E0-C02628695B9F}"/>
               </a:ext>
             </a:extLst>
           </p:cNvPr>
@@ -6695,7 +7031,7 @@
           <p:cNvPr id="2" name="code-surface">
             <a:extLst xmlns:a="http://schemas.openxmlformats.org/drawingml/2006/main">
               <a:ext uri="{FF2B5EF4-FFF2-40B4-BE49-F238E27FC236}">
-                <a16:creationId xmlns:a16="http://schemas.microsoft.com/office/drawing/2014/main" id="{2728FA21-EC35-4B43-B4D7-6888DBAAE13E}"/>
+                <a16:creationId xmlns:a16="http://schemas.microsoft.com/office/drawing/2014/main" id="{3AB8FD26-1958-484B-92A5-D7FF07D7476A}"/>
               </a:ext>
             </a:extLst>
           </p:cNvPr>
@@ -6730,7 +7066,7 @@
           <p:cNvPr id="3" name="command">
             <a:extLst xmlns:a="http://schemas.openxmlformats.org/drawingml/2006/main">
               <a:ext uri="{FF2B5EF4-FFF2-40B4-BE49-F238E27FC236}">
-                <a16:creationId xmlns:a16="http://schemas.microsoft.com/office/drawing/2014/main" id="{A8D45197-EE46-4632-A988-868248E90321}"/>
+                <a16:creationId xmlns:a16="http://schemas.microsoft.com/office/drawing/2014/main" id="{AE7B8024-F7AD-4480-B8A0-A2CEFD339081}"/>
               </a:ext>
             </a:extLst>
           </p:cNvPr>
@@ -6781,7 +7117,7 @@
           <p:cNvPr id="4" name="command-help">
             <a:extLst xmlns:a="http://schemas.openxmlformats.org/drawingml/2006/main">
               <a:ext uri="{FF2B5EF4-FFF2-40B4-BE49-F238E27FC236}">
-                <a16:creationId xmlns:a16="http://schemas.microsoft.com/office/drawing/2014/main" id="{F56836D4-6D0A-4C99-AE23-1B8809F90869}"/>
+                <a16:creationId xmlns:a16="http://schemas.microsoft.com/office/drawing/2014/main" id="{41102E08-2724-4732-9698-9E2554379353}"/>
               </a:ext>
             </a:extLst>
           </p:cNvPr>
@@ -6832,7 +7168,7 @@
           <p:cNvPr id="5" name="eyebrow">
             <a:extLst xmlns:a="http://schemas.openxmlformats.org/drawingml/2006/main">
               <a:ext uri="{FF2B5EF4-FFF2-40B4-BE49-F238E27FC236}">
-                <a16:creationId xmlns:a16="http://schemas.microsoft.com/office/drawing/2014/main" id="{5DFC19CA-78B1-478C-B5BA-6009E9C58EDF}"/>
+                <a16:creationId xmlns:a16="http://schemas.microsoft.com/office/drawing/2014/main" id="{D5268C43-6F90-40B3-BA83-6FE695D1F1B9}"/>
               </a:ext>
             </a:extLst>
           </p:cNvPr>
@@ -6880,10 +7216,69 @@
       </p:sp>
       <p:sp>
         <p:nvSpPr>
-          <p:cNvPr id="6" name="footer-rule">
-            <a:extLst xmlns:a="http://schemas.openxmlformats.org/drawingml/2006/main">
-              <a:ext uri="{FF2B5EF4-FFF2-40B4-BE49-F238E27FC236}">
-                <a16:creationId xmlns:a16="http://schemas.microsoft.com/office/drawing/2014/main" id="{E1AE4347-6C8A-4401-9CB5-08B85BC2DB50}"/>
+          <p:cNvPr id="6" name="rescue-point-logo-background">
+            <a:extLst xmlns:a="http://schemas.openxmlformats.org/drawingml/2006/main">
+              <a:ext uri="{FF2B5EF4-FFF2-40B4-BE49-F238E27FC236}">
+                <a16:creationId xmlns:a16="http://schemas.microsoft.com/office/drawing/2014/main" id="{FE401BA2-1E04-4EC3-8F03-531B6B9AAEDB}"/>
+              </a:ext>
+            </a:extLst>
+          </p:cNvPr>
+          <p:cNvSpPr>
+            <a:spLocks xmlns:a="http://schemas.openxmlformats.org/drawingml/2006/main" noGrp="1"/>
+          </p:cNvSpPr>
+          <p:nvPr/>
+        </p:nvSpPr>
+        <p:spPr>
+          <a:xfrm xmlns:a="http://schemas.openxmlformats.org/drawingml/2006/main">
+            <a:off x="9772650" y="133350"/>
+            <a:ext cx="1733550" cy="457200"/>
+          </a:xfrm>
+          <a:prstGeom xmlns:a="http://schemas.openxmlformats.org/drawingml/2006/main" prst="roundRect">
+            <a:avLst>
+              <a:gd name="adj" fmla="val 16667"/>
+            </a:avLst>
+          </a:prstGeom>
+          <a:solidFill xmlns:a="http://schemas.openxmlformats.org/drawingml/2006/main">
+            <a:srgbClr val="06142E"/>
+          </a:solidFill>
+          <a:ln xmlns:a="http://schemas.openxmlformats.org/drawingml/2006/main" w="9525">
+            <a:solidFill>
+              <a:srgbClr val="1EC5FF">
+                <a:alpha val="33333"/>
+              </a:srgbClr>
+            </a:solidFill>
+            <a:prstDash val="solid"/>
+          </a:ln>
+        </p:spPr>
+      </p:sp>
+      <p:pic>
+        <p:nvPicPr>
+          <p:cNvPr id="19" name="" descr="Figura oficial da documentação dbt usada para explicar: Demonstração — execute — python course.py checkpoint 04."/>
+          <p:cNvPicPr>
+            <a:picLocks xmlns:a="http://schemas.openxmlformats.org/drawingml/2006/main" noChangeAspect="1"/>
+          </p:cNvPicPr>
+          <p:nvPr/>
+        </p:nvPicPr>
+        <p:blipFill>
+          <a:blip xmlns:r="http://schemas.openxmlformats.org/officeDocument/2006/relationships" xmlns:a="http://schemas.openxmlformats.org/drawingml/2006/main" r:embed="R3665628ee2294eaf"/>
+          <a:stretch xmlns:a="http://schemas.openxmlformats.org/drawingml/2006/main"/>
+        </p:blipFill>
+        <p:spPr>
+          <a:xfrm xmlns:a="http://schemas.openxmlformats.org/drawingml/2006/main">
+            <a:off x="9893718" y="209550"/>
+            <a:ext cx="1491414" cy="323850"/>
+          </a:xfrm>
+          <a:prstGeom xmlns:a="http://schemas.openxmlformats.org/drawingml/2006/main" prst="rect">
+            <a:avLst/>
+          </a:prstGeom>
+        </p:spPr>
+      </p:pic>
+      <p:sp>
+        <p:nvSpPr>
+          <p:cNvPr id="8" name="footer-rule">
+            <a:extLst xmlns:a="http://schemas.openxmlformats.org/drawingml/2006/main">
+              <a:ext uri="{FF2B5EF4-FFF2-40B4-BE49-F238E27FC236}">
+                <a16:creationId xmlns:a16="http://schemas.microsoft.com/office/drawing/2014/main" id="{C5425F79-40EA-4661-9E3C-629F4C146579}"/>
               </a:ext>
             </a:extLst>
           </p:cNvPr>
@@ -6913,10 +7308,10 @@
       </p:sp>
       <p:sp>
         <p:nvSpPr>
-          <p:cNvPr id="7" name="footer">
-            <a:extLst xmlns:a="http://schemas.openxmlformats.org/drawingml/2006/main">
-              <a:ext uri="{FF2B5EF4-FFF2-40B4-BE49-F238E27FC236}">
-                <a16:creationId xmlns:a16="http://schemas.microsoft.com/office/drawing/2014/main" id="{E9BEA6FA-DA3F-49B7-9ADF-223CFACF68E2}"/>
+          <p:cNvPr id="9" name="footer">
+            <a:extLst xmlns:a="http://schemas.openxmlformats.org/drawingml/2006/main">
+              <a:ext uri="{FF2B5EF4-FFF2-40B4-BE49-F238E27FC236}">
+                <a16:creationId xmlns:a16="http://schemas.microsoft.com/office/drawing/2014/main" id="{92EEA321-2813-40B9-8E80-77C02FD10188}"/>
               </a:ext>
             </a:extLst>
           </p:cNvPr>
@@ -6968,10 +7363,10 @@
       </p:sp>
       <p:sp>
         <p:nvSpPr>
-          <p:cNvPr id="8" name="page-number">
-            <a:extLst xmlns:a="http://schemas.openxmlformats.org/drawingml/2006/main">
-              <a:ext uri="{FF2B5EF4-FFF2-40B4-BE49-F238E27FC236}">
-                <a16:creationId xmlns:a16="http://schemas.microsoft.com/office/drawing/2014/main" id="{B6532930-0A71-48FF-A8E5-32F3E11CF36F}"/>
+          <p:cNvPr id="10" name="page-number">
+            <a:extLst xmlns:a="http://schemas.openxmlformats.org/drawingml/2006/main">
+              <a:ext uri="{FF2B5EF4-FFF2-40B4-BE49-F238E27FC236}">
+                <a16:creationId xmlns:a16="http://schemas.microsoft.com/office/drawing/2014/main" id="{D57D8425-C9C5-4FB9-BEAD-F98F13D3ACD6}"/>
               </a:ext>
             </a:extLst>
           </p:cNvPr>
@@ -7024,7 +7419,7 @@
     </p:spTree>
     <p:extLst>
       <p:ext uri="{BB962C8B-B14F-4D97-AF65-F5344CB8AC3E}">
-        <p14:creationId xmlns:p14="http://schemas.microsoft.com/office/powerpoint/2010/main" val="2017338661"/>
+        <p14:creationId xmlns:p14="http://schemas.microsoft.com/office/powerpoint/2010/main" val="677560174"/>
       </p:ext>
     </p:extLst>
   </p:cSld>
@@ -7052,10 +7447,10 @@
       </p:grpSpPr>
       <p:sp>
         <p:nvSpPr>
-          <p:cNvPr id="14" name="slide-title">
-            <a:extLst xmlns:a="http://schemas.openxmlformats.org/drawingml/2006/main">
-              <a:ext uri="{FF2B5EF4-FFF2-40B4-BE49-F238E27FC236}">
-                <a16:creationId xmlns:a16="http://schemas.microsoft.com/office/drawing/2014/main" id="{7FE42B7E-6F25-4D6E-96C0-DAEC02D95681}"/>
+          <p:cNvPr id="16" name="slide-title">
+            <a:extLst xmlns:a="http://schemas.openxmlformats.org/drawingml/2006/main">
+              <a:ext uri="{FF2B5EF4-FFF2-40B4-BE49-F238E27FC236}">
+                <a16:creationId xmlns:a16="http://schemas.microsoft.com/office/drawing/2014/main" id="{60E87A8A-B799-486F-AF59-76260990B0CC}"/>
               </a:ext>
             </a:extLst>
           </p:cNvPr>
@@ -7106,7 +7501,7 @@
           <p:cNvPr id="2" name="step-num-1">
             <a:extLst xmlns:a="http://schemas.openxmlformats.org/drawingml/2006/main">
               <a:ext uri="{FF2B5EF4-FFF2-40B4-BE49-F238E27FC236}">
-                <a16:creationId xmlns:a16="http://schemas.microsoft.com/office/drawing/2014/main" id="{9354AFC6-E209-4B9D-9798-1690E1898891}"/>
+                <a16:creationId xmlns:a16="http://schemas.microsoft.com/office/drawing/2014/main" id="{65FBD3C1-B91C-45D1-9D56-827612AB5BA2}"/>
               </a:ext>
             </a:extLst>
           </p:cNvPr>
@@ -7157,7 +7552,7 @@
           <p:cNvPr id="3" name="step-label-1">
             <a:extLst xmlns:a="http://schemas.openxmlformats.org/drawingml/2006/main">
               <a:ext uri="{FF2B5EF4-FFF2-40B4-BE49-F238E27FC236}">
-                <a16:creationId xmlns:a16="http://schemas.microsoft.com/office/drawing/2014/main" id="{3D609106-5841-4A8D-9D4D-4E5815FB2CA5}"/>
+                <a16:creationId xmlns:a16="http://schemas.microsoft.com/office/drawing/2014/main" id="{9688B413-97E0-4C8D-B837-6C20F09C4D50}"/>
               </a:ext>
             </a:extLst>
           </p:cNvPr>
@@ -7208,7 +7603,7 @@
           <p:cNvPr id="4" name="step-line-1">
             <a:extLst xmlns:a="http://schemas.openxmlformats.org/drawingml/2006/main">
               <a:ext uri="{FF2B5EF4-FFF2-40B4-BE49-F238E27FC236}">
-                <a16:creationId xmlns:a16="http://schemas.microsoft.com/office/drawing/2014/main" id="{EF7786D6-B9A1-47A2-BFD9-95675FD2DE1F}"/>
+                <a16:creationId xmlns:a16="http://schemas.microsoft.com/office/drawing/2014/main" id="{2292B801-2BA1-46B5-9EE9-076DD6FED9A6}"/>
               </a:ext>
             </a:extLst>
           </p:cNvPr>
@@ -7239,7 +7634,7 @@
           <p:cNvPr id="5" name="step-num-2">
             <a:extLst xmlns:a="http://schemas.openxmlformats.org/drawingml/2006/main">
               <a:ext uri="{FF2B5EF4-FFF2-40B4-BE49-F238E27FC236}">
-                <a16:creationId xmlns:a16="http://schemas.microsoft.com/office/drawing/2014/main" id="{203542BB-28D9-4C62-B594-91D022FBF413}"/>
+                <a16:creationId xmlns:a16="http://schemas.microsoft.com/office/drawing/2014/main" id="{EE6C8149-39CD-4FC2-B3BF-B60EB045A370}"/>
               </a:ext>
             </a:extLst>
           </p:cNvPr>
@@ -7290,7 +7685,7 @@
           <p:cNvPr id="6" name="step-label-2">
             <a:extLst xmlns:a="http://schemas.openxmlformats.org/drawingml/2006/main">
               <a:ext uri="{FF2B5EF4-FFF2-40B4-BE49-F238E27FC236}">
-                <a16:creationId xmlns:a16="http://schemas.microsoft.com/office/drawing/2014/main" id="{B2569F71-8FD6-4A5B-93B2-533BC559A72C}"/>
+                <a16:creationId xmlns:a16="http://schemas.microsoft.com/office/drawing/2014/main" id="{31066025-7189-450D-8719-DE760CC451E1}"/>
               </a:ext>
             </a:extLst>
           </p:cNvPr>
@@ -7341,7 +7736,7 @@
           <p:cNvPr id="7" name="step-line-2">
             <a:extLst xmlns:a="http://schemas.openxmlformats.org/drawingml/2006/main">
               <a:ext uri="{FF2B5EF4-FFF2-40B4-BE49-F238E27FC236}">
-                <a16:creationId xmlns:a16="http://schemas.microsoft.com/office/drawing/2014/main" id="{4327F719-0CC9-453A-9330-852BF6CE4F49}"/>
+                <a16:creationId xmlns:a16="http://schemas.microsoft.com/office/drawing/2014/main" id="{9C8791E3-51D2-4E4D-AB89-38F03C1C5309}"/>
               </a:ext>
             </a:extLst>
           </p:cNvPr>
@@ -7372,7 +7767,7 @@
           <p:cNvPr id="8" name="step-num-3">
             <a:extLst xmlns:a="http://schemas.openxmlformats.org/drawingml/2006/main">
               <a:ext uri="{FF2B5EF4-FFF2-40B4-BE49-F238E27FC236}">
-                <a16:creationId xmlns:a16="http://schemas.microsoft.com/office/drawing/2014/main" id="{053A69D3-70F4-4058-9953-09A6909850CB}"/>
+                <a16:creationId xmlns:a16="http://schemas.microsoft.com/office/drawing/2014/main" id="{BFB63742-E303-4E47-B23C-D5C8949D0DAD}"/>
               </a:ext>
             </a:extLst>
           </p:cNvPr>
@@ -7423,7 +7818,7 @@
           <p:cNvPr id="9" name="step-label-3">
             <a:extLst xmlns:a="http://schemas.openxmlformats.org/drawingml/2006/main">
               <a:ext uri="{FF2B5EF4-FFF2-40B4-BE49-F238E27FC236}">
-                <a16:creationId xmlns:a16="http://schemas.microsoft.com/office/drawing/2014/main" id="{A59ED376-29E1-4B2B-A164-941B64944C80}"/>
+                <a16:creationId xmlns:a16="http://schemas.microsoft.com/office/drawing/2014/main" id="{592995EB-8DC9-43A0-8977-4DD1EC71F144}"/>
               </a:ext>
             </a:extLst>
           </p:cNvPr>
@@ -7474,7 +7869,7 @@
           <p:cNvPr id="10" name="eyebrow">
             <a:extLst xmlns:a="http://schemas.openxmlformats.org/drawingml/2006/main">
               <a:ext uri="{FF2B5EF4-FFF2-40B4-BE49-F238E27FC236}">
-                <a16:creationId xmlns:a16="http://schemas.microsoft.com/office/drawing/2014/main" id="{CE3C8B2A-2415-4371-9D82-677E9835D8D8}"/>
+                <a16:creationId xmlns:a16="http://schemas.microsoft.com/office/drawing/2014/main" id="{64EF7120-D196-440F-8D45-FAF4AC1ACDDE}"/>
               </a:ext>
             </a:extLst>
           </p:cNvPr>
@@ -7522,10 +7917,69 @@
       </p:sp>
       <p:sp>
         <p:nvSpPr>
-          <p:cNvPr id="11" name="footer-rule">
-            <a:extLst xmlns:a="http://schemas.openxmlformats.org/drawingml/2006/main">
-              <a:ext uri="{FF2B5EF4-FFF2-40B4-BE49-F238E27FC236}">
-                <a16:creationId xmlns:a16="http://schemas.microsoft.com/office/drawing/2014/main" id="{FE70D955-FD8F-4330-B40D-A54762A3E014}"/>
+          <p:cNvPr id="11" name="rescue-point-logo-background">
+            <a:extLst xmlns:a="http://schemas.openxmlformats.org/drawingml/2006/main">
+              <a:ext uri="{FF2B5EF4-FFF2-40B4-BE49-F238E27FC236}">
+                <a16:creationId xmlns:a16="http://schemas.microsoft.com/office/drawing/2014/main" id="{20A245DF-F13A-4B71-93CF-40BB3DE14A23}"/>
+              </a:ext>
+            </a:extLst>
+          </p:cNvPr>
+          <p:cNvSpPr>
+            <a:spLocks xmlns:a="http://schemas.openxmlformats.org/drawingml/2006/main" noGrp="1"/>
+          </p:cNvSpPr>
+          <p:nvPr/>
+        </p:nvSpPr>
+        <p:spPr>
+          <a:xfrm xmlns:a="http://schemas.openxmlformats.org/drawingml/2006/main">
+            <a:off x="9772650" y="133350"/>
+            <a:ext cx="1733550" cy="457200"/>
+          </a:xfrm>
+          <a:prstGeom xmlns:a="http://schemas.openxmlformats.org/drawingml/2006/main" prst="roundRect">
+            <a:avLst>
+              <a:gd name="adj" fmla="val 16667"/>
+            </a:avLst>
+          </a:prstGeom>
+          <a:solidFill xmlns:a="http://schemas.openxmlformats.org/drawingml/2006/main">
+            <a:srgbClr val="06142E"/>
+          </a:solidFill>
+          <a:ln xmlns:a="http://schemas.openxmlformats.org/drawingml/2006/main" w="9525">
+            <a:solidFill>
+              <a:srgbClr val="1EC5FF">
+                <a:alpha val="33333"/>
+              </a:srgbClr>
+            </a:solidFill>
+            <a:prstDash val="solid"/>
+          </a:ln>
+        </p:spPr>
+      </p:sp>
+      <p:pic>
+        <p:nvPicPr>
+          <p:cNvPr id="29" name="" descr="Figura oficial da documentação dbt usada para explicar: Demonstração — observe — 01."/>
+          <p:cNvPicPr>
+            <a:picLocks xmlns:a="http://schemas.openxmlformats.org/drawingml/2006/main" noChangeAspect="1"/>
+          </p:cNvPicPr>
+          <p:nvPr/>
+        </p:nvPicPr>
+        <p:blipFill>
+          <a:blip xmlns:r="http://schemas.openxmlformats.org/officeDocument/2006/relationships" xmlns:a="http://schemas.openxmlformats.org/drawingml/2006/main" r:embed="R8d30f34a88084bb2"/>
+          <a:stretch xmlns:a="http://schemas.openxmlformats.org/drawingml/2006/main"/>
+        </p:blipFill>
+        <p:spPr>
+          <a:xfrm xmlns:a="http://schemas.openxmlformats.org/drawingml/2006/main">
+            <a:off x="9893718" y="209550"/>
+            <a:ext cx="1491414" cy="323850"/>
+          </a:xfrm>
+          <a:prstGeom xmlns:a="http://schemas.openxmlformats.org/drawingml/2006/main" prst="rect">
+            <a:avLst/>
+          </a:prstGeom>
+        </p:spPr>
+      </p:pic>
+      <p:sp>
+        <p:nvSpPr>
+          <p:cNvPr id="13" name="footer-rule">
+            <a:extLst xmlns:a="http://schemas.openxmlformats.org/drawingml/2006/main">
+              <a:ext uri="{FF2B5EF4-FFF2-40B4-BE49-F238E27FC236}">
+                <a16:creationId xmlns:a16="http://schemas.microsoft.com/office/drawing/2014/main" id="{01DEE9B1-F325-4FFB-9A25-FC73124DE857}"/>
               </a:ext>
             </a:extLst>
           </p:cNvPr>
@@ -7555,10 +8009,10 @@
       </p:sp>
       <p:sp>
         <p:nvSpPr>
-          <p:cNvPr id="12" name="footer">
-            <a:extLst xmlns:a="http://schemas.openxmlformats.org/drawingml/2006/main">
-              <a:ext uri="{FF2B5EF4-FFF2-40B4-BE49-F238E27FC236}">
-                <a16:creationId xmlns:a16="http://schemas.microsoft.com/office/drawing/2014/main" id="{1BD2EC70-4D55-4B8D-A47A-538BE88774BA}"/>
+          <p:cNvPr id="14" name="footer">
+            <a:extLst xmlns:a="http://schemas.openxmlformats.org/drawingml/2006/main">
+              <a:ext uri="{FF2B5EF4-FFF2-40B4-BE49-F238E27FC236}">
+                <a16:creationId xmlns:a16="http://schemas.microsoft.com/office/drawing/2014/main" id="{43FF4958-E36E-4F1C-BF79-20247CAA8FDD}"/>
               </a:ext>
             </a:extLst>
           </p:cNvPr>
@@ -7610,10 +8064,10 @@
       </p:sp>
       <p:sp>
         <p:nvSpPr>
-          <p:cNvPr id="13" name="page-number">
-            <a:extLst xmlns:a="http://schemas.openxmlformats.org/drawingml/2006/main">
-              <a:ext uri="{FF2B5EF4-FFF2-40B4-BE49-F238E27FC236}">
-                <a16:creationId xmlns:a16="http://schemas.microsoft.com/office/drawing/2014/main" id="{36431C96-C379-48BC-ACCA-36E4BD61F6C4}"/>
+          <p:cNvPr id="15" name="page-number">
+            <a:extLst xmlns:a="http://schemas.openxmlformats.org/drawingml/2006/main">
+              <a:ext uri="{FF2B5EF4-FFF2-40B4-BE49-F238E27FC236}">
+                <a16:creationId xmlns:a16="http://schemas.microsoft.com/office/drawing/2014/main" id="{DF47EC0E-49C3-485F-936D-B4F1618A2E31}"/>
               </a:ext>
             </a:extLst>
           </p:cNvPr>
@@ -7666,7 +8120,7 @@
     </p:spTree>
     <p:extLst>
       <p:ext uri="{BB962C8B-B14F-4D97-AF65-F5344CB8AC3E}">
-        <p14:creationId xmlns:p14="http://schemas.microsoft.com/office/powerpoint/2010/main" val="1322346663"/>
+        <p14:creationId xmlns:p14="http://schemas.microsoft.com/office/powerpoint/2010/main" val="1785512660"/>
       </p:ext>
     </p:extLst>
   </p:cSld>
@@ -7702,10 +8156,10 @@
       </p:grpSpPr>
       <p:sp>
         <p:nvSpPr>
-          <p:cNvPr id="10" name="result-label">
-            <a:extLst xmlns:a="http://schemas.openxmlformats.org/drawingml/2006/main">
-              <a:ext uri="{FF2B5EF4-FFF2-40B4-BE49-F238E27FC236}">
-                <a16:creationId xmlns:a16="http://schemas.microsoft.com/office/drawing/2014/main" id="{A031093C-3472-4FDA-8BDD-94FA2BEF35AB}"/>
+          <p:cNvPr id="12" name="result-label">
+            <a:extLst xmlns:a="http://schemas.openxmlformats.org/drawingml/2006/main">
+              <a:ext uri="{FF2B5EF4-FFF2-40B4-BE49-F238E27FC236}">
+                <a16:creationId xmlns:a16="http://schemas.microsoft.com/office/drawing/2014/main" id="{88F35CC2-C8E7-4D92-9123-390C884DB322}"/>
               </a:ext>
             </a:extLst>
           </p:cNvPr>
@@ -7756,7 +8210,7 @@
           <p:cNvPr id="2" name="result">
             <a:extLst xmlns:a="http://schemas.openxmlformats.org/drawingml/2006/main">
               <a:ext uri="{FF2B5EF4-FFF2-40B4-BE49-F238E27FC236}">
-                <a16:creationId xmlns:a16="http://schemas.microsoft.com/office/drawing/2014/main" id="{14EE4AA1-AB6D-4BF4-A4DA-E6CCD2331DB9}"/>
+                <a16:creationId xmlns:a16="http://schemas.microsoft.com/office/drawing/2014/main" id="{C0EB65BA-B1E2-4894-A861-8DCD0EF792C0}"/>
               </a:ext>
             </a:extLst>
           </p:cNvPr>
@@ -7807,7 +8261,7 @@
           <p:cNvPr id="3" name="result-meta">
             <a:extLst xmlns:a="http://schemas.openxmlformats.org/drawingml/2006/main">
               <a:ext uri="{FF2B5EF4-FFF2-40B4-BE49-F238E27FC236}">
-                <a16:creationId xmlns:a16="http://schemas.microsoft.com/office/drawing/2014/main" id="{345C39AD-1629-47B3-A3A9-0DC7C51A6F6D}"/>
+                <a16:creationId xmlns:a16="http://schemas.microsoft.com/office/drawing/2014/main" id="{53FD64DD-2600-4E3F-9442-D318AEDE4A1A}"/>
               </a:ext>
             </a:extLst>
           </p:cNvPr>
@@ -7858,7 +8312,7 @@
           <p:cNvPr id="4" name="ambient-glow">
             <a:extLst xmlns:a="http://schemas.openxmlformats.org/drawingml/2006/main">
               <a:ext uri="{FF2B5EF4-FFF2-40B4-BE49-F238E27FC236}">
-                <a16:creationId xmlns:a16="http://schemas.microsoft.com/office/drawing/2014/main" id="{C835169B-976D-421A-9ECD-43D7C9F751D6}"/>
+                <a16:creationId xmlns:a16="http://schemas.microsoft.com/office/drawing/2014/main" id="{B6A0C108-B7EF-4DE2-9858-AE9B5008FF04}"/>
               </a:ext>
             </a:extLst>
           </p:cNvPr>
@@ -7895,7 +8349,7 @@
           <p:cNvPr id="5" name="ambient-core">
             <a:extLst xmlns:a="http://schemas.openxmlformats.org/drawingml/2006/main">
               <a:ext uri="{FF2B5EF4-FFF2-40B4-BE49-F238E27FC236}">
-                <a16:creationId xmlns:a16="http://schemas.microsoft.com/office/drawing/2014/main" id="{8F309ECD-3ABC-42F9-9E33-1FC8E5B1CE0A}"/>
+                <a16:creationId xmlns:a16="http://schemas.microsoft.com/office/drawing/2014/main" id="{CC743AD3-2726-4CB6-B1D0-AC1FA0D045DE}"/>
               </a:ext>
             </a:extLst>
           </p:cNvPr>
@@ -7932,7 +8386,7 @@
           <p:cNvPr id="6" name="eyebrow">
             <a:extLst xmlns:a="http://schemas.openxmlformats.org/drawingml/2006/main">
               <a:ext uri="{FF2B5EF4-FFF2-40B4-BE49-F238E27FC236}">
-                <a16:creationId xmlns:a16="http://schemas.microsoft.com/office/drawing/2014/main" id="{2AD3241B-E9B8-48B0-91F2-43B706B2CA5A}"/>
+                <a16:creationId xmlns:a16="http://schemas.microsoft.com/office/drawing/2014/main" id="{E252BA9D-9322-4AA4-9A2A-1BF9B4A3C7A6}"/>
               </a:ext>
             </a:extLst>
           </p:cNvPr>
@@ -7980,10 +8434,69 @@
       </p:sp>
       <p:sp>
         <p:nvSpPr>
-          <p:cNvPr id="7" name="footer-rule">
-            <a:extLst xmlns:a="http://schemas.openxmlformats.org/drawingml/2006/main">
-              <a:ext uri="{FF2B5EF4-FFF2-40B4-BE49-F238E27FC236}">
-                <a16:creationId xmlns:a16="http://schemas.microsoft.com/office/drawing/2014/main" id="{550A3D6C-8CD4-4032-A4BF-8BE334200765}"/>
+          <p:cNvPr id="7" name="rescue-point-logo-background">
+            <a:extLst xmlns:a="http://schemas.openxmlformats.org/drawingml/2006/main">
+              <a:ext uri="{FF2B5EF4-FFF2-40B4-BE49-F238E27FC236}">
+                <a16:creationId xmlns:a16="http://schemas.microsoft.com/office/drawing/2014/main" id="{1B9BB479-D892-4A63-B899-F4ED11CBF8B2}"/>
+              </a:ext>
+            </a:extLst>
+          </p:cNvPr>
+          <p:cNvSpPr>
+            <a:spLocks xmlns:a="http://schemas.openxmlformats.org/drawingml/2006/main" noGrp="1"/>
+          </p:cNvSpPr>
+          <p:nvPr/>
+        </p:nvSpPr>
+        <p:spPr>
+          <a:xfrm xmlns:a="http://schemas.openxmlformats.org/drawingml/2006/main">
+            <a:off x="9772650" y="133350"/>
+            <a:ext cx="1733550" cy="457200"/>
+          </a:xfrm>
+          <a:prstGeom xmlns:a="http://schemas.openxmlformats.org/drawingml/2006/main" prst="roundRect">
+            <a:avLst>
+              <a:gd name="adj" fmla="val 16667"/>
+            </a:avLst>
+          </a:prstGeom>
+          <a:solidFill xmlns:a="http://schemas.openxmlformats.org/drawingml/2006/main">
+            <a:srgbClr val="06142E"/>
+          </a:solidFill>
+          <a:ln xmlns:a="http://schemas.openxmlformats.org/drawingml/2006/main" w="9525">
+            <a:solidFill>
+              <a:srgbClr val="1EC5FF">
+                <a:alpha val="33333"/>
+              </a:srgbClr>
+            </a:solidFill>
+            <a:prstDash val="solid"/>
+          </a:ln>
+        </p:spPr>
+      </p:sp>
+      <p:pic>
+        <p:nvPicPr>
+          <p:cNvPr id="21" name="" descr="Figura oficial da documentação dbt usada para explicar: RESULTADO ESPERADO — Mesmo valor via métrica e SQL."/>
+          <p:cNvPicPr>
+            <a:picLocks xmlns:a="http://schemas.openxmlformats.org/drawingml/2006/main" noChangeAspect="1"/>
+          </p:cNvPicPr>
+          <p:nvPr/>
+        </p:nvPicPr>
+        <p:blipFill>
+          <a:blip xmlns:r="http://schemas.openxmlformats.org/officeDocument/2006/relationships" xmlns:a="http://schemas.openxmlformats.org/drawingml/2006/main" r:embed="Reebef6d5794146fa"/>
+          <a:stretch xmlns:a="http://schemas.openxmlformats.org/drawingml/2006/main"/>
+        </p:blipFill>
+        <p:spPr>
+          <a:xfrm xmlns:a="http://schemas.openxmlformats.org/drawingml/2006/main">
+            <a:off x="9893718" y="209550"/>
+            <a:ext cx="1491414" cy="323850"/>
+          </a:xfrm>
+          <a:prstGeom xmlns:a="http://schemas.openxmlformats.org/drawingml/2006/main" prst="rect">
+            <a:avLst/>
+          </a:prstGeom>
+        </p:spPr>
+      </p:pic>
+      <p:sp>
+        <p:nvSpPr>
+          <p:cNvPr id="9" name="footer-rule">
+            <a:extLst xmlns:a="http://schemas.openxmlformats.org/drawingml/2006/main">
+              <a:ext uri="{FF2B5EF4-FFF2-40B4-BE49-F238E27FC236}">
+                <a16:creationId xmlns:a16="http://schemas.microsoft.com/office/drawing/2014/main" id="{B485E31A-D218-474C-8638-78A4F048128F}"/>
               </a:ext>
             </a:extLst>
           </p:cNvPr>
@@ -8013,10 +8526,10 @@
       </p:sp>
       <p:sp>
         <p:nvSpPr>
-          <p:cNvPr id="8" name="footer">
-            <a:extLst xmlns:a="http://schemas.openxmlformats.org/drawingml/2006/main">
-              <a:ext uri="{FF2B5EF4-FFF2-40B4-BE49-F238E27FC236}">
-                <a16:creationId xmlns:a16="http://schemas.microsoft.com/office/drawing/2014/main" id="{CA75738A-A8C1-42C7-AE17-1742265C7A95}"/>
+          <p:cNvPr id="10" name="footer">
+            <a:extLst xmlns:a="http://schemas.openxmlformats.org/drawingml/2006/main">
+              <a:ext uri="{FF2B5EF4-FFF2-40B4-BE49-F238E27FC236}">
+                <a16:creationId xmlns:a16="http://schemas.microsoft.com/office/drawing/2014/main" id="{27AFBE2D-B92E-46D3-AE82-12DDCF4D7DE1}"/>
               </a:ext>
             </a:extLst>
           </p:cNvPr>
@@ -8068,10 +8581,10 @@
       </p:sp>
       <p:sp>
         <p:nvSpPr>
-          <p:cNvPr id="9" name="page-number">
-            <a:extLst xmlns:a="http://schemas.openxmlformats.org/drawingml/2006/main">
-              <a:ext uri="{FF2B5EF4-FFF2-40B4-BE49-F238E27FC236}">
-                <a16:creationId xmlns:a16="http://schemas.microsoft.com/office/drawing/2014/main" id="{97DB0547-63B4-4BF2-9C5C-60987005339A}"/>
+          <p:cNvPr id="11" name="page-number">
+            <a:extLst xmlns:a="http://schemas.openxmlformats.org/drawingml/2006/main">
+              <a:ext uri="{FF2B5EF4-FFF2-40B4-BE49-F238E27FC236}">
+                <a16:creationId xmlns:a16="http://schemas.microsoft.com/office/drawing/2014/main" id="{00F17F7F-7121-4479-ABA1-BA422356F6BD}"/>
               </a:ext>
             </a:extLst>
           </p:cNvPr>
@@ -8124,7 +8637,7 @@
     </p:spTree>
     <p:extLst>
       <p:ext uri="{BB962C8B-B14F-4D97-AF65-F5344CB8AC3E}">
-        <p14:creationId xmlns:p14="http://schemas.microsoft.com/office/powerpoint/2010/main" val="838365709"/>
+        <p14:creationId xmlns:p14="http://schemas.microsoft.com/office/powerpoint/2010/main" val="496575166"/>
       </p:ext>
     </p:extLst>
   </p:cSld>
@@ -8152,10 +8665,10 @@
       </p:grpSpPr>
       <p:sp>
         <p:nvSpPr>
-          <p:cNvPr id="14" name="slide-title">
-            <a:extLst xmlns:a="http://schemas.openxmlformats.org/drawingml/2006/main">
-              <a:ext uri="{FF2B5EF4-FFF2-40B4-BE49-F238E27FC236}">
-                <a16:creationId xmlns:a16="http://schemas.microsoft.com/office/drawing/2014/main" id="{D754EFD4-7965-450A-9905-225EF701C6EF}"/>
+          <p:cNvPr id="16" name="slide-title">
+            <a:extLst xmlns:a="http://schemas.openxmlformats.org/drawingml/2006/main">
+              <a:ext uri="{FF2B5EF4-FFF2-40B4-BE49-F238E27FC236}">
+                <a16:creationId xmlns:a16="http://schemas.microsoft.com/office/drawing/2014/main" id="{5299102A-0A80-4664-AADE-44AE57C83364}"/>
               </a:ext>
             </a:extLst>
           </p:cNvPr>
@@ -8206,7 +8719,7 @@
           <p:cNvPr id="2" name="step-num-1">
             <a:extLst xmlns:a="http://schemas.openxmlformats.org/drawingml/2006/main">
               <a:ext uri="{FF2B5EF4-FFF2-40B4-BE49-F238E27FC236}">
-                <a16:creationId xmlns:a16="http://schemas.microsoft.com/office/drawing/2014/main" id="{62B63C3C-5DDB-481F-BCAC-67D2196348D5}"/>
+                <a16:creationId xmlns:a16="http://schemas.microsoft.com/office/drawing/2014/main" id="{115FCC9B-F0F7-4AC3-A5C9-16316E8F702C}"/>
               </a:ext>
             </a:extLst>
           </p:cNvPr>
@@ -8257,7 +8770,7 @@
           <p:cNvPr id="3" name="step-label-1">
             <a:extLst xmlns:a="http://schemas.openxmlformats.org/drawingml/2006/main">
               <a:ext uri="{FF2B5EF4-FFF2-40B4-BE49-F238E27FC236}">
-                <a16:creationId xmlns:a16="http://schemas.microsoft.com/office/drawing/2014/main" id="{13FBDA79-32FD-4FAA-9024-E727A4F14DE1}"/>
+                <a16:creationId xmlns:a16="http://schemas.microsoft.com/office/drawing/2014/main" id="{55E9E6DB-6C8F-4B72-AC6C-6316B7BFC028}"/>
               </a:ext>
             </a:extLst>
           </p:cNvPr>
@@ -8308,7 +8821,7 @@
           <p:cNvPr id="4" name="step-line-1">
             <a:extLst xmlns:a="http://schemas.openxmlformats.org/drawingml/2006/main">
               <a:ext uri="{FF2B5EF4-FFF2-40B4-BE49-F238E27FC236}">
-                <a16:creationId xmlns:a16="http://schemas.microsoft.com/office/drawing/2014/main" id="{7B8261E1-0E2B-459E-A8D4-EBE12231D1EA}"/>
+                <a16:creationId xmlns:a16="http://schemas.microsoft.com/office/drawing/2014/main" id="{ED0CC637-6127-4890-859F-914473B4597F}"/>
               </a:ext>
             </a:extLst>
           </p:cNvPr>
@@ -8339,7 +8852,7 @@
           <p:cNvPr id="5" name="step-num-2">
             <a:extLst xmlns:a="http://schemas.openxmlformats.org/drawingml/2006/main">
               <a:ext uri="{FF2B5EF4-FFF2-40B4-BE49-F238E27FC236}">
-                <a16:creationId xmlns:a16="http://schemas.microsoft.com/office/drawing/2014/main" id="{B3FFC66C-1E1A-4EF9-981C-363C46CCDAEA}"/>
+                <a16:creationId xmlns:a16="http://schemas.microsoft.com/office/drawing/2014/main" id="{A11BAEBB-467D-4CBB-A0EC-A83A4D37A28F}"/>
               </a:ext>
             </a:extLst>
           </p:cNvPr>
@@ -8390,7 +8903,7 @@
           <p:cNvPr id="6" name="step-label-2">
             <a:extLst xmlns:a="http://schemas.openxmlformats.org/drawingml/2006/main">
               <a:ext uri="{FF2B5EF4-FFF2-40B4-BE49-F238E27FC236}">
-                <a16:creationId xmlns:a16="http://schemas.microsoft.com/office/drawing/2014/main" id="{69613763-1910-4850-897E-AD63DE0D7A40}"/>
+                <a16:creationId xmlns:a16="http://schemas.microsoft.com/office/drawing/2014/main" id="{9753C00E-129C-4309-99B2-E5B88C629998}"/>
               </a:ext>
             </a:extLst>
           </p:cNvPr>
@@ -8441,7 +8954,7 @@
           <p:cNvPr id="7" name="step-line-2">
             <a:extLst xmlns:a="http://schemas.openxmlformats.org/drawingml/2006/main">
               <a:ext uri="{FF2B5EF4-FFF2-40B4-BE49-F238E27FC236}">
-                <a16:creationId xmlns:a16="http://schemas.microsoft.com/office/drawing/2014/main" id="{7C3D907E-1D40-40D9-8490-3EA765B81927}"/>
+                <a16:creationId xmlns:a16="http://schemas.microsoft.com/office/drawing/2014/main" id="{732ECC4E-8D11-43D6-8AC7-666C276C17B1}"/>
               </a:ext>
             </a:extLst>
           </p:cNvPr>
@@ -8472,7 +8985,7 @@
           <p:cNvPr id="8" name="step-num-3">
             <a:extLst xmlns:a="http://schemas.openxmlformats.org/drawingml/2006/main">
               <a:ext uri="{FF2B5EF4-FFF2-40B4-BE49-F238E27FC236}">
-                <a16:creationId xmlns:a16="http://schemas.microsoft.com/office/drawing/2014/main" id="{57FDA363-387D-4B2E-A1FE-28F34233736F}"/>
+                <a16:creationId xmlns:a16="http://schemas.microsoft.com/office/drawing/2014/main" id="{484CA953-594B-4763-9F99-61FA05B0DFD4}"/>
               </a:ext>
             </a:extLst>
           </p:cNvPr>
@@ -8523,7 +9036,7 @@
           <p:cNvPr id="9" name="step-label-3">
             <a:extLst xmlns:a="http://schemas.openxmlformats.org/drawingml/2006/main">
               <a:ext uri="{FF2B5EF4-FFF2-40B4-BE49-F238E27FC236}">
-                <a16:creationId xmlns:a16="http://schemas.microsoft.com/office/drawing/2014/main" id="{880E111E-4E98-436E-9C40-1D333F0F02C2}"/>
+                <a16:creationId xmlns:a16="http://schemas.microsoft.com/office/drawing/2014/main" id="{877A9447-9C5D-45F1-83CC-448DAC918EB3}"/>
               </a:ext>
             </a:extLst>
           </p:cNvPr>
@@ -8574,7 +9087,7 @@
           <p:cNvPr id="10" name="eyebrow">
             <a:extLst xmlns:a="http://schemas.openxmlformats.org/drawingml/2006/main">
               <a:ext uri="{FF2B5EF4-FFF2-40B4-BE49-F238E27FC236}">
-                <a16:creationId xmlns:a16="http://schemas.microsoft.com/office/drawing/2014/main" id="{029D7E47-C4C1-4115-A68D-5228CD17E6C1}"/>
+                <a16:creationId xmlns:a16="http://schemas.microsoft.com/office/drawing/2014/main" id="{EB6CEFB9-A1AF-4FF5-AF82-8B4452C4F503}"/>
               </a:ext>
             </a:extLst>
           </p:cNvPr>
@@ -8622,10 +9135,69 @@
       </p:sp>
       <p:sp>
         <p:nvSpPr>
-          <p:cNvPr id="11" name="footer-rule">
-            <a:extLst xmlns:a="http://schemas.openxmlformats.org/drawingml/2006/main">
-              <a:ext uri="{FF2B5EF4-FFF2-40B4-BE49-F238E27FC236}">
-                <a16:creationId xmlns:a16="http://schemas.microsoft.com/office/drawing/2014/main" id="{B72277F6-A182-4DD1-BF17-E69238A8F9D7}"/>
+          <p:cNvPr id="11" name="rescue-point-logo-background">
+            <a:extLst xmlns:a="http://schemas.openxmlformats.org/drawingml/2006/main">
+              <a:ext uri="{FF2B5EF4-FFF2-40B4-BE49-F238E27FC236}">
+                <a16:creationId xmlns:a16="http://schemas.microsoft.com/office/drawing/2014/main" id="{3DDE8AAA-090F-48D9-84B7-7793BD433026}"/>
+              </a:ext>
+            </a:extLst>
+          </p:cNvPr>
+          <p:cNvSpPr>
+            <a:spLocks xmlns:a="http://schemas.openxmlformats.org/drawingml/2006/main" noGrp="1"/>
+          </p:cNvSpPr>
+          <p:nvPr/>
+        </p:nvSpPr>
+        <p:spPr>
+          <a:xfrm xmlns:a="http://schemas.openxmlformats.org/drawingml/2006/main">
+            <a:off x="9772650" y="133350"/>
+            <a:ext cx="1733550" cy="457200"/>
+          </a:xfrm>
+          <a:prstGeom xmlns:a="http://schemas.openxmlformats.org/drawingml/2006/main" prst="roundRect">
+            <a:avLst>
+              <a:gd name="adj" fmla="val 16667"/>
+            </a:avLst>
+          </a:prstGeom>
+          <a:solidFill xmlns:a="http://schemas.openxmlformats.org/drawingml/2006/main">
+            <a:srgbClr val="06142E"/>
+          </a:solidFill>
+          <a:ln xmlns:a="http://schemas.openxmlformats.org/drawingml/2006/main" w="9525">
+            <a:solidFill>
+              <a:srgbClr val="1EC5FF">
+                <a:alpha val="33333"/>
+              </a:srgbClr>
+            </a:solidFill>
+            <a:prstDash val="solid"/>
+          </a:ln>
+        </p:spPr>
+      </p:sp>
+      <p:pic>
+        <p:nvPicPr>
+          <p:cNvPr id="29" name="" descr="Figura oficial da documentação dbt usada para explicar: O mesmo recurso afeta três decisões — 01."/>
+          <p:cNvPicPr>
+            <a:picLocks xmlns:a="http://schemas.openxmlformats.org/drawingml/2006/main" noChangeAspect="1"/>
+          </p:cNvPicPr>
+          <p:nvPr/>
+        </p:nvPicPr>
+        <p:blipFill>
+          <a:blip xmlns:r="http://schemas.openxmlformats.org/officeDocument/2006/relationships" xmlns:a="http://schemas.openxmlformats.org/drawingml/2006/main" r:embed="R73209d21f7b64de3"/>
+          <a:stretch xmlns:a="http://schemas.openxmlformats.org/drawingml/2006/main"/>
+        </p:blipFill>
+        <p:spPr>
+          <a:xfrm xmlns:a="http://schemas.openxmlformats.org/drawingml/2006/main">
+            <a:off x="9893718" y="209550"/>
+            <a:ext cx="1491414" cy="323850"/>
+          </a:xfrm>
+          <a:prstGeom xmlns:a="http://schemas.openxmlformats.org/drawingml/2006/main" prst="rect">
+            <a:avLst/>
+          </a:prstGeom>
+        </p:spPr>
+      </p:pic>
+      <p:sp>
+        <p:nvSpPr>
+          <p:cNvPr id="13" name="footer-rule">
+            <a:extLst xmlns:a="http://schemas.openxmlformats.org/drawingml/2006/main">
+              <a:ext uri="{FF2B5EF4-FFF2-40B4-BE49-F238E27FC236}">
+                <a16:creationId xmlns:a16="http://schemas.microsoft.com/office/drawing/2014/main" id="{D314AF1F-994E-4625-BF59-9E133AD924E5}"/>
               </a:ext>
             </a:extLst>
           </p:cNvPr>
@@ -8655,10 +9227,10 @@
       </p:sp>
       <p:sp>
         <p:nvSpPr>
-          <p:cNvPr id="12" name="footer">
-            <a:extLst xmlns:a="http://schemas.openxmlformats.org/drawingml/2006/main">
-              <a:ext uri="{FF2B5EF4-FFF2-40B4-BE49-F238E27FC236}">
-                <a16:creationId xmlns:a16="http://schemas.microsoft.com/office/drawing/2014/main" id="{145173F0-5E41-4A29-9E03-4481103EECDE}"/>
+          <p:cNvPr id="14" name="footer">
+            <a:extLst xmlns:a="http://schemas.openxmlformats.org/drawingml/2006/main">
+              <a:ext uri="{FF2B5EF4-FFF2-40B4-BE49-F238E27FC236}">
+                <a16:creationId xmlns:a16="http://schemas.microsoft.com/office/drawing/2014/main" id="{6EE597E7-B32A-4E9D-A4E1-31D42A78A5F4}"/>
               </a:ext>
             </a:extLst>
           </p:cNvPr>
@@ -8710,10 +9282,10 @@
       </p:sp>
       <p:sp>
         <p:nvSpPr>
-          <p:cNvPr id="13" name="page-number">
-            <a:extLst xmlns:a="http://schemas.openxmlformats.org/drawingml/2006/main">
-              <a:ext uri="{FF2B5EF4-FFF2-40B4-BE49-F238E27FC236}">
-                <a16:creationId xmlns:a16="http://schemas.microsoft.com/office/drawing/2014/main" id="{21ED2316-A737-4BE2-A8D1-83F087108501}"/>
+          <p:cNvPr id="15" name="page-number">
+            <a:extLst xmlns:a="http://schemas.openxmlformats.org/drawingml/2006/main">
+              <a:ext uri="{FF2B5EF4-FFF2-40B4-BE49-F238E27FC236}">
+                <a16:creationId xmlns:a16="http://schemas.microsoft.com/office/drawing/2014/main" id="{B1B22709-4B14-43EE-BBCD-79A2EB4A4BAF}"/>
               </a:ext>
             </a:extLst>
           </p:cNvPr>
@@ -8766,7 +9338,7 @@
     </p:spTree>
     <p:extLst>
       <p:ext uri="{BB962C8B-B14F-4D97-AF65-F5344CB8AC3E}">
-        <p14:creationId xmlns:p14="http://schemas.microsoft.com/office/powerpoint/2010/main" val="2008340240"/>
+        <p14:creationId xmlns:p14="http://schemas.microsoft.com/office/powerpoint/2010/main" val="1596490064"/>
       </p:ext>
     </p:extLst>
   </p:cSld>
@@ -8802,10 +9374,10 @@
       </p:grpSpPr>
       <p:sp>
         <p:nvSpPr>
-          <p:cNvPr id="9" name="case-number">
-            <a:extLst xmlns:a="http://schemas.openxmlformats.org/drawingml/2006/main">
-              <a:ext uri="{FF2B5EF4-FFF2-40B4-BE49-F238E27FC236}">
-                <a16:creationId xmlns:a16="http://schemas.microsoft.com/office/drawing/2014/main" id="{C03B3BEB-C369-4F1E-B051-6492D3C5CF8B}"/>
+          <p:cNvPr id="11" name="case-number">
+            <a:extLst xmlns:a="http://schemas.openxmlformats.org/drawingml/2006/main">
+              <a:ext uri="{FF2B5EF4-FFF2-40B4-BE49-F238E27FC236}">
+                <a16:creationId xmlns:a16="http://schemas.microsoft.com/office/drawing/2014/main" id="{380E773C-30FD-466B-8E41-43CF1384F91A}"/>
               </a:ext>
             </a:extLst>
           </p:cNvPr>
@@ -8856,7 +9428,7 @@
           <p:cNvPr id="2" name="case-label">
             <a:extLst xmlns:a="http://schemas.openxmlformats.org/drawingml/2006/main">
               <a:ext uri="{FF2B5EF4-FFF2-40B4-BE49-F238E27FC236}">
-                <a16:creationId xmlns:a16="http://schemas.microsoft.com/office/drawing/2014/main" id="{150048CE-3663-4D4C-BE3E-D6F52EBA3DB2}"/>
+                <a16:creationId xmlns:a16="http://schemas.microsoft.com/office/drawing/2014/main" id="{220442FC-DEAB-4C3F-96DA-4C29FA0A120E}"/>
               </a:ext>
             </a:extLst>
           </p:cNvPr>
@@ -8907,7 +9479,7 @@
           <p:cNvPr id="3" name="case-divider">
             <a:extLst xmlns:a="http://schemas.openxmlformats.org/drawingml/2006/main">
               <a:ext uri="{FF2B5EF4-FFF2-40B4-BE49-F238E27FC236}">
-                <a16:creationId xmlns:a16="http://schemas.microsoft.com/office/drawing/2014/main" id="{D9F0880D-4EB9-41D6-B106-35823E0380F0}"/>
+                <a16:creationId xmlns:a16="http://schemas.microsoft.com/office/drawing/2014/main" id="{3A8F13B5-2011-4C45-8428-A86A900325AC}"/>
               </a:ext>
             </a:extLst>
           </p:cNvPr>
@@ -8940,7 +9512,7 @@
           <p:cNvPr id="4" name="case-caveat">
             <a:extLst xmlns:a="http://schemas.openxmlformats.org/drawingml/2006/main">
               <a:ext uri="{FF2B5EF4-FFF2-40B4-BE49-F238E27FC236}">
-                <a16:creationId xmlns:a16="http://schemas.microsoft.com/office/drawing/2014/main" id="{A303BCFD-7EA1-49EA-BE06-FEAB5EF939AE}"/>
+                <a16:creationId xmlns:a16="http://schemas.microsoft.com/office/drawing/2014/main" id="{7D43C0F2-8B0F-4425-8A71-31B1B957CCF8}"/>
               </a:ext>
             </a:extLst>
           </p:cNvPr>
@@ -8991,7 +9563,7 @@
           <p:cNvPr id="5" name="eyebrow">
             <a:extLst xmlns:a="http://schemas.openxmlformats.org/drawingml/2006/main">
               <a:ext uri="{FF2B5EF4-FFF2-40B4-BE49-F238E27FC236}">
-                <a16:creationId xmlns:a16="http://schemas.microsoft.com/office/drawing/2014/main" id="{EF768119-B85E-4FDD-8E52-59D4E853D43B}"/>
+                <a16:creationId xmlns:a16="http://schemas.microsoft.com/office/drawing/2014/main" id="{3BAEE4F3-C093-42CD-8977-F1B521D7070A}"/>
               </a:ext>
             </a:extLst>
           </p:cNvPr>
@@ -9039,10 +9611,69 @@
       </p:sp>
       <p:sp>
         <p:nvSpPr>
-          <p:cNvPr id="6" name="footer-rule">
-            <a:extLst xmlns:a="http://schemas.openxmlformats.org/drawingml/2006/main">
-              <a:ext uri="{FF2B5EF4-FFF2-40B4-BE49-F238E27FC236}">
-                <a16:creationId xmlns:a16="http://schemas.microsoft.com/office/drawing/2014/main" id="{D371CD10-D927-407B-AF17-8A16F9F0D077}"/>
+          <p:cNvPr id="6" name="rescue-point-logo-background">
+            <a:extLst xmlns:a="http://schemas.openxmlformats.org/drawingml/2006/main">
+              <a:ext uri="{FF2B5EF4-FFF2-40B4-BE49-F238E27FC236}">
+                <a16:creationId xmlns:a16="http://schemas.microsoft.com/office/drawing/2014/main" id="{C3FB1002-AAD1-4DF2-A6FE-153D81C90242}"/>
+              </a:ext>
+            </a:extLst>
+          </p:cNvPr>
+          <p:cNvSpPr>
+            <a:spLocks xmlns:a="http://schemas.openxmlformats.org/drawingml/2006/main" noGrp="1"/>
+          </p:cNvSpPr>
+          <p:nvPr/>
+        </p:nvSpPr>
+        <p:spPr>
+          <a:xfrm xmlns:a="http://schemas.openxmlformats.org/drawingml/2006/main">
+            <a:off x="9772650" y="133350"/>
+            <a:ext cx="1733550" cy="457200"/>
+          </a:xfrm>
+          <a:prstGeom xmlns:a="http://schemas.openxmlformats.org/drawingml/2006/main" prst="roundRect">
+            <a:avLst>
+              <a:gd name="adj" fmla="val 16667"/>
+            </a:avLst>
+          </a:prstGeom>
+          <a:solidFill xmlns:a="http://schemas.openxmlformats.org/drawingml/2006/main">
+            <a:srgbClr val="06142E"/>
+          </a:solidFill>
+          <a:ln xmlns:a="http://schemas.openxmlformats.org/drawingml/2006/main" w="9525">
+            <a:solidFill>
+              <a:srgbClr val="1EC5FF">
+                <a:alpha val="33333"/>
+              </a:srgbClr>
+            </a:solidFill>
+            <a:prstDash val="solid"/>
+          </a:ln>
+        </p:spPr>
+      </p:sp>
+      <p:pic>
+        <p:nvPicPr>
+          <p:cNvPr id="19" name="" descr="Figura oficial da documentação dbt usada para explicar: 83 métricas — mantidas pela Inventa."/>
+          <p:cNvPicPr>
+            <a:picLocks xmlns:a="http://schemas.openxmlformats.org/drawingml/2006/main" noChangeAspect="1"/>
+          </p:cNvPicPr>
+          <p:nvPr/>
+        </p:nvPicPr>
+        <p:blipFill>
+          <a:blip xmlns:r="http://schemas.openxmlformats.org/officeDocument/2006/relationships" xmlns:a="http://schemas.openxmlformats.org/drawingml/2006/main" r:embed="Ra53004880cb44724"/>
+          <a:stretch xmlns:a="http://schemas.openxmlformats.org/drawingml/2006/main"/>
+        </p:blipFill>
+        <p:spPr>
+          <a:xfrm xmlns:a="http://schemas.openxmlformats.org/drawingml/2006/main">
+            <a:off x="9893718" y="209550"/>
+            <a:ext cx="1491414" cy="323850"/>
+          </a:xfrm>
+          <a:prstGeom xmlns:a="http://schemas.openxmlformats.org/drawingml/2006/main" prst="rect">
+            <a:avLst/>
+          </a:prstGeom>
+        </p:spPr>
+      </p:pic>
+      <p:sp>
+        <p:nvSpPr>
+          <p:cNvPr id="8" name="footer-rule">
+            <a:extLst xmlns:a="http://schemas.openxmlformats.org/drawingml/2006/main">
+              <a:ext uri="{FF2B5EF4-FFF2-40B4-BE49-F238E27FC236}">
+                <a16:creationId xmlns:a16="http://schemas.microsoft.com/office/drawing/2014/main" id="{D36CE2A7-2A35-45EA-A50A-2E8E503D90ED}"/>
               </a:ext>
             </a:extLst>
           </p:cNvPr>
@@ -9072,10 +9703,10 @@
       </p:sp>
       <p:sp>
         <p:nvSpPr>
-          <p:cNvPr id="7" name="footer">
-            <a:extLst xmlns:a="http://schemas.openxmlformats.org/drawingml/2006/main">
-              <a:ext uri="{FF2B5EF4-FFF2-40B4-BE49-F238E27FC236}">
-                <a16:creationId xmlns:a16="http://schemas.microsoft.com/office/drawing/2014/main" id="{3C1E9232-F829-430B-8AA8-85F810103B39}"/>
+          <p:cNvPr id="9" name="footer">
+            <a:extLst xmlns:a="http://schemas.openxmlformats.org/drawingml/2006/main">
+              <a:ext uri="{FF2B5EF4-FFF2-40B4-BE49-F238E27FC236}">
+                <a16:creationId xmlns:a16="http://schemas.microsoft.com/office/drawing/2014/main" id="{59C9AAF8-E7B2-4762-857E-0FE32B67A113}"/>
               </a:ext>
             </a:extLst>
           </p:cNvPr>
@@ -9127,10 +9758,10 @@
       </p:sp>
       <p:sp>
         <p:nvSpPr>
-          <p:cNvPr id="8" name="page-number">
-            <a:extLst xmlns:a="http://schemas.openxmlformats.org/drawingml/2006/main">
-              <a:ext uri="{FF2B5EF4-FFF2-40B4-BE49-F238E27FC236}">
-                <a16:creationId xmlns:a16="http://schemas.microsoft.com/office/drawing/2014/main" id="{AD61ACDB-5130-4327-A8BA-9D37E505354D}"/>
+          <p:cNvPr id="10" name="page-number">
+            <a:extLst xmlns:a="http://schemas.openxmlformats.org/drawingml/2006/main">
+              <a:ext uri="{FF2B5EF4-FFF2-40B4-BE49-F238E27FC236}">
+                <a16:creationId xmlns:a16="http://schemas.microsoft.com/office/drawing/2014/main" id="{3C0A0E57-028F-4572-90D0-F51FC744C74F}"/>
               </a:ext>
             </a:extLst>
           </p:cNvPr>
@@ -9183,7 +9814,7 @@
     </p:spTree>
     <p:extLst>
       <p:ext uri="{BB962C8B-B14F-4D97-AF65-F5344CB8AC3E}">
-        <p14:creationId xmlns:p14="http://schemas.microsoft.com/office/powerpoint/2010/main" val="1475371810"/>
+        <p14:creationId xmlns:p14="http://schemas.microsoft.com/office/powerpoint/2010/main" val="1539980850"/>
       </p:ext>
     </p:extLst>
   </p:cSld>
@@ -9211,10 +9842,10 @@
       </p:grpSpPr>
       <p:sp>
         <p:nvSpPr>
-          <p:cNvPr id="7" name="slide-title">
-            <a:extLst xmlns:a="http://schemas.openxmlformats.org/drawingml/2006/main">
-              <a:ext uri="{FF2B5EF4-FFF2-40B4-BE49-F238E27FC236}">
-                <a16:creationId xmlns:a16="http://schemas.microsoft.com/office/drawing/2014/main" id="{6EA51E37-51A5-4346-93F1-E230AB74D367}"/>
+          <p:cNvPr id="9" name="slide-title">
+            <a:extLst xmlns:a="http://schemas.openxmlformats.org/drawingml/2006/main">
+              <a:ext uri="{FF2B5EF4-FFF2-40B4-BE49-F238E27FC236}">
+                <a16:creationId xmlns:a16="http://schemas.microsoft.com/office/drawing/2014/main" id="{78095A76-3892-417B-8A4D-512C5F142DAE}"/>
               </a:ext>
             </a:extLst>
           </p:cNvPr>
@@ -9265,7 +9896,7 @@
           <p:cNvPr id="2" name="bullets">
             <a:extLst xmlns:a="http://schemas.openxmlformats.org/drawingml/2006/main">
               <a:ext uri="{FF2B5EF4-FFF2-40B4-BE49-F238E27FC236}">
-                <a16:creationId xmlns:a16="http://schemas.microsoft.com/office/drawing/2014/main" id="{08BAC543-C994-4F6E-84FC-72723E1759EA}"/>
+                <a16:creationId xmlns:a16="http://schemas.microsoft.com/office/drawing/2014/main" id="{DB4DCBB2-D42B-4B10-90E2-61A887BD070A}"/>
               </a:ext>
             </a:extLst>
           </p:cNvPr>
@@ -9352,7 +9983,7 @@
           <p:cNvPr id="3" name="eyebrow">
             <a:extLst xmlns:a="http://schemas.openxmlformats.org/drawingml/2006/main">
               <a:ext uri="{FF2B5EF4-FFF2-40B4-BE49-F238E27FC236}">
-                <a16:creationId xmlns:a16="http://schemas.microsoft.com/office/drawing/2014/main" id="{D2D0AE58-7BA6-44FD-877C-3101602CA7F5}"/>
+                <a16:creationId xmlns:a16="http://schemas.microsoft.com/office/drawing/2014/main" id="{C875CF20-CB2C-413A-97DE-7624058A91A2}"/>
               </a:ext>
             </a:extLst>
           </p:cNvPr>
@@ -9400,10 +10031,69 @@
       </p:sp>
       <p:sp>
         <p:nvSpPr>
-          <p:cNvPr id="4" name="footer-rule">
-            <a:extLst xmlns:a="http://schemas.openxmlformats.org/drawingml/2006/main">
-              <a:ext uri="{FF2B5EF4-FFF2-40B4-BE49-F238E27FC236}">
-                <a16:creationId xmlns:a16="http://schemas.microsoft.com/office/drawing/2014/main" id="{BCB887C3-8064-404F-AA1B-BD157E270A93}"/>
+          <p:cNvPr id="4" name="rescue-point-logo-background">
+            <a:extLst xmlns:a="http://schemas.openxmlformats.org/drawingml/2006/main">
+              <a:ext uri="{FF2B5EF4-FFF2-40B4-BE49-F238E27FC236}">
+                <a16:creationId xmlns:a16="http://schemas.microsoft.com/office/drawing/2014/main" id="{1E020BCF-6878-4E9D-992E-FA3793EFF2DD}"/>
+              </a:ext>
+            </a:extLst>
+          </p:cNvPr>
+          <p:cNvSpPr>
+            <a:spLocks xmlns:a="http://schemas.openxmlformats.org/drawingml/2006/main" noGrp="1"/>
+          </p:cNvSpPr>
+          <p:nvPr/>
+        </p:nvSpPr>
+        <p:spPr>
+          <a:xfrm xmlns:a="http://schemas.openxmlformats.org/drawingml/2006/main">
+            <a:off x="9772650" y="133350"/>
+            <a:ext cx="1733550" cy="457200"/>
+          </a:xfrm>
+          <a:prstGeom xmlns:a="http://schemas.openxmlformats.org/drawingml/2006/main" prst="roundRect">
+            <a:avLst>
+              <a:gd name="adj" fmla="val 16667"/>
+            </a:avLst>
+          </a:prstGeom>
+          <a:solidFill xmlns:a="http://schemas.openxmlformats.org/drawingml/2006/main">
+            <a:srgbClr val="06142E"/>
+          </a:solidFill>
+          <a:ln xmlns:a="http://schemas.openxmlformats.org/drawingml/2006/main" w="9525">
+            <a:solidFill>
+              <a:srgbClr val="1EC5FF">
+                <a:alpha val="33333"/>
+              </a:srgbClr>
+            </a:solidFill>
+            <a:prstDash val="solid"/>
+          </a:ln>
+        </p:spPr>
+      </p:sp>
+      <p:pic>
+        <p:nvPicPr>
+          <p:cNvPr id="15" name="" descr="Figura oficial da documentação dbt usada para explicar: Limitações que precisam permanecer visíveis — • OSI continua evoluindo."/>
+          <p:cNvPicPr>
+            <a:picLocks xmlns:a="http://schemas.openxmlformats.org/drawingml/2006/main" noChangeAspect="1"/>
+          </p:cNvPicPr>
+          <p:nvPr/>
+        </p:nvPicPr>
+        <p:blipFill>
+          <a:blip xmlns:r="http://schemas.openxmlformats.org/officeDocument/2006/relationships" xmlns:a="http://schemas.openxmlformats.org/drawingml/2006/main" r:embed="R8fbf5494eea34a50"/>
+          <a:stretch xmlns:a="http://schemas.openxmlformats.org/drawingml/2006/main"/>
+        </p:blipFill>
+        <p:spPr>
+          <a:xfrm xmlns:a="http://schemas.openxmlformats.org/drawingml/2006/main">
+            <a:off x="9893718" y="209550"/>
+            <a:ext cx="1491414" cy="323850"/>
+          </a:xfrm>
+          <a:prstGeom xmlns:a="http://schemas.openxmlformats.org/drawingml/2006/main" prst="rect">
+            <a:avLst/>
+          </a:prstGeom>
+        </p:spPr>
+      </p:pic>
+      <p:sp>
+        <p:nvSpPr>
+          <p:cNvPr id="6" name="footer-rule">
+            <a:extLst xmlns:a="http://schemas.openxmlformats.org/drawingml/2006/main">
+              <a:ext uri="{FF2B5EF4-FFF2-40B4-BE49-F238E27FC236}">
+                <a16:creationId xmlns:a16="http://schemas.microsoft.com/office/drawing/2014/main" id="{D80631BC-8B9E-4350-9EFD-4BFABA048E5C}"/>
               </a:ext>
             </a:extLst>
           </p:cNvPr>
@@ -9433,10 +10123,10 @@
       </p:sp>
       <p:sp>
         <p:nvSpPr>
-          <p:cNvPr id="5" name="footer">
-            <a:extLst xmlns:a="http://schemas.openxmlformats.org/drawingml/2006/main">
-              <a:ext uri="{FF2B5EF4-FFF2-40B4-BE49-F238E27FC236}">
-                <a16:creationId xmlns:a16="http://schemas.microsoft.com/office/drawing/2014/main" id="{7C2FE27A-1748-4723-8DE1-B446EA375EF4}"/>
+          <p:cNvPr id="7" name="footer">
+            <a:extLst xmlns:a="http://schemas.openxmlformats.org/drawingml/2006/main">
+              <a:ext uri="{FF2B5EF4-FFF2-40B4-BE49-F238E27FC236}">
+                <a16:creationId xmlns:a16="http://schemas.microsoft.com/office/drawing/2014/main" id="{F9E1F4EC-5C63-4E6B-8BA0-ADA06C87C65A}"/>
               </a:ext>
             </a:extLst>
           </p:cNvPr>
@@ -9488,10 +10178,10 @@
       </p:sp>
       <p:sp>
         <p:nvSpPr>
-          <p:cNvPr id="6" name="page-number">
-            <a:extLst xmlns:a="http://schemas.openxmlformats.org/drawingml/2006/main">
-              <a:ext uri="{FF2B5EF4-FFF2-40B4-BE49-F238E27FC236}">
-                <a16:creationId xmlns:a16="http://schemas.microsoft.com/office/drawing/2014/main" id="{00008E06-F695-4ED9-A4C1-9FB3C24B89F9}"/>
+          <p:cNvPr id="8" name="page-number">
+            <a:extLst xmlns:a="http://schemas.openxmlformats.org/drawingml/2006/main">
+              <a:ext uri="{FF2B5EF4-FFF2-40B4-BE49-F238E27FC236}">
+                <a16:creationId xmlns:a16="http://schemas.microsoft.com/office/drawing/2014/main" id="{DBE75736-A145-4853-A67B-8A0E184CC554}"/>
               </a:ext>
             </a:extLst>
           </p:cNvPr>
@@ -9544,7 +10234,7 @@
     </p:spTree>
     <p:extLst>
       <p:ext uri="{BB962C8B-B14F-4D97-AF65-F5344CB8AC3E}">
-        <p14:creationId xmlns:p14="http://schemas.microsoft.com/office/powerpoint/2010/main" val="958496306"/>
+        <p14:creationId xmlns:p14="http://schemas.microsoft.com/office/powerpoint/2010/main" val="1398406574"/>
       </p:ext>
     </p:extLst>
   </p:cSld>
@@ -9580,10 +10270,10 @@
       </p:grpSpPr>
       <p:sp>
         <p:nvSpPr>
-          <p:cNvPr id="10" name="radar-label">
-            <a:extLst xmlns:a="http://schemas.openxmlformats.org/drawingml/2006/main">
-              <a:ext uri="{FF2B5EF4-FFF2-40B4-BE49-F238E27FC236}">
-                <a16:creationId xmlns:a16="http://schemas.microsoft.com/office/drawing/2014/main" id="{12B34448-33BE-44E7-9338-04B1BB802360}"/>
+          <p:cNvPr id="12" name="radar-label">
+            <a:extLst xmlns:a="http://schemas.openxmlformats.org/drawingml/2006/main">
+              <a:ext uri="{FF2B5EF4-FFF2-40B4-BE49-F238E27FC236}">
+                <a16:creationId xmlns:a16="http://schemas.microsoft.com/office/drawing/2014/main" id="{37D2EBEA-AD4D-4672-920A-9A569524920D}"/>
               </a:ext>
             </a:extLst>
           </p:cNvPr>
@@ -9634,7 +10324,7 @@
           <p:cNvPr id="2" name="radar-text">
             <a:extLst xmlns:a="http://schemas.openxmlformats.org/drawingml/2006/main">
               <a:ext uri="{FF2B5EF4-FFF2-40B4-BE49-F238E27FC236}">
-                <a16:creationId xmlns:a16="http://schemas.microsoft.com/office/drawing/2014/main" id="{130979AC-A896-43F7-BC2C-A0E59032E44A}"/>
+                <a16:creationId xmlns:a16="http://schemas.microsoft.com/office/drawing/2014/main" id="{411D949A-C59B-469B-AF71-E1D92B794992}"/>
               </a:ext>
             </a:extLst>
           </p:cNvPr>
@@ -9685,7 +10375,7 @@
           <p:cNvPr id="3" name="radar-rule">
             <a:extLst xmlns:a="http://schemas.openxmlformats.org/drawingml/2006/main">
               <a:ext uri="{FF2B5EF4-FFF2-40B4-BE49-F238E27FC236}">
-                <a16:creationId xmlns:a16="http://schemas.microsoft.com/office/drawing/2014/main" id="{05342A25-98D7-44EA-AADA-3F492500AA55}"/>
+                <a16:creationId xmlns:a16="http://schemas.microsoft.com/office/drawing/2014/main" id="{8A5DBCE5-83D1-46DD-A1D8-CF072AD46D95}"/>
               </a:ext>
             </a:extLst>
           </p:cNvPr>
@@ -9736,7 +10426,7 @@
           <p:cNvPr id="4" name="ambient-glow">
             <a:extLst xmlns:a="http://schemas.openxmlformats.org/drawingml/2006/main">
               <a:ext uri="{FF2B5EF4-FFF2-40B4-BE49-F238E27FC236}">
-                <a16:creationId xmlns:a16="http://schemas.microsoft.com/office/drawing/2014/main" id="{21D7F376-2280-4991-B9C9-D724E7B337F6}"/>
+                <a16:creationId xmlns:a16="http://schemas.microsoft.com/office/drawing/2014/main" id="{AA988B36-86C3-4420-8E8C-B72E97480EC3}"/>
               </a:ext>
             </a:extLst>
           </p:cNvPr>
@@ -9773,7 +10463,7 @@
           <p:cNvPr id="5" name="ambient-core">
             <a:extLst xmlns:a="http://schemas.openxmlformats.org/drawingml/2006/main">
               <a:ext uri="{FF2B5EF4-FFF2-40B4-BE49-F238E27FC236}">
-                <a16:creationId xmlns:a16="http://schemas.microsoft.com/office/drawing/2014/main" id="{96A9361B-8178-4CA9-B654-5FC3DE57B249}"/>
+                <a16:creationId xmlns:a16="http://schemas.microsoft.com/office/drawing/2014/main" id="{70771554-EF16-49BF-BACF-632B739C454E}"/>
               </a:ext>
             </a:extLst>
           </p:cNvPr>
@@ -9810,7 +10500,7 @@
           <p:cNvPr id="6" name="eyebrow">
             <a:extLst xmlns:a="http://schemas.openxmlformats.org/drawingml/2006/main">
               <a:ext uri="{FF2B5EF4-FFF2-40B4-BE49-F238E27FC236}">
-                <a16:creationId xmlns:a16="http://schemas.microsoft.com/office/drawing/2014/main" id="{DE8C9B4C-F87B-4EFE-8DCA-3A1ED27FD501}"/>
+                <a16:creationId xmlns:a16="http://schemas.microsoft.com/office/drawing/2014/main" id="{6614A81A-E220-4F4F-991F-6CAFDBDC31D4}"/>
               </a:ext>
             </a:extLst>
           </p:cNvPr>
@@ -9858,10 +10548,69 @@
       </p:sp>
       <p:sp>
         <p:nvSpPr>
-          <p:cNvPr id="7" name="footer-rule">
-            <a:extLst xmlns:a="http://schemas.openxmlformats.org/drawingml/2006/main">
-              <a:ext uri="{FF2B5EF4-FFF2-40B4-BE49-F238E27FC236}">
-                <a16:creationId xmlns:a16="http://schemas.microsoft.com/office/drawing/2014/main" id="{A10DDE52-DCCE-4F58-AD01-6403DA417C74}"/>
+          <p:cNvPr id="7" name="rescue-point-logo-background">
+            <a:extLst xmlns:a="http://schemas.openxmlformats.org/drawingml/2006/main">
+              <a:ext uri="{FF2B5EF4-FFF2-40B4-BE49-F238E27FC236}">
+                <a16:creationId xmlns:a16="http://schemas.microsoft.com/office/drawing/2014/main" id="{70950E92-FE05-40EF-AD03-8C783D911D58}"/>
+              </a:ext>
+            </a:extLst>
+          </p:cNvPr>
+          <p:cNvSpPr>
+            <a:spLocks xmlns:a="http://schemas.openxmlformats.org/drawingml/2006/main" noGrp="1"/>
+          </p:cNvSpPr>
+          <p:nvPr/>
+        </p:nvSpPr>
+        <p:spPr>
+          <a:xfrm xmlns:a="http://schemas.openxmlformats.org/drawingml/2006/main">
+            <a:off x="9772650" y="133350"/>
+            <a:ext cx="1733550" cy="457200"/>
+          </a:xfrm>
+          <a:prstGeom xmlns:a="http://schemas.openxmlformats.org/drawingml/2006/main" prst="roundRect">
+            <a:avLst>
+              <a:gd name="adj" fmla="val 16667"/>
+            </a:avLst>
+          </a:prstGeom>
+          <a:solidFill xmlns:a="http://schemas.openxmlformats.org/drawingml/2006/main">
+            <a:srgbClr val="06142E"/>
+          </a:solidFill>
+          <a:ln xmlns:a="http://schemas.openxmlformats.org/drawingml/2006/main" w="9525">
+            <a:solidFill>
+              <a:srgbClr val="1EC5FF">
+                <a:alpha val="33333"/>
+              </a:srgbClr>
+            </a:solidFill>
+            <a:prstDash val="solid"/>
+          </a:ln>
+        </p:spPr>
+      </p:sp>
+      <p:pic>
+        <p:nvPicPr>
+          <p:cNvPr id="21" name="" descr="Figura oficial da documentação dbt usada para explicar: RADAR — APIs, cache e integrações hospedadas ficam para a temporada de plataforma.."/>
+          <p:cNvPicPr>
+            <a:picLocks xmlns:a="http://schemas.openxmlformats.org/drawingml/2006/main" noChangeAspect="1"/>
+          </p:cNvPicPr>
+          <p:nvPr/>
+        </p:nvPicPr>
+        <p:blipFill>
+          <a:blip xmlns:r="http://schemas.openxmlformats.org/officeDocument/2006/relationships" xmlns:a="http://schemas.openxmlformats.org/drawingml/2006/main" r:embed="Re58e50480a8a4961"/>
+          <a:stretch xmlns:a="http://schemas.openxmlformats.org/drawingml/2006/main"/>
+        </p:blipFill>
+        <p:spPr>
+          <a:xfrm xmlns:a="http://schemas.openxmlformats.org/drawingml/2006/main">
+            <a:off x="9893718" y="209550"/>
+            <a:ext cx="1491414" cy="323850"/>
+          </a:xfrm>
+          <a:prstGeom xmlns:a="http://schemas.openxmlformats.org/drawingml/2006/main" prst="rect">
+            <a:avLst/>
+          </a:prstGeom>
+        </p:spPr>
+      </p:pic>
+      <p:sp>
+        <p:nvSpPr>
+          <p:cNvPr id="9" name="footer-rule">
+            <a:extLst xmlns:a="http://schemas.openxmlformats.org/drawingml/2006/main">
+              <a:ext uri="{FF2B5EF4-FFF2-40B4-BE49-F238E27FC236}">
+                <a16:creationId xmlns:a16="http://schemas.microsoft.com/office/drawing/2014/main" id="{91D53FA3-34B6-44B9-8B17-E9BEF02C70CB}"/>
               </a:ext>
             </a:extLst>
           </p:cNvPr>
@@ -9891,10 +10640,10 @@
       </p:sp>
       <p:sp>
         <p:nvSpPr>
-          <p:cNvPr id="8" name="footer">
-            <a:extLst xmlns:a="http://schemas.openxmlformats.org/drawingml/2006/main">
-              <a:ext uri="{FF2B5EF4-FFF2-40B4-BE49-F238E27FC236}">
-                <a16:creationId xmlns:a16="http://schemas.microsoft.com/office/drawing/2014/main" id="{C44146BA-FD10-4111-BE50-C49000BC2724}"/>
+          <p:cNvPr id="10" name="footer">
+            <a:extLst xmlns:a="http://schemas.openxmlformats.org/drawingml/2006/main">
+              <a:ext uri="{FF2B5EF4-FFF2-40B4-BE49-F238E27FC236}">
+                <a16:creationId xmlns:a16="http://schemas.microsoft.com/office/drawing/2014/main" id="{C4DF7A32-4CA7-4DD2-8CCB-168C9F5E7FE3}"/>
               </a:ext>
             </a:extLst>
           </p:cNvPr>
@@ -9946,10 +10695,10 @@
       </p:sp>
       <p:sp>
         <p:nvSpPr>
-          <p:cNvPr id="9" name="page-number">
-            <a:extLst xmlns:a="http://schemas.openxmlformats.org/drawingml/2006/main">
-              <a:ext uri="{FF2B5EF4-FFF2-40B4-BE49-F238E27FC236}">
-                <a16:creationId xmlns:a16="http://schemas.microsoft.com/office/drawing/2014/main" id="{69AC3735-D725-4B80-8607-416CE4D094B5}"/>
+          <p:cNvPr id="11" name="page-number">
+            <a:extLst xmlns:a="http://schemas.openxmlformats.org/drawingml/2006/main">
+              <a:ext uri="{FF2B5EF4-FFF2-40B4-BE49-F238E27FC236}">
+                <a16:creationId xmlns:a16="http://schemas.microsoft.com/office/drawing/2014/main" id="{EFB391F2-6930-4344-AA56-17CBC0852C01}"/>
               </a:ext>
             </a:extLst>
           </p:cNvPr>
@@ -10002,7 +10751,7 @@
     </p:spTree>
     <p:extLst>
       <p:ext uri="{BB962C8B-B14F-4D97-AF65-F5344CB8AC3E}">
-        <p14:creationId xmlns:p14="http://schemas.microsoft.com/office/powerpoint/2010/main" val="1138468697"/>
+        <p14:creationId xmlns:p14="http://schemas.microsoft.com/office/powerpoint/2010/main" val="953021536"/>
       </p:ext>
     </p:extLst>
   </p:cSld>
@@ -10030,10 +10779,10 @@
       </p:grpSpPr>
       <p:sp>
         <p:nvSpPr>
-          <p:cNvPr id="10" name="hook">
-            <a:extLst xmlns:a="http://schemas.openxmlformats.org/drawingml/2006/main">
-              <a:ext uri="{FF2B5EF4-FFF2-40B4-BE49-F238E27FC236}">
-                <a16:creationId xmlns:a16="http://schemas.microsoft.com/office/drawing/2014/main" id="{D2A278ED-12FD-4322-AE96-7A553C3765FC}"/>
+          <p:cNvPr id="12" name="hook">
+            <a:extLst xmlns:a="http://schemas.openxmlformats.org/drawingml/2006/main">
+              <a:ext uri="{FF2B5EF4-FFF2-40B4-BE49-F238E27FC236}">
+                <a16:creationId xmlns:a16="http://schemas.microsoft.com/office/drawing/2014/main" id="{1E5E63D8-D19E-4257-9882-A229E23B29EB}"/>
               </a:ext>
             </a:extLst>
           </p:cNvPr>
@@ -10084,7 +10833,7 @@
           <p:cNvPr id="2" name="hook-rule">
             <a:extLst xmlns:a="http://schemas.openxmlformats.org/drawingml/2006/main">
               <a:ext uri="{FF2B5EF4-FFF2-40B4-BE49-F238E27FC236}">
-                <a16:creationId xmlns:a16="http://schemas.microsoft.com/office/drawing/2014/main" id="{11ACFF50-3D09-4C75-A1A8-E148BD41F0BF}"/>
+                <a16:creationId xmlns:a16="http://schemas.microsoft.com/office/drawing/2014/main" id="{2ECDAD82-6604-4157-AA38-8890B4A03CF3}"/>
               </a:ext>
             </a:extLst>
           </p:cNvPr>
@@ -10115,7 +10864,7 @@
           <p:cNvPr id="3" name="hook-label">
             <a:extLst xmlns:a="http://schemas.openxmlformats.org/drawingml/2006/main">
               <a:ext uri="{FF2B5EF4-FFF2-40B4-BE49-F238E27FC236}">
-                <a16:creationId xmlns:a16="http://schemas.microsoft.com/office/drawing/2014/main" id="{AC1AF2F7-0283-4557-8ACC-453C6E98E658}"/>
+                <a16:creationId xmlns:a16="http://schemas.microsoft.com/office/drawing/2014/main" id="{6622FDEB-7228-48BB-AE6F-D47D33346772}"/>
               </a:ext>
             </a:extLst>
           </p:cNvPr>
@@ -10166,7 +10915,7 @@
           <p:cNvPr id="4" name="diagram-surface">
             <a:extLst xmlns:a="http://schemas.openxmlformats.org/drawingml/2006/main">
               <a:ext uri="{FF2B5EF4-FFF2-40B4-BE49-F238E27FC236}">
-                <a16:creationId xmlns:a16="http://schemas.microsoft.com/office/drawing/2014/main" id="{898728BB-281C-49CF-8EFC-8BC46154E0B5}"/>
+                <a16:creationId xmlns:a16="http://schemas.microsoft.com/office/drawing/2014/main" id="{A310C11B-C3CB-46F9-B869-3A080994706D}"/>
               </a:ext>
             </a:extLst>
           </p:cNvPr>
@@ -10198,14 +10947,14 @@
       </p:sp>
       <p:pic>
         <p:nvPicPr>
-          <p:cNvPr id="16" name="" descr="Diagrama didático autoral que apresenta: Interoperabilidade começa quando o consumidor não precisa copiar a fórmula. — A pergunta que guia a aula."/>
+          <p:cNvPr id="19" name="" descr="Diagrama didático autoral que apresenta: Interoperabilidade começa quando o consumidor não precisa copiar a fórmula. — A pergunta que guia a aula."/>
           <p:cNvPicPr>
             <a:picLocks xmlns:a="http://schemas.openxmlformats.org/drawingml/2006/main" noChangeAspect="1"/>
           </p:cNvPicPr>
           <p:nvPr/>
         </p:nvPicPr>
         <p:blipFill>
-          <a:blip xmlns:r="http://schemas.openxmlformats.org/officeDocument/2006/relationships" xmlns:a="http://schemas.openxmlformats.org/drawingml/2006/main" r:embed="R4b3f09543842440a"/>
+          <a:blip xmlns:r="http://schemas.openxmlformats.org/officeDocument/2006/relationships" xmlns:a="http://schemas.openxmlformats.org/drawingml/2006/main" r:embed="R19015cb30a20467b"/>
           <a:stretch xmlns:a="http://schemas.openxmlformats.org/drawingml/2006/main"/>
         </p:blipFill>
         <p:spPr>
@@ -10223,7 +10972,7 @@
           <p:cNvPr id="6" name="eyebrow">
             <a:extLst xmlns:a="http://schemas.openxmlformats.org/drawingml/2006/main">
               <a:ext uri="{FF2B5EF4-FFF2-40B4-BE49-F238E27FC236}">
-                <a16:creationId xmlns:a16="http://schemas.microsoft.com/office/drawing/2014/main" id="{8C8650A5-B416-4E07-B902-714E5089E8B7}"/>
+                <a16:creationId xmlns:a16="http://schemas.microsoft.com/office/drawing/2014/main" id="{6673AA58-6A78-461D-BAD2-D52AE4FC5E38}"/>
               </a:ext>
             </a:extLst>
           </p:cNvPr>
@@ -10271,10 +11020,69 @@
       </p:sp>
       <p:sp>
         <p:nvSpPr>
-          <p:cNvPr id="7" name="footer-rule">
-            <a:extLst xmlns:a="http://schemas.openxmlformats.org/drawingml/2006/main">
-              <a:ext uri="{FF2B5EF4-FFF2-40B4-BE49-F238E27FC236}">
-                <a16:creationId xmlns:a16="http://schemas.microsoft.com/office/drawing/2014/main" id="{B39532A8-DD17-4B42-88BD-5E690CD8EDE1}"/>
+          <p:cNvPr id="7" name="rescue-point-logo-background">
+            <a:extLst xmlns:a="http://schemas.openxmlformats.org/drawingml/2006/main">
+              <a:ext uri="{FF2B5EF4-FFF2-40B4-BE49-F238E27FC236}">
+                <a16:creationId xmlns:a16="http://schemas.microsoft.com/office/drawing/2014/main" id="{2A6C9FF0-C779-460C-93BB-0E4A676F9848}"/>
+              </a:ext>
+            </a:extLst>
+          </p:cNvPr>
+          <p:cNvSpPr>
+            <a:spLocks xmlns:a="http://schemas.openxmlformats.org/drawingml/2006/main" noGrp="1"/>
+          </p:cNvSpPr>
+          <p:nvPr/>
+        </p:nvSpPr>
+        <p:spPr>
+          <a:xfrm xmlns:a="http://schemas.openxmlformats.org/drawingml/2006/main">
+            <a:off x="9772650" y="133350"/>
+            <a:ext cx="1733550" cy="457200"/>
+          </a:xfrm>
+          <a:prstGeom xmlns:a="http://schemas.openxmlformats.org/drawingml/2006/main" prst="roundRect">
+            <a:avLst>
+              <a:gd name="adj" fmla="val 16667"/>
+            </a:avLst>
+          </a:prstGeom>
+          <a:solidFill xmlns:a="http://schemas.openxmlformats.org/drawingml/2006/main">
+            <a:srgbClr val="06142E"/>
+          </a:solidFill>
+          <a:ln xmlns:a="http://schemas.openxmlformats.org/drawingml/2006/main" w="9525">
+            <a:solidFill>
+              <a:srgbClr val="1EC5FF">
+                <a:alpha val="33333"/>
+              </a:srgbClr>
+            </a:solidFill>
+            <a:prstDash val="solid"/>
+          </a:ln>
+        </p:spPr>
+      </p:sp>
+      <p:pic>
+        <p:nvPicPr>
+          <p:cNvPr id="22" name="" descr="Diagrama didático autoral que apresenta: Interoperabilidade começa quando o consumidor não precisa copiar a fórmula. — A pergunta que guia a aula."/>
+          <p:cNvPicPr>
+            <a:picLocks xmlns:a="http://schemas.openxmlformats.org/drawingml/2006/main" noChangeAspect="1"/>
+          </p:cNvPicPr>
+          <p:nvPr/>
+        </p:nvPicPr>
+        <p:blipFill>
+          <a:blip xmlns:r="http://schemas.openxmlformats.org/officeDocument/2006/relationships" xmlns:a="http://schemas.openxmlformats.org/drawingml/2006/main" r:embed="Rb85b97c0f7144573"/>
+          <a:stretch xmlns:a="http://schemas.openxmlformats.org/drawingml/2006/main"/>
+        </p:blipFill>
+        <p:spPr>
+          <a:xfrm xmlns:a="http://schemas.openxmlformats.org/drawingml/2006/main">
+            <a:off x="9893718" y="209550"/>
+            <a:ext cx="1491414" cy="323850"/>
+          </a:xfrm>
+          <a:prstGeom xmlns:a="http://schemas.openxmlformats.org/drawingml/2006/main" prst="rect">
+            <a:avLst/>
+          </a:prstGeom>
+        </p:spPr>
+      </p:pic>
+      <p:sp>
+        <p:nvSpPr>
+          <p:cNvPr id="9" name="footer-rule">
+            <a:extLst xmlns:a="http://schemas.openxmlformats.org/drawingml/2006/main">
+              <a:ext uri="{FF2B5EF4-FFF2-40B4-BE49-F238E27FC236}">
+                <a16:creationId xmlns:a16="http://schemas.microsoft.com/office/drawing/2014/main" id="{F4102377-5ED5-4265-8CB8-7938893CB0B6}"/>
               </a:ext>
             </a:extLst>
           </p:cNvPr>
@@ -10304,10 +11112,10 @@
       </p:sp>
       <p:sp>
         <p:nvSpPr>
-          <p:cNvPr id="8" name="footer">
-            <a:extLst xmlns:a="http://schemas.openxmlformats.org/drawingml/2006/main">
-              <a:ext uri="{FF2B5EF4-FFF2-40B4-BE49-F238E27FC236}">
-                <a16:creationId xmlns:a16="http://schemas.microsoft.com/office/drawing/2014/main" id="{EF4502A5-A30B-4EC6-906E-EC170006DAFA}"/>
+          <p:cNvPr id="10" name="footer">
+            <a:extLst xmlns:a="http://schemas.openxmlformats.org/drawingml/2006/main">
+              <a:ext uri="{FF2B5EF4-FFF2-40B4-BE49-F238E27FC236}">
+                <a16:creationId xmlns:a16="http://schemas.microsoft.com/office/drawing/2014/main" id="{627F446A-6F2D-4399-865C-9920284AD1A3}"/>
               </a:ext>
             </a:extLst>
           </p:cNvPr>
@@ -10359,10 +11167,10 @@
       </p:sp>
       <p:sp>
         <p:nvSpPr>
-          <p:cNvPr id="9" name="page-number">
-            <a:extLst xmlns:a="http://schemas.openxmlformats.org/drawingml/2006/main">
-              <a:ext uri="{FF2B5EF4-FFF2-40B4-BE49-F238E27FC236}">
-                <a16:creationId xmlns:a16="http://schemas.microsoft.com/office/drawing/2014/main" id="{259ED907-7A73-42BE-82DF-501A6C5B5DFE}"/>
+          <p:cNvPr id="11" name="page-number">
+            <a:extLst xmlns:a="http://schemas.openxmlformats.org/drawingml/2006/main">
+              <a:ext uri="{FF2B5EF4-FFF2-40B4-BE49-F238E27FC236}">
+                <a16:creationId xmlns:a16="http://schemas.microsoft.com/office/drawing/2014/main" id="{EC92B3B7-95D7-4E63-9BF9-03BD116530BC}"/>
               </a:ext>
             </a:extLst>
           </p:cNvPr>
@@ -10415,7 +11223,7 @@
     </p:spTree>
     <p:extLst>
       <p:ext uri="{BB962C8B-B14F-4D97-AF65-F5344CB8AC3E}">
-        <p14:creationId xmlns:p14="http://schemas.microsoft.com/office/powerpoint/2010/main" val="1415375423"/>
+        <p14:creationId xmlns:p14="http://schemas.microsoft.com/office/powerpoint/2010/main" val="199371322"/>
       </p:ext>
     </p:extLst>
   </p:cSld>
@@ -10443,10 +11251,10 @@
       </p:grpSpPr>
       <p:sp>
         <p:nvSpPr>
-          <p:cNvPr id="8" name="cta-label">
-            <a:extLst xmlns:a="http://schemas.openxmlformats.org/drawingml/2006/main">
-              <a:ext uri="{FF2B5EF4-FFF2-40B4-BE49-F238E27FC236}">
-                <a16:creationId xmlns:a16="http://schemas.microsoft.com/office/drawing/2014/main" id="{24AE421A-7D65-4E3E-9E09-63F2CD3D2E8D}"/>
+          <p:cNvPr id="10" name="cta-label">
+            <a:extLst xmlns:a="http://schemas.openxmlformats.org/drawingml/2006/main">
+              <a:ext uri="{FF2B5EF4-FFF2-40B4-BE49-F238E27FC236}">
+                <a16:creationId xmlns:a16="http://schemas.microsoft.com/office/drawing/2014/main" id="{DB97FCE2-E669-4D45-9331-1D52141112A3}"/>
               </a:ext>
             </a:extLst>
           </p:cNvPr>
@@ -10497,7 +11305,7 @@
           <p:cNvPr id="2" name="cta">
             <a:extLst xmlns:a="http://schemas.openxmlformats.org/drawingml/2006/main">
               <a:ext uri="{FF2B5EF4-FFF2-40B4-BE49-F238E27FC236}">
-                <a16:creationId xmlns:a16="http://schemas.microsoft.com/office/drawing/2014/main" id="{7579C270-C97C-4017-AF50-3752FAFF6A58}"/>
+                <a16:creationId xmlns:a16="http://schemas.microsoft.com/office/drawing/2014/main" id="{A681DC43-F10B-4080-8373-96809E1AB72A}"/>
               </a:ext>
             </a:extLst>
           </p:cNvPr>
@@ -10548,7 +11356,7 @@
           <p:cNvPr id="3" name="cta-meta">
             <a:extLst xmlns:a="http://schemas.openxmlformats.org/drawingml/2006/main">
               <a:ext uri="{FF2B5EF4-FFF2-40B4-BE49-F238E27FC236}">
-                <a16:creationId xmlns:a16="http://schemas.microsoft.com/office/drawing/2014/main" id="{0050FDD1-B3B7-4653-9D6E-1EA06F0AAFFC}"/>
+                <a16:creationId xmlns:a16="http://schemas.microsoft.com/office/drawing/2014/main" id="{986FD500-09A5-4D98-BEF4-A71B0E395CBC}"/>
               </a:ext>
             </a:extLst>
           </p:cNvPr>
@@ -10599,7 +11407,7 @@
           <p:cNvPr id="4" name="eyebrow">
             <a:extLst xmlns:a="http://schemas.openxmlformats.org/drawingml/2006/main">
               <a:ext uri="{FF2B5EF4-FFF2-40B4-BE49-F238E27FC236}">
-                <a16:creationId xmlns:a16="http://schemas.microsoft.com/office/drawing/2014/main" id="{27A2CD5C-06A7-42BB-A6D2-A3C8C27F70FF}"/>
+                <a16:creationId xmlns:a16="http://schemas.microsoft.com/office/drawing/2014/main" id="{B4BDC3BB-5002-4871-ABDE-04520430308B}"/>
               </a:ext>
             </a:extLst>
           </p:cNvPr>
@@ -10647,10 +11455,69 @@
       </p:sp>
       <p:sp>
         <p:nvSpPr>
-          <p:cNvPr id="5" name="footer-rule">
-            <a:extLst xmlns:a="http://schemas.openxmlformats.org/drawingml/2006/main">
-              <a:ext uri="{FF2B5EF4-FFF2-40B4-BE49-F238E27FC236}">
-                <a16:creationId xmlns:a16="http://schemas.microsoft.com/office/drawing/2014/main" id="{7E382FBB-10E0-4DC7-A053-D86808832516}"/>
+          <p:cNvPr id="5" name="rescue-point-logo-background">
+            <a:extLst xmlns:a="http://schemas.openxmlformats.org/drawingml/2006/main">
+              <a:ext uri="{FF2B5EF4-FFF2-40B4-BE49-F238E27FC236}">
+                <a16:creationId xmlns:a16="http://schemas.microsoft.com/office/drawing/2014/main" id="{6C736777-DC94-46D7-9AB2-707A6BF2E595}"/>
+              </a:ext>
+            </a:extLst>
+          </p:cNvPr>
+          <p:cNvSpPr>
+            <a:spLocks xmlns:a="http://schemas.openxmlformats.org/drawingml/2006/main" noGrp="1"/>
+          </p:cNvSpPr>
+          <p:nvPr/>
+        </p:nvSpPr>
+        <p:spPr>
+          <a:xfrm xmlns:a="http://schemas.openxmlformats.org/drawingml/2006/main">
+            <a:off x="9772650" y="133350"/>
+            <a:ext cx="1733550" cy="457200"/>
+          </a:xfrm>
+          <a:prstGeom xmlns:a="http://schemas.openxmlformats.org/drawingml/2006/main" prst="roundRect">
+            <a:avLst>
+              <a:gd name="adj" fmla="val 16667"/>
+            </a:avLst>
+          </a:prstGeom>
+          <a:solidFill xmlns:a="http://schemas.openxmlformats.org/drawingml/2006/main">
+            <a:srgbClr val="06142E"/>
+          </a:solidFill>
+          <a:ln xmlns:a="http://schemas.openxmlformats.org/drawingml/2006/main" w="9525">
+            <a:solidFill>
+              <a:srgbClr val="1EC5FF">
+                <a:alpha val="33333"/>
+              </a:srgbClr>
+            </a:solidFill>
+            <a:prstDash val="solid"/>
+          </a:ln>
+        </p:spPr>
+      </p:sp>
+      <p:pic>
+        <p:nvPicPr>
+          <p:cNvPr id="17" name="" descr="Figura oficial da documentação dbt usada para explicar: PRÓXIMO PASSO — Prove a mesma métrica via MetricFlow e SQL sem copiar a fórmula.."/>
+          <p:cNvPicPr>
+            <a:picLocks xmlns:a="http://schemas.openxmlformats.org/drawingml/2006/main" noChangeAspect="1"/>
+          </p:cNvPicPr>
+          <p:nvPr/>
+        </p:nvPicPr>
+        <p:blipFill>
+          <a:blip xmlns:r="http://schemas.openxmlformats.org/officeDocument/2006/relationships" xmlns:a="http://schemas.openxmlformats.org/drawingml/2006/main" r:embed="R8eb47cfa124e4225"/>
+          <a:stretch xmlns:a="http://schemas.openxmlformats.org/drawingml/2006/main"/>
+        </p:blipFill>
+        <p:spPr>
+          <a:xfrm xmlns:a="http://schemas.openxmlformats.org/drawingml/2006/main">
+            <a:off x="9893718" y="209550"/>
+            <a:ext cx="1491414" cy="323850"/>
+          </a:xfrm>
+          <a:prstGeom xmlns:a="http://schemas.openxmlformats.org/drawingml/2006/main" prst="rect">
+            <a:avLst/>
+          </a:prstGeom>
+        </p:spPr>
+      </p:pic>
+      <p:sp>
+        <p:nvSpPr>
+          <p:cNvPr id="7" name="footer-rule">
+            <a:extLst xmlns:a="http://schemas.openxmlformats.org/drawingml/2006/main">
+              <a:ext uri="{FF2B5EF4-FFF2-40B4-BE49-F238E27FC236}">
+                <a16:creationId xmlns:a16="http://schemas.microsoft.com/office/drawing/2014/main" id="{52FAE48F-EB1C-4D7B-B628-1AD95DD98FA6}"/>
               </a:ext>
             </a:extLst>
           </p:cNvPr>
@@ -10680,10 +11547,10 @@
       </p:sp>
       <p:sp>
         <p:nvSpPr>
-          <p:cNvPr id="6" name="footer">
-            <a:extLst xmlns:a="http://schemas.openxmlformats.org/drawingml/2006/main">
-              <a:ext uri="{FF2B5EF4-FFF2-40B4-BE49-F238E27FC236}">
-                <a16:creationId xmlns:a16="http://schemas.microsoft.com/office/drawing/2014/main" id="{44E2029B-FDC0-4081-8CD9-03F9E8DE672F}"/>
+          <p:cNvPr id="8" name="footer">
+            <a:extLst xmlns:a="http://schemas.openxmlformats.org/drawingml/2006/main">
+              <a:ext uri="{FF2B5EF4-FFF2-40B4-BE49-F238E27FC236}">
+                <a16:creationId xmlns:a16="http://schemas.microsoft.com/office/drawing/2014/main" id="{7A92BF15-0FCB-4B29-8D32-B88B4AD16DF7}"/>
               </a:ext>
             </a:extLst>
           </p:cNvPr>
@@ -10735,10 +11602,10 @@
       </p:sp>
       <p:sp>
         <p:nvSpPr>
-          <p:cNvPr id="7" name="page-number">
-            <a:extLst xmlns:a="http://schemas.openxmlformats.org/drawingml/2006/main">
-              <a:ext uri="{FF2B5EF4-FFF2-40B4-BE49-F238E27FC236}">
-                <a16:creationId xmlns:a16="http://schemas.microsoft.com/office/drawing/2014/main" id="{C5B25B6C-E719-4FF1-8784-138217E197F5}"/>
+          <p:cNvPr id="9" name="page-number">
+            <a:extLst xmlns:a="http://schemas.openxmlformats.org/drawingml/2006/main">
+              <a:ext uri="{FF2B5EF4-FFF2-40B4-BE49-F238E27FC236}">
+                <a16:creationId xmlns:a16="http://schemas.microsoft.com/office/drawing/2014/main" id="{299D83C3-1F80-4C8C-B37D-AAFBF174D763}"/>
               </a:ext>
             </a:extLst>
           </p:cNvPr>
@@ -10791,7 +11658,7 @@
     </p:spTree>
     <p:extLst>
       <p:ext uri="{BB962C8B-B14F-4D97-AF65-F5344CB8AC3E}">
-        <p14:creationId xmlns:p14="http://schemas.microsoft.com/office/powerpoint/2010/main" val="730916514"/>
+        <p14:creationId xmlns:p14="http://schemas.microsoft.com/office/powerpoint/2010/main" val="1364218740"/>
       </p:ext>
     </p:extLst>
   </p:cSld>
@@ -10827,10 +11694,10 @@
       </p:grpSpPr>
       <p:sp>
         <p:nvSpPr>
-          <p:cNvPr id="14" name="slide-title">
-            <a:extLst xmlns:a="http://schemas.openxmlformats.org/drawingml/2006/main">
-              <a:ext uri="{FF2B5EF4-FFF2-40B4-BE49-F238E27FC236}">
-                <a16:creationId xmlns:a16="http://schemas.microsoft.com/office/drawing/2014/main" id="{A353BF1A-3338-449D-A0D2-68A0169214A8}"/>
+          <p:cNvPr id="16" name="slide-title">
+            <a:extLst xmlns:a="http://schemas.openxmlformats.org/drawingml/2006/main">
+              <a:ext uri="{FF2B5EF4-FFF2-40B4-BE49-F238E27FC236}">
+                <a16:creationId xmlns:a16="http://schemas.microsoft.com/office/drawing/2014/main" id="{24D8B08C-242D-4C2D-B2BB-AA435A6C174B}"/>
               </a:ext>
             </a:extLst>
           </p:cNvPr>
@@ -10881,7 +11748,7 @@
           <p:cNvPr id="2" name="step-num-1">
             <a:extLst xmlns:a="http://schemas.openxmlformats.org/drawingml/2006/main">
               <a:ext uri="{FF2B5EF4-FFF2-40B4-BE49-F238E27FC236}">
-                <a16:creationId xmlns:a16="http://schemas.microsoft.com/office/drawing/2014/main" id="{BBF0C274-D3BA-4163-A7BE-6330D2DA2E08}"/>
+                <a16:creationId xmlns:a16="http://schemas.microsoft.com/office/drawing/2014/main" id="{7D7476EC-E0B5-4FD6-A481-3B03BD7B4C03}"/>
               </a:ext>
             </a:extLst>
           </p:cNvPr>
@@ -10932,7 +11799,7 @@
           <p:cNvPr id="3" name="step-label-1">
             <a:extLst xmlns:a="http://schemas.openxmlformats.org/drawingml/2006/main">
               <a:ext uri="{FF2B5EF4-FFF2-40B4-BE49-F238E27FC236}">
-                <a16:creationId xmlns:a16="http://schemas.microsoft.com/office/drawing/2014/main" id="{0F03CD73-6613-4FD8-B156-28ED378CC8E1}"/>
+                <a16:creationId xmlns:a16="http://schemas.microsoft.com/office/drawing/2014/main" id="{670A2421-8D8A-499C-AC2E-9ADD37A5749F}"/>
               </a:ext>
             </a:extLst>
           </p:cNvPr>
@@ -10983,7 +11850,7 @@
           <p:cNvPr id="4" name="step-line-1">
             <a:extLst xmlns:a="http://schemas.openxmlformats.org/drawingml/2006/main">
               <a:ext uri="{FF2B5EF4-FFF2-40B4-BE49-F238E27FC236}">
-                <a16:creationId xmlns:a16="http://schemas.microsoft.com/office/drawing/2014/main" id="{C1ADD13C-5570-40FC-9CD0-AA9FA3CAFF44}"/>
+                <a16:creationId xmlns:a16="http://schemas.microsoft.com/office/drawing/2014/main" id="{6F98FEB0-C1EE-4973-BA13-EC37907CE6E7}"/>
               </a:ext>
             </a:extLst>
           </p:cNvPr>
@@ -11014,7 +11881,7 @@
           <p:cNvPr id="5" name="step-num-2">
             <a:extLst xmlns:a="http://schemas.openxmlformats.org/drawingml/2006/main">
               <a:ext uri="{FF2B5EF4-FFF2-40B4-BE49-F238E27FC236}">
-                <a16:creationId xmlns:a16="http://schemas.microsoft.com/office/drawing/2014/main" id="{78A9E337-297C-4600-95BC-7B0568BFE553}"/>
+                <a16:creationId xmlns:a16="http://schemas.microsoft.com/office/drawing/2014/main" id="{1B94196A-1CEC-477B-B22A-608C7D40BDDD}"/>
               </a:ext>
             </a:extLst>
           </p:cNvPr>
@@ -11065,7 +11932,7 @@
           <p:cNvPr id="6" name="step-label-2">
             <a:extLst xmlns:a="http://schemas.openxmlformats.org/drawingml/2006/main">
               <a:ext uri="{FF2B5EF4-FFF2-40B4-BE49-F238E27FC236}">
-                <a16:creationId xmlns:a16="http://schemas.microsoft.com/office/drawing/2014/main" id="{F22C9018-5018-4DBE-A37C-2010E866086E}"/>
+                <a16:creationId xmlns:a16="http://schemas.microsoft.com/office/drawing/2014/main" id="{855BDC81-292C-4457-A460-5A9BDEF7AE3A}"/>
               </a:ext>
             </a:extLst>
           </p:cNvPr>
@@ -11116,7 +11983,7 @@
           <p:cNvPr id="7" name="step-line-2">
             <a:extLst xmlns:a="http://schemas.openxmlformats.org/drawingml/2006/main">
               <a:ext uri="{FF2B5EF4-FFF2-40B4-BE49-F238E27FC236}">
-                <a16:creationId xmlns:a16="http://schemas.microsoft.com/office/drawing/2014/main" id="{50C33408-3A3E-47CF-A729-8112E09D58C0}"/>
+                <a16:creationId xmlns:a16="http://schemas.microsoft.com/office/drawing/2014/main" id="{BB077995-CFBE-4335-A033-8E03DB771F74}"/>
               </a:ext>
             </a:extLst>
           </p:cNvPr>
@@ -11147,7 +12014,7 @@
           <p:cNvPr id="8" name="step-num-3">
             <a:extLst xmlns:a="http://schemas.openxmlformats.org/drawingml/2006/main">
               <a:ext uri="{FF2B5EF4-FFF2-40B4-BE49-F238E27FC236}">
-                <a16:creationId xmlns:a16="http://schemas.microsoft.com/office/drawing/2014/main" id="{133AF3CD-F4B3-460A-834D-C6A75FDEDC4C}"/>
+                <a16:creationId xmlns:a16="http://schemas.microsoft.com/office/drawing/2014/main" id="{E0C3218A-E923-432E-812A-4C7B32CBD578}"/>
               </a:ext>
             </a:extLst>
           </p:cNvPr>
@@ -11198,7 +12065,7 @@
           <p:cNvPr id="9" name="step-label-3">
             <a:extLst xmlns:a="http://schemas.openxmlformats.org/drawingml/2006/main">
               <a:ext uri="{FF2B5EF4-FFF2-40B4-BE49-F238E27FC236}">
-                <a16:creationId xmlns:a16="http://schemas.microsoft.com/office/drawing/2014/main" id="{14412CD4-0477-483D-9501-74954CBCF6F8}"/>
+                <a16:creationId xmlns:a16="http://schemas.microsoft.com/office/drawing/2014/main" id="{DE0EE587-FC20-43A7-9D5B-2CA22DAE8B3A}"/>
               </a:ext>
             </a:extLst>
           </p:cNvPr>
@@ -11249,7 +12116,7 @@
           <p:cNvPr id="10" name="eyebrow">
             <a:extLst xmlns:a="http://schemas.openxmlformats.org/drawingml/2006/main">
               <a:ext uri="{FF2B5EF4-FFF2-40B4-BE49-F238E27FC236}">
-                <a16:creationId xmlns:a16="http://schemas.microsoft.com/office/drawing/2014/main" id="{F92EFE43-22B6-4BFF-86B1-13AC6887830F}"/>
+                <a16:creationId xmlns:a16="http://schemas.microsoft.com/office/drawing/2014/main" id="{0EF51453-4509-444F-896B-A049B739D4D3}"/>
               </a:ext>
             </a:extLst>
           </p:cNvPr>
@@ -11297,10 +12164,69 @@
       </p:sp>
       <p:sp>
         <p:nvSpPr>
-          <p:cNvPr id="11" name="footer-rule">
-            <a:extLst xmlns:a="http://schemas.openxmlformats.org/drawingml/2006/main">
-              <a:ext uri="{FF2B5EF4-FFF2-40B4-BE49-F238E27FC236}">
-                <a16:creationId xmlns:a16="http://schemas.microsoft.com/office/drawing/2014/main" id="{B58599AD-EDB3-4505-984C-5961F94C66B8}"/>
+          <p:cNvPr id="11" name="rescue-point-logo-background">
+            <a:extLst xmlns:a="http://schemas.openxmlformats.org/drawingml/2006/main">
+              <a:ext uri="{FF2B5EF4-FFF2-40B4-BE49-F238E27FC236}">
+                <a16:creationId xmlns:a16="http://schemas.microsoft.com/office/drawing/2014/main" id="{58D31E92-E6B1-431D-AB9B-233C2EB0360D}"/>
+              </a:ext>
+            </a:extLst>
+          </p:cNvPr>
+          <p:cNvSpPr>
+            <a:spLocks xmlns:a="http://schemas.openxmlformats.org/drawingml/2006/main" noGrp="1"/>
+          </p:cNvSpPr>
+          <p:nvPr/>
+        </p:nvSpPr>
+        <p:spPr>
+          <a:xfrm xmlns:a="http://schemas.openxmlformats.org/drawingml/2006/main">
+            <a:off x="9772650" y="133350"/>
+            <a:ext cx="1733550" cy="457200"/>
+          </a:xfrm>
+          <a:prstGeom xmlns:a="http://schemas.openxmlformats.org/drawingml/2006/main" prst="roundRect">
+            <a:avLst>
+              <a:gd name="adj" fmla="val 16667"/>
+            </a:avLst>
+          </a:prstGeom>
+          <a:solidFill xmlns:a="http://schemas.openxmlformats.org/drawingml/2006/main">
+            <a:srgbClr val="06142E"/>
+          </a:solidFill>
+          <a:ln xmlns:a="http://schemas.openxmlformats.org/drawingml/2006/main" w="9525">
+            <a:solidFill>
+              <a:srgbClr val="1EC5FF">
+                <a:alpha val="33333"/>
+              </a:srgbClr>
+            </a:solidFill>
+            <a:prstDash val="solid"/>
+          </a:ln>
+        </p:spPr>
+      </p:sp>
+      <p:pic>
+        <p:nvPicPr>
+          <p:cNvPr id="29" name="" descr="Figura oficial da documentação dbt usada para explicar: Ao final, você consegue... — 01."/>
+          <p:cNvPicPr>
+            <a:picLocks xmlns:a="http://schemas.openxmlformats.org/drawingml/2006/main" noChangeAspect="1"/>
+          </p:cNvPicPr>
+          <p:nvPr/>
+        </p:nvPicPr>
+        <p:blipFill>
+          <a:blip xmlns:r="http://schemas.openxmlformats.org/officeDocument/2006/relationships" xmlns:a="http://schemas.openxmlformats.org/drawingml/2006/main" r:embed="R1ea3fee9c2534ab2"/>
+          <a:stretch xmlns:a="http://schemas.openxmlformats.org/drawingml/2006/main"/>
+        </p:blipFill>
+        <p:spPr>
+          <a:xfrm xmlns:a="http://schemas.openxmlformats.org/drawingml/2006/main">
+            <a:off x="9893718" y="209550"/>
+            <a:ext cx="1491414" cy="323850"/>
+          </a:xfrm>
+          <a:prstGeom xmlns:a="http://schemas.openxmlformats.org/drawingml/2006/main" prst="rect">
+            <a:avLst/>
+          </a:prstGeom>
+        </p:spPr>
+      </p:pic>
+      <p:sp>
+        <p:nvSpPr>
+          <p:cNvPr id="13" name="footer-rule">
+            <a:extLst xmlns:a="http://schemas.openxmlformats.org/drawingml/2006/main">
+              <a:ext uri="{FF2B5EF4-FFF2-40B4-BE49-F238E27FC236}">
+                <a16:creationId xmlns:a16="http://schemas.microsoft.com/office/drawing/2014/main" id="{308A161A-A468-4FA4-9CBE-A48F70CA71B3}"/>
               </a:ext>
             </a:extLst>
           </p:cNvPr>
@@ -11330,10 +12256,10 @@
       </p:sp>
       <p:sp>
         <p:nvSpPr>
-          <p:cNvPr id="12" name="footer">
-            <a:extLst xmlns:a="http://schemas.openxmlformats.org/drawingml/2006/main">
-              <a:ext uri="{FF2B5EF4-FFF2-40B4-BE49-F238E27FC236}">
-                <a16:creationId xmlns:a16="http://schemas.microsoft.com/office/drawing/2014/main" id="{9CEC884A-BABB-4B61-92C7-68F00C4065BD}"/>
+          <p:cNvPr id="14" name="footer">
+            <a:extLst xmlns:a="http://schemas.openxmlformats.org/drawingml/2006/main">
+              <a:ext uri="{FF2B5EF4-FFF2-40B4-BE49-F238E27FC236}">
+                <a16:creationId xmlns:a16="http://schemas.microsoft.com/office/drawing/2014/main" id="{37B07233-FB6E-42DD-82D3-3B7E47FA6A79}"/>
               </a:ext>
             </a:extLst>
           </p:cNvPr>
@@ -11385,10 +12311,10 @@
       </p:sp>
       <p:sp>
         <p:nvSpPr>
-          <p:cNvPr id="13" name="page-number">
-            <a:extLst xmlns:a="http://schemas.openxmlformats.org/drawingml/2006/main">
-              <a:ext uri="{FF2B5EF4-FFF2-40B4-BE49-F238E27FC236}">
-                <a16:creationId xmlns:a16="http://schemas.microsoft.com/office/drawing/2014/main" id="{9876800D-8857-4B06-8DD9-E8E2D4D433CA}"/>
+          <p:cNvPr id="15" name="page-number">
+            <a:extLst xmlns:a="http://schemas.openxmlformats.org/drawingml/2006/main">
+              <a:ext uri="{FF2B5EF4-FFF2-40B4-BE49-F238E27FC236}">
+                <a16:creationId xmlns:a16="http://schemas.microsoft.com/office/drawing/2014/main" id="{DCED00AB-1618-470B-8990-34025B570FF6}"/>
               </a:ext>
             </a:extLst>
           </p:cNvPr>
@@ -11441,7 +12367,7 @@
     </p:spTree>
     <p:extLst>
       <p:ext uri="{BB962C8B-B14F-4D97-AF65-F5344CB8AC3E}">
-        <p14:creationId xmlns:p14="http://schemas.microsoft.com/office/powerpoint/2010/main" val="941330217"/>
+        <p14:creationId xmlns:p14="http://schemas.microsoft.com/office/powerpoint/2010/main" val="811666614"/>
       </p:ext>
     </p:extLst>
   </p:cSld>
@@ -11477,10 +12403,10 @@
       </p:grpSpPr>
       <p:sp>
         <p:nvSpPr>
-          <p:cNvPr id="11" name="slide-title">
-            <a:extLst xmlns:a="http://schemas.openxmlformats.org/drawingml/2006/main">
-              <a:ext uri="{FF2B5EF4-FFF2-40B4-BE49-F238E27FC236}">
-                <a16:creationId xmlns:a16="http://schemas.microsoft.com/office/drawing/2014/main" id="{90873653-FA0A-4948-871F-79CB35BBB56D}"/>
+          <p:cNvPr id="13" name="slide-title">
+            <a:extLst xmlns:a="http://schemas.openxmlformats.org/drawingml/2006/main">
+              <a:ext uri="{FF2B5EF4-FFF2-40B4-BE49-F238E27FC236}">
+                <a16:creationId xmlns:a16="http://schemas.microsoft.com/office/drawing/2014/main" id="{9815B6B5-A9F6-42FA-9BF2-584BBA0E2ADC}"/>
               </a:ext>
             </a:extLst>
           </p:cNvPr>
@@ -11531,7 +12457,7 @@
           <p:cNvPr id="2" name="slide-subtitle">
             <a:extLst xmlns:a="http://schemas.openxmlformats.org/drawingml/2006/main">
               <a:ext uri="{FF2B5EF4-FFF2-40B4-BE49-F238E27FC236}">
-                <a16:creationId xmlns:a16="http://schemas.microsoft.com/office/drawing/2014/main" id="{E33F9202-B793-4457-98F0-A18AE22F870B}"/>
+                <a16:creationId xmlns:a16="http://schemas.microsoft.com/office/drawing/2014/main" id="{967781A8-72CC-42C3-88FD-CACECC27DAB2}"/>
               </a:ext>
             </a:extLst>
           </p:cNvPr>
@@ -11582,7 +12508,7 @@
           <p:cNvPr id="3" name="bullets">
             <a:extLst xmlns:a="http://schemas.openxmlformats.org/drawingml/2006/main">
               <a:ext uri="{FF2B5EF4-FFF2-40B4-BE49-F238E27FC236}">
-                <a16:creationId xmlns:a16="http://schemas.microsoft.com/office/drawing/2014/main" id="{D09EFF78-B3E7-4519-A111-3AB05A691D73}"/>
+                <a16:creationId xmlns:a16="http://schemas.microsoft.com/office/drawing/2014/main" id="{805D1CB8-CB99-4241-B944-6340631255D9}"/>
               </a:ext>
             </a:extLst>
           </p:cNvPr>
@@ -11669,7 +12595,7 @@
           <p:cNvPr id="4" name="ambient-glow">
             <a:extLst xmlns:a="http://schemas.openxmlformats.org/drawingml/2006/main">
               <a:ext uri="{FF2B5EF4-FFF2-40B4-BE49-F238E27FC236}">
-                <a16:creationId xmlns:a16="http://schemas.microsoft.com/office/drawing/2014/main" id="{1E9A6CB6-C440-48AF-9671-6D8F580C4F87}"/>
+                <a16:creationId xmlns:a16="http://schemas.microsoft.com/office/drawing/2014/main" id="{99645BC5-8E53-48D2-A8B4-63B4AED76D11}"/>
               </a:ext>
             </a:extLst>
           </p:cNvPr>
@@ -11706,7 +12632,7 @@
           <p:cNvPr id="5" name="ambient-core">
             <a:extLst xmlns:a="http://schemas.openxmlformats.org/drawingml/2006/main">
               <a:ext uri="{FF2B5EF4-FFF2-40B4-BE49-F238E27FC236}">
-                <a16:creationId xmlns:a16="http://schemas.microsoft.com/office/drawing/2014/main" id="{C1704A08-DBFA-4F9C-A3F6-72B8BE5D2BDA}"/>
+                <a16:creationId xmlns:a16="http://schemas.microsoft.com/office/drawing/2014/main" id="{F6BEFD93-6756-47EC-BABF-8B103F094094}"/>
               </a:ext>
             </a:extLst>
           </p:cNvPr>
@@ -11743,7 +12669,7 @@
           <p:cNvPr id="6" name="section-number">
             <a:extLst xmlns:a="http://schemas.openxmlformats.org/drawingml/2006/main">
               <a:ext uri="{FF2B5EF4-FFF2-40B4-BE49-F238E27FC236}">
-                <a16:creationId xmlns:a16="http://schemas.microsoft.com/office/drawing/2014/main" id="{BEC17A08-BBF2-4BFB-87F6-403DBE4E2068}"/>
+                <a16:creationId xmlns:a16="http://schemas.microsoft.com/office/drawing/2014/main" id="{A85ACE0B-B890-43DE-B03D-41C7C57607ED}"/>
               </a:ext>
             </a:extLst>
           </p:cNvPr>
@@ -11794,7 +12720,7 @@
           <p:cNvPr id="7" name="eyebrow">
             <a:extLst xmlns:a="http://schemas.openxmlformats.org/drawingml/2006/main">
               <a:ext uri="{FF2B5EF4-FFF2-40B4-BE49-F238E27FC236}">
-                <a16:creationId xmlns:a16="http://schemas.microsoft.com/office/drawing/2014/main" id="{0FAF99DB-1D5D-45D7-976F-FD0EB0970F03}"/>
+                <a16:creationId xmlns:a16="http://schemas.microsoft.com/office/drawing/2014/main" id="{CD0B6E52-6221-4706-A3FC-0A6340344440}"/>
               </a:ext>
             </a:extLst>
           </p:cNvPr>
@@ -11842,10 +12768,69 @@
       </p:sp>
       <p:sp>
         <p:nvSpPr>
-          <p:cNvPr id="8" name="footer-rule">
-            <a:extLst xmlns:a="http://schemas.openxmlformats.org/drawingml/2006/main">
-              <a:ext uri="{FF2B5EF4-FFF2-40B4-BE49-F238E27FC236}">
-                <a16:creationId xmlns:a16="http://schemas.microsoft.com/office/drawing/2014/main" id="{C7224E00-B4CA-4BC5-8AA5-1999A2AB58E2}"/>
+          <p:cNvPr id="8" name="rescue-point-logo-background">
+            <a:extLst xmlns:a="http://schemas.openxmlformats.org/drawingml/2006/main">
+              <a:ext uri="{FF2B5EF4-FFF2-40B4-BE49-F238E27FC236}">
+                <a16:creationId xmlns:a16="http://schemas.microsoft.com/office/drawing/2014/main" id="{7EEF3C4A-CDCE-4385-B768-CB6F22731342}"/>
+              </a:ext>
+            </a:extLst>
+          </p:cNvPr>
+          <p:cNvSpPr>
+            <a:spLocks xmlns:a="http://schemas.openxmlformats.org/drawingml/2006/main" noGrp="1"/>
+          </p:cNvSpPr>
+          <p:nvPr/>
+        </p:nvSpPr>
+        <p:spPr>
+          <a:xfrm xmlns:a="http://schemas.openxmlformats.org/drawingml/2006/main">
+            <a:off x="9772650" y="133350"/>
+            <a:ext cx="1733550" cy="457200"/>
+          </a:xfrm>
+          <a:prstGeom xmlns:a="http://schemas.openxmlformats.org/drawingml/2006/main" prst="roundRect">
+            <a:avLst>
+              <a:gd name="adj" fmla="val 16667"/>
+            </a:avLst>
+          </a:prstGeom>
+          <a:solidFill xmlns:a="http://schemas.openxmlformats.org/drawingml/2006/main">
+            <a:srgbClr val="06142E"/>
+          </a:solidFill>
+          <a:ln xmlns:a="http://schemas.openxmlformats.org/drawingml/2006/main" w="9525">
+            <a:solidFill>
+              <a:srgbClr val="1EC5FF">
+                <a:alpha val="33333"/>
+              </a:srgbClr>
+            </a:solidFill>
+            <a:prstDash val="solid"/>
+          </a:ln>
+        </p:spPr>
+      </p:sp>
+      <p:pic>
+        <p:nvPicPr>
+          <p:cNvPr id="23" name="" descr="Figura oficial da documentação dbt usada para explicar: Três interfaces, uma fonte de significado — MetricFlow, SQL e OSI reutilizam o mesmo contrato semântico.."/>
+          <p:cNvPicPr>
+            <a:picLocks xmlns:a="http://schemas.openxmlformats.org/drawingml/2006/main" noChangeAspect="1"/>
+          </p:cNvPicPr>
+          <p:nvPr/>
+        </p:nvPicPr>
+        <p:blipFill>
+          <a:blip xmlns:r="http://schemas.openxmlformats.org/officeDocument/2006/relationships" xmlns:a="http://schemas.openxmlformats.org/drawingml/2006/main" r:embed="R54ff138418094445"/>
+          <a:stretch xmlns:a="http://schemas.openxmlformats.org/drawingml/2006/main"/>
+        </p:blipFill>
+        <p:spPr>
+          <a:xfrm xmlns:a="http://schemas.openxmlformats.org/drawingml/2006/main">
+            <a:off x="9893718" y="209550"/>
+            <a:ext cx="1491414" cy="323850"/>
+          </a:xfrm>
+          <a:prstGeom xmlns:a="http://schemas.openxmlformats.org/drawingml/2006/main" prst="rect">
+            <a:avLst/>
+          </a:prstGeom>
+        </p:spPr>
+      </p:pic>
+      <p:sp>
+        <p:nvSpPr>
+          <p:cNvPr id="10" name="footer-rule">
+            <a:extLst xmlns:a="http://schemas.openxmlformats.org/drawingml/2006/main">
+              <a:ext uri="{FF2B5EF4-FFF2-40B4-BE49-F238E27FC236}">
+                <a16:creationId xmlns:a16="http://schemas.microsoft.com/office/drawing/2014/main" id="{7DEFF6CB-41E9-4FE2-AE93-6E9BFB0A0A57}"/>
               </a:ext>
             </a:extLst>
           </p:cNvPr>
@@ -11875,10 +12860,10 @@
       </p:sp>
       <p:sp>
         <p:nvSpPr>
-          <p:cNvPr id="9" name="footer">
-            <a:extLst xmlns:a="http://schemas.openxmlformats.org/drawingml/2006/main">
-              <a:ext uri="{FF2B5EF4-FFF2-40B4-BE49-F238E27FC236}">
-                <a16:creationId xmlns:a16="http://schemas.microsoft.com/office/drawing/2014/main" id="{C036FB82-C421-4926-B201-C58157FD6D2D}"/>
+          <p:cNvPr id="11" name="footer">
+            <a:extLst xmlns:a="http://schemas.openxmlformats.org/drawingml/2006/main">
+              <a:ext uri="{FF2B5EF4-FFF2-40B4-BE49-F238E27FC236}">
+                <a16:creationId xmlns:a16="http://schemas.microsoft.com/office/drawing/2014/main" id="{626B9B5E-CA65-4E4F-AAEB-C232332CB639}"/>
               </a:ext>
             </a:extLst>
           </p:cNvPr>
@@ -11930,10 +12915,10 @@
       </p:sp>
       <p:sp>
         <p:nvSpPr>
-          <p:cNvPr id="10" name="page-number">
-            <a:extLst xmlns:a="http://schemas.openxmlformats.org/drawingml/2006/main">
-              <a:ext uri="{FF2B5EF4-FFF2-40B4-BE49-F238E27FC236}">
-                <a16:creationId xmlns:a16="http://schemas.microsoft.com/office/drawing/2014/main" id="{64828416-7C6F-464A-954F-0C1C9B899244}"/>
+          <p:cNvPr id="12" name="page-number">
+            <a:extLst xmlns:a="http://schemas.openxmlformats.org/drawingml/2006/main">
+              <a:ext uri="{FF2B5EF4-FFF2-40B4-BE49-F238E27FC236}">
+                <a16:creationId xmlns:a16="http://schemas.microsoft.com/office/drawing/2014/main" id="{CA434A11-9FE6-46A8-93BC-386D06871935}"/>
               </a:ext>
             </a:extLst>
           </p:cNvPr>
@@ -11986,7 +12971,7 @@
     </p:spTree>
     <p:extLst>
       <p:ext uri="{BB962C8B-B14F-4D97-AF65-F5344CB8AC3E}">
-        <p14:creationId xmlns:p14="http://schemas.microsoft.com/office/powerpoint/2010/main" val="1187041876"/>
+        <p14:creationId xmlns:p14="http://schemas.microsoft.com/office/powerpoint/2010/main" val="199258464"/>
       </p:ext>
     </p:extLst>
   </p:cSld>
@@ -12014,10 +12999,10 @@
       </p:grpSpPr>
       <p:sp>
         <p:nvSpPr>
-          <p:cNvPr id="11" name="slide-title">
-            <a:extLst xmlns:a="http://schemas.openxmlformats.org/drawingml/2006/main">
-              <a:ext uri="{FF2B5EF4-FFF2-40B4-BE49-F238E27FC236}">
-                <a16:creationId xmlns:a16="http://schemas.microsoft.com/office/drawing/2014/main" id="{BF92EFB3-BB3D-434A-A13C-2850DE52EDC7}"/>
+          <p:cNvPr id="13" name="slide-title">
+            <a:extLst xmlns:a="http://schemas.openxmlformats.org/drawingml/2006/main">
+              <a:ext uri="{FF2B5EF4-FFF2-40B4-BE49-F238E27FC236}">
+                <a16:creationId xmlns:a16="http://schemas.microsoft.com/office/drawing/2014/main" id="{AA381C42-009A-4A62-9197-CB31FE9BEFCD}"/>
               </a:ext>
             </a:extLst>
           </p:cNvPr>
@@ -12068,7 +13053,7 @@
           <p:cNvPr id="2" name="slide-subtitle">
             <a:extLst xmlns:a="http://schemas.openxmlformats.org/drawingml/2006/main">
               <a:ext uri="{FF2B5EF4-FFF2-40B4-BE49-F238E27FC236}">
-                <a16:creationId xmlns:a16="http://schemas.microsoft.com/office/drawing/2014/main" id="{FC66F024-7893-40D5-B130-7407B1A5C07B}"/>
+                <a16:creationId xmlns:a16="http://schemas.microsoft.com/office/drawing/2014/main" id="{B56590FA-E96E-4BFE-A6F9-B97DA8AA7142}"/>
               </a:ext>
             </a:extLst>
           </p:cNvPr>
@@ -12119,7 +13104,7 @@
           <p:cNvPr id="3" name="bullets">
             <a:extLst xmlns:a="http://schemas.openxmlformats.org/drawingml/2006/main">
               <a:ext uri="{FF2B5EF4-FFF2-40B4-BE49-F238E27FC236}">
-                <a16:creationId xmlns:a16="http://schemas.microsoft.com/office/drawing/2014/main" id="{ED1BD7BB-918E-4F56-AAF1-C1FAAD23E977}"/>
+                <a16:creationId xmlns:a16="http://schemas.microsoft.com/office/drawing/2014/main" id="{67541C03-DF81-4219-BE22-567910CD666E}"/>
               </a:ext>
             </a:extLst>
           </p:cNvPr>
@@ -12206,7 +13191,7 @@
           <p:cNvPr id="4" name="ambient-glow">
             <a:extLst xmlns:a="http://schemas.openxmlformats.org/drawingml/2006/main">
               <a:ext uri="{FF2B5EF4-FFF2-40B4-BE49-F238E27FC236}">
-                <a16:creationId xmlns:a16="http://schemas.microsoft.com/office/drawing/2014/main" id="{5821D9BA-4F90-4E82-AB15-BBBE2B7E2A06}"/>
+                <a16:creationId xmlns:a16="http://schemas.microsoft.com/office/drawing/2014/main" id="{E10142AD-814D-40C3-9209-F1EC3D9CAC87}"/>
               </a:ext>
             </a:extLst>
           </p:cNvPr>
@@ -12243,7 +13228,7 @@
           <p:cNvPr id="5" name="ambient-core">
             <a:extLst xmlns:a="http://schemas.openxmlformats.org/drawingml/2006/main">
               <a:ext uri="{FF2B5EF4-FFF2-40B4-BE49-F238E27FC236}">
-                <a16:creationId xmlns:a16="http://schemas.microsoft.com/office/drawing/2014/main" id="{20E65B27-8842-4D30-8915-3B0F41E3A020}"/>
+                <a16:creationId xmlns:a16="http://schemas.microsoft.com/office/drawing/2014/main" id="{B18A2896-7E29-4A66-A144-EEF5C0510FCE}"/>
               </a:ext>
             </a:extLst>
           </p:cNvPr>
@@ -12280,7 +13265,7 @@
           <p:cNvPr id="6" name="section-number">
             <a:extLst xmlns:a="http://schemas.openxmlformats.org/drawingml/2006/main">
               <a:ext uri="{FF2B5EF4-FFF2-40B4-BE49-F238E27FC236}">
-                <a16:creationId xmlns:a16="http://schemas.microsoft.com/office/drawing/2014/main" id="{09F6EDD4-45E2-44DA-8AB5-4A8B40987F92}"/>
+                <a16:creationId xmlns:a16="http://schemas.microsoft.com/office/drawing/2014/main" id="{EE385B31-7F25-44CB-9912-EC4E0B1ED027}"/>
               </a:ext>
             </a:extLst>
           </p:cNvPr>
@@ -12331,7 +13316,7 @@
           <p:cNvPr id="7" name="eyebrow">
             <a:extLst xmlns:a="http://schemas.openxmlformats.org/drawingml/2006/main">
               <a:ext uri="{FF2B5EF4-FFF2-40B4-BE49-F238E27FC236}">
-                <a16:creationId xmlns:a16="http://schemas.microsoft.com/office/drawing/2014/main" id="{2FB1F332-78D7-4020-AF86-26A2B6140C5C}"/>
+                <a16:creationId xmlns:a16="http://schemas.microsoft.com/office/drawing/2014/main" id="{5AD979B7-391E-430E-973A-C1CDE5835BC9}"/>
               </a:ext>
             </a:extLst>
           </p:cNvPr>
@@ -12379,10 +13364,69 @@
       </p:sp>
       <p:sp>
         <p:nvSpPr>
-          <p:cNvPr id="8" name="footer-rule">
-            <a:extLst xmlns:a="http://schemas.openxmlformats.org/drawingml/2006/main">
-              <a:ext uri="{FF2B5EF4-FFF2-40B4-BE49-F238E27FC236}">
-                <a16:creationId xmlns:a16="http://schemas.microsoft.com/office/drawing/2014/main" id="{1520BEA3-3BC5-4A48-B746-250029E14552}"/>
+          <p:cNvPr id="8" name="rescue-point-logo-background">
+            <a:extLst xmlns:a="http://schemas.openxmlformats.org/drawingml/2006/main">
+              <a:ext uri="{FF2B5EF4-FFF2-40B4-BE49-F238E27FC236}">
+                <a16:creationId xmlns:a16="http://schemas.microsoft.com/office/drawing/2014/main" id="{FD5D8566-62B0-4DDA-B564-B8493FC65F33}"/>
+              </a:ext>
+            </a:extLst>
+          </p:cNvPr>
+          <p:cNvSpPr>
+            <a:spLocks xmlns:a="http://schemas.openxmlformats.org/drawingml/2006/main" noGrp="1"/>
+          </p:cNvSpPr>
+          <p:nvPr/>
+        </p:nvSpPr>
+        <p:spPr>
+          <a:xfrm xmlns:a="http://schemas.openxmlformats.org/drawingml/2006/main">
+            <a:off x="9772650" y="133350"/>
+            <a:ext cx="1733550" cy="457200"/>
+          </a:xfrm>
+          <a:prstGeom xmlns:a="http://schemas.openxmlformats.org/drawingml/2006/main" prst="roundRect">
+            <a:avLst>
+              <a:gd name="adj" fmla="val 16667"/>
+            </a:avLst>
+          </a:prstGeom>
+          <a:solidFill xmlns:a="http://schemas.openxmlformats.org/drawingml/2006/main">
+            <a:srgbClr val="06142E"/>
+          </a:solidFill>
+          <a:ln xmlns:a="http://schemas.openxmlformats.org/drawingml/2006/main" w="9525">
+            <a:solidFill>
+              <a:srgbClr val="1EC5FF">
+                <a:alpha val="33333"/>
+              </a:srgbClr>
+            </a:solidFill>
+            <a:prstDash val="solid"/>
+          </a:ln>
+        </p:spPr>
+      </p:sp>
+      <p:pic>
+        <p:nvPicPr>
+          <p:cNvPr id="23" name="" descr="Figura oficial da documentação dbt usada para explicar: Consulta lógica reduz acoplamento — O consumidor pede métrica e dimensão; o compilador resolve o caminho.."/>
+          <p:cNvPicPr>
+            <a:picLocks xmlns:a="http://schemas.openxmlformats.org/drawingml/2006/main" noChangeAspect="1"/>
+          </p:cNvPicPr>
+          <p:nvPr/>
+        </p:nvPicPr>
+        <p:blipFill>
+          <a:blip xmlns:r="http://schemas.openxmlformats.org/officeDocument/2006/relationships" xmlns:a="http://schemas.openxmlformats.org/drawingml/2006/main" r:embed="R380098c4f1f14b1f"/>
+          <a:stretch xmlns:a="http://schemas.openxmlformats.org/drawingml/2006/main"/>
+        </p:blipFill>
+        <p:spPr>
+          <a:xfrm xmlns:a="http://schemas.openxmlformats.org/drawingml/2006/main">
+            <a:off x="9893718" y="209550"/>
+            <a:ext cx="1491414" cy="323850"/>
+          </a:xfrm>
+          <a:prstGeom xmlns:a="http://schemas.openxmlformats.org/drawingml/2006/main" prst="rect">
+            <a:avLst/>
+          </a:prstGeom>
+        </p:spPr>
+      </p:pic>
+      <p:sp>
+        <p:nvSpPr>
+          <p:cNvPr id="10" name="footer-rule">
+            <a:extLst xmlns:a="http://schemas.openxmlformats.org/drawingml/2006/main">
+              <a:ext uri="{FF2B5EF4-FFF2-40B4-BE49-F238E27FC236}">
+                <a16:creationId xmlns:a16="http://schemas.microsoft.com/office/drawing/2014/main" id="{E22B846C-CAFB-4733-A934-553BFBA334E7}"/>
               </a:ext>
             </a:extLst>
           </p:cNvPr>
@@ -12412,10 +13456,10 @@
       </p:sp>
       <p:sp>
         <p:nvSpPr>
-          <p:cNvPr id="9" name="footer">
-            <a:extLst xmlns:a="http://schemas.openxmlformats.org/drawingml/2006/main">
-              <a:ext uri="{FF2B5EF4-FFF2-40B4-BE49-F238E27FC236}">
-                <a16:creationId xmlns:a16="http://schemas.microsoft.com/office/drawing/2014/main" id="{644A0785-7722-408F-82D8-B65D23E9AECF}"/>
+          <p:cNvPr id="11" name="footer">
+            <a:extLst xmlns:a="http://schemas.openxmlformats.org/drawingml/2006/main">
+              <a:ext uri="{FF2B5EF4-FFF2-40B4-BE49-F238E27FC236}">
+                <a16:creationId xmlns:a16="http://schemas.microsoft.com/office/drawing/2014/main" id="{2ECED0FF-141F-4690-A105-A52E9320D781}"/>
               </a:ext>
             </a:extLst>
           </p:cNvPr>
@@ -12467,10 +13511,10 @@
       </p:sp>
       <p:sp>
         <p:nvSpPr>
-          <p:cNvPr id="10" name="page-number">
-            <a:extLst xmlns:a="http://schemas.openxmlformats.org/drawingml/2006/main">
-              <a:ext uri="{FF2B5EF4-FFF2-40B4-BE49-F238E27FC236}">
-                <a16:creationId xmlns:a16="http://schemas.microsoft.com/office/drawing/2014/main" id="{F5A2EFB2-B7D7-405D-ADF2-AFBE4F3DF89A}"/>
+          <p:cNvPr id="12" name="page-number">
+            <a:extLst xmlns:a="http://schemas.openxmlformats.org/drawingml/2006/main">
+              <a:ext uri="{FF2B5EF4-FFF2-40B4-BE49-F238E27FC236}">
+                <a16:creationId xmlns:a16="http://schemas.microsoft.com/office/drawing/2014/main" id="{A24517B5-84E6-4EFA-B4E0-96059C539888}"/>
               </a:ext>
             </a:extLst>
           </p:cNvPr>
@@ -12523,7 +13567,7 @@
     </p:spTree>
     <p:extLst>
       <p:ext uri="{BB962C8B-B14F-4D97-AF65-F5344CB8AC3E}">
-        <p14:creationId xmlns:p14="http://schemas.microsoft.com/office/powerpoint/2010/main" val="1504813390"/>
+        <p14:creationId xmlns:p14="http://schemas.microsoft.com/office/powerpoint/2010/main" val="622858300"/>
       </p:ext>
     </p:extLst>
   </p:cSld>
@@ -12559,10 +13603,10 @@
       </p:grpSpPr>
       <p:sp>
         <p:nvSpPr>
-          <p:cNvPr id="17" name="slide-title">
-            <a:extLst xmlns:a="http://schemas.openxmlformats.org/drawingml/2006/main">
-              <a:ext uri="{FF2B5EF4-FFF2-40B4-BE49-F238E27FC236}">
-                <a16:creationId xmlns:a16="http://schemas.microsoft.com/office/drawing/2014/main" id="{9922DD0C-4C41-4AE7-8CC5-B5BBF6B6FC11}"/>
+          <p:cNvPr id="19" name="slide-title">
+            <a:extLst xmlns:a="http://schemas.openxmlformats.org/drawingml/2006/main">
+              <a:ext uri="{FF2B5EF4-FFF2-40B4-BE49-F238E27FC236}">
+                <a16:creationId xmlns:a16="http://schemas.microsoft.com/office/drawing/2014/main" id="{0663AFD9-3929-41CD-89B3-27FF4713CA10}"/>
               </a:ext>
             </a:extLst>
           </p:cNvPr>
@@ -12613,7 +13657,7 @@
           <p:cNvPr id="2" name="step-num-1">
             <a:extLst xmlns:a="http://schemas.openxmlformats.org/drawingml/2006/main">
               <a:ext uri="{FF2B5EF4-FFF2-40B4-BE49-F238E27FC236}">
-                <a16:creationId xmlns:a16="http://schemas.microsoft.com/office/drawing/2014/main" id="{43EC08C7-0C23-4E1C-8719-321D593AF459}"/>
+                <a16:creationId xmlns:a16="http://schemas.microsoft.com/office/drawing/2014/main" id="{FC435357-6E88-4E60-8423-BAD80C8B0D59}"/>
               </a:ext>
             </a:extLst>
           </p:cNvPr>
@@ -12664,7 +13708,7 @@
           <p:cNvPr id="3" name="step-label-1">
             <a:extLst xmlns:a="http://schemas.openxmlformats.org/drawingml/2006/main">
               <a:ext uri="{FF2B5EF4-FFF2-40B4-BE49-F238E27FC236}">
-                <a16:creationId xmlns:a16="http://schemas.microsoft.com/office/drawing/2014/main" id="{E781DC50-7165-4683-9DAF-A1A578B4BDFF}"/>
+                <a16:creationId xmlns:a16="http://schemas.microsoft.com/office/drawing/2014/main" id="{EFE8EE7E-6B08-44FE-B2DC-8478160663F0}"/>
               </a:ext>
             </a:extLst>
           </p:cNvPr>
@@ -12715,7 +13759,7 @@
           <p:cNvPr id="4" name="step-line-1">
             <a:extLst xmlns:a="http://schemas.openxmlformats.org/drawingml/2006/main">
               <a:ext uri="{FF2B5EF4-FFF2-40B4-BE49-F238E27FC236}">
-                <a16:creationId xmlns:a16="http://schemas.microsoft.com/office/drawing/2014/main" id="{CA9344E9-724C-462E-A0F2-E7FA55338743}"/>
+                <a16:creationId xmlns:a16="http://schemas.microsoft.com/office/drawing/2014/main" id="{B4466833-785B-43D5-AC1E-D5D02E379CE2}"/>
               </a:ext>
             </a:extLst>
           </p:cNvPr>
@@ -12746,7 +13790,7 @@
           <p:cNvPr id="5" name="step-num-2">
             <a:extLst xmlns:a="http://schemas.openxmlformats.org/drawingml/2006/main">
               <a:ext uri="{FF2B5EF4-FFF2-40B4-BE49-F238E27FC236}">
-                <a16:creationId xmlns:a16="http://schemas.microsoft.com/office/drawing/2014/main" id="{955FF67D-54EA-4B93-BC41-C972CBCD21F8}"/>
+                <a16:creationId xmlns:a16="http://schemas.microsoft.com/office/drawing/2014/main" id="{2C4BB413-CA26-4A7C-AD0F-9097B7773D17}"/>
               </a:ext>
             </a:extLst>
           </p:cNvPr>
@@ -12797,7 +13841,7 @@
           <p:cNvPr id="6" name="step-label-2">
             <a:extLst xmlns:a="http://schemas.openxmlformats.org/drawingml/2006/main">
               <a:ext uri="{FF2B5EF4-FFF2-40B4-BE49-F238E27FC236}">
-                <a16:creationId xmlns:a16="http://schemas.microsoft.com/office/drawing/2014/main" id="{F6662D85-4A5C-4B5E-B771-F906DCA4D32D}"/>
+                <a16:creationId xmlns:a16="http://schemas.microsoft.com/office/drawing/2014/main" id="{BD2944A5-E79D-480F-B57F-CB711DE266E9}"/>
               </a:ext>
             </a:extLst>
           </p:cNvPr>
@@ -12848,7 +13892,7 @@
           <p:cNvPr id="7" name="step-line-2">
             <a:extLst xmlns:a="http://schemas.openxmlformats.org/drawingml/2006/main">
               <a:ext uri="{FF2B5EF4-FFF2-40B4-BE49-F238E27FC236}">
-                <a16:creationId xmlns:a16="http://schemas.microsoft.com/office/drawing/2014/main" id="{9CBF9C03-6AD0-413D-B23C-68974A505610}"/>
+                <a16:creationId xmlns:a16="http://schemas.microsoft.com/office/drawing/2014/main" id="{FC09209D-C430-4EC9-AF82-8F4365CFCBF8}"/>
               </a:ext>
             </a:extLst>
           </p:cNvPr>
@@ -12879,7 +13923,7 @@
           <p:cNvPr id="8" name="step-num-3">
             <a:extLst xmlns:a="http://schemas.openxmlformats.org/drawingml/2006/main">
               <a:ext uri="{FF2B5EF4-FFF2-40B4-BE49-F238E27FC236}">
-                <a16:creationId xmlns:a16="http://schemas.microsoft.com/office/drawing/2014/main" id="{FD5537AB-558B-4FDB-8229-E110B375168F}"/>
+                <a16:creationId xmlns:a16="http://schemas.microsoft.com/office/drawing/2014/main" id="{3D61DFC2-5891-4BE3-A8EB-A0F5781E4A92}"/>
               </a:ext>
             </a:extLst>
           </p:cNvPr>
@@ -12930,7 +13974,7 @@
           <p:cNvPr id="9" name="step-label-3">
             <a:extLst xmlns:a="http://schemas.openxmlformats.org/drawingml/2006/main">
               <a:ext uri="{FF2B5EF4-FFF2-40B4-BE49-F238E27FC236}">
-                <a16:creationId xmlns:a16="http://schemas.microsoft.com/office/drawing/2014/main" id="{9A090CD1-765F-41D3-B2B9-8624E4249AE1}"/>
+                <a16:creationId xmlns:a16="http://schemas.microsoft.com/office/drawing/2014/main" id="{406DDA08-E4BE-48A4-BF7E-A37698B35113}"/>
               </a:ext>
             </a:extLst>
           </p:cNvPr>
@@ -12981,7 +14025,7 @@
           <p:cNvPr id="10" name="step-line-3">
             <a:extLst xmlns:a="http://schemas.openxmlformats.org/drawingml/2006/main">
               <a:ext uri="{FF2B5EF4-FFF2-40B4-BE49-F238E27FC236}">
-                <a16:creationId xmlns:a16="http://schemas.microsoft.com/office/drawing/2014/main" id="{41D5CDD4-CF2D-480C-A94C-4B8778A52603}"/>
+                <a16:creationId xmlns:a16="http://schemas.microsoft.com/office/drawing/2014/main" id="{65C5483A-04D6-4165-8B8E-1A009DCC41C3}"/>
               </a:ext>
             </a:extLst>
           </p:cNvPr>
@@ -13012,7 +14056,7 @@
           <p:cNvPr id="11" name="step-num-4">
             <a:extLst xmlns:a="http://schemas.openxmlformats.org/drawingml/2006/main">
               <a:ext uri="{FF2B5EF4-FFF2-40B4-BE49-F238E27FC236}">
-                <a16:creationId xmlns:a16="http://schemas.microsoft.com/office/drawing/2014/main" id="{44CE5C85-308B-471F-AB3E-C3CA8FCDB50F}"/>
+                <a16:creationId xmlns:a16="http://schemas.microsoft.com/office/drawing/2014/main" id="{21501244-2ADC-4415-8F22-957AFA0DF299}"/>
               </a:ext>
             </a:extLst>
           </p:cNvPr>
@@ -13063,7 +14107,7 @@
           <p:cNvPr id="12" name="step-label-4">
             <a:extLst xmlns:a="http://schemas.openxmlformats.org/drawingml/2006/main">
               <a:ext uri="{FF2B5EF4-FFF2-40B4-BE49-F238E27FC236}">
-                <a16:creationId xmlns:a16="http://schemas.microsoft.com/office/drawing/2014/main" id="{B4657246-8F91-43EC-8133-840FC24FC1FF}"/>
+                <a16:creationId xmlns:a16="http://schemas.microsoft.com/office/drawing/2014/main" id="{9F5F53FB-60A5-418A-A8B3-C440FFA21B34}"/>
               </a:ext>
             </a:extLst>
           </p:cNvPr>
@@ -13114,7 +14158,7 @@
           <p:cNvPr id="13" name="eyebrow">
             <a:extLst xmlns:a="http://schemas.openxmlformats.org/drawingml/2006/main">
               <a:ext uri="{FF2B5EF4-FFF2-40B4-BE49-F238E27FC236}">
-                <a16:creationId xmlns:a16="http://schemas.microsoft.com/office/drawing/2014/main" id="{8D243545-6274-4D32-ADF9-7F9FAD6C7523}"/>
+                <a16:creationId xmlns:a16="http://schemas.microsoft.com/office/drawing/2014/main" id="{456A996B-A57B-4BA3-B7C8-EA7C840F2AB5}"/>
               </a:ext>
             </a:extLst>
           </p:cNvPr>
@@ -13162,10 +14206,69 @@
       </p:sp>
       <p:sp>
         <p:nvSpPr>
-          <p:cNvPr id="14" name="footer-rule">
-            <a:extLst xmlns:a="http://schemas.openxmlformats.org/drawingml/2006/main">
-              <a:ext uri="{FF2B5EF4-FFF2-40B4-BE49-F238E27FC236}">
-                <a16:creationId xmlns:a16="http://schemas.microsoft.com/office/drawing/2014/main" id="{63EB2FB9-A868-4D8C-8E77-5E77B8DB30B5}"/>
+          <p:cNvPr id="14" name="rescue-point-logo-background">
+            <a:extLst xmlns:a="http://schemas.openxmlformats.org/drawingml/2006/main">
+              <a:ext uri="{FF2B5EF4-FFF2-40B4-BE49-F238E27FC236}">
+                <a16:creationId xmlns:a16="http://schemas.microsoft.com/office/drawing/2014/main" id="{6BBCB9F5-49E0-4ACF-AB00-04105EF88BED}"/>
+              </a:ext>
+            </a:extLst>
+          </p:cNvPr>
+          <p:cNvSpPr>
+            <a:spLocks xmlns:a="http://schemas.openxmlformats.org/drawingml/2006/main" noGrp="1"/>
+          </p:cNvSpPr>
+          <p:nvPr/>
+        </p:nvSpPr>
+        <p:spPr>
+          <a:xfrm xmlns:a="http://schemas.openxmlformats.org/drawingml/2006/main">
+            <a:off x="9772650" y="133350"/>
+            <a:ext cx="1733550" cy="457200"/>
+          </a:xfrm>
+          <a:prstGeom xmlns:a="http://schemas.openxmlformats.org/drawingml/2006/main" prst="roundRect">
+            <a:avLst>
+              <a:gd name="adj" fmla="val 16667"/>
+            </a:avLst>
+          </a:prstGeom>
+          <a:solidFill xmlns:a="http://schemas.openxmlformats.org/drawingml/2006/main">
+            <a:srgbClr val="06142E"/>
+          </a:solidFill>
+          <a:ln xmlns:a="http://schemas.openxmlformats.org/drawingml/2006/main" w="9525">
+            <a:solidFill>
+              <a:srgbClr val="1EC5FF">
+                <a:alpha val="33333"/>
+              </a:srgbClr>
+            </a:solidFill>
+            <a:prstDash val="solid"/>
+          </a:ln>
+        </p:spPr>
+      </p:sp>
+      <p:pic>
+        <p:nvPicPr>
+          <p:cNvPr id="35" name="" descr="Figura oficial da documentação dbt usada para explicar: Consulta lógica reduz acoplamento — 01."/>
+          <p:cNvPicPr>
+            <a:picLocks xmlns:a="http://schemas.openxmlformats.org/drawingml/2006/main" noChangeAspect="1"/>
+          </p:cNvPicPr>
+          <p:nvPr/>
+        </p:nvPicPr>
+        <p:blipFill>
+          <a:blip xmlns:r="http://schemas.openxmlformats.org/officeDocument/2006/relationships" xmlns:a="http://schemas.openxmlformats.org/drawingml/2006/main" r:embed="R93223046dfa149f6"/>
+          <a:stretch xmlns:a="http://schemas.openxmlformats.org/drawingml/2006/main"/>
+        </p:blipFill>
+        <p:spPr>
+          <a:xfrm xmlns:a="http://schemas.openxmlformats.org/drawingml/2006/main">
+            <a:off x="9893718" y="209550"/>
+            <a:ext cx="1491414" cy="323850"/>
+          </a:xfrm>
+          <a:prstGeom xmlns:a="http://schemas.openxmlformats.org/drawingml/2006/main" prst="rect">
+            <a:avLst/>
+          </a:prstGeom>
+        </p:spPr>
+      </p:pic>
+      <p:sp>
+        <p:nvSpPr>
+          <p:cNvPr id="16" name="footer-rule">
+            <a:extLst xmlns:a="http://schemas.openxmlformats.org/drawingml/2006/main">
+              <a:ext uri="{FF2B5EF4-FFF2-40B4-BE49-F238E27FC236}">
+                <a16:creationId xmlns:a16="http://schemas.microsoft.com/office/drawing/2014/main" id="{F8414BA8-6CA0-4576-8479-75C940EE2F9F}"/>
               </a:ext>
             </a:extLst>
           </p:cNvPr>
@@ -13195,10 +14298,10 @@
       </p:sp>
       <p:sp>
         <p:nvSpPr>
-          <p:cNvPr id="15" name="footer">
-            <a:extLst xmlns:a="http://schemas.openxmlformats.org/drawingml/2006/main">
-              <a:ext uri="{FF2B5EF4-FFF2-40B4-BE49-F238E27FC236}">
-                <a16:creationId xmlns:a16="http://schemas.microsoft.com/office/drawing/2014/main" id="{8DE5A357-E1C7-49BE-B409-DFB772959AFF}"/>
+          <p:cNvPr id="17" name="footer">
+            <a:extLst xmlns:a="http://schemas.openxmlformats.org/drawingml/2006/main">
+              <a:ext uri="{FF2B5EF4-FFF2-40B4-BE49-F238E27FC236}">
+                <a16:creationId xmlns:a16="http://schemas.microsoft.com/office/drawing/2014/main" id="{39C7634B-1AE8-45A5-87FE-3D32CB1AFF6B}"/>
               </a:ext>
             </a:extLst>
           </p:cNvPr>
@@ -13250,10 +14353,10 @@
       </p:sp>
       <p:sp>
         <p:nvSpPr>
-          <p:cNvPr id="16" name="page-number">
-            <a:extLst xmlns:a="http://schemas.openxmlformats.org/drawingml/2006/main">
-              <a:ext uri="{FF2B5EF4-FFF2-40B4-BE49-F238E27FC236}">
-                <a16:creationId xmlns:a16="http://schemas.microsoft.com/office/drawing/2014/main" id="{67DB722D-95D2-4A41-9967-2F9ABD27020F}"/>
+          <p:cNvPr id="18" name="page-number">
+            <a:extLst xmlns:a="http://schemas.openxmlformats.org/drawingml/2006/main">
+              <a:ext uri="{FF2B5EF4-FFF2-40B4-BE49-F238E27FC236}">
+                <a16:creationId xmlns:a16="http://schemas.microsoft.com/office/drawing/2014/main" id="{21A666E0-DDDE-448B-989F-4011AE359D0B}"/>
               </a:ext>
             </a:extLst>
           </p:cNvPr>
@@ -13306,7 +14409,7 @@
     </p:spTree>
     <p:extLst>
       <p:ext uri="{BB962C8B-B14F-4D97-AF65-F5344CB8AC3E}">
-        <p14:creationId xmlns:p14="http://schemas.microsoft.com/office/powerpoint/2010/main" val="1616717821"/>
+        <p14:creationId xmlns:p14="http://schemas.microsoft.com/office/powerpoint/2010/main" val="766395142"/>
       </p:ext>
     </p:extLst>
   </p:cSld>
@@ -13342,10 +14445,10 @@
       </p:grpSpPr>
       <p:sp>
         <p:nvSpPr>
-          <p:cNvPr id="11" name="slide-title">
-            <a:extLst xmlns:a="http://schemas.openxmlformats.org/drawingml/2006/main">
-              <a:ext uri="{FF2B5EF4-FFF2-40B4-BE49-F238E27FC236}">
-                <a16:creationId xmlns:a16="http://schemas.microsoft.com/office/drawing/2014/main" id="{B7456918-3FCA-4BDA-A89B-9F0538672A02}"/>
+          <p:cNvPr id="13" name="slide-title">
+            <a:extLst xmlns:a="http://schemas.openxmlformats.org/drawingml/2006/main">
+              <a:ext uri="{FF2B5EF4-FFF2-40B4-BE49-F238E27FC236}">
+                <a16:creationId xmlns:a16="http://schemas.microsoft.com/office/drawing/2014/main" id="{062E5F36-17AF-439C-9AB3-2E36ACD1117C}"/>
               </a:ext>
             </a:extLst>
           </p:cNvPr>
@@ -13396,7 +14499,7 @@
           <p:cNvPr id="2" name="slide-subtitle">
             <a:extLst xmlns:a="http://schemas.openxmlformats.org/drawingml/2006/main">
               <a:ext uri="{FF2B5EF4-FFF2-40B4-BE49-F238E27FC236}">
-                <a16:creationId xmlns:a16="http://schemas.microsoft.com/office/drawing/2014/main" id="{85DED92E-2F45-4C1D-B144-1B055277004D}"/>
+                <a16:creationId xmlns:a16="http://schemas.microsoft.com/office/drawing/2014/main" id="{3FC5D6C1-B7B3-4666-8F44-3DAB1D3B1251}"/>
               </a:ext>
             </a:extLst>
           </p:cNvPr>
@@ -13447,7 +14550,7 @@
           <p:cNvPr id="3" name="bullets">
             <a:extLst xmlns:a="http://schemas.openxmlformats.org/drawingml/2006/main">
               <a:ext uri="{FF2B5EF4-FFF2-40B4-BE49-F238E27FC236}">
-                <a16:creationId xmlns:a16="http://schemas.microsoft.com/office/drawing/2014/main" id="{C16D3A26-51DE-4E4D-9E71-EFFD9D392BAB}"/>
+                <a16:creationId xmlns:a16="http://schemas.microsoft.com/office/drawing/2014/main" id="{B7979139-6962-49F7-B6D1-181F8F42CE78}"/>
               </a:ext>
             </a:extLst>
           </p:cNvPr>
@@ -13534,7 +14637,7 @@
           <p:cNvPr id="4" name="ambient-glow">
             <a:extLst xmlns:a="http://schemas.openxmlformats.org/drawingml/2006/main">
               <a:ext uri="{FF2B5EF4-FFF2-40B4-BE49-F238E27FC236}">
-                <a16:creationId xmlns:a16="http://schemas.microsoft.com/office/drawing/2014/main" id="{F3BC1DA6-A813-4CCB-8413-0969981F66F0}"/>
+                <a16:creationId xmlns:a16="http://schemas.microsoft.com/office/drawing/2014/main" id="{AF5A7698-97D4-4082-802C-56B0D796855D}"/>
               </a:ext>
             </a:extLst>
           </p:cNvPr>
@@ -13571,7 +14674,7 @@
           <p:cNvPr id="5" name="ambient-core">
             <a:extLst xmlns:a="http://schemas.openxmlformats.org/drawingml/2006/main">
               <a:ext uri="{FF2B5EF4-FFF2-40B4-BE49-F238E27FC236}">
-                <a16:creationId xmlns:a16="http://schemas.microsoft.com/office/drawing/2014/main" id="{3F33A364-5DE4-421F-8D48-15B24EB77F80}"/>
+                <a16:creationId xmlns:a16="http://schemas.microsoft.com/office/drawing/2014/main" id="{B8283269-41FC-4995-A5FF-B196B9F054FD}"/>
               </a:ext>
             </a:extLst>
           </p:cNvPr>
@@ -13608,7 +14711,7 @@
           <p:cNvPr id="6" name="section-number">
             <a:extLst xmlns:a="http://schemas.openxmlformats.org/drawingml/2006/main">
               <a:ext uri="{FF2B5EF4-FFF2-40B4-BE49-F238E27FC236}">
-                <a16:creationId xmlns:a16="http://schemas.microsoft.com/office/drawing/2014/main" id="{7995E1E6-D0EE-4453-8580-53851CF965C2}"/>
+                <a16:creationId xmlns:a16="http://schemas.microsoft.com/office/drawing/2014/main" id="{37E0AA70-D715-4417-81EE-FB041DC784C7}"/>
               </a:ext>
             </a:extLst>
           </p:cNvPr>
@@ -13659,7 +14762,7 @@
           <p:cNvPr id="7" name="eyebrow">
             <a:extLst xmlns:a="http://schemas.openxmlformats.org/drawingml/2006/main">
               <a:ext uri="{FF2B5EF4-FFF2-40B4-BE49-F238E27FC236}">
-                <a16:creationId xmlns:a16="http://schemas.microsoft.com/office/drawing/2014/main" id="{D799D5E1-701E-4B37-8147-46A50ED9160C}"/>
+                <a16:creationId xmlns:a16="http://schemas.microsoft.com/office/drawing/2014/main" id="{EA24EF32-6A4C-41F5-9962-BE14A0528CE3}"/>
               </a:ext>
             </a:extLst>
           </p:cNvPr>
@@ -13707,10 +14810,69 @@
       </p:sp>
       <p:sp>
         <p:nvSpPr>
-          <p:cNvPr id="8" name="footer-rule">
-            <a:extLst xmlns:a="http://schemas.openxmlformats.org/drawingml/2006/main">
-              <a:ext uri="{FF2B5EF4-FFF2-40B4-BE49-F238E27FC236}">
-                <a16:creationId xmlns:a16="http://schemas.microsoft.com/office/drawing/2014/main" id="{593ABA8D-A563-4649-9F4E-D36069CCAA0C}"/>
+          <p:cNvPr id="8" name="rescue-point-logo-background">
+            <a:extLst xmlns:a="http://schemas.openxmlformats.org/drawingml/2006/main">
+              <a:ext uri="{FF2B5EF4-FFF2-40B4-BE49-F238E27FC236}">
+                <a16:creationId xmlns:a16="http://schemas.microsoft.com/office/drawing/2014/main" id="{1DA1886F-2A4D-4496-92B5-A126CBD4D43D}"/>
+              </a:ext>
+            </a:extLst>
+          </p:cNvPr>
+          <p:cNvSpPr>
+            <a:spLocks xmlns:a="http://schemas.openxmlformats.org/drawingml/2006/main" noGrp="1"/>
+          </p:cNvSpPr>
+          <p:nvPr/>
+        </p:nvSpPr>
+        <p:spPr>
+          <a:xfrm xmlns:a="http://schemas.openxmlformats.org/drawingml/2006/main">
+            <a:off x="9772650" y="133350"/>
+            <a:ext cx="1733550" cy="457200"/>
+          </a:xfrm>
+          <a:prstGeom xmlns:a="http://schemas.openxmlformats.org/drawingml/2006/main" prst="roundRect">
+            <a:avLst>
+              <a:gd name="adj" fmla="val 16667"/>
+            </a:avLst>
+          </a:prstGeom>
+          <a:solidFill xmlns:a="http://schemas.openxmlformats.org/drawingml/2006/main">
+            <a:srgbClr val="06142E"/>
+          </a:solidFill>
+          <a:ln xmlns:a="http://schemas.openxmlformats.org/drawingml/2006/main" w="9525">
+            <a:solidFill>
+              <a:srgbClr val="1EC5FF">
+                <a:alpha val="33333"/>
+              </a:srgbClr>
+            </a:solidFill>
+            <a:prstDash val="solid"/>
+          </a:ln>
+        </p:spPr>
+      </p:sp>
+      <p:pic>
+        <p:nvPicPr>
+          <p:cNvPr id="23" name="" descr="Figura oficial da documentação dbt usada para explicar: SQL governado continua útil — BI e APIs podem consumir uma fachada sem reimplementar regra.."/>
+          <p:cNvPicPr>
+            <a:picLocks xmlns:a="http://schemas.openxmlformats.org/drawingml/2006/main" noChangeAspect="1"/>
+          </p:cNvPicPr>
+          <p:nvPr/>
+        </p:nvPicPr>
+        <p:blipFill>
+          <a:blip xmlns:r="http://schemas.openxmlformats.org/officeDocument/2006/relationships" xmlns:a="http://schemas.openxmlformats.org/drawingml/2006/main" r:embed="Rbaaf5c39d0ea413f"/>
+          <a:stretch xmlns:a="http://schemas.openxmlformats.org/drawingml/2006/main"/>
+        </p:blipFill>
+        <p:spPr>
+          <a:xfrm xmlns:a="http://schemas.openxmlformats.org/drawingml/2006/main">
+            <a:off x="9893718" y="209550"/>
+            <a:ext cx="1491414" cy="323850"/>
+          </a:xfrm>
+          <a:prstGeom xmlns:a="http://schemas.openxmlformats.org/drawingml/2006/main" prst="rect">
+            <a:avLst/>
+          </a:prstGeom>
+        </p:spPr>
+      </p:pic>
+      <p:sp>
+        <p:nvSpPr>
+          <p:cNvPr id="10" name="footer-rule">
+            <a:extLst xmlns:a="http://schemas.openxmlformats.org/drawingml/2006/main">
+              <a:ext uri="{FF2B5EF4-FFF2-40B4-BE49-F238E27FC236}">
+                <a16:creationId xmlns:a16="http://schemas.microsoft.com/office/drawing/2014/main" id="{395AA685-E7E7-40A2-A293-0E957D7CDC8E}"/>
               </a:ext>
             </a:extLst>
           </p:cNvPr>
@@ -13740,10 +14902,10 @@
       </p:sp>
       <p:sp>
         <p:nvSpPr>
-          <p:cNvPr id="9" name="footer">
-            <a:extLst xmlns:a="http://schemas.openxmlformats.org/drawingml/2006/main">
-              <a:ext uri="{FF2B5EF4-FFF2-40B4-BE49-F238E27FC236}">
-                <a16:creationId xmlns:a16="http://schemas.microsoft.com/office/drawing/2014/main" id="{81B46D35-AB33-4344-A005-8D7078EF10A1}"/>
+          <p:cNvPr id="11" name="footer">
+            <a:extLst xmlns:a="http://schemas.openxmlformats.org/drawingml/2006/main">
+              <a:ext uri="{FF2B5EF4-FFF2-40B4-BE49-F238E27FC236}">
+                <a16:creationId xmlns:a16="http://schemas.microsoft.com/office/drawing/2014/main" id="{6DFEC2B8-F72F-4D57-AAA4-78B8D669B80F}"/>
               </a:ext>
             </a:extLst>
           </p:cNvPr>
@@ -13795,10 +14957,10 @@
       </p:sp>
       <p:sp>
         <p:nvSpPr>
-          <p:cNvPr id="10" name="page-number">
-            <a:extLst xmlns:a="http://schemas.openxmlformats.org/drawingml/2006/main">
-              <a:ext uri="{FF2B5EF4-FFF2-40B4-BE49-F238E27FC236}">
-                <a16:creationId xmlns:a16="http://schemas.microsoft.com/office/drawing/2014/main" id="{B6657CF4-037A-40A0-BB1A-B08A3508A965}"/>
+          <p:cNvPr id="12" name="page-number">
+            <a:extLst xmlns:a="http://schemas.openxmlformats.org/drawingml/2006/main">
+              <a:ext uri="{FF2B5EF4-FFF2-40B4-BE49-F238E27FC236}">
+                <a16:creationId xmlns:a16="http://schemas.microsoft.com/office/drawing/2014/main" id="{A0780513-747B-4159-BD54-7F2C6FC0D43B}"/>
               </a:ext>
             </a:extLst>
           </p:cNvPr>
@@ -13851,7 +15013,7 @@
     </p:spTree>
     <p:extLst>
       <p:ext uri="{BB962C8B-B14F-4D97-AF65-F5344CB8AC3E}">
-        <p14:creationId xmlns:p14="http://schemas.microsoft.com/office/powerpoint/2010/main" val="822178065"/>
+        <p14:creationId xmlns:p14="http://schemas.microsoft.com/office/powerpoint/2010/main" val="1967302650"/>
       </p:ext>
     </p:extLst>
   </p:cSld>
@@ -13879,10 +15041,10 @@
       </p:grpSpPr>
       <p:sp>
         <p:nvSpPr>
-          <p:cNvPr id="11" name="slide-title">
-            <a:extLst xmlns:a="http://schemas.openxmlformats.org/drawingml/2006/main">
-              <a:ext uri="{FF2B5EF4-FFF2-40B4-BE49-F238E27FC236}">
-                <a16:creationId xmlns:a16="http://schemas.microsoft.com/office/drawing/2014/main" id="{EFE3178B-09B4-4EA8-AD25-19CF5809D7AE}"/>
+          <p:cNvPr id="13" name="slide-title">
+            <a:extLst xmlns:a="http://schemas.openxmlformats.org/drawingml/2006/main">
+              <a:ext uri="{FF2B5EF4-FFF2-40B4-BE49-F238E27FC236}">
+                <a16:creationId xmlns:a16="http://schemas.microsoft.com/office/drawing/2014/main" id="{48A44A12-1FEA-48D4-9ED8-8E3A38254962}"/>
               </a:ext>
             </a:extLst>
           </p:cNvPr>
@@ -13933,7 +15095,7 @@
           <p:cNvPr id="2" name="compare-left-title">
             <a:extLst xmlns:a="http://schemas.openxmlformats.org/drawingml/2006/main">
               <a:ext uri="{FF2B5EF4-FFF2-40B4-BE49-F238E27FC236}">
-                <a16:creationId xmlns:a16="http://schemas.microsoft.com/office/drawing/2014/main" id="{C2557549-228B-4ECB-B9AA-5542A5C4CAB5}"/>
+                <a16:creationId xmlns:a16="http://schemas.microsoft.com/office/drawing/2014/main" id="{C6F6093A-2914-46FA-8B10-0E26FDBC8062}"/>
               </a:ext>
             </a:extLst>
           </p:cNvPr>
@@ -13984,7 +15146,7 @@
           <p:cNvPr id="3" name="compare-right-title">
             <a:extLst xmlns:a="http://schemas.openxmlformats.org/drawingml/2006/main">
               <a:ext uri="{FF2B5EF4-FFF2-40B4-BE49-F238E27FC236}">
-                <a16:creationId xmlns:a16="http://schemas.microsoft.com/office/drawing/2014/main" id="{76B2DFD0-CE58-4688-A741-2590C76BEE93}"/>
+                <a16:creationId xmlns:a16="http://schemas.microsoft.com/office/drawing/2014/main" id="{29942244-EB70-4C88-A5E8-B220019367AD}"/>
               </a:ext>
             </a:extLst>
           </p:cNvPr>
@@ -14035,7 +15197,7 @@
           <p:cNvPr id="4" name="compare-divider">
             <a:extLst xmlns:a="http://schemas.openxmlformats.org/drawingml/2006/main">
               <a:ext uri="{FF2B5EF4-FFF2-40B4-BE49-F238E27FC236}">
-                <a16:creationId xmlns:a16="http://schemas.microsoft.com/office/drawing/2014/main" id="{0552B546-7B0B-4E93-9745-30671F05123A}"/>
+                <a16:creationId xmlns:a16="http://schemas.microsoft.com/office/drawing/2014/main" id="{4E31174C-5817-40EF-A07F-6D5EDCDA3489}"/>
               </a:ext>
             </a:extLst>
           </p:cNvPr>
@@ -14066,7 +15228,7 @@
           <p:cNvPr id="5" name="bullets">
             <a:extLst xmlns:a="http://schemas.openxmlformats.org/drawingml/2006/main">
               <a:ext uri="{FF2B5EF4-FFF2-40B4-BE49-F238E27FC236}">
-                <a16:creationId xmlns:a16="http://schemas.microsoft.com/office/drawing/2014/main" id="{85AE45C5-A447-4133-9859-F0948A13A850}"/>
+                <a16:creationId xmlns:a16="http://schemas.microsoft.com/office/drawing/2014/main" id="{B7520A97-192F-4C7A-A8B2-B17C63E12C3D}"/>
               </a:ext>
             </a:extLst>
           </p:cNvPr>
@@ -14135,7 +15297,7 @@
           <p:cNvPr id="6" name="bullets">
             <a:extLst xmlns:a="http://schemas.openxmlformats.org/drawingml/2006/main">
               <a:ext uri="{FF2B5EF4-FFF2-40B4-BE49-F238E27FC236}">
-                <a16:creationId xmlns:a16="http://schemas.microsoft.com/office/drawing/2014/main" id="{800D5565-332E-40E3-9F00-8963200863D6}"/>
+                <a16:creationId xmlns:a16="http://schemas.microsoft.com/office/drawing/2014/main" id="{E13D8FED-3CEC-4928-89E7-EB7EE78FBB9C}"/>
               </a:ext>
             </a:extLst>
           </p:cNvPr>
@@ -14186,7 +15348,7 @@
           <p:cNvPr id="7" name="eyebrow">
             <a:extLst xmlns:a="http://schemas.openxmlformats.org/drawingml/2006/main">
               <a:ext uri="{FF2B5EF4-FFF2-40B4-BE49-F238E27FC236}">
-                <a16:creationId xmlns:a16="http://schemas.microsoft.com/office/drawing/2014/main" id="{A12B4D4F-7209-43E2-9EEF-27CDC7040C23}"/>
+                <a16:creationId xmlns:a16="http://schemas.microsoft.com/office/drawing/2014/main" id="{6B18DF9C-90EA-427D-BDA9-DBB03C626740}"/>
               </a:ext>
             </a:extLst>
           </p:cNvPr>
@@ -14234,10 +15396,69 @@
       </p:sp>
       <p:sp>
         <p:nvSpPr>
-          <p:cNvPr id="8" name="footer-rule">
-            <a:extLst xmlns:a="http://schemas.openxmlformats.org/drawingml/2006/main">
-              <a:ext uri="{FF2B5EF4-FFF2-40B4-BE49-F238E27FC236}">
-                <a16:creationId xmlns:a16="http://schemas.microsoft.com/office/drawing/2014/main" id="{FD340CB5-377C-4D5D-9851-E4068FF031A6}"/>
+          <p:cNvPr id="8" name="rescue-point-logo-background">
+            <a:extLst xmlns:a="http://schemas.openxmlformats.org/drawingml/2006/main">
+              <a:ext uri="{FF2B5EF4-FFF2-40B4-BE49-F238E27FC236}">
+                <a16:creationId xmlns:a16="http://schemas.microsoft.com/office/drawing/2014/main" id="{29D82322-EC9E-47CB-8149-A7F317EAC028}"/>
+              </a:ext>
+            </a:extLst>
+          </p:cNvPr>
+          <p:cNvSpPr>
+            <a:spLocks xmlns:a="http://schemas.openxmlformats.org/drawingml/2006/main" noGrp="1"/>
+          </p:cNvSpPr>
+          <p:nvPr/>
+        </p:nvSpPr>
+        <p:spPr>
+          <a:xfrm xmlns:a="http://schemas.openxmlformats.org/drawingml/2006/main">
+            <a:off x="9772650" y="133350"/>
+            <a:ext cx="1733550" cy="457200"/>
+          </a:xfrm>
+          <a:prstGeom xmlns:a="http://schemas.openxmlformats.org/drawingml/2006/main" prst="roundRect">
+            <a:avLst>
+              <a:gd name="adj" fmla="val 16667"/>
+            </a:avLst>
+          </a:prstGeom>
+          <a:solidFill xmlns:a="http://schemas.openxmlformats.org/drawingml/2006/main">
+            <a:srgbClr val="06142E"/>
+          </a:solidFill>
+          <a:ln xmlns:a="http://schemas.openxmlformats.org/drawingml/2006/main" w="9525">
+            <a:solidFill>
+              <a:srgbClr val="1EC5FF">
+                <a:alpha val="33333"/>
+              </a:srgbClr>
+            </a:solidFill>
+            <a:prstDash val="solid"/>
+          </a:ln>
+        </p:spPr>
+      </p:sp>
+      <p:pic>
+        <p:nvPicPr>
+          <p:cNvPr id="23" name="" descr="Figura oficial da documentação dbt usada para explicar: SQL governado continua útil — Contrato."/>
+          <p:cNvPicPr>
+            <a:picLocks xmlns:a="http://schemas.openxmlformats.org/drawingml/2006/main" noChangeAspect="1"/>
+          </p:cNvPicPr>
+          <p:nvPr/>
+        </p:nvPicPr>
+        <p:blipFill>
+          <a:blip xmlns:r="http://schemas.openxmlformats.org/officeDocument/2006/relationships" xmlns:a="http://schemas.openxmlformats.org/drawingml/2006/main" r:embed="Raacb0482fdaa43ba"/>
+          <a:stretch xmlns:a="http://schemas.openxmlformats.org/drawingml/2006/main"/>
+        </p:blipFill>
+        <p:spPr>
+          <a:xfrm xmlns:a="http://schemas.openxmlformats.org/drawingml/2006/main">
+            <a:off x="9893718" y="209550"/>
+            <a:ext cx="1491414" cy="323850"/>
+          </a:xfrm>
+          <a:prstGeom xmlns:a="http://schemas.openxmlformats.org/drawingml/2006/main" prst="rect">
+            <a:avLst/>
+          </a:prstGeom>
+        </p:spPr>
+      </p:pic>
+      <p:sp>
+        <p:nvSpPr>
+          <p:cNvPr id="10" name="footer-rule">
+            <a:extLst xmlns:a="http://schemas.openxmlformats.org/drawingml/2006/main">
+              <a:ext uri="{FF2B5EF4-FFF2-40B4-BE49-F238E27FC236}">
+                <a16:creationId xmlns:a16="http://schemas.microsoft.com/office/drawing/2014/main" id="{25AE85CB-3E04-4A8B-874E-0B7210438A52}"/>
               </a:ext>
             </a:extLst>
           </p:cNvPr>
@@ -14267,10 +15488,10 @@
       </p:sp>
       <p:sp>
         <p:nvSpPr>
-          <p:cNvPr id="9" name="footer">
-            <a:extLst xmlns:a="http://schemas.openxmlformats.org/drawingml/2006/main">
-              <a:ext uri="{FF2B5EF4-FFF2-40B4-BE49-F238E27FC236}">
-                <a16:creationId xmlns:a16="http://schemas.microsoft.com/office/drawing/2014/main" id="{D208C406-AC30-4303-8C6A-367D82AA7862}"/>
+          <p:cNvPr id="11" name="footer">
+            <a:extLst xmlns:a="http://schemas.openxmlformats.org/drawingml/2006/main">
+              <a:ext uri="{FF2B5EF4-FFF2-40B4-BE49-F238E27FC236}">
+                <a16:creationId xmlns:a16="http://schemas.microsoft.com/office/drawing/2014/main" id="{48FD4A39-92B8-412A-B9D7-E0EDD9C88F4A}"/>
               </a:ext>
             </a:extLst>
           </p:cNvPr>
@@ -14322,10 +15543,10 @@
       </p:sp>
       <p:sp>
         <p:nvSpPr>
-          <p:cNvPr id="10" name="page-number">
-            <a:extLst xmlns:a="http://schemas.openxmlformats.org/drawingml/2006/main">
-              <a:ext uri="{FF2B5EF4-FFF2-40B4-BE49-F238E27FC236}">
-                <a16:creationId xmlns:a16="http://schemas.microsoft.com/office/drawing/2014/main" id="{63E3BE1C-BCCC-4DEE-A8DF-55E6C9D7937D}"/>
+          <p:cNvPr id="12" name="page-number">
+            <a:extLst xmlns:a="http://schemas.openxmlformats.org/drawingml/2006/main">
+              <a:ext uri="{FF2B5EF4-FFF2-40B4-BE49-F238E27FC236}">
+                <a16:creationId xmlns:a16="http://schemas.microsoft.com/office/drawing/2014/main" id="{11A199B5-CA1D-44F1-AB1B-523ED345157B}"/>
               </a:ext>
             </a:extLst>
           </p:cNvPr>
@@ -14378,7 +15599,7 @@
     </p:spTree>
     <p:extLst>
       <p:ext uri="{BB962C8B-B14F-4D97-AF65-F5344CB8AC3E}">
-        <p14:creationId xmlns:p14="http://schemas.microsoft.com/office/powerpoint/2010/main" val="1527960339"/>
+        <p14:creationId xmlns:p14="http://schemas.microsoft.com/office/powerpoint/2010/main" val="2104949834"/>
       </p:ext>
     </p:extLst>
   </p:cSld>
@@ -14406,10 +15627,10 @@
       </p:grpSpPr>
       <p:sp>
         <p:nvSpPr>
-          <p:cNvPr id="11" name="slide-title">
-            <a:extLst xmlns:a="http://schemas.openxmlformats.org/drawingml/2006/main">
-              <a:ext uri="{FF2B5EF4-FFF2-40B4-BE49-F238E27FC236}">
-                <a16:creationId xmlns:a16="http://schemas.microsoft.com/office/drawing/2014/main" id="{AE324580-1471-4BA7-BB30-CB08CDBA6E54}"/>
+          <p:cNvPr id="13" name="slide-title">
+            <a:extLst xmlns:a="http://schemas.openxmlformats.org/drawingml/2006/main">
+              <a:ext uri="{FF2B5EF4-FFF2-40B4-BE49-F238E27FC236}">
+                <a16:creationId xmlns:a16="http://schemas.microsoft.com/office/drawing/2014/main" id="{B6E7547A-2EBC-4EF3-B680-46A2D87CCA90}"/>
               </a:ext>
             </a:extLst>
           </p:cNvPr>
@@ -14460,7 +15681,7 @@
           <p:cNvPr id="2" name="slide-subtitle">
             <a:extLst xmlns:a="http://schemas.openxmlformats.org/drawingml/2006/main">
               <a:ext uri="{FF2B5EF4-FFF2-40B4-BE49-F238E27FC236}">
-                <a16:creationId xmlns:a16="http://schemas.microsoft.com/office/drawing/2014/main" id="{63143CB3-E712-41FE-BEE1-E49C0195DDB5}"/>
+                <a16:creationId xmlns:a16="http://schemas.microsoft.com/office/drawing/2014/main" id="{8C5F56EA-A685-4ADE-86AC-21C27F9D586F}"/>
               </a:ext>
             </a:extLst>
           </p:cNvPr>
@@ -14511,7 +15732,7 @@
           <p:cNvPr id="3" name="bullets">
             <a:extLst xmlns:a="http://schemas.openxmlformats.org/drawingml/2006/main">
               <a:ext uri="{FF2B5EF4-FFF2-40B4-BE49-F238E27FC236}">
-                <a16:creationId xmlns:a16="http://schemas.microsoft.com/office/drawing/2014/main" id="{43699B49-960D-481A-B3F9-55C79E5C3E78}"/>
+                <a16:creationId xmlns:a16="http://schemas.microsoft.com/office/drawing/2014/main" id="{FD785E1A-816B-4ABF-8CEB-14978E861EF4}"/>
               </a:ext>
             </a:extLst>
           </p:cNvPr>
@@ -14598,7 +15819,7 @@
           <p:cNvPr id="4" name="ambient-glow">
             <a:extLst xmlns:a="http://schemas.openxmlformats.org/drawingml/2006/main">
               <a:ext uri="{FF2B5EF4-FFF2-40B4-BE49-F238E27FC236}">
-                <a16:creationId xmlns:a16="http://schemas.microsoft.com/office/drawing/2014/main" id="{6EC797FD-2B86-4D27-960A-900A52A3010D}"/>
+                <a16:creationId xmlns:a16="http://schemas.microsoft.com/office/drawing/2014/main" id="{EEAFC83D-CE10-4BF4-A5BD-B322EB44472E}"/>
               </a:ext>
             </a:extLst>
           </p:cNvPr>
@@ -14635,7 +15856,7 @@
           <p:cNvPr id="5" name="ambient-core">
             <a:extLst xmlns:a="http://schemas.openxmlformats.org/drawingml/2006/main">
               <a:ext uri="{FF2B5EF4-FFF2-40B4-BE49-F238E27FC236}">
-                <a16:creationId xmlns:a16="http://schemas.microsoft.com/office/drawing/2014/main" id="{6712DF9F-ADA8-4191-90BA-786667B8FD90}"/>
+                <a16:creationId xmlns:a16="http://schemas.microsoft.com/office/drawing/2014/main" id="{EEA63D3A-A5EA-4497-AE8E-0A35A5A92DA2}"/>
               </a:ext>
             </a:extLst>
           </p:cNvPr>
@@ -14672,7 +15893,7 @@
           <p:cNvPr id="6" name="section-number">
             <a:extLst xmlns:a="http://schemas.openxmlformats.org/drawingml/2006/main">
               <a:ext uri="{FF2B5EF4-FFF2-40B4-BE49-F238E27FC236}">
-                <a16:creationId xmlns:a16="http://schemas.microsoft.com/office/drawing/2014/main" id="{81ADC3E0-BA3B-48AE-88F5-3348CAF7FCC6}"/>
+                <a16:creationId xmlns:a16="http://schemas.microsoft.com/office/drawing/2014/main" id="{7A5B1040-9CE0-42C0-A13A-DEACD7B4CE3A}"/>
               </a:ext>
             </a:extLst>
           </p:cNvPr>
@@ -14723,7 +15944,7 @@
           <p:cNvPr id="7" name="eyebrow">
             <a:extLst xmlns:a="http://schemas.openxmlformats.org/drawingml/2006/main">
               <a:ext uri="{FF2B5EF4-FFF2-40B4-BE49-F238E27FC236}">
-                <a16:creationId xmlns:a16="http://schemas.microsoft.com/office/drawing/2014/main" id="{64EB963E-E565-433B-958F-22303A3743B7}"/>
+                <a16:creationId xmlns:a16="http://schemas.microsoft.com/office/drawing/2014/main" id="{42CD274D-1385-461B-9DAB-E8F16977D3A1}"/>
               </a:ext>
             </a:extLst>
           </p:cNvPr>
@@ -14771,10 +15992,69 @@
       </p:sp>
       <p:sp>
         <p:nvSpPr>
-          <p:cNvPr id="8" name="footer-rule">
-            <a:extLst xmlns:a="http://schemas.openxmlformats.org/drawingml/2006/main">
-              <a:ext uri="{FF2B5EF4-FFF2-40B4-BE49-F238E27FC236}">
-                <a16:creationId xmlns:a16="http://schemas.microsoft.com/office/drawing/2014/main" id="{6361F5C7-8AC5-4640-85C3-D0868CDBA3A1}"/>
+          <p:cNvPr id="8" name="rescue-point-logo-background">
+            <a:extLst xmlns:a="http://schemas.openxmlformats.org/drawingml/2006/main">
+              <a:ext uri="{FF2B5EF4-FFF2-40B4-BE49-F238E27FC236}">
+                <a16:creationId xmlns:a16="http://schemas.microsoft.com/office/drawing/2014/main" id="{639BCF0D-A9D0-423E-AF2F-FEC4FE232D54}"/>
+              </a:ext>
+            </a:extLst>
+          </p:cNvPr>
+          <p:cNvSpPr>
+            <a:spLocks xmlns:a="http://schemas.openxmlformats.org/drawingml/2006/main" noGrp="1"/>
+          </p:cNvSpPr>
+          <p:nvPr/>
+        </p:nvSpPr>
+        <p:spPr>
+          <a:xfrm xmlns:a="http://schemas.openxmlformats.org/drawingml/2006/main">
+            <a:off x="9772650" y="133350"/>
+            <a:ext cx="1733550" cy="457200"/>
+          </a:xfrm>
+          <a:prstGeom xmlns:a="http://schemas.openxmlformats.org/drawingml/2006/main" prst="roundRect">
+            <a:avLst>
+              <a:gd name="adj" fmla="val 16667"/>
+            </a:avLst>
+          </a:prstGeom>
+          <a:solidFill xmlns:a="http://schemas.openxmlformats.org/drawingml/2006/main">
+            <a:srgbClr val="06142E"/>
+          </a:solidFill>
+          <a:ln xmlns:a="http://schemas.openxmlformats.org/drawingml/2006/main" w="9525">
+            <a:solidFill>
+              <a:srgbClr val="1EC5FF">
+                <a:alpha val="33333"/>
+              </a:srgbClr>
+            </a:solidFill>
+            <a:prstDash val="solid"/>
+          </a:ln>
+        </p:spPr>
+      </p:sp>
+      <p:pic>
+        <p:nvPicPr>
+          <p:cNvPr id="23" name="" descr="Figura oficial da documentação dbt usada para explicar: OSI é um contrato, não um conector mágico — O artifact descreve semântica; cada consumidor ainda precisa implementar compatibilidade.."/>
+          <p:cNvPicPr>
+            <a:picLocks xmlns:a="http://schemas.openxmlformats.org/drawingml/2006/main" noChangeAspect="1"/>
+          </p:cNvPicPr>
+          <p:nvPr/>
+        </p:nvPicPr>
+        <p:blipFill>
+          <a:blip xmlns:r="http://schemas.openxmlformats.org/officeDocument/2006/relationships" xmlns:a="http://schemas.openxmlformats.org/drawingml/2006/main" r:embed="R7fa3087de19440e5"/>
+          <a:stretch xmlns:a="http://schemas.openxmlformats.org/drawingml/2006/main"/>
+        </p:blipFill>
+        <p:spPr>
+          <a:xfrm xmlns:a="http://schemas.openxmlformats.org/drawingml/2006/main">
+            <a:off x="9893718" y="209550"/>
+            <a:ext cx="1491414" cy="323850"/>
+          </a:xfrm>
+          <a:prstGeom xmlns:a="http://schemas.openxmlformats.org/drawingml/2006/main" prst="rect">
+            <a:avLst/>
+          </a:prstGeom>
+        </p:spPr>
+      </p:pic>
+      <p:sp>
+        <p:nvSpPr>
+          <p:cNvPr id="10" name="footer-rule">
+            <a:extLst xmlns:a="http://schemas.openxmlformats.org/drawingml/2006/main">
+              <a:ext uri="{FF2B5EF4-FFF2-40B4-BE49-F238E27FC236}">
+                <a16:creationId xmlns:a16="http://schemas.microsoft.com/office/drawing/2014/main" id="{77E43351-A1B2-4DF4-A0AB-C03FCDACA5D5}"/>
               </a:ext>
             </a:extLst>
           </p:cNvPr>
@@ -14804,10 +16084,10 @@
       </p:sp>
       <p:sp>
         <p:nvSpPr>
-          <p:cNvPr id="9" name="footer">
-            <a:extLst xmlns:a="http://schemas.openxmlformats.org/drawingml/2006/main">
-              <a:ext uri="{FF2B5EF4-FFF2-40B4-BE49-F238E27FC236}">
-                <a16:creationId xmlns:a16="http://schemas.microsoft.com/office/drawing/2014/main" id="{27BABEEA-EBB9-4BA0-827C-888981625276}"/>
+          <p:cNvPr id="11" name="footer">
+            <a:extLst xmlns:a="http://schemas.openxmlformats.org/drawingml/2006/main">
+              <a:ext uri="{FF2B5EF4-FFF2-40B4-BE49-F238E27FC236}">
+                <a16:creationId xmlns:a16="http://schemas.microsoft.com/office/drawing/2014/main" id="{A3CD4ED8-FB3D-4EF1-9E1E-0F7E608A7525}"/>
               </a:ext>
             </a:extLst>
           </p:cNvPr>
@@ -14859,10 +16139,10 @@
       </p:sp>
       <p:sp>
         <p:nvSpPr>
-          <p:cNvPr id="10" name="page-number">
-            <a:extLst xmlns:a="http://schemas.openxmlformats.org/drawingml/2006/main">
-              <a:ext uri="{FF2B5EF4-FFF2-40B4-BE49-F238E27FC236}">
-                <a16:creationId xmlns:a16="http://schemas.microsoft.com/office/drawing/2014/main" id="{9E5A074A-CB5A-43CA-9397-0929A440BCB4}"/>
+          <p:cNvPr id="12" name="page-number">
+            <a:extLst xmlns:a="http://schemas.openxmlformats.org/drawingml/2006/main">
+              <a:ext uri="{FF2B5EF4-FFF2-40B4-BE49-F238E27FC236}">
+                <a16:creationId xmlns:a16="http://schemas.microsoft.com/office/drawing/2014/main" id="{619019A2-9CA9-4BE2-84E8-F683B4FB9216}"/>
               </a:ext>
             </a:extLst>
           </p:cNvPr>
@@ -14915,7 +16195,7 @@
     </p:spTree>
     <p:extLst>
       <p:ext uri="{BB962C8B-B14F-4D97-AF65-F5344CB8AC3E}">
-        <p14:creationId xmlns:p14="http://schemas.microsoft.com/office/powerpoint/2010/main" val="343854588"/>
+        <p14:creationId xmlns:p14="http://schemas.microsoft.com/office/powerpoint/2010/main" val="85223706"/>
       </p:ext>
     </p:extLst>
   </p:cSld>
